--- a/Thesis_Final/Presentation/Hairfall_Presentation.pptx
+++ b/Thesis_Final/Presentation/Hairfall_Presentation.pptx
@@ -19,6 +19,8 @@
     <p:sldId id="267" r:id="rId19"/>
     <p:sldId id="268" r:id="rId20"/>
     <p:sldId id="269" r:id="rId21"/>
+    <p:sldId id="270" r:id="rId22"/>
+    <p:sldId id="271" r:id="rId23"/>
   </p:sldIdLst>
   <p:sldSz cx="12191695" cy="6858000" type="screen4x3"/>
   <p:notesSz cx="6858000" cy="9144000"/>
@@ -585,7 +587,7 @@
           <a:lstStyle/>
           <a:p>
             <a:r>
-              <a:t>One pipeline: clean and split the data once, give the same rows to the three models, evaluate them the same way, and explain each with SHAP. The 500 and 2,000 record sets show behaviour with little data.</a:t>
+              <a:t>Two public datasets are the sources. A super dataset of 200,000 records holds all their fields plus extra fields. Age and gender are identified in it. Comparing it with the two datasets gives the final dataset of 21,606 records used for modelling.</a:t>
             </a:r>
           </a:p>
         </p:txBody>
@@ -655,7 +657,7 @@
           <a:lstStyle/>
           <a:p>
             <a:r>
-              <a:t>Three different ways to predict. CatBoost needs training and tuning. TabPFN and TabFM only read the training rows as context and predict, so they need no tuning.</a:t>
+              <a:t>One pipeline: clean and split the data once, give the same rows to the three models, evaluate them the same way, and explain each with SHAP. The 500 and 2,000 record sets show behaviour with little data.</a:t>
             </a:r>
           </a:p>
         </p:txBody>
@@ -725,7 +727,7 @@
           <a:lstStyle/>
           <a:p>
             <a:r>
-              <a:t>SHAP shows which features push each prediction up or down. Metrics are macro averages because the tiers are not equal in size. McNemar's test tells us if differences are real.</a:t>
+              <a:t>Three different ways to predict. CatBoost needs training and tuning. TabPFN and TabFM only read the training rows as context and predict, so they need no tuning.</a:t>
             </a:r>
           </a:p>
         </p:txBody>
@@ -795,7 +797,7 @@
           <a:lstStyle/>
           <a:p>
             <a:r>
-              <a:t>These are expectations to test, not results. The study can also show the opposite, and a difference counts only if McNemar's test supports it.</a:t>
+              <a:t>SHAP shows which features push each prediction up or down. Metrics are macro averages because the tiers are not equal in size. McNemar's test tells us if differences are real.</a:t>
             </a:r>
           </a:p>
         </p:txBody>
@@ -865,7 +867,147 @@
           <a:lstStyle/>
           <a:p>
             <a:r>
+              <a:t>These are expectations to test, not results. The study can also show the opposite, and a difference counts only if McNemar's test supports it.</a:t>
+            </a:r>
+          </a:p>
+        </p:txBody>
+      </p:sp>
+      <p:sp>
+        <p:nvSpPr>
+          <p:cNvPr id="4" name="Slide Number Placeholder 3"/>
+          <p:cNvSpPr>
+            <a:spLocks noGrp="1"/>
+          </p:cNvSpPr>
+          <p:nvPr>
+            <p:ph type="sldNum" idx="5" sz="quarter"/>
+          </p:nvPr>
+        </p:nvSpPr>
+        <p:spPr/>
+      </p:sp>
+    </p:spTree>
+  </p:cSld>
+  <p:clrMapOvr>
+    <a:masterClrMapping/>
+  </p:clrMapOvr>
+</p:notes>
+</file>
+
+<file path=ppt/notesSlides/notesSlide15.xml><?xml version="1.0" encoding="utf-8"?>
+<p:notes xmlns:a="http://schemas.openxmlformats.org/drawingml/2006/main" xmlns:p="http://schemas.openxmlformats.org/presentationml/2006/main" xmlns:r="http://schemas.openxmlformats.org/officeDocument/2006/relationships">
+  <p:cSld>
+    <p:spTree>
+      <p:nvGrpSpPr>
+        <p:cNvPr id="1" name=""/>
+        <p:cNvGrpSpPr/>
+        <p:nvPr/>
+      </p:nvGrpSpPr>
+      <p:grpSpPr>
+        <a:xfrm>
+          <a:off x="0" y="0"/>
+          <a:ext cx="0" cy="0"/>
+          <a:chOff x="0" y="0"/>
+          <a:chExt cx="0" cy="0"/>
+        </a:xfrm>
+      </p:grpSpPr>
+      <p:sp>
+        <p:nvSpPr>
+          <p:cNvPr id="2" name="Slide Image Placeholder 1"/>
+          <p:cNvSpPr>
+            <a:spLocks noGrp="1"/>
+          </p:cNvSpPr>
+          <p:nvPr>
+            <p:ph type="sldImg" idx="2"/>
+          </p:nvPr>
+        </p:nvSpPr>
+        <p:spPr/>
+      </p:sp>
+      <p:sp>
+        <p:nvSpPr>
+          <p:cNvPr id="3" name="Notes Placeholder 2"/>
+          <p:cNvSpPr>
+            <a:spLocks noGrp="1"/>
+          </p:cNvSpPr>
+          <p:nvPr>
+            <p:ph type="body" idx="3" sz="quarter"/>
+          </p:nvPr>
+        </p:nvSpPr>
+        <p:spPr/>
+        <p:txBody>
+          <a:bodyPr/>
+          <a:lstStyle/>
+          <a:p>
+            <a:r>
               <a:t>Months 1 and 2 are the proposal work. Months 3 and 4 are the final work after approval, in the order of the methodology. Thank you; questions are welcome.</a:t>
+            </a:r>
+          </a:p>
+        </p:txBody>
+      </p:sp>
+      <p:sp>
+        <p:nvSpPr>
+          <p:cNvPr id="4" name="Slide Number Placeholder 3"/>
+          <p:cNvSpPr>
+            <a:spLocks noGrp="1"/>
+          </p:cNvSpPr>
+          <p:nvPr>
+            <p:ph type="sldNum" idx="5" sz="quarter"/>
+          </p:nvPr>
+        </p:nvSpPr>
+        <p:spPr/>
+      </p:sp>
+    </p:spTree>
+  </p:cSld>
+  <p:clrMapOvr>
+    <a:masterClrMapping/>
+  </p:clrMapOvr>
+</p:notes>
+</file>
+
+<file path=ppt/notesSlides/notesSlide16.xml><?xml version="1.0" encoding="utf-8"?>
+<p:notes xmlns:a="http://schemas.openxmlformats.org/drawingml/2006/main" xmlns:p="http://schemas.openxmlformats.org/presentationml/2006/main" xmlns:r="http://schemas.openxmlformats.org/officeDocument/2006/relationships">
+  <p:cSld>
+    <p:spTree>
+      <p:nvGrpSpPr>
+        <p:cNvPr id="1" name=""/>
+        <p:cNvGrpSpPr/>
+        <p:nvPr/>
+      </p:nvGrpSpPr>
+      <p:grpSpPr>
+        <a:xfrm>
+          <a:off x="0" y="0"/>
+          <a:ext cx="0" cy="0"/>
+          <a:chOff x="0" y="0"/>
+          <a:chExt cx="0" cy="0"/>
+        </a:xfrm>
+      </p:grpSpPr>
+      <p:sp>
+        <p:nvSpPr>
+          <p:cNvPr id="2" name="Slide Image Placeholder 1"/>
+          <p:cNvSpPr>
+            <a:spLocks noGrp="1"/>
+          </p:cNvSpPr>
+          <p:nvPr>
+            <p:ph type="sldImg" idx="2"/>
+          </p:nvPr>
+        </p:nvSpPr>
+        <p:spPr/>
+      </p:sp>
+      <p:sp>
+        <p:nvSpPr>
+          <p:cNvPr id="3" name="Notes Placeholder 2"/>
+          <p:cNvSpPr>
+            <a:spLocks noGrp="1"/>
+          </p:cNvSpPr>
+          <p:nvPr>
+            <p:ph type="body" idx="3" sz="quarter"/>
+          </p:nvPr>
+        </p:nvSpPr>
+        <p:spPr/>
+        <p:txBody>
+          <a:bodyPr/>
+          <a:lstStyle/>
+          <a:p>
+            <a:r>
+              <a:t>Thank the panel and invite questions.</a:t>
             </a:r>
           </a:p>
         </p:txBody>
@@ -935,7 +1077,7 @@
           <a:lstStyle/>
           <a:p>
             <a:r>
-              <a:t>One-slide summary. Problem, aim, data, method, expected result and time. Each point is explained on the next slides.</a:t>
+              <a:t>This is the outline of the talk: the problem, what is known, the gap, the data and methods, what we expect, and the schedule.</a:t>
             </a:r>
           </a:p>
         </p:txBody>
@@ -1005,7 +1147,7 @@
           <a:lstStyle/>
           <a:p>
             <a:r>
-              <a:t>Hair loss has many causes that act together, so one test cannot predict it. Doctors rely on history and self-reports. ML can help but is a black box, which is a problem in health care.</a:t>
+              <a:t>One-slide summary. Problem, aim, data, method, expected result and time. Each point is explained on the next slides.</a:t>
             </a:r>
           </a:p>
         </p:txBody>
@@ -1075,7 +1217,7 @@
           <a:lstStyle/>
           <a:p>
             <a:r>
-              <a:t>Two objectives: compare the three models, and explain them. Everything in the project serves one of these two.</a:t>
+              <a:t>Hair loss has many causes that act together, so one test cannot predict it. Doctors rely on history and self-reports. ML can help but is a black box, which is a problem in health care.</a:t>
             </a:r>
           </a:p>
         </p:txBody>
@@ -1145,7 +1287,7 @@
           <a:lstStyle/>
           <a:p>
             <a:r>
-              <a:t>Hair grows in cycles. Anything that pushes follicles out of the growth phase early causes shedding. These factors overlap, which is why a model that combines many indicators is useful.</a:t>
+              <a:t>Two objectives: compare the three models, and explain them. Everything in the project serves one of these two.</a:t>
             </a:r>
           </a:p>
         </p:txBody>
@@ -1215,7 +1357,7 @@
           <a:lstStyle/>
           <a:p>
             <a:r>
-              <a:t>These are the closest studies. Most use classical models on survey data, or images. Results differ a lot between studies, and explanations were not compared.</a:t>
+              <a:t>Hair grows in cycles. Anything that pushes follicles out of the growth phase early causes shedding. These factors overlap, which is why a model that combines many indicators is useful.</a:t>
             </a:r>
           </a:p>
         </p:txBody>
@@ -1285,7 +1427,7 @@
           <a:lstStyle/>
           <a:p>
             <a:r>
-              <a:t>CatBoost is a strong boosted-tree model for categorical data. TabPFN and TabFM are new foundation models: pretrained once, then they predict in one pass without training.</a:t>
+              <a:t>These are the closest studies. Most use classical models on survey data, or images. Results differ a lot between studies, and explanations were not compared.</a:t>
             </a:r>
           </a:p>
         </p:txBody>
@@ -1355,7 +1497,7 @@
           <a:lstStyle/>
           <a:p>
             <a:r>
-              <a:t>This is what we found missing in the literature. It is why the project compares these three models and explains them.</a:t>
+              <a:t>CatBoost is a strong boosted-tree model for categorical data. TabPFN and TabFM are new foundation models: pretrained once, then they predict in one pass without training.</a:t>
             </a:r>
           </a:p>
         </p:txBody>
@@ -1425,7 +1567,7 @@
           <a:lstStyle/>
           <a:p>
             <a:r>
-              <a:t>Two public datasets are the sources. A super dataset of 200,000 records holds all their fields plus extra fields. Age and gender are identified in it. Comparing it with the two datasets gives the final dataset of 21,606 records used for modelling.</a:t>
+              <a:t>This is what we found missing in the literature. It is why the project compares these three models and explains them.</a:t>
             </a:r>
           </a:p>
         </p:txBody>
@@ -4707,7 +4849,7 @@
                 </a:solidFill>
                 <a:latin typeface="Arial"/>
               </a:rPr>
-              <a:t>Research framework</a:t>
+              <a:t>Data</a:t>
             </a:r>
           </a:p>
         </p:txBody>
@@ -4820,14 +4962,101 @@
                 </a:solidFill>
                 <a:latin typeface="Arial"/>
               </a:rPr>
-              <a:t>10 / 14</a:t>
+              <a:t>10 / 16</a:t>
+            </a:r>
+          </a:p>
+        </p:txBody>
+      </p:sp>
+      <p:sp>
+        <p:nvSpPr>
+          <p:cNvPr id="6" name="TextBox 5"/>
+          <p:cNvSpPr txBox="1"/>
+          <p:nvPr/>
+        </p:nvSpPr>
+        <p:spPr>
+          <a:xfrm>
+            <a:off x="548640" y="1371600"/>
+            <a:ext cx="4572000" cy="4846320"/>
+          </a:xfrm>
+          <a:prstGeom prst="rect">
+            <a:avLst/>
+          </a:prstGeom>
+          <a:noFill/>
+        </p:spPr>
+        <p:txBody>
+          <a:bodyPr wrap="square" anchor="t" lIns="45720" rIns="45720">
+            <a:spAutoFit/>
+          </a:bodyPr>
+          <a:lstStyle/>
+          <a:p>
+            <a:pPr algn="l">
+              <a:spcAft>
+                <a:spcPts val="1200"/>
+              </a:spcAft>
+            </a:pPr>
+            <a:r>
+              <a:rPr sz="1700" b="0">
+                <a:solidFill>
+                  <a:srgbClr val="000000"/>
+                </a:solidFill>
+                <a:latin typeface="Arial"/>
+              </a:rPr>
+              <a:t>•  Dataset 1 (Kaggle): 100,000 records, 13 columns of measurements and hair fall (0 to 5).</a:t>
+            </a:r>
+          </a:p>
+          <a:p>
+            <a:pPr algn="l">
+              <a:spcAft>
+                <a:spcPts val="1200"/>
+              </a:spcAft>
+            </a:pPr>
+            <a:r>
+              <a:rPr sz="1700" b="0">
+                <a:solidFill>
+                  <a:srgbClr val="000000"/>
+                </a:solidFill>
+                <a:latin typeface="Arial"/>
+              </a:rPr>
+              <a:t>•  Dataset 2 (Mendeley): survey of 716 people, 14 columns.</a:t>
+            </a:r>
+          </a:p>
+          <a:p>
+            <a:pPr algn="l">
+              <a:spcAft>
+                <a:spcPts val="1200"/>
+              </a:spcAft>
+            </a:pPr>
+            <a:r>
+              <a:rPr sz="1700" b="0">
+                <a:solidFill>
+                  <a:srgbClr val="000000"/>
+                </a:solidFill>
+                <a:latin typeface="Arial"/>
+              </a:rPr>
+              <a:t>•  Super dataset: 200,000 records with all fields of both and extra fields.</a:t>
+            </a:r>
+          </a:p>
+          <a:p>
+            <a:pPr algn="l">
+              <a:spcAft>
+                <a:spcPts val="1200"/>
+              </a:spcAft>
+            </a:pPr>
+            <a:r>
+              <a:rPr sz="1700" b="0">
+                <a:solidFill>
+                  <a:srgbClr val="000000"/>
+                </a:solidFill>
+                <a:latin typeface="Arial"/>
+              </a:rPr>
+              <a:t>•  Final dataset: 21,606 records, 20 features, target Low 45%, Moderate 35%, High 20%.</a:t>
             </a:r>
           </a:p>
         </p:txBody>
       </p:sp>
       <p:pic>
         <p:nvPicPr>
-          <p:cNvPr id="6" name="Picture 5" descr="fig_3_1_framework.png"/>
+          <p:cNvPr id="7" name="Picture 6" descr="fig_3_2_dataset_link.png"/>
           <p:cNvPicPr>
             <a:picLocks noChangeAspect="1"/>
           </p:cNvPicPr>
@@ -4841,53 +5070,14 @@
         </p:blipFill>
         <p:spPr>
           <a:xfrm>
-            <a:off x="1737360" y="1371600"/>
-            <a:ext cx="8686800" cy="3750768"/>
+            <a:off x="5212080" y="2194560"/>
+            <a:ext cx="6675120" cy="2853550"/>
           </a:xfrm>
           <a:prstGeom prst="rect">
             <a:avLst/>
           </a:prstGeom>
         </p:spPr>
       </p:pic>
-      <p:sp>
-        <p:nvSpPr>
-          <p:cNvPr id="7" name="TextBox 6"/>
-          <p:cNvSpPr txBox="1"/>
-          <p:nvPr/>
-        </p:nvSpPr>
-        <p:spPr>
-          <a:xfrm>
-            <a:off x="822960" y="5760720"/>
-            <a:ext cx="10515600" cy="548640"/>
-          </a:xfrm>
-          <a:prstGeom prst="rect">
-            <a:avLst/>
-          </a:prstGeom>
-          <a:noFill/>
-        </p:spPr>
-        <p:txBody>
-          <a:bodyPr wrap="square" anchor="t" lIns="45720" rIns="45720">
-            <a:spAutoFit/>
-          </a:bodyPr>
-          <a:lstStyle/>
-          <a:p>
-            <a:pPr algn="ctr">
-              <a:spcAft>
-                <a:spcPts val="800"/>
-              </a:spcAft>
-            </a:pPr>
-            <a:r>
-              <a:rPr sz="1600" b="0">
-                <a:solidFill>
-                  <a:srgbClr val="000000"/>
-                </a:solidFill>
-                <a:latin typeface="Arial"/>
-              </a:rPr>
-              <a:t>Same split and seed for all models. Training sizes: 500, 2,000, and all 17,284 records.</a:t>
-            </a:r>
-          </a:p>
-        </p:txBody>
-      </p:sp>
     </p:spTree>
   </p:cSld>
   <p:clrMapOvr>
@@ -4940,7 +5130,7 @@
                 </a:solidFill>
                 <a:latin typeface="Arial"/>
               </a:rPr>
-              <a:t>Models</a:t>
+              <a:t>Research framework</a:t>
             </a:r>
           </a:p>
         </p:txBody>
@@ -5053,7 +5243,240 @@
                 </a:solidFill>
                 <a:latin typeface="Arial"/>
               </a:rPr>
-              <a:t>11 / 14</a:t>
+              <a:t>11 / 16</a:t>
+            </a:r>
+          </a:p>
+        </p:txBody>
+      </p:sp>
+      <p:pic>
+        <p:nvPicPr>
+          <p:cNvPr id="6" name="Picture 5" descr="fig_3_1_framework.png"/>
+          <p:cNvPicPr>
+            <a:picLocks noChangeAspect="1"/>
+          </p:cNvPicPr>
+          <p:nvPr/>
+        </p:nvPicPr>
+        <p:blipFill>
+          <a:blip r:embed="rId3"/>
+          <a:stretch>
+            <a:fillRect/>
+          </a:stretch>
+        </p:blipFill>
+        <p:spPr>
+          <a:xfrm>
+            <a:off x="1737360" y="1371600"/>
+            <a:ext cx="8686800" cy="3750768"/>
+          </a:xfrm>
+          <a:prstGeom prst="rect">
+            <a:avLst/>
+          </a:prstGeom>
+        </p:spPr>
+      </p:pic>
+      <p:sp>
+        <p:nvSpPr>
+          <p:cNvPr id="7" name="TextBox 6"/>
+          <p:cNvSpPr txBox="1"/>
+          <p:nvPr/>
+        </p:nvSpPr>
+        <p:spPr>
+          <a:xfrm>
+            <a:off x="822960" y="5760720"/>
+            <a:ext cx="10515600" cy="548640"/>
+          </a:xfrm>
+          <a:prstGeom prst="rect">
+            <a:avLst/>
+          </a:prstGeom>
+          <a:noFill/>
+        </p:spPr>
+        <p:txBody>
+          <a:bodyPr wrap="square" anchor="t" lIns="45720" rIns="45720">
+            <a:spAutoFit/>
+          </a:bodyPr>
+          <a:lstStyle/>
+          <a:p>
+            <a:pPr algn="ctr">
+              <a:spcAft>
+                <a:spcPts val="800"/>
+              </a:spcAft>
+            </a:pPr>
+            <a:r>
+              <a:rPr sz="1600" b="0">
+                <a:solidFill>
+                  <a:srgbClr val="000000"/>
+                </a:solidFill>
+                <a:latin typeface="Arial"/>
+              </a:rPr>
+              <a:t>Same split and seed for all models. Training sizes: 500, 2,000, and all 17,284 records.</a:t>
+            </a:r>
+          </a:p>
+        </p:txBody>
+      </p:sp>
+    </p:spTree>
+  </p:cSld>
+  <p:clrMapOvr>
+    <a:masterClrMapping/>
+  </p:clrMapOvr>
+</p:sld>
+</file>
+
+<file path=ppt/slides/slide12.xml><?xml version="1.0" encoding="utf-8"?>
+<p:sld xmlns:a="http://schemas.openxmlformats.org/drawingml/2006/main" xmlns:p="http://schemas.openxmlformats.org/presentationml/2006/main" xmlns:r="http://schemas.openxmlformats.org/officeDocument/2006/relationships">
+  <p:cSld>
+    <p:spTree>
+      <p:nvGrpSpPr>
+        <p:cNvPr id="1" name=""/>
+        <p:cNvGrpSpPr/>
+        <p:nvPr/>
+      </p:nvGrpSpPr>
+      <p:grpSpPr/>
+      <p:sp>
+        <p:nvSpPr>
+          <p:cNvPr id="2" name="TextBox 1"/>
+          <p:cNvSpPr txBox="1"/>
+          <p:nvPr/>
+        </p:nvSpPr>
+        <p:spPr>
+          <a:xfrm>
+            <a:off x="548640" y="320040"/>
+            <a:ext cx="11064240" cy="822960"/>
+          </a:xfrm>
+          <a:prstGeom prst="rect">
+            <a:avLst/>
+          </a:prstGeom>
+          <a:noFill/>
+        </p:spPr>
+        <p:txBody>
+          <a:bodyPr wrap="square" anchor="ctr" lIns="45720" rIns="45720">
+            <a:spAutoFit/>
+          </a:bodyPr>
+          <a:lstStyle/>
+          <a:p>
+            <a:pPr algn="l">
+              <a:spcAft>
+                <a:spcPts val="800"/>
+              </a:spcAft>
+            </a:pPr>
+            <a:r>
+              <a:rPr sz="3200" b="1">
+                <a:solidFill>
+                  <a:srgbClr val="000000"/>
+                </a:solidFill>
+                <a:latin typeface="Arial"/>
+              </a:rPr>
+              <a:t>Models</a:t>
+            </a:r>
+          </a:p>
+        </p:txBody>
+      </p:sp>
+      <p:cxnSp>
+        <p:nvCxnSpPr>
+          <p:cNvPr id="3" name="Connector 2"/>
+          <p:cNvCxnSpPr/>
+          <p:nvPr/>
+        </p:nvCxnSpPr>
+        <p:spPr>
+          <a:xfrm>
+            <a:off x="594360" y="1143000"/>
+            <a:ext cx="10972800" cy="0"/>
+          </a:xfrm>
+          <a:prstGeom prst="line">
+            <a:avLst/>
+          </a:prstGeom>
+          <a:ln w="15875">
+            <a:solidFill>
+              <a:srgbClr val="000000"/>
+            </a:solidFill>
+          </a:ln>
+        </p:spPr>
+        <p:style>
+          <a:lnRef idx="2">
+            <a:schemeClr val="accent1"/>
+          </a:lnRef>
+          <a:fillRef idx="0">
+            <a:schemeClr val="accent1"/>
+          </a:fillRef>
+          <a:effectRef idx="1">
+            <a:schemeClr val="accent1"/>
+          </a:effectRef>
+          <a:fontRef idx="minor">
+            <a:schemeClr val="tx1"/>
+          </a:fontRef>
+        </p:style>
+      </p:cxnSp>
+      <p:sp>
+        <p:nvSpPr>
+          <p:cNvPr id="4" name="TextBox 3"/>
+          <p:cNvSpPr txBox="1"/>
+          <p:nvPr/>
+        </p:nvSpPr>
+        <p:spPr>
+          <a:xfrm>
+            <a:off x="548640" y="6400800"/>
+            <a:ext cx="8229600" cy="320040"/>
+          </a:xfrm>
+          <a:prstGeom prst="rect">
+            <a:avLst/>
+          </a:prstGeom>
+          <a:noFill/>
+        </p:spPr>
+        <p:txBody>
+          <a:bodyPr wrap="square" anchor="t" lIns="45720" rIns="45720">
+            <a:spAutoFit/>
+          </a:bodyPr>
+          <a:lstStyle/>
+          <a:p>
+            <a:pPr algn="l">
+              <a:spcAft>
+                <a:spcPts val="800"/>
+              </a:spcAft>
+            </a:pPr>
+            <a:r>
+              <a:rPr sz="1100" b="0">
+                <a:solidFill>
+                  <a:srgbClr val="595959"/>
+                </a:solidFill>
+                <a:latin typeface="Arial"/>
+              </a:rPr>
+              <a:t>Comparing CatBoost, TabPFN, and TabFM for Explainable Hair Fall Risk Prediction</a:t>
+            </a:r>
+          </a:p>
+        </p:txBody>
+      </p:sp>
+      <p:sp>
+        <p:nvSpPr>
+          <p:cNvPr id="5" name="TextBox 4"/>
+          <p:cNvSpPr txBox="1"/>
+          <p:nvPr/>
+        </p:nvSpPr>
+        <p:spPr>
+          <a:xfrm>
+            <a:off x="10698480" y="6400800"/>
+            <a:ext cx="914400" cy="320040"/>
+          </a:xfrm>
+          <a:prstGeom prst="rect">
+            <a:avLst/>
+          </a:prstGeom>
+          <a:noFill/>
+        </p:spPr>
+        <p:txBody>
+          <a:bodyPr wrap="square" anchor="t" lIns="45720" rIns="45720">
+            <a:spAutoFit/>
+          </a:bodyPr>
+          <a:lstStyle/>
+          <a:p>
+            <a:pPr algn="r">
+              <a:spcAft>
+                <a:spcPts val="800"/>
+              </a:spcAft>
+            </a:pPr>
+            <a:r>
+              <a:rPr sz="1100" b="0">
+                <a:solidFill>
+                  <a:srgbClr val="595959"/>
+                </a:solidFill>
+                <a:latin typeface="Arial"/>
+              </a:rPr>
+              <a:t>12 / 16</a:t>
             </a:r>
           </a:p>
         </p:txBody>
@@ -5692,7 +6115,7 @@
 </p:sld>
 </file>
 
-<file path=ppt/slides/slide12.xml><?xml version="1.0" encoding="utf-8"?>
+<file path=ppt/slides/slide13.xml><?xml version="1.0" encoding="utf-8"?>
 <p:sld xmlns:a="http://schemas.openxmlformats.org/drawingml/2006/main" xmlns:p="http://schemas.openxmlformats.org/presentationml/2006/main" xmlns:r="http://schemas.openxmlformats.org/officeDocument/2006/relationships">
   <p:cSld>
     <p:spTree>
@@ -5849,7 +6272,7 @@
                 </a:solidFill>
                 <a:latin typeface="Arial"/>
               </a:rPr>
-              <a:t>12 / 14</a:t>
+              <a:t>13 / 16</a:t>
             </a:r>
           </a:p>
         </p:txBody>
@@ -6052,7 +6475,7 @@
 </p:sld>
 </file>
 
-<file path=ppt/slides/slide13.xml><?xml version="1.0" encoding="utf-8"?>
+<file path=ppt/slides/slide14.xml><?xml version="1.0" encoding="utf-8"?>
 <p:sld xmlns:a="http://schemas.openxmlformats.org/drawingml/2006/main" xmlns:p="http://schemas.openxmlformats.org/presentationml/2006/main" xmlns:r="http://schemas.openxmlformats.org/officeDocument/2006/relationships">
   <p:cSld>
     <p:spTree>
@@ -6209,7 +6632,7 @@
                 </a:solidFill>
                 <a:latin typeface="Arial"/>
               </a:rPr>
-              <a:t>13 / 14</a:t>
+              <a:t>14 / 16</a:t>
             </a:r>
           </a:p>
         </p:txBody>
@@ -6325,7 +6748,7 @@
 </p:sld>
 </file>
 
-<file path=ppt/slides/slide14.xml><?xml version="1.0" encoding="utf-8"?>
+<file path=ppt/slides/slide15.xml><?xml version="1.0" encoding="utf-8"?>
 <p:sld xmlns:a="http://schemas.openxmlformats.org/drawingml/2006/main" xmlns:p="http://schemas.openxmlformats.org/presentationml/2006/main" xmlns:r="http://schemas.openxmlformats.org/officeDocument/2006/relationships">
   <p:cSld>
     <p:spTree>
@@ -6482,7 +6905,7 @@
                 </a:solidFill>
                 <a:latin typeface="Arial"/>
               </a:rPr>
-              <a:t>14 / 14</a:t>
+              <a:t>15 / 16</a:t>
             </a:r>
           </a:p>
         </p:txBody>
@@ -6519,6 +6942,192 @@
 </p:sld>
 </file>
 
+<file path=ppt/slides/slide16.xml><?xml version="1.0" encoding="utf-8"?>
+<p:sld xmlns:a="http://schemas.openxmlformats.org/drawingml/2006/main" xmlns:p="http://schemas.openxmlformats.org/presentationml/2006/main" xmlns:r="http://schemas.openxmlformats.org/officeDocument/2006/relationships">
+  <p:cSld>
+    <p:spTree>
+      <p:nvGrpSpPr>
+        <p:cNvPr id="1" name=""/>
+        <p:cNvGrpSpPr/>
+        <p:nvPr/>
+      </p:nvGrpSpPr>
+      <p:grpSpPr/>
+      <p:sp>
+        <p:nvSpPr>
+          <p:cNvPr id="2" name="TextBox 1"/>
+          <p:cNvSpPr txBox="1"/>
+          <p:nvPr/>
+        </p:nvSpPr>
+        <p:spPr>
+          <a:xfrm>
+            <a:off x="731520" y="2103120"/>
+            <a:ext cx="10698480" cy="1280160"/>
+          </a:xfrm>
+          <a:prstGeom prst="rect">
+            <a:avLst/>
+          </a:prstGeom>
+          <a:noFill/>
+        </p:spPr>
+        <p:txBody>
+          <a:bodyPr wrap="square" anchor="ctr" lIns="45720" rIns="45720">
+            <a:spAutoFit/>
+          </a:bodyPr>
+          <a:lstStyle/>
+          <a:p>
+            <a:pPr algn="ctr">
+              <a:spcAft>
+                <a:spcPts val="800"/>
+              </a:spcAft>
+            </a:pPr>
+            <a:r>
+              <a:rPr sz="5400" b="1">
+                <a:solidFill>
+                  <a:srgbClr val="000000"/>
+                </a:solidFill>
+                <a:latin typeface="Arial"/>
+              </a:rPr>
+              <a:t>Thank you</a:t>
+            </a:r>
+          </a:p>
+        </p:txBody>
+      </p:sp>
+      <p:cxnSp>
+        <p:nvCxnSpPr>
+          <p:cNvPr id="3" name="Connector 2"/>
+          <p:cNvCxnSpPr/>
+          <p:nvPr/>
+        </p:nvCxnSpPr>
+        <p:spPr>
+          <a:xfrm>
+            <a:off x="3840480" y="3566160"/>
+            <a:ext cx="4572000" cy="0"/>
+          </a:xfrm>
+          <a:prstGeom prst="line">
+            <a:avLst/>
+          </a:prstGeom>
+          <a:ln w="15875">
+            <a:solidFill>
+              <a:srgbClr val="000000"/>
+            </a:solidFill>
+          </a:ln>
+        </p:spPr>
+        <p:style>
+          <a:lnRef idx="2">
+            <a:schemeClr val="accent1"/>
+          </a:lnRef>
+          <a:fillRef idx="0">
+            <a:schemeClr val="accent1"/>
+          </a:fillRef>
+          <a:effectRef idx="1">
+            <a:schemeClr val="accent1"/>
+          </a:effectRef>
+          <a:fontRef idx="minor">
+            <a:schemeClr val="tx1"/>
+          </a:fontRef>
+        </p:style>
+      </p:cxnSp>
+      <p:sp>
+        <p:nvSpPr>
+          <p:cNvPr id="4" name="TextBox 3"/>
+          <p:cNvSpPr txBox="1"/>
+          <p:nvPr/>
+        </p:nvSpPr>
+        <p:spPr>
+          <a:xfrm>
+            <a:off x="731520" y="3749039"/>
+            <a:ext cx="10698480" cy="1097280"/>
+          </a:xfrm>
+          <a:prstGeom prst="rect">
+            <a:avLst/>
+          </a:prstGeom>
+          <a:noFill/>
+        </p:spPr>
+        <p:txBody>
+          <a:bodyPr wrap="square" anchor="t" lIns="45720" rIns="45720">
+            <a:spAutoFit/>
+          </a:bodyPr>
+          <a:lstStyle/>
+          <a:p>
+            <a:pPr algn="ctr">
+              <a:spcAft>
+                <a:spcPts val="800"/>
+              </a:spcAft>
+            </a:pPr>
+            <a:r>
+              <a:rPr sz="2000" b="0">
+                <a:solidFill>
+                  <a:srgbClr val="000000"/>
+                </a:solidFill>
+                <a:latin typeface="Arial"/>
+              </a:rPr>
+              <a:t>Questions are welcome</a:t>
+            </a:r>
+          </a:p>
+          <a:p>
+            <a:pPr algn="ctr">
+              <a:spcAft>
+                <a:spcPts val="800"/>
+              </a:spcAft>
+            </a:pPr>
+            <a:r>
+              <a:rPr sz="2000" b="0">
+                <a:solidFill>
+                  <a:srgbClr val="000000"/>
+                </a:solidFill>
+                <a:latin typeface="Arial"/>
+              </a:rPr>
+              <a:t>Nirajan Shahi  |  Supervisor: Asst. Prof. Jagadish Bhatta</a:t>
+            </a:r>
+          </a:p>
+        </p:txBody>
+      </p:sp>
+      <p:sp>
+        <p:nvSpPr>
+          <p:cNvPr id="5" name="TextBox 4"/>
+          <p:cNvSpPr txBox="1"/>
+          <p:nvPr/>
+        </p:nvSpPr>
+        <p:spPr>
+          <a:xfrm>
+            <a:off x="10698480" y="6400800"/>
+            <a:ext cx="914400" cy="320040"/>
+          </a:xfrm>
+          <a:prstGeom prst="rect">
+            <a:avLst/>
+          </a:prstGeom>
+          <a:noFill/>
+        </p:spPr>
+        <p:txBody>
+          <a:bodyPr wrap="square" anchor="t" lIns="45720" rIns="45720">
+            <a:spAutoFit/>
+          </a:bodyPr>
+          <a:lstStyle/>
+          <a:p>
+            <a:pPr algn="r">
+              <a:spcAft>
+                <a:spcPts val="800"/>
+              </a:spcAft>
+            </a:pPr>
+            <a:r>
+              <a:rPr sz="1100" b="0">
+                <a:solidFill>
+                  <a:srgbClr val="595959"/>
+                </a:solidFill>
+                <a:latin typeface="Arial"/>
+              </a:rPr>
+              <a:t>16 / 16</a:t>
+            </a:r>
+          </a:p>
+        </p:txBody>
+      </p:sp>
+    </p:spTree>
+  </p:cSld>
+  <p:clrMapOvr>
+    <a:masterClrMapping/>
+  </p:clrMapOvr>
+</p:sld>
+</file>
+
 <file path=ppt/slides/slide2.xml><?xml version="1.0" encoding="utf-8"?>
 <p:sld xmlns:a="http://schemas.openxmlformats.org/drawingml/2006/main" xmlns:p="http://schemas.openxmlformats.org/presentationml/2006/main" xmlns:r="http://schemas.openxmlformats.org/officeDocument/2006/relationships">
   <p:cSld>
@@ -6563,7 +7172,7 @@
                 </a:solidFill>
                 <a:latin typeface="Arial"/>
               </a:rPr>
-              <a:t>Project at a glance</a:t>
+              <a:t>Contents</a:t>
             </a:r>
           </a:p>
         </p:txBody>
@@ -6676,7 +7285,955 @@
                 </a:solidFill>
                 <a:latin typeface="Arial"/>
               </a:rPr>
-              <a:t>2 / 14</a:t>
+              <a:t>2 / 16</a:t>
+            </a:r>
+          </a:p>
+        </p:txBody>
+      </p:sp>
+      <p:graphicFrame>
+        <p:nvGraphicFramePr>
+          <p:cNvPr id="6" name="Table 5"/>
+          <p:cNvGraphicFramePr>
+            <a:graphicFrameLocks noGrp="1"/>
+          </p:cNvGraphicFramePr>
+          <p:nvPr/>
+        </p:nvGraphicFramePr>
+        <p:xfrm>
+          <a:off x="2011680" y="1463040"/>
+          <a:ext cx="8138160" cy="4389120"/>
+        </p:xfrm>
+        <a:graphic>
+          <a:graphicData uri="http://schemas.openxmlformats.org/drawingml/2006/table">
+            <a:tbl>
+              <a:tblPr firstRow="0" bandRow="0">
+                <a:tableStyleId>{5940675A-B579-460E-94D1-54222C63F5DA}</a:tableStyleId>
+              </a:tblPr>
+              <a:tblGrid>
+                <a:gridCol w="6400800"/>
+                <a:gridCol w="1737360"/>
+              </a:tblGrid>
+              <a:tr h="548640">
+                <a:tc>
+                  <a:txBody>
+                    <a:bodyPr wrap="square"/>
+                    <a:lstStyle/>
+                    <a:p>
+                      <a:r>
+                        <a:rPr sz="2000" b="1">
+                          <a:solidFill>
+                            <a:srgbClr val="000000"/>
+                          </a:solidFill>
+                          <a:latin typeface="Arial"/>
+                        </a:rPr>
+                        <a:t>Topic</a:t>
+                      </a:r>
+                    </a:p>
+                  </a:txBody>
+                  <a:tcPr marL="73152" marR="73152" marT="36576" marB="36576">
+                    <a:solidFill>
+                      <a:srgbClr val="EEEEEE"/>
+                    </a:solidFill>
+                    <a:lnL w="12700" cap="flat" cmpd="sng" algn="ctr">
+                      <a:solidFill>
+                        <a:srgbClr val="000000"/>
+                      </a:solidFill>
+                      <a:prstDash val="solid"/>
+                    </a:lnL>
+                    <a:lnR w="12700" cap="flat" cmpd="sng" algn="ctr">
+                      <a:solidFill>
+                        <a:srgbClr val="000000"/>
+                      </a:solidFill>
+                      <a:prstDash val="solid"/>
+                    </a:lnR>
+                    <a:lnT w="12700" cap="flat" cmpd="sng" algn="ctr">
+                      <a:solidFill>
+                        <a:srgbClr val="000000"/>
+                      </a:solidFill>
+                      <a:prstDash val="solid"/>
+                    </a:lnT>
+                    <a:lnB w="12700" cap="flat" cmpd="sng" algn="ctr">
+                      <a:solidFill>
+                        <a:srgbClr val="000000"/>
+                      </a:solidFill>
+                      <a:prstDash val="solid"/>
+                    </a:lnB>
+                  </a:tcPr>
+                </a:tc>
+                <a:tc>
+                  <a:txBody>
+                    <a:bodyPr wrap="square"/>
+                    <a:lstStyle/>
+                    <a:p>
+                      <a:r>
+                        <a:rPr sz="2000" b="1">
+                          <a:solidFill>
+                            <a:srgbClr val="000000"/>
+                          </a:solidFill>
+                          <a:latin typeface="Arial"/>
+                        </a:rPr>
+                        <a:t>Slides</a:t>
+                      </a:r>
+                    </a:p>
+                  </a:txBody>
+                  <a:tcPr marL="73152" marR="73152" marT="36576" marB="36576">
+                    <a:solidFill>
+                      <a:srgbClr val="EEEEEE"/>
+                    </a:solidFill>
+                    <a:lnL w="12700" cap="flat" cmpd="sng" algn="ctr">
+                      <a:solidFill>
+                        <a:srgbClr val="000000"/>
+                      </a:solidFill>
+                      <a:prstDash val="solid"/>
+                    </a:lnL>
+                    <a:lnR w="12700" cap="flat" cmpd="sng" algn="ctr">
+                      <a:solidFill>
+                        <a:srgbClr val="000000"/>
+                      </a:solidFill>
+                      <a:prstDash val="solid"/>
+                    </a:lnR>
+                    <a:lnT w="12700" cap="flat" cmpd="sng" algn="ctr">
+                      <a:solidFill>
+                        <a:srgbClr val="000000"/>
+                      </a:solidFill>
+                      <a:prstDash val="solid"/>
+                    </a:lnT>
+                    <a:lnB w="12700" cap="flat" cmpd="sng" algn="ctr">
+                      <a:solidFill>
+                        <a:srgbClr val="000000"/>
+                      </a:solidFill>
+                      <a:prstDash val="solid"/>
+                    </a:lnB>
+                  </a:tcPr>
+                </a:tc>
+              </a:tr>
+              <a:tr h="548640">
+                <a:tc>
+                  <a:txBody>
+                    <a:bodyPr wrap="square"/>
+                    <a:lstStyle/>
+                    <a:p>
+                      <a:r>
+                        <a:rPr sz="2000" b="0">
+                          <a:solidFill>
+                            <a:srgbClr val="000000"/>
+                          </a:solidFill>
+                          <a:latin typeface="Arial"/>
+                        </a:rPr>
+                        <a:t>1.  Project at a glance</a:t>
+                      </a:r>
+                    </a:p>
+                  </a:txBody>
+                  <a:tcPr marL="73152" marR="73152" marT="36576" marB="36576">
+                    <a:solidFill>
+                      <a:srgbClr val="FFFFFF"/>
+                    </a:solidFill>
+                    <a:lnL w="12700" cap="flat" cmpd="sng" algn="ctr">
+                      <a:solidFill>
+                        <a:srgbClr val="000000"/>
+                      </a:solidFill>
+                      <a:prstDash val="solid"/>
+                    </a:lnL>
+                    <a:lnR w="12700" cap="flat" cmpd="sng" algn="ctr">
+                      <a:solidFill>
+                        <a:srgbClr val="000000"/>
+                      </a:solidFill>
+                      <a:prstDash val="solid"/>
+                    </a:lnR>
+                    <a:lnT w="12700" cap="flat" cmpd="sng" algn="ctr">
+                      <a:solidFill>
+                        <a:srgbClr val="000000"/>
+                      </a:solidFill>
+                      <a:prstDash val="solid"/>
+                    </a:lnT>
+                    <a:lnB w="12700" cap="flat" cmpd="sng" algn="ctr">
+                      <a:solidFill>
+                        <a:srgbClr val="000000"/>
+                      </a:solidFill>
+                      <a:prstDash val="solid"/>
+                    </a:lnB>
+                  </a:tcPr>
+                </a:tc>
+                <a:tc>
+                  <a:txBody>
+                    <a:bodyPr wrap="square"/>
+                    <a:lstStyle/>
+                    <a:p>
+                      <a:r>
+                        <a:rPr sz="2000" b="0">
+                          <a:solidFill>
+                            <a:srgbClr val="000000"/>
+                          </a:solidFill>
+                          <a:latin typeface="Arial"/>
+                        </a:rPr>
+                        <a:t>3</a:t>
+                      </a:r>
+                    </a:p>
+                  </a:txBody>
+                  <a:tcPr marL="73152" marR="73152" marT="36576" marB="36576">
+                    <a:solidFill>
+                      <a:srgbClr val="FFFFFF"/>
+                    </a:solidFill>
+                    <a:lnL w="12700" cap="flat" cmpd="sng" algn="ctr">
+                      <a:solidFill>
+                        <a:srgbClr val="000000"/>
+                      </a:solidFill>
+                      <a:prstDash val="solid"/>
+                    </a:lnL>
+                    <a:lnR w="12700" cap="flat" cmpd="sng" algn="ctr">
+                      <a:solidFill>
+                        <a:srgbClr val="000000"/>
+                      </a:solidFill>
+                      <a:prstDash val="solid"/>
+                    </a:lnR>
+                    <a:lnT w="12700" cap="flat" cmpd="sng" algn="ctr">
+                      <a:solidFill>
+                        <a:srgbClr val="000000"/>
+                      </a:solidFill>
+                      <a:prstDash val="solid"/>
+                    </a:lnT>
+                    <a:lnB w="12700" cap="flat" cmpd="sng" algn="ctr">
+                      <a:solidFill>
+                        <a:srgbClr val="000000"/>
+                      </a:solidFill>
+                      <a:prstDash val="solid"/>
+                    </a:lnB>
+                  </a:tcPr>
+                </a:tc>
+              </a:tr>
+              <a:tr h="548640">
+                <a:tc>
+                  <a:txBody>
+                    <a:bodyPr wrap="square"/>
+                    <a:lstStyle/>
+                    <a:p>
+                      <a:r>
+                        <a:rPr sz="2000" b="0">
+                          <a:solidFill>
+                            <a:srgbClr val="000000"/>
+                          </a:solidFill>
+                          <a:latin typeface="Arial"/>
+                        </a:rPr>
+                        <a:t>2.  Problem statement and objectives</a:t>
+                      </a:r>
+                    </a:p>
+                  </a:txBody>
+                  <a:tcPr marL="73152" marR="73152" marT="36576" marB="36576">
+                    <a:solidFill>
+                      <a:srgbClr val="FFFFFF"/>
+                    </a:solidFill>
+                    <a:lnL w="12700" cap="flat" cmpd="sng" algn="ctr">
+                      <a:solidFill>
+                        <a:srgbClr val="000000"/>
+                      </a:solidFill>
+                      <a:prstDash val="solid"/>
+                    </a:lnL>
+                    <a:lnR w="12700" cap="flat" cmpd="sng" algn="ctr">
+                      <a:solidFill>
+                        <a:srgbClr val="000000"/>
+                      </a:solidFill>
+                      <a:prstDash val="solid"/>
+                    </a:lnR>
+                    <a:lnT w="12700" cap="flat" cmpd="sng" algn="ctr">
+                      <a:solidFill>
+                        <a:srgbClr val="000000"/>
+                      </a:solidFill>
+                      <a:prstDash val="solid"/>
+                    </a:lnT>
+                    <a:lnB w="12700" cap="flat" cmpd="sng" algn="ctr">
+                      <a:solidFill>
+                        <a:srgbClr val="000000"/>
+                      </a:solidFill>
+                      <a:prstDash val="solid"/>
+                    </a:lnB>
+                  </a:tcPr>
+                </a:tc>
+                <a:tc>
+                  <a:txBody>
+                    <a:bodyPr wrap="square"/>
+                    <a:lstStyle/>
+                    <a:p>
+                      <a:r>
+                        <a:rPr sz="2000" b="0">
+                          <a:solidFill>
+                            <a:srgbClr val="000000"/>
+                          </a:solidFill>
+                          <a:latin typeface="Arial"/>
+                        </a:rPr>
+                        <a:t>4 - 5</a:t>
+                      </a:r>
+                    </a:p>
+                  </a:txBody>
+                  <a:tcPr marL="73152" marR="73152" marT="36576" marB="36576">
+                    <a:solidFill>
+                      <a:srgbClr val="FFFFFF"/>
+                    </a:solidFill>
+                    <a:lnL w="12700" cap="flat" cmpd="sng" algn="ctr">
+                      <a:solidFill>
+                        <a:srgbClr val="000000"/>
+                      </a:solidFill>
+                      <a:prstDash val="solid"/>
+                    </a:lnL>
+                    <a:lnR w="12700" cap="flat" cmpd="sng" algn="ctr">
+                      <a:solidFill>
+                        <a:srgbClr val="000000"/>
+                      </a:solidFill>
+                      <a:prstDash val="solid"/>
+                    </a:lnR>
+                    <a:lnT w="12700" cap="flat" cmpd="sng" algn="ctr">
+                      <a:solidFill>
+                        <a:srgbClr val="000000"/>
+                      </a:solidFill>
+                      <a:prstDash val="solid"/>
+                    </a:lnT>
+                    <a:lnB w="12700" cap="flat" cmpd="sng" algn="ctr">
+                      <a:solidFill>
+                        <a:srgbClr val="000000"/>
+                      </a:solidFill>
+                      <a:prstDash val="solid"/>
+                    </a:lnB>
+                  </a:tcPr>
+                </a:tc>
+              </a:tr>
+              <a:tr h="548640">
+                <a:tc>
+                  <a:txBody>
+                    <a:bodyPr wrap="square"/>
+                    <a:lstStyle/>
+                    <a:p>
+                      <a:r>
+                        <a:rPr sz="2000" b="0">
+                          <a:solidFill>
+                            <a:srgbClr val="000000"/>
+                          </a:solidFill>
+                          <a:latin typeface="Arial"/>
+                        </a:rPr>
+                        <a:t>3.  Background and literature</a:t>
+                      </a:r>
+                    </a:p>
+                  </a:txBody>
+                  <a:tcPr marL="73152" marR="73152" marT="36576" marB="36576">
+                    <a:solidFill>
+                      <a:srgbClr val="FFFFFF"/>
+                    </a:solidFill>
+                    <a:lnL w="12700" cap="flat" cmpd="sng" algn="ctr">
+                      <a:solidFill>
+                        <a:srgbClr val="000000"/>
+                      </a:solidFill>
+                      <a:prstDash val="solid"/>
+                    </a:lnL>
+                    <a:lnR w="12700" cap="flat" cmpd="sng" algn="ctr">
+                      <a:solidFill>
+                        <a:srgbClr val="000000"/>
+                      </a:solidFill>
+                      <a:prstDash val="solid"/>
+                    </a:lnR>
+                    <a:lnT w="12700" cap="flat" cmpd="sng" algn="ctr">
+                      <a:solidFill>
+                        <a:srgbClr val="000000"/>
+                      </a:solidFill>
+                      <a:prstDash val="solid"/>
+                    </a:lnT>
+                    <a:lnB w="12700" cap="flat" cmpd="sng" algn="ctr">
+                      <a:solidFill>
+                        <a:srgbClr val="000000"/>
+                      </a:solidFill>
+                      <a:prstDash val="solid"/>
+                    </a:lnB>
+                  </a:tcPr>
+                </a:tc>
+                <a:tc>
+                  <a:txBody>
+                    <a:bodyPr wrap="square"/>
+                    <a:lstStyle/>
+                    <a:p>
+                      <a:r>
+                        <a:rPr sz="2000" b="0">
+                          <a:solidFill>
+                            <a:srgbClr val="000000"/>
+                          </a:solidFill>
+                          <a:latin typeface="Arial"/>
+                        </a:rPr>
+                        <a:t>6 - 8</a:t>
+                      </a:r>
+                    </a:p>
+                  </a:txBody>
+                  <a:tcPr marL="73152" marR="73152" marT="36576" marB="36576">
+                    <a:solidFill>
+                      <a:srgbClr val="FFFFFF"/>
+                    </a:solidFill>
+                    <a:lnL w="12700" cap="flat" cmpd="sng" algn="ctr">
+                      <a:solidFill>
+                        <a:srgbClr val="000000"/>
+                      </a:solidFill>
+                      <a:prstDash val="solid"/>
+                    </a:lnL>
+                    <a:lnR w="12700" cap="flat" cmpd="sng" algn="ctr">
+                      <a:solidFill>
+                        <a:srgbClr val="000000"/>
+                      </a:solidFill>
+                      <a:prstDash val="solid"/>
+                    </a:lnR>
+                    <a:lnT w="12700" cap="flat" cmpd="sng" algn="ctr">
+                      <a:solidFill>
+                        <a:srgbClr val="000000"/>
+                      </a:solidFill>
+                      <a:prstDash val="solid"/>
+                    </a:lnT>
+                    <a:lnB w="12700" cap="flat" cmpd="sng" algn="ctr">
+                      <a:solidFill>
+                        <a:srgbClr val="000000"/>
+                      </a:solidFill>
+                      <a:prstDash val="solid"/>
+                    </a:lnB>
+                  </a:tcPr>
+                </a:tc>
+              </a:tr>
+              <a:tr h="548640">
+                <a:tc>
+                  <a:txBody>
+                    <a:bodyPr wrap="square"/>
+                    <a:lstStyle/>
+                    <a:p>
+                      <a:r>
+                        <a:rPr sz="2000" b="0">
+                          <a:solidFill>
+                            <a:srgbClr val="000000"/>
+                          </a:solidFill>
+                          <a:latin typeface="Arial"/>
+                        </a:rPr>
+                        <a:t>4.  Research gap</a:t>
+                      </a:r>
+                    </a:p>
+                  </a:txBody>
+                  <a:tcPr marL="73152" marR="73152" marT="36576" marB="36576">
+                    <a:solidFill>
+                      <a:srgbClr val="FFFFFF"/>
+                    </a:solidFill>
+                    <a:lnL w="12700" cap="flat" cmpd="sng" algn="ctr">
+                      <a:solidFill>
+                        <a:srgbClr val="000000"/>
+                      </a:solidFill>
+                      <a:prstDash val="solid"/>
+                    </a:lnL>
+                    <a:lnR w="12700" cap="flat" cmpd="sng" algn="ctr">
+                      <a:solidFill>
+                        <a:srgbClr val="000000"/>
+                      </a:solidFill>
+                      <a:prstDash val="solid"/>
+                    </a:lnR>
+                    <a:lnT w="12700" cap="flat" cmpd="sng" algn="ctr">
+                      <a:solidFill>
+                        <a:srgbClr val="000000"/>
+                      </a:solidFill>
+                      <a:prstDash val="solid"/>
+                    </a:lnT>
+                    <a:lnB w="12700" cap="flat" cmpd="sng" algn="ctr">
+                      <a:solidFill>
+                        <a:srgbClr val="000000"/>
+                      </a:solidFill>
+                      <a:prstDash val="solid"/>
+                    </a:lnB>
+                  </a:tcPr>
+                </a:tc>
+                <a:tc>
+                  <a:txBody>
+                    <a:bodyPr wrap="square"/>
+                    <a:lstStyle/>
+                    <a:p>
+                      <a:r>
+                        <a:rPr sz="2000" b="0">
+                          <a:solidFill>
+                            <a:srgbClr val="000000"/>
+                          </a:solidFill>
+                          <a:latin typeface="Arial"/>
+                        </a:rPr>
+                        <a:t>9</a:t>
+                      </a:r>
+                    </a:p>
+                  </a:txBody>
+                  <a:tcPr marL="73152" marR="73152" marT="36576" marB="36576">
+                    <a:solidFill>
+                      <a:srgbClr val="FFFFFF"/>
+                    </a:solidFill>
+                    <a:lnL w="12700" cap="flat" cmpd="sng" algn="ctr">
+                      <a:solidFill>
+                        <a:srgbClr val="000000"/>
+                      </a:solidFill>
+                      <a:prstDash val="solid"/>
+                    </a:lnL>
+                    <a:lnR w="12700" cap="flat" cmpd="sng" algn="ctr">
+                      <a:solidFill>
+                        <a:srgbClr val="000000"/>
+                      </a:solidFill>
+                      <a:prstDash val="solid"/>
+                    </a:lnR>
+                    <a:lnT w="12700" cap="flat" cmpd="sng" algn="ctr">
+                      <a:solidFill>
+                        <a:srgbClr val="000000"/>
+                      </a:solidFill>
+                      <a:prstDash val="solid"/>
+                    </a:lnT>
+                    <a:lnB w="12700" cap="flat" cmpd="sng" algn="ctr">
+                      <a:solidFill>
+                        <a:srgbClr val="000000"/>
+                      </a:solidFill>
+                      <a:prstDash val="solid"/>
+                    </a:lnB>
+                  </a:tcPr>
+                </a:tc>
+              </a:tr>
+              <a:tr h="548640">
+                <a:tc>
+                  <a:txBody>
+                    <a:bodyPr wrap="square"/>
+                    <a:lstStyle/>
+                    <a:p>
+                      <a:r>
+                        <a:rPr sz="2000" b="0">
+                          <a:solidFill>
+                            <a:srgbClr val="000000"/>
+                          </a:solidFill>
+                          <a:latin typeface="Arial"/>
+                        </a:rPr>
+                        <a:t>5.  Data, framework, models, and evaluation</a:t>
+                      </a:r>
+                    </a:p>
+                  </a:txBody>
+                  <a:tcPr marL="73152" marR="73152" marT="36576" marB="36576">
+                    <a:solidFill>
+                      <a:srgbClr val="FFFFFF"/>
+                    </a:solidFill>
+                    <a:lnL w="12700" cap="flat" cmpd="sng" algn="ctr">
+                      <a:solidFill>
+                        <a:srgbClr val="000000"/>
+                      </a:solidFill>
+                      <a:prstDash val="solid"/>
+                    </a:lnL>
+                    <a:lnR w="12700" cap="flat" cmpd="sng" algn="ctr">
+                      <a:solidFill>
+                        <a:srgbClr val="000000"/>
+                      </a:solidFill>
+                      <a:prstDash val="solid"/>
+                    </a:lnR>
+                    <a:lnT w="12700" cap="flat" cmpd="sng" algn="ctr">
+                      <a:solidFill>
+                        <a:srgbClr val="000000"/>
+                      </a:solidFill>
+                      <a:prstDash val="solid"/>
+                    </a:lnT>
+                    <a:lnB w="12700" cap="flat" cmpd="sng" algn="ctr">
+                      <a:solidFill>
+                        <a:srgbClr val="000000"/>
+                      </a:solidFill>
+                      <a:prstDash val="solid"/>
+                    </a:lnB>
+                  </a:tcPr>
+                </a:tc>
+                <a:tc>
+                  <a:txBody>
+                    <a:bodyPr wrap="square"/>
+                    <a:lstStyle/>
+                    <a:p>
+                      <a:r>
+                        <a:rPr sz="2000" b="0">
+                          <a:solidFill>
+                            <a:srgbClr val="000000"/>
+                          </a:solidFill>
+                          <a:latin typeface="Arial"/>
+                        </a:rPr>
+                        <a:t>10 - 13</a:t>
+                      </a:r>
+                    </a:p>
+                  </a:txBody>
+                  <a:tcPr marL="73152" marR="73152" marT="36576" marB="36576">
+                    <a:solidFill>
+                      <a:srgbClr val="FFFFFF"/>
+                    </a:solidFill>
+                    <a:lnL w="12700" cap="flat" cmpd="sng" algn="ctr">
+                      <a:solidFill>
+                        <a:srgbClr val="000000"/>
+                      </a:solidFill>
+                      <a:prstDash val="solid"/>
+                    </a:lnL>
+                    <a:lnR w="12700" cap="flat" cmpd="sng" algn="ctr">
+                      <a:solidFill>
+                        <a:srgbClr val="000000"/>
+                      </a:solidFill>
+                      <a:prstDash val="solid"/>
+                    </a:lnR>
+                    <a:lnT w="12700" cap="flat" cmpd="sng" algn="ctr">
+                      <a:solidFill>
+                        <a:srgbClr val="000000"/>
+                      </a:solidFill>
+                      <a:prstDash val="solid"/>
+                    </a:lnT>
+                    <a:lnB w="12700" cap="flat" cmpd="sng" algn="ctr">
+                      <a:solidFill>
+                        <a:srgbClr val="000000"/>
+                      </a:solidFill>
+                      <a:prstDash val="solid"/>
+                    </a:lnB>
+                  </a:tcPr>
+                </a:tc>
+              </a:tr>
+              <a:tr h="548640">
+                <a:tc>
+                  <a:txBody>
+                    <a:bodyPr wrap="square"/>
+                    <a:lstStyle/>
+                    <a:p>
+                      <a:r>
+                        <a:rPr sz="2000" b="0">
+                          <a:solidFill>
+                            <a:srgbClr val="000000"/>
+                          </a:solidFill>
+                          <a:latin typeface="Arial"/>
+                        </a:rPr>
+                        <a:t>6.  Expected outcomes</a:t>
+                      </a:r>
+                    </a:p>
+                  </a:txBody>
+                  <a:tcPr marL="73152" marR="73152" marT="36576" marB="36576">
+                    <a:solidFill>
+                      <a:srgbClr val="FFFFFF"/>
+                    </a:solidFill>
+                    <a:lnL w="12700" cap="flat" cmpd="sng" algn="ctr">
+                      <a:solidFill>
+                        <a:srgbClr val="000000"/>
+                      </a:solidFill>
+                      <a:prstDash val="solid"/>
+                    </a:lnL>
+                    <a:lnR w="12700" cap="flat" cmpd="sng" algn="ctr">
+                      <a:solidFill>
+                        <a:srgbClr val="000000"/>
+                      </a:solidFill>
+                      <a:prstDash val="solid"/>
+                    </a:lnR>
+                    <a:lnT w="12700" cap="flat" cmpd="sng" algn="ctr">
+                      <a:solidFill>
+                        <a:srgbClr val="000000"/>
+                      </a:solidFill>
+                      <a:prstDash val="solid"/>
+                    </a:lnT>
+                    <a:lnB w="12700" cap="flat" cmpd="sng" algn="ctr">
+                      <a:solidFill>
+                        <a:srgbClr val="000000"/>
+                      </a:solidFill>
+                      <a:prstDash val="solid"/>
+                    </a:lnB>
+                  </a:tcPr>
+                </a:tc>
+                <a:tc>
+                  <a:txBody>
+                    <a:bodyPr wrap="square"/>
+                    <a:lstStyle/>
+                    <a:p>
+                      <a:r>
+                        <a:rPr sz="2000" b="0">
+                          <a:solidFill>
+                            <a:srgbClr val="000000"/>
+                          </a:solidFill>
+                          <a:latin typeface="Arial"/>
+                        </a:rPr>
+                        <a:t>14</a:t>
+                      </a:r>
+                    </a:p>
+                  </a:txBody>
+                  <a:tcPr marL="73152" marR="73152" marT="36576" marB="36576">
+                    <a:solidFill>
+                      <a:srgbClr val="FFFFFF"/>
+                    </a:solidFill>
+                    <a:lnL w="12700" cap="flat" cmpd="sng" algn="ctr">
+                      <a:solidFill>
+                        <a:srgbClr val="000000"/>
+                      </a:solidFill>
+                      <a:prstDash val="solid"/>
+                    </a:lnL>
+                    <a:lnR w="12700" cap="flat" cmpd="sng" algn="ctr">
+                      <a:solidFill>
+                        <a:srgbClr val="000000"/>
+                      </a:solidFill>
+                      <a:prstDash val="solid"/>
+                    </a:lnR>
+                    <a:lnT w="12700" cap="flat" cmpd="sng" algn="ctr">
+                      <a:solidFill>
+                        <a:srgbClr val="000000"/>
+                      </a:solidFill>
+                      <a:prstDash val="solid"/>
+                    </a:lnT>
+                    <a:lnB w="12700" cap="flat" cmpd="sng" algn="ctr">
+                      <a:solidFill>
+                        <a:srgbClr val="000000"/>
+                      </a:solidFill>
+                      <a:prstDash val="solid"/>
+                    </a:lnB>
+                  </a:tcPr>
+                </a:tc>
+              </a:tr>
+              <a:tr h="548640">
+                <a:tc>
+                  <a:txBody>
+                    <a:bodyPr wrap="square"/>
+                    <a:lstStyle/>
+                    <a:p>
+                      <a:r>
+                        <a:rPr sz="2000" b="0">
+                          <a:solidFill>
+                            <a:srgbClr val="000000"/>
+                          </a:solidFill>
+                          <a:latin typeface="Arial"/>
+                        </a:rPr>
+                        <a:t>7.  Schedule</a:t>
+                      </a:r>
+                    </a:p>
+                  </a:txBody>
+                  <a:tcPr marL="73152" marR="73152" marT="36576" marB="36576">
+                    <a:solidFill>
+                      <a:srgbClr val="FFFFFF"/>
+                    </a:solidFill>
+                    <a:lnL w="12700" cap="flat" cmpd="sng" algn="ctr">
+                      <a:solidFill>
+                        <a:srgbClr val="000000"/>
+                      </a:solidFill>
+                      <a:prstDash val="solid"/>
+                    </a:lnL>
+                    <a:lnR w="12700" cap="flat" cmpd="sng" algn="ctr">
+                      <a:solidFill>
+                        <a:srgbClr val="000000"/>
+                      </a:solidFill>
+                      <a:prstDash val="solid"/>
+                    </a:lnR>
+                    <a:lnT w="12700" cap="flat" cmpd="sng" algn="ctr">
+                      <a:solidFill>
+                        <a:srgbClr val="000000"/>
+                      </a:solidFill>
+                      <a:prstDash val="solid"/>
+                    </a:lnT>
+                    <a:lnB w="12700" cap="flat" cmpd="sng" algn="ctr">
+                      <a:solidFill>
+                        <a:srgbClr val="000000"/>
+                      </a:solidFill>
+                      <a:prstDash val="solid"/>
+                    </a:lnB>
+                  </a:tcPr>
+                </a:tc>
+                <a:tc>
+                  <a:txBody>
+                    <a:bodyPr wrap="square"/>
+                    <a:lstStyle/>
+                    <a:p>
+                      <a:r>
+                        <a:rPr sz="2000" b="0">
+                          <a:solidFill>
+                            <a:srgbClr val="000000"/>
+                          </a:solidFill>
+                          <a:latin typeface="Arial"/>
+                        </a:rPr>
+                        <a:t>15</a:t>
+                      </a:r>
+                    </a:p>
+                  </a:txBody>
+                  <a:tcPr marL="73152" marR="73152" marT="36576" marB="36576">
+                    <a:solidFill>
+                      <a:srgbClr val="FFFFFF"/>
+                    </a:solidFill>
+                    <a:lnL w="12700" cap="flat" cmpd="sng" algn="ctr">
+                      <a:solidFill>
+                        <a:srgbClr val="000000"/>
+                      </a:solidFill>
+                      <a:prstDash val="solid"/>
+                    </a:lnL>
+                    <a:lnR w="12700" cap="flat" cmpd="sng" algn="ctr">
+                      <a:solidFill>
+                        <a:srgbClr val="000000"/>
+                      </a:solidFill>
+                      <a:prstDash val="solid"/>
+                    </a:lnR>
+                    <a:lnT w="12700" cap="flat" cmpd="sng" algn="ctr">
+                      <a:solidFill>
+                        <a:srgbClr val="000000"/>
+                      </a:solidFill>
+                      <a:prstDash val="solid"/>
+                    </a:lnT>
+                    <a:lnB w="12700" cap="flat" cmpd="sng" algn="ctr">
+                      <a:solidFill>
+                        <a:srgbClr val="000000"/>
+                      </a:solidFill>
+                      <a:prstDash val="solid"/>
+                    </a:lnB>
+                  </a:tcPr>
+                </a:tc>
+              </a:tr>
+            </a:tbl>
+          </a:graphicData>
+        </a:graphic>
+      </p:graphicFrame>
+    </p:spTree>
+  </p:cSld>
+  <p:clrMapOvr>
+    <a:masterClrMapping/>
+  </p:clrMapOvr>
+</p:sld>
+</file>
+
+<file path=ppt/slides/slide3.xml><?xml version="1.0" encoding="utf-8"?>
+<p:sld xmlns:a="http://schemas.openxmlformats.org/drawingml/2006/main" xmlns:p="http://schemas.openxmlformats.org/presentationml/2006/main" xmlns:r="http://schemas.openxmlformats.org/officeDocument/2006/relationships">
+  <p:cSld>
+    <p:spTree>
+      <p:nvGrpSpPr>
+        <p:cNvPr id="1" name=""/>
+        <p:cNvGrpSpPr/>
+        <p:nvPr/>
+      </p:nvGrpSpPr>
+      <p:grpSpPr/>
+      <p:sp>
+        <p:nvSpPr>
+          <p:cNvPr id="2" name="TextBox 1"/>
+          <p:cNvSpPr txBox="1"/>
+          <p:nvPr/>
+        </p:nvSpPr>
+        <p:spPr>
+          <a:xfrm>
+            <a:off x="548640" y="320040"/>
+            <a:ext cx="11064240" cy="822960"/>
+          </a:xfrm>
+          <a:prstGeom prst="rect">
+            <a:avLst/>
+          </a:prstGeom>
+          <a:noFill/>
+        </p:spPr>
+        <p:txBody>
+          <a:bodyPr wrap="square" anchor="ctr" lIns="45720" rIns="45720">
+            <a:spAutoFit/>
+          </a:bodyPr>
+          <a:lstStyle/>
+          <a:p>
+            <a:pPr algn="l">
+              <a:spcAft>
+                <a:spcPts val="800"/>
+              </a:spcAft>
+            </a:pPr>
+            <a:r>
+              <a:rPr sz="3200" b="1">
+                <a:solidFill>
+                  <a:srgbClr val="000000"/>
+                </a:solidFill>
+                <a:latin typeface="Arial"/>
+              </a:rPr>
+              <a:t>Project at a glance</a:t>
+            </a:r>
+          </a:p>
+        </p:txBody>
+      </p:sp>
+      <p:cxnSp>
+        <p:nvCxnSpPr>
+          <p:cNvPr id="3" name="Connector 2"/>
+          <p:cNvCxnSpPr/>
+          <p:nvPr/>
+        </p:nvCxnSpPr>
+        <p:spPr>
+          <a:xfrm>
+            <a:off x="594360" y="1143000"/>
+            <a:ext cx="10972800" cy="0"/>
+          </a:xfrm>
+          <a:prstGeom prst="line">
+            <a:avLst/>
+          </a:prstGeom>
+          <a:ln w="15875">
+            <a:solidFill>
+              <a:srgbClr val="000000"/>
+            </a:solidFill>
+          </a:ln>
+        </p:spPr>
+        <p:style>
+          <a:lnRef idx="2">
+            <a:schemeClr val="accent1"/>
+          </a:lnRef>
+          <a:fillRef idx="0">
+            <a:schemeClr val="accent1"/>
+          </a:fillRef>
+          <a:effectRef idx="1">
+            <a:schemeClr val="accent1"/>
+          </a:effectRef>
+          <a:fontRef idx="minor">
+            <a:schemeClr val="tx1"/>
+          </a:fontRef>
+        </p:style>
+      </p:cxnSp>
+      <p:sp>
+        <p:nvSpPr>
+          <p:cNvPr id="4" name="TextBox 3"/>
+          <p:cNvSpPr txBox="1"/>
+          <p:nvPr/>
+        </p:nvSpPr>
+        <p:spPr>
+          <a:xfrm>
+            <a:off x="548640" y="6400800"/>
+            <a:ext cx="8229600" cy="320040"/>
+          </a:xfrm>
+          <a:prstGeom prst="rect">
+            <a:avLst/>
+          </a:prstGeom>
+          <a:noFill/>
+        </p:spPr>
+        <p:txBody>
+          <a:bodyPr wrap="square" anchor="t" lIns="45720" rIns="45720">
+            <a:spAutoFit/>
+          </a:bodyPr>
+          <a:lstStyle/>
+          <a:p>
+            <a:pPr algn="l">
+              <a:spcAft>
+                <a:spcPts val="800"/>
+              </a:spcAft>
+            </a:pPr>
+            <a:r>
+              <a:rPr sz="1100" b="0">
+                <a:solidFill>
+                  <a:srgbClr val="595959"/>
+                </a:solidFill>
+                <a:latin typeface="Arial"/>
+              </a:rPr>
+              <a:t>Comparing CatBoost, TabPFN, and TabFM for Explainable Hair Fall Risk Prediction</a:t>
+            </a:r>
+          </a:p>
+        </p:txBody>
+      </p:sp>
+      <p:sp>
+        <p:nvSpPr>
+          <p:cNvPr id="5" name="TextBox 4"/>
+          <p:cNvSpPr txBox="1"/>
+          <p:nvPr/>
+        </p:nvSpPr>
+        <p:spPr>
+          <a:xfrm>
+            <a:off x="10698480" y="6400800"/>
+            <a:ext cx="914400" cy="320040"/>
+          </a:xfrm>
+          <a:prstGeom prst="rect">
+            <a:avLst/>
+          </a:prstGeom>
+          <a:noFill/>
+        </p:spPr>
+        <p:txBody>
+          <a:bodyPr wrap="square" anchor="t" lIns="45720" rIns="45720">
+            <a:spAutoFit/>
+          </a:bodyPr>
+          <a:lstStyle/>
+          <a:p>
+            <a:pPr algn="r">
+              <a:spcAft>
+                <a:spcPts val="800"/>
+              </a:spcAft>
+            </a:pPr>
+            <a:r>
+              <a:rPr sz="1100" b="0">
+                <a:solidFill>
+                  <a:srgbClr val="595959"/>
+                </a:solidFill>
+                <a:latin typeface="Arial"/>
+              </a:rPr>
+              <a:t>3 / 16</a:t>
             </a:r>
           </a:p>
         </p:txBody>
@@ -7373,7 +8930,7 @@
 </p:sld>
 </file>
 
-<file path=ppt/slides/slide3.xml><?xml version="1.0" encoding="utf-8"?>
+<file path=ppt/slides/slide4.xml><?xml version="1.0" encoding="utf-8"?>
 <p:sld xmlns:a="http://schemas.openxmlformats.org/drawingml/2006/main" xmlns:p="http://schemas.openxmlformats.org/presentationml/2006/main" xmlns:r="http://schemas.openxmlformats.org/officeDocument/2006/relationships">
   <p:cSld>
     <p:spTree>
@@ -7530,7 +9087,7 @@
                 </a:solidFill>
                 <a:latin typeface="Arial"/>
               </a:rPr>
-              <a:t>3 / 14</a:t>
+              <a:t>4 / 16</a:t>
             </a:r>
           </a:p>
         </p:txBody>
@@ -7646,7 +9203,7 @@
 </p:sld>
 </file>
 
-<file path=ppt/slides/slide4.xml><?xml version="1.0" encoding="utf-8"?>
+<file path=ppt/slides/slide5.xml><?xml version="1.0" encoding="utf-8"?>
 <p:sld xmlns:a="http://schemas.openxmlformats.org/drawingml/2006/main" xmlns:p="http://schemas.openxmlformats.org/presentationml/2006/main" xmlns:r="http://schemas.openxmlformats.org/officeDocument/2006/relationships">
   <p:cSld>
     <p:spTree>
@@ -7803,7 +9360,7 @@
                 </a:solidFill>
                 <a:latin typeface="Arial"/>
               </a:rPr>
-              <a:t>4 / 14</a:t>
+              <a:t>5 / 16</a:t>
             </a:r>
           </a:p>
         </p:txBody>
@@ -7871,7 +9428,7 @@
 </p:sld>
 </file>
 
-<file path=ppt/slides/slide5.xml><?xml version="1.0" encoding="utf-8"?>
+<file path=ppt/slides/slide6.xml><?xml version="1.0" encoding="utf-8"?>
 <p:sld xmlns:a="http://schemas.openxmlformats.org/drawingml/2006/main" xmlns:p="http://schemas.openxmlformats.org/presentationml/2006/main" xmlns:r="http://schemas.openxmlformats.org/officeDocument/2006/relationships">
   <p:cSld>
     <p:spTree>
@@ -8028,7 +9585,7 @@
                 </a:solidFill>
                 <a:latin typeface="Arial"/>
               </a:rPr>
-              <a:t>5 / 14</a:t>
+              <a:t>6 / 16</a:t>
             </a:r>
           </a:p>
         </p:txBody>
@@ -8947,7 +10504,7 @@
 </p:sld>
 </file>
 
-<file path=ppt/slides/slide6.xml><?xml version="1.0" encoding="utf-8"?>
+<file path=ppt/slides/slide7.xml><?xml version="1.0" encoding="utf-8"?>
 <p:sld xmlns:a="http://schemas.openxmlformats.org/drawingml/2006/main" xmlns:p="http://schemas.openxmlformats.org/presentationml/2006/main" xmlns:r="http://schemas.openxmlformats.org/officeDocument/2006/relationships">
   <p:cSld>
     <p:spTree>
@@ -9104,7 +10661,7 @@
                 </a:solidFill>
                 <a:latin typeface="Arial"/>
               </a:rPr>
-              <a:t>6 / 14</a:t>
+              <a:t>7 / 16</a:t>
             </a:r>
           </a:p>
         </p:txBody>
@@ -10486,7 +12043,7 @@
 </p:sld>
 </file>
 
-<file path=ppt/slides/slide7.xml><?xml version="1.0" encoding="utf-8"?>
+<file path=ppt/slides/slide8.xml><?xml version="1.0" encoding="utf-8"?>
 <p:sld xmlns:a="http://schemas.openxmlformats.org/drawingml/2006/main" xmlns:p="http://schemas.openxmlformats.org/presentationml/2006/main" xmlns:r="http://schemas.openxmlformats.org/officeDocument/2006/relationships">
   <p:cSld>
     <p:spTree>
@@ -10643,7 +12200,7 @@
                 </a:solidFill>
                 <a:latin typeface="Arial"/>
               </a:rPr>
-              <a:t>7 / 14</a:t>
+              <a:t>8 / 16</a:t>
             </a:r>
           </a:p>
         </p:txBody>
@@ -10759,7 +12316,7 @@
 </p:sld>
 </file>
 
-<file path=ppt/slides/slide8.xml><?xml version="1.0" encoding="utf-8"?>
+<file path=ppt/slides/slide9.xml><?xml version="1.0" encoding="utf-8"?>
 <p:sld xmlns:a="http://schemas.openxmlformats.org/drawingml/2006/main" xmlns:p="http://schemas.openxmlformats.org/presentationml/2006/main" xmlns:r="http://schemas.openxmlformats.org/officeDocument/2006/relationships">
   <p:cSld>
     <p:spTree>
@@ -10916,7 +12473,7 @@
                 </a:solidFill>
                 <a:latin typeface="Arial"/>
               </a:rPr>
-              <a:t>8 / 14</a:t>
+              <a:t>9 / 16</a:t>
             </a:r>
           </a:p>
         </p:txBody>
@@ -11024,287 +12581,6 @@
           </a:p>
         </p:txBody>
       </p:sp>
-    </p:spTree>
-  </p:cSld>
-  <p:clrMapOvr>
-    <a:masterClrMapping/>
-  </p:clrMapOvr>
-</p:sld>
-</file>
-
-<file path=ppt/slides/slide9.xml><?xml version="1.0" encoding="utf-8"?>
-<p:sld xmlns:a="http://schemas.openxmlformats.org/drawingml/2006/main" xmlns:p="http://schemas.openxmlformats.org/presentationml/2006/main" xmlns:r="http://schemas.openxmlformats.org/officeDocument/2006/relationships">
-  <p:cSld>
-    <p:spTree>
-      <p:nvGrpSpPr>
-        <p:cNvPr id="1" name=""/>
-        <p:cNvGrpSpPr/>
-        <p:nvPr/>
-      </p:nvGrpSpPr>
-      <p:grpSpPr/>
-      <p:sp>
-        <p:nvSpPr>
-          <p:cNvPr id="2" name="TextBox 1"/>
-          <p:cNvSpPr txBox="1"/>
-          <p:nvPr/>
-        </p:nvSpPr>
-        <p:spPr>
-          <a:xfrm>
-            <a:off x="548640" y="320040"/>
-            <a:ext cx="11064240" cy="822960"/>
-          </a:xfrm>
-          <a:prstGeom prst="rect">
-            <a:avLst/>
-          </a:prstGeom>
-          <a:noFill/>
-        </p:spPr>
-        <p:txBody>
-          <a:bodyPr wrap="square" anchor="ctr" lIns="45720" rIns="45720">
-            <a:spAutoFit/>
-          </a:bodyPr>
-          <a:lstStyle/>
-          <a:p>
-            <a:pPr algn="l">
-              <a:spcAft>
-                <a:spcPts val="800"/>
-              </a:spcAft>
-            </a:pPr>
-            <a:r>
-              <a:rPr sz="3200" b="1">
-                <a:solidFill>
-                  <a:srgbClr val="000000"/>
-                </a:solidFill>
-                <a:latin typeface="Arial"/>
-              </a:rPr>
-              <a:t>Data</a:t>
-            </a:r>
-          </a:p>
-        </p:txBody>
-      </p:sp>
-      <p:cxnSp>
-        <p:nvCxnSpPr>
-          <p:cNvPr id="3" name="Connector 2"/>
-          <p:cNvCxnSpPr/>
-          <p:nvPr/>
-        </p:nvCxnSpPr>
-        <p:spPr>
-          <a:xfrm>
-            <a:off x="594360" y="1143000"/>
-            <a:ext cx="10972800" cy="0"/>
-          </a:xfrm>
-          <a:prstGeom prst="line">
-            <a:avLst/>
-          </a:prstGeom>
-          <a:ln w="15875">
-            <a:solidFill>
-              <a:srgbClr val="000000"/>
-            </a:solidFill>
-          </a:ln>
-        </p:spPr>
-        <p:style>
-          <a:lnRef idx="2">
-            <a:schemeClr val="accent1"/>
-          </a:lnRef>
-          <a:fillRef idx="0">
-            <a:schemeClr val="accent1"/>
-          </a:fillRef>
-          <a:effectRef idx="1">
-            <a:schemeClr val="accent1"/>
-          </a:effectRef>
-          <a:fontRef idx="minor">
-            <a:schemeClr val="tx1"/>
-          </a:fontRef>
-        </p:style>
-      </p:cxnSp>
-      <p:sp>
-        <p:nvSpPr>
-          <p:cNvPr id="4" name="TextBox 3"/>
-          <p:cNvSpPr txBox="1"/>
-          <p:nvPr/>
-        </p:nvSpPr>
-        <p:spPr>
-          <a:xfrm>
-            <a:off x="548640" y="6400800"/>
-            <a:ext cx="8229600" cy="320040"/>
-          </a:xfrm>
-          <a:prstGeom prst="rect">
-            <a:avLst/>
-          </a:prstGeom>
-          <a:noFill/>
-        </p:spPr>
-        <p:txBody>
-          <a:bodyPr wrap="square" anchor="t" lIns="45720" rIns="45720">
-            <a:spAutoFit/>
-          </a:bodyPr>
-          <a:lstStyle/>
-          <a:p>
-            <a:pPr algn="l">
-              <a:spcAft>
-                <a:spcPts val="800"/>
-              </a:spcAft>
-            </a:pPr>
-            <a:r>
-              <a:rPr sz="1100" b="0">
-                <a:solidFill>
-                  <a:srgbClr val="595959"/>
-                </a:solidFill>
-                <a:latin typeface="Arial"/>
-              </a:rPr>
-              <a:t>Comparing CatBoost, TabPFN, and TabFM for Explainable Hair Fall Risk Prediction</a:t>
-            </a:r>
-          </a:p>
-        </p:txBody>
-      </p:sp>
-      <p:sp>
-        <p:nvSpPr>
-          <p:cNvPr id="5" name="TextBox 4"/>
-          <p:cNvSpPr txBox="1"/>
-          <p:nvPr/>
-        </p:nvSpPr>
-        <p:spPr>
-          <a:xfrm>
-            <a:off x="10698480" y="6400800"/>
-            <a:ext cx="914400" cy="320040"/>
-          </a:xfrm>
-          <a:prstGeom prst="rect">
-            <a:avLst/>
-          </a:prstGeom>
-          <a:noFill/>
-        </p:spPr>
-        <p:txBody>
-          <a:bodyPr wrap="square" anchor="t" lIns="45720" rIns="45720">
-            <a:spAutoFit/>
-          </a:bodyPr>
-          <a:lstStyle/>
-          <a:p>
-            <a:pPr algn="r">
-              <a:spcAft>
-                <a:spcPts val="800"/>
-              </a:spcAft>
-            </a:pPr>
-            <a:r>
-              <a:rPr sz="1100" b="0">
-                <a:solidFill>
-                  <a:srgbClr val="595959"/>
-                </a:solidFill>
-                <a:latin typeface="Arial"/>
-              </a:rPr>
-              <a:t>9 / 14</a:t>
-            </a:r>
-          </a:p>
-        </p:txBody>
-      </p:sp>
-      <p:sp>
-        <p:nvSpPr>
-          <p:cNvPr id="6" name="TextBox 5"/>
-          <p:cNvSpPr txBox="1"/>
-          <p:nvPr/>
-        </p:nvSpPr>
-        <p:spPr>
-          <a:xfrm>
-            <a:off x="548640" y="1371600"/>
-            <a:ext cx="4572000" cy="4846320"/>
-          </a:xfrm>
-          <a:prstGeom prst="rect">
-            <a:avLst/>
-          </a:prstGeom>
-          <a:noFill/>
-        </p:spPr>
-        <p:txBody>
-          <a:bodyPr wrap="square" anchor="t" lIns="45720" rIns="45720">
-            <a:spAutoFit/>
-          </a:bodyPr>
-          <a:lstStyle/>
-          <a:p>
-            <a:pPr algn="l">
-              <a:spcAft>
-                <a:spcPts val="1200"/>
-              </a:spcAft>
-            </a:pPr>
-            <a:r>
-              <a:rPr sz="1700" b="0">
-                <a:solidFill>
-                  <a:srgbClr val="000000"/>
-                </a:solidFill>
-                <a:latin typeface="Arial"/>
-              </a:rPr>
-              <a:t>•  Dataset 1 (Kaggle): 100,000 records, 13 columns of measurements and hair fall (0 to 5).</a:t>
-            </a:r>
-          </a:p>
-          <a:p>
-            <a:pPr algn="l">
-              <a:spcAft>
-                <a:spcPts val="1200"/>
-              </a:spcAft>
-            </a:pPr>
-            <a:r>
-              <a:rPr sz="1700" b="0">
-                <a:solidFill>
-                  <a:srgbClr val="000000"/>
-                </a:solidFill>
-                <a:latin typeface="Arial"/>
-              </a:rPr>
-              <a:t>•  Dataset 2 (Mendeley): survey of 716 people, 14 columns.</a:t>
-            </a:r>
-          </a:p>
-          <a:p>
-            <a:pPr algn="l">
-              <a:spcAft>
-                <a:spcPts val="1200"/>
-              </a:spcAft>
-            </a:pPr>
-            <a:r>
-              <a:rPr sz="1700" b="0">
-                <a:solidFill>
-                  <a:srgbClr val="000000"/>
-                </a:solidFill>
-                <a:latin typeface="Arial"/>
-              </a:rPr>
-              <a:t>•  Super dataset: 200,000 records with all fields of both and extra fields.</a:t>
-            </a:r>
-          </a:p>
-          <a:p>
-            <a:pPr algn="l">
-              <a:spcAft>
-                <a:spcPts val="1200"/>
-              </a:spcAft>
-            </a:pPr>
-            <a:r>
-              <a:rPr sz="1700" b="0">
-                <a:solidFill>
-                  <a:srgbClr val="000000"/>
-                </a:solidFill>
-                <a:latin typeface="Arial"/>
-              </a:rPr>
-              <a:t>•  Final dataset: 21,606 records, 20 features, target Low 45%, Moderate 35%, High 20%.</a:t>
-            </a:r>
-          </a:p>
-        </p:txBody>
-      </p:sp>
-      <p:pic>
-        <p:nvPicPr>
-          <p:cNvPr id="7" name="Picture 6" descr="fig_3_2_dataset_link.png"/>
-          <p:cNvPicPr>
-            <a:picLocks noChangeAspect="1"/>
-          </p:cNvPicPr>
-          <p:nvPr/>
-        </p:nvPicPr>
-        <p:blipFill>
-          <a:blip r:embed="rId3"/>
-          <a:stretch>
-            <a:fillRect/>
-          </a:stretch>
-        </p:blipFill>
-        <p:spPr>
-          <a:xfrm>
-            <a:off x="5212080" y="2194560"/>
-            <a:ext cx="6675120" cy="2853550"/>
-          </a:xfrm>
-          <a:prstGeom prst="rect">
-            <a:avLst/>
-          </a:prstGeom>
-        </p:spPr>
-      </p:pic>
     </p:spTree>
   </p:cSld>
   <p:clrMapOvr>

--- a/Thesis_Final/Presentation/Hairfall_Presentation.pptx
+++ b/Thesis_Final/Presentation/Hairfall_Presentation.pptx
@@ -19,8 +19,6 @@
     <p:sldId id="267" r:id="rId19"/>
     <p:sldId id="268" r:id="rId20"/>
     <p:sldId id="269" r:id="rId21"/>
-    <p:sldId id="270" r:id="rId22"/>
-    <p:sldId id="271" r:id="rId23"/>
   </p:sldIdLst>
   <p:sldSz cx="12191695" cy="6858000" type="screen4x3"/>
   <p:notesSz cx="6858000" cy="9144000"/>
@@ -587,7 +585,7 @@
           <a:lstStyle/>
           <a:p>
             <a:r>
-              <a:t>Two public datasets are the sources. A super dataset of 200,000 records holds all their fields plus extra fields. Age and gender are identified in it. Comparing it with the two datasets gives the final dataset of 21,606 records used for modelling.</a:t>
+              <a:t>Two public datasets feed a super dataset of 200,000 records. Comparing it with them gives the final dataset of 21,606 records used for modelling.</a:t>
             </a:r>
           </a:p>
         </p:txBody>
@@ -657,7 +655,7 @@
           <a:lstStyle/>
           <a:p>
             <a:r>
-              <a:t>One pipeline: clean and split the data once, give the same rows to the three models, evaluate them the same way, and explain each with SHAP. The 500 and 2,000 record sets show behaviour with little data.</a:t>
+              <a:t>One pipeline: clean and split once, give the same rows to the three models, evaluate them the same way, and explain each with SHAP.</a:t>
             </a:r>
           </a:p>
         </p:txBody>
@@ -727,7 +725,7 @@
           <a:lstStyle/>
           <a:p>
             <a:r>
-              <a:t>Three different ways to predict. CatBoost needs training and tuning. TabPFN and TabFM only read the training rows as context and predict, so they need no tuning.</a:t>
+              <a:t>CatBoost needs training and tuning. TabPFN and TabFM only read the training rows as context and predict, so they need no tuning.</a:t>
             </a:r>
           </a:p>
         </p:txBody>
@@ -797,7 +795,7 @@
           <a:lstStyle/>
           <a:p>
             <a:r>
-              <a:t>SHAP shows which features push each prediction up or down. Metrics are macro averages because the tiers are not equal in size. McNemar's test tells us if differences are real.</a:t>
+              <a:t>These are expectations to test, not results. The study can also show the opposite.</a:t>
             </a:r>
           </a:p>
         </p:txBody>
@@ -867,146 +865,6 @@
           <a:lstStyle/>
           <a:p>
             <a:r>
-              <a:t>These are expectations to test, not results. The study can also show the opposite, and a difference counts only if McNemar's test supports it.</a:t>
-            </a:r>
-          </a:p>
-        </p:txBody>
-      </p:sp>
-      <p:sp>
-        <p:nvSpPr>
-          <p:cNvPr id="4" name="Slide Number Placeholder 3"/>
-          <p:cNvSpPr>
-            <a:spLocks noGrp="1"/>
-          </p:cNvSpPr>
-          <p:nvPr>
-            <p:ph type="sldNum" idx="5" sz="quarter"/>
-          </p:nvPr>
-        </p:nvSpPr>
-        <p:spPr/>
-      </p:sp>
-    </p:spTree>
-  </p:cSld>
-  <p:clrMapOvr>
-    <a:masterClrMapping/>
-  </p:clrMapOvr>
-</p:notes>
-</file>
-
-<file path=ppt/notesSlides/notesSlide15.xml><?xml version="1.0" encoding="utf-8"?>
-<p:notes xmlns:a="http://schemas.openxmlformats.org/drawingml/2006/main" xmlns:p="http://schemas.openxmlformats.org/presentationml/2006/main" xmlns:r="http://schemas.openxmlformats.org/officeDocument/2006/relationships">
-  <p:cSld>
-    <p:spTree>
-      <p:nvGrpSpPr>
-        <p:cNvPr id="1" name=""/>
-        <p:cNvGrpSpPr/>
-        <p:nvPr/>
-      </p:nvGrpSpPr>
-      <p:grpSpPr>
-        <a:xfrm>
-          <a:off x="0" y="0"/>
-          <a:ext cx="0" cy="0"/>
-          <a:chOff x="0" y="0"/>
-          <a:chExt cx="0" cy="0"/>
-        </a:xfrm>
-      </p:grpSpPr>
-      <p:sp>
-        <p:nvSpPr>
-          <p:cNvPr id="2" name="Slide Image Placeholder 1"/>
-          <p:cNvSpPr>
-            <a:spLocks noGrp="1"/>
-          </p:cNvSpPr>
-          <p:nvPr>
-            <p:ph type="sldImg" idx="2"/>
-          </p:nvPr>
-        </p:nvSpPr>
-        <p:spPr/>
-      </p:sp>
-      <p:sp>
-        <p:nvSpPr>
-          <p:cNvPr id="3" name="Notes Placeholder 2"/>
-          <p:cNvSpPr>
-            <a:spLocks noGrp="1"/>
-          </p:cNvSpPr>
-          <p:nvPr>
-            <p:ph type="body" idx="3" sz="quarter"/>
-          </p:nvPr>
-        </p:nvSpPr>
-        <p:spPr/>
-        <p:txBody>
-          <a:bodyPr/>
-          <a:lstStyle/>
-          <a:p>
-            <a:r>
-              <a:t>Months 1 and 2 are the proposal work. Months 3 and 4 are the final work after approval, in the order of the methodology. Thank you; questions are welcome.</a:t>
-            </a:r>
-          </a:p>
-        </p:txBody>
-      </p:sp>
-      <p:sp>
-        <p:nvSpPr>
-          <p:cNvPr id="4" name="Slide Number Placeholder 3"/>
-          <p:cNvSpPr>
-            <a:spLocks noGrp="1"/>
-          </p:cNvSpPr>
-          <p:nvPr>
-            <p:ph type="sldNum" idx="5" sz="quarter"/>
-          </p:nvPr>
-        </p:nvSpPr>
-        <p:spPr/>
-      </p:sp>
-    </p:spTree>
-  </p:cSld>
-  <p:clrMapOvr>
-    <a:masterClrMapping/>
-  </p:clrMapOvr>
-</p:notes>
-</file>
-
-<file path=ppt/notesSlides/notesSlide16.xml><?xml version="1.0" encoding="utf-8"?>
-<p:notes xmlns:a="http://schemas.openxmlformats.org/drawingml/2006/main" xmlns:p="http://schemas.openxmlformats.org/presentationml/2006/main" xmlns:r="http://schemas.openxmlformats.org/officeDocument/2006/relationships">
-  <p:cSld>
-    <p:spTree>
-      <p:nvGrpSpPr>
-        <p:cNvPr id="1" name=""/>
-        <p:cNvGrpSpPr/>
-        <p:nvPr/>
-      </p:nvGrpSpPr>
-      <p:grpSpPr>
-        <a:xfrm>
-          <a:off x="0" y="0"/>
-          <a:ext cx="0" cy="0"/>
-          <a:chOff x="0" y="0"/>
-          <a:chExt cx="0" cy="0"/>
-        </a:xfrm>
-      </p:grpSpPr>
-      <p:sp>
-        <p:nvSpPr>
-          <p:cNvPr id="2" name="Slide Image Placeholder 1"/>
-          <p:cNvSpPr>
-            <a:spLocks noGrp="1"/>
-          </p:cNvSpPr>
-          <p:nvPr>
-            <p:ph type="sldImg" idx="2"/>
-          </p:nvPr>
-        </p:nvSpPr>
-        <p:spPr/>
-      </p:sp>
-      <p:sp>
-        <p:nvSpPr>
-          <p:cNvPr id="3" name="Notes Placeholder 2"/>
-          <p:cNvSpPr>
-            <a:spLocks noGrp="1"/>
-          </p:cNvSpPr>
-          <p:nvPr>
-            <p:ph type="body" idx="3" sz="quarter"/>
-          </p:nvPr>
-        </p:nvSpPr>
-        <p:spPr/>
-        <p:txBody>
-          <a:bodyPr/>
-          <a:lstStyle/>
-          <a:p>
-            <a:r>
               <a:t>Thank the panel and invite questions.</a:t>
             </a:r>
           </a:p>
@@ -1077,7 +935,7 @@
           <a:lstStyle/>
           <a:p>
             <a:r>
-              <a:t>This is the outline of the talk: the problem, what is known, the gap, the data and methods, what we expect, and the schedule.</a:t>
+              <a:t>Outline of the talk: the project in one slide, the problem, what is known, the gap, the data and methods, and what we expect.</a:t>
             </a:r>
           </a:p>
         </p:txBody>
@@ -1147,7 +1005,7 @@
           <a:lstStyle/>
           <a:p>
             <a:r>
-              <a:t>One-slide summary. Problem, aim, data, method, expected result and time. Each point is explained on the next slides.</a:t>
+              <a:t>One-slide summary. The problem, the aim, what is missing in earlier work, the data and method, and what we expect.</a:t>
             </a:r>
           </a:p>
         </p:txBody>
@@ -1217,7 +1075,7 @@
           <a:lstStyle/>
           <a:p>
             <a:r>
-              <a:t>Hair loss has many causes that act together, so one test cannot predict it. Doctors rely on history and self-reports. ML can help but is a black box, which is a problem in health care.</a:t>
+              <a:t>Hair loss has many causes that act together, so no single test predicts it. Earlier studies used classical models, and new foundation models are untested and hard to explain.</a:t>
             </a:r>
           </a:p>
         </p:txBody>
@@ -1287,7 +1145,7 @@
           <a:lstStyle/>
           <a:p>
             <a:r>
-              <a:t>Two objectives: compare the three models, and explain them. Everything in the project serves one of these two.</a:t>
+              <a:t>Two objectives: compare the three models, and explain them.</a:t>
             </a:r>
           </a:p>
         </p:txBody>
@@ -1357,7 +1215,7 @@
           <a:lstStyle/>
           <a:p>
             <a:r>
-              <a:t>Hair grows in cycles. Anything that pushes follicles out of the growth phase early causes shedding. These factors overlap, which is why a model that combines many indicators is useful.</a:t>
+              <a:t>Hair grows in cycles. Anything that pushes follicles into the resting phase early causes shedding. These factors overlap, so a model that combines many indicators is useful.</a:t>
             </a:r>
           </a:p>
         </p:txBody>
@@ -1427,7 +1285,7 @@
           <a:lstStyle/>
           <a:p>
             <a:r>
-              <a:t>These are the closest studies. Most use classical models on survey data, or images. Results differ a lot between studies, and explanations were not compared.</a:t>
+              <a:t>These are the closest studies. They use classical models on survey data, the results differ a lot, and none compared explanations.</a:t>
             </a:r>
           </a:p>
         </p:txBody>
@@ -1497,7 +1355,7 @@
           <a:lstStyle/>
           <a:p>
             <a:r>
-              <a:t>CatBoost is a strong boosted-tree model for categorical data. TabPFN and TabFM are new foundation models: pretrained once, then they predict in one pass without training.</a:t>
+              <a:t>CatBoost is a strong boosted-tree model. TabPFN and TabFM are new foundation models: pretrained once, then they predict in one pass without training.</a:t>
             </a:r>
           </a:p>
         </p:txBody>
@@ -1567,7 +1425,7 @@
           <a:lstStyle/>
           <a:p>
             <a:r>
-              <a:t>This is what we found missing in the literature. It is why the project compares these three models and explains them.</a:t>
+              <a:t>This is what we found missing. It is why the project compares these three models and explains them.</a:t>
             </a:r>
           </a:p>
         </p:txBody>
@@ -4962,7 +4820,7 @@
                 </a:solidFill>
                 <a:latin typeface="Arial"/>
               </a:rPr>
-              <a:t>10 / 16</a:t>
+              <a:t>10 / 14</a:t>
             </a:r>
           </a:p>
         </p:txBody>
@@ -4975,8 +4833,8 @@
         </p:nvSpPr>
         <p:spPr>
           <a:xfrm>
-            <a:off x="548640" y="1371600"/>
-            <a:ext cx="4572000" cy="4846320"/>
+            <a:off x="548640" y="1645920"/>
+            <a:ext cx="4572000" cy="4114800"/>
           </a:xfrm>
           <a:prstGeom prst="rect">
             <a:avLst/>
@@ -4991,65 +4849,49 @@
           <a:p>
             <a:pPr algn="l">
               <a:spcAft>
-                <a:spcPts val="1200"/>
+                <a:spcPts val="2000"/>
               </a:spcAft>
             </a:pPr>
             <a:r>
-              <a:rPr sz="1700" b="0">
+              <a:rPr sz="2200" b="0">
                 <a:solidFill>
                   <a:srgbClr val="000000"/>
                 </a:solidFill>
                 <a:latin typeface="Arial"/>
               </a:rPr>
-              <a:t>•  Dataset 1 (Kaggle): 100,000 records, 13 columns of measurements and hair fall (0 to 5).</a:t>
+              <a:t>•  Two public datasets: Kaggle and Mendeley.</a:t>
             </a:r>
           </a:p>
           <a:p>
             <a:pPr algn="l">
               <a:spcAft>
-                <a:spcPts val="1200"/>
+                <a:spcPts val="2000"/>
               </a:spcAft>
             </a:pPr>
             <a:r>
-              <a:rPr sz="1700" b="0">
+              <a:rPr sz="2200" b="0">
                 <a:solidFill>
                   <a:srgbClr val="000000"/>
                 </a:solidFill>
                 <a:latin typeface="Arial"/>
               </a:rPr>
-              <a:t>•  Dataset 2 (Mendeley): survey of 716 people, 14 columns.</a:t>
+              <a:t>•  Super dataset: 200,000 records.</a:t>
             </a:r>
           </a:p>
           <a:p>
             <a:pPr algn="l">
               <a:spcAft>
-                <a:spcPts val="1200"/>
+                <a:spcPts val="2000"/>
               </a:spcAft>
             </a:pPr>
             <a:r>
-              <a:rPr sz="1700" b="0">
+              <a:rPr sz="2200" b="0">
                 <a:solidFill>
                   <a:srgbClr val="000000"/>
                 </a:solidFill>
                 <a:latin typeface="Arial"/>
               </a:rPr>
-              <a:t>•  Super dataset: 200,000 records with all fields of both and extra fields.</a:t>
-            </a:r>
-          </a:p>
-          <a:p>
-            <a:pPr algn="l">
-              <a:spcAft>
-                <a:spcPts val="1200"/>
-              </a:spcAft>
-            </a:pPr>
-            <a:r>
-              <a:rPr sz="1700" b="0">
-                <a:solidFill>
-                  <a:srgbClr val="000000"/>
-                </a:solidFill>
-                <a:latin typeface="Arial"/>
-              </a:rPr>
-              <a:t>•  Final dataset: 21,606 records, 20 features, target Low 45%, Moderate 35%, High 20%.</a:t>
+              <a:t>•  Final dataset: 21,606 records, 20 features, 3 risk tiers.</a:t>
             </a:r>
           </a:p>
         </p:txBody>
@@ -5243,7 +5085,7 @@
                 </a:solidFill>
                 <a:latin typeface="Arial"/>
               </a:rPr>
-              <a:t>11 / 16</a:t>
+              <a:t>11 / 14</a:t>
             </a:r>
           </a:p>
         </p:txBody>
@@ -5264,7 +5106,7 @@
         </p:blipFill>
         <p:spPr>
           <a:xfrm>
-            <a:off x="1737360" y="1371600"/>
+            <a:off x="1737360" y="1463040"/>
             <a:ext cx="8686800" cy="3750768"/>
           </a:xfrm>
           <a:prstGeom prst="rect">
@@ -5300,13 +5142,13 @@
               </a:spcAft>
             </a:pPr>
             <a:r>
-              <a:rPr sz="1600" b="0">
+              <a:rPr sz="1800" b="0">
                 <a:solidFill>
                   <a:srgbClr val="000000"/>
                 </a:solidFill>
                 <a:latin typeface="Arial"/>
               </a:rPr>
-              <a:t>Same split and seed for all models. Training sizes: 500, 2,000, and all 17,284 records.</a:t>
+              <a:t>Same split and seed for all models.</a:t>
             </a:r>
           </a:p>
         </p:txBody>
@@ -5476,7 +5318,7 @@
                 </a:solidFill>
                 <a:latin typeface="Arial"/>
               </a:rPr>
-              <a:t>12 / 16</a:t>
+              <a:t>12 / 14</a:t>
             </a:r>
           </a:p>
         </p:txBody>
@@ -5490,8 +5332,8 @@
           <p:nvPr/>
         </p:nvGraphicFramePr>
         <p:xfrm>
-          <a:off x="594360" y="1463040"/>
-          <a:ext cx="10972800" cy="3657600"/>
+          <a:off x="594360" y="1645920"/>
+          <a:ext cx="10972799" cy="3291840"/>
         </p:xfrm>
         <a:graphic>
           <a:graphicData uri="http://schemas.openxmlformats.org/drawingml/2006/table">
@@ -5500,18 +5342,17 @@
                 <a:tableStyleId>{5940675A-B579-460E-94D1-54222C63F5DA}</a:tableStyleId>
               </a:tblPr>
               <a:tblGrid>
-                <a:gridCol w="2011680"/>
-                <a:gridCol w="5486400"/>
                 <a:gridCol w="3474720"/>
+                <a:gridCol w="7498079"/>
               </a:tblGrid>
-              <a:tr h="914400">
+              <a:tr h="822960">
                 <a:tc>
                   <a:txBody>
                     <a:bodyPr wrap="square"/>
                     <a:lstStyle/>
                     <a:p>
                       <a:r>
-                        <a:rPr sz="1600" b="1">
+                        <a:rPr sz="2200" b="1">
                           <a:solidFill>
                             <a:srgbClr val="000000"/>
                           </a:solidFill>
@@ -5557,13 +5398,13 @@
                     <a:lstStyle/>
                     <a:p>
                       <a:r>
-                        <a:rPr sz="1600" b="1">
+                        <a:rPr sz="2200" b="1">
                           <a:solidFill>
                             <a:srgbClr val="000000"/>
                           </a:solidFill>
                           <a:latin typeface="Arial"/>
                         </a:rPr>
-                        <a:t>How it works</a:t>
+                        <a:t>Tuning</a:t>
                       </a:r>
                     </a:p>
                   </a:txBody>
@@ -5597,61 +5438,15 @@
                     </a:lnB>
                   </a:tcPr>
                 </a:tc>
+              </a:tr>
+              <a:tr h="822960">
                 <a:tc>
                   <a:txBody>
                     <a:bodyPr wrap="square"/>
                     <a:lstStyle/>
                     <a:p>
                       <a:r>
-                        <a:rPr sz="1600" b="1">
-                          <a:solidFill>
-                            <a:srgbClr val="000000"/>
-                          </a:solidFill>
-                          <a:latin typeface="Arial"/>
-                        </a:rPr>
-                        <a:t>Training and tuning</a:t>
-                      </a:r>
-                    </a:p>
-                  </a:txBody>
-                  <a:tcPr marL="73152" marR="73152" marT="36576" marB="36576">
-                    <a:solidFill>
-                      <a:srgbClr val="EEEEEE"/>
-                    </a:solidFill>
-                    <a:lnL w="12700" cap="flat" cmpd="sng" algn="ctr">
-                      <a:solidFill>
-                        <a:srgbClr val="000000"/>
-                      </a:solidFill>
-                      <a:prstDash val="solid"/>
-                    </a:lnL>
-                    <a:lnR w="12700" cap="flat" cmpd="sng" algn="ctr">
-                      <a:solidFill>
-                        <a:srgbClr val="000000"/>
-                      </a:solidFill>
-                      <a:prstDash val="solid"/>
-                    </a:lnR>
-                    <a:lnT w="12700" cap="flat" cmpd="sng" algn="ctr">
-                      <a:solidFill>
-                        <a:srgbClr val="000000"/>
-                      </a:solidFill>
-                      <a:prstDash val="solid"/>
-                    </a:lnT>
-                    <a:lnB w="12700" cap="flat" cmpd="sng" algn="ctr">
-                      <a:solidFill>
-                        <a:srgbClr val="000000"/>
-                      </a:solidFill>
-                      <a:prstDash val="solid"/>
-                    </a:lnB>
-                  </a:tcPr>
-                </a:tc>
-              </a:tr>
-              <a:tr h="914400">
-                <a:tc>
-                  <a:txBody>
-                    <a:bodyPr wrap="square"/>
-                    <a:lstStyle/>
-                    <a:p>
-                      <a:r>
-                        <a:rPr sz="1600" b="0">
+                        <a:rPr sz="2200" b="0">
                           <a:solidFill>
                             <a:srgbClr val="000000"/>
                           </a:solidFill>
@@ -5697,13 +5492,13 @@
                     <a:lstStyle/>
                     <a:p>
                       <a:r>
-                        <a:rPr sz="1600" b="0">
+                        <a:rPr sz="2200" b="0">
                           <a:solidFill>
                             <a:srgbClr val="000000"/>
                           </a:solidFill>
                           <a:latin typeface="Arial"/>
                         </a:rPr>
-                        <a:t>Many small symmetric decision trees, each correcting the previous ones</a:t>
+                        <a:t>Trained and tuned (grid search, 5-fold cross-validation)</a:t>
                       </a:r>
                     </a:p>
                   </a:txBody>
@@ -5737,61 +5532,15 @@
                     </a:lnB>
                   </a:tcPr>
                 </a:tc>
+              </a:tr>
+              <a:tr h="822960">
                 <a:tc>
                   <a:txBody>
                     <a:bodyPr wrap="square"/>
                     <a:lstStyle/>
                     <a:p>
                       <a:r>
-                        <a:rPr sz="1600" b="0">
-                          <a:solidFill>
-                            <a:srgbClr val="000000"/>
-                          </a:solidFill>
-                          <a:latin typeface="Arial"/>
-                        </a:rPr>
-                        <a:t>Trained and tuned: grid search with 5-fold cross-validation</a:t>
-                      </a:r>
-                    </a:p>
-                  </a:txBody>
-                  <a:tcPr marL="73152" marR="73152" marT="36576" marB="36576">
-                    <a:solidFill>
-                      <a:srgbClr val="FFFFFF"/>
-                    </a:solidFill>
-                    <a:lnL w="12700" cap="flat" cmpd="sng" algn="ctr">
-                      <a:solidFill>
-                        <a:srgbClr val="000000"/>
-                      </a:solidFill>
-                      <a:prstDash val="solid"/>
-                    </a:lnL>
-                    <a:lnR w="12700" cap="flat" cmpd="sng" algn="ctr">
-                      <a:solidFill>
-                        <a:srgbClr val="000000"/>
-                      </a:solidFill>
-                      <a:prstDash val="solid"/>
-                    </a:lnR>
-                    <a:lnT w="12700" cap="flat" cmpd="sng" algn="ctr">
-                      <a:solidFill>
-                        <a:srgbClr val="000000"/>
-                      </a:solidFill>
-                      <a:prstDash val="solid"/>
-                    </a:lnT>
-                    <a:lnB w="12700" cap="flat" cmpd="sng" algn="ctr">
-                      <a:solidFill>
-                        <a:srgbClr val="000000"/>
-                      </a:solidFill>
-                      <a:prstDash val="solid"/>
-                    </a:lnB>
-                  </a:tcPr>
-                </a:tc>
-              </a:tr>
-              <a:tr h="914400">
-                <a:tc>
-                  <a:txBody>
-                    <a:bodyPr wrap="square"/>
-                    <a:lstStyle/>
-                    <a:p>
-                      <a:r>
-                        <a:rPr sz="1600" b="0">
+                        <a:rPr sz="2200" b="0">
                           <a:solidFill>
                             <a:srgbClr val="000000"/>
                           </a:solidFill>
@@ -5837,13 +5586,13 @@
                     <a:lstStyle/>
                     <a:p>
                       <a:r>
-                        <a:rPr sz="1600" b="0">
+                        <a:rPr sz="2200" b="0">
                           <a:solidFill>
                             <a:srgbClr val="000000"/>
                           </a:solidFill>
                           <a:latin typeface="Arial"/>
                         </a:rPr>
-                        <a:t>Transformer reads training rows and the patient, predicts in one pass</a:t>
+                        <a:t>None</a:t>
                       </a:r>
                     </a:p>
                   </a:txBody>
@@ -5877,61 +5626,15 @@
                     </a:lnB>
                   </a:tcPr>
                 </a:tc>
+              </a:tr>
+              <a:tr h="822960">
                 <a:tc>
                   <a:txBody>
                     <a:bodyPr wrap="square"/>
                     <a:lstStyle/>
                     <a:p>
                       <a:r>
-                        <a:rPr sz="1600" b="0">
-                          <a:solidFill>
-                            <a:srgbClr val="000000"/>
-                          </a:solidFill>
-                          <a:latin typeface="Arial"/>
-                        </a:rPr>
-                        <a:t>None; weights are fixed</a:t>
-                      </a:r>
-                    </a:p>
-                  </a:txBody>
-                  <a:tcPr marL="73152" marR="73152" marT="36576" marB="36576">
-                    <a:solidFill>
-                      <a:srgbClr val="FFFFFF"/>
-                    </a:solidFill>
-                    <a:lnL w="12700" cap="flat" cmpd="sng" algn="ctr">
-                      <a:solidFill>
-                        <a:srgbClr val="000000"/>
-                      </a:solidFill>
-                      <a:prstDash val="solid"/>
-                    </a:lnL>
-                    <a:lnR w="12700" cap="flat" cmpd="sng" algn="ctr">
-                      <a:solidFill>
-                        <a:srgbClr val="000000"/>
-                      </a:solidFill>
-                      <a:prstDash val="solid"/>
-                    </a:lnR>
-                    <a:lnT w="12700" cap="flat" cmpd="sng" algn="ctr">
-                      <a:solidFill>
-                        <a:srgbClr val="000000"/>
-                      </a:solidFill>
-                      <a:prstDash val="solid"/>
-                    </a:lnT>
-                    <a:lnB w="12700" cap="flat" cmpd="sng" algn="ctr">
-                      <a:solidFill>
-                        <a:srgbClr val="000000"/>
-                      </a:solidFill>
-                      <a:prstDash val="solid"/>
-                    </a:lnB>
-                  </a:tcPr>
-                </a:tc>
-              </a:tr>
-              <a:tr h="914400">
-                <a:tc>
-                  <a:txBody>
-                    <a:bodyPr wrap="square"/>
-                    <a:lstStyle/>
-                    <a:p>
-                      <a:r>
-                        <a:rPr sz="1600" b="0">
+                        <a:rPr sz="2200" b="0">
                           <a:solidFill>
                             <a:srgbClr val="000000"/>
                           </a:solidFill>
@@ -5977,13 +5680,13 @@
                     <a:lstStyle/>
                     <a:p>
                       <a:r>
-                        <a:rPr sz="1600" b="0">
+                        <a:rPr sz="2200" b="0">
                           <a:solidFill>
                             <a:srgbClr val="000000"/>
                           </a:solidFill>
                           <a:latin typeface="Arial"/>
                         </a:rPr>
-                        <a:t>Transformer with column and row attention, about 400 million parameters</a:t>
+                        <a:t>None</a:t>
                       </a:r>
                     </a:p>
                   </a:txBody>
@@ -6017,96 +5720,11 @@
                     </a:lnB>
                   </a:tcPr>
                 </a:tc>
-                <a:tc>
-                  <a:txBody>
-                    <a:bodyPr wrap="square"/>
-                    <a:lstStyle/>
-                    <a:p>
-                      <a:r>
-                        <a:rPr sz="1600" b="0">
-                          <a:solidFill>
-                            <a:srgbClr val="000000"/>
-                          </a:solidFill>
-                          <a:latin typeface="Arial"/>
-                        </a:rPr>
-                        <a:t>None; weights are fixed</a:t>
-                      </a:r>
-                    </a:p>
-                  </a:txBody>
-                  <a:tcPr marL="73152" marR="73152" marT="36576" marB="36576">
-                    <a:solidFill>
-                      <a:srgbClr val="FFFFFF"/>
-                    </a:solidFill>
-                    <a:lnL w="12700" cap="flat" cmpd="sng" algn="ctr">
-                      <a:solidFill>
-                        <a:srgbClr val="000000"/>
-                      </a:solidFill>
-                      <a:prstDash val="solid"/>
-                    </a:lnL>
-                    <a:lnR w="12700" cap="flat" cmpd="sng" algn="ctr">
-                      <a:solidFill>
-                        <a:srgbClr val="000000"/>
-                      </a:solidFill>
-                      <a:prstDash val="solid"/>
-                    </a:lnR>
-                    <a:lnT w="12700" cap="flat" cmpd="sng" algn="ctr">
-                      <a:solidFill>
-                        <a:srgbClr val="000000"/>
-                      </a:solidFill>
-                      <a:prstDash val="solid"/>
-                    </a:lnT>
-                    <a:lnB w="12700" cap="flat" cmpd="sng" algn="ctr">
-                      <a:solidFill>
-                        <a:srgbClr val="000000"/>
-                      </a:solidFill>
-                      <a:prstDash val="solid"/>
-                    </a:lnB>
-                  </a:tcPr>
-                </a:tc>
               </a:tr>
             </a:tbl>
           </a:graphicData>
         </a:graphic>
       </p:graphicFrame>
-      <p:sp>
-        <p:nvSpPr>
-          <p:cNvPr id="7" name="TextBox 6"/>
-          <p:cNvSpPr txBox="1"/>
-          <p:nvPr/>
-        </p:nvSpPr>
-        <p:spPr>
-          <a:xfrm>
-            <a:off x="594360" y="5394960"/>
-            <a:ext cx="10972800" cy="731520"/>
-          </a:xfrm>
-          <a:prstGeom prst="rect">
-            <a:avLst/>
-          </a:prstGeom>
-          <a:noFill/>
-        </p:spPr>
-        <p:txBody>
-          <a:bodyPr wrap="square" anchor="t" lIns="45720" rIns="45720">
-            <a:spAutoFit/>
-          </a:bodyPr>
-          <a:lstStyle/>
-          <a:p>
-            <a:pPr algn="l">
-              <a:spcAft>
-                <a:spcPts val="800"/>
-              </a:spcAft>
-            </a:pPr>
-            <a:r>
-              <a:rPr sz="1600" b="0">
-                <a:solidFill>
-                  <a:srgbClr val="000000"/>
-                </a:solidFill>
-                <a:latin typeface="Arial"/>
-              </a:rPr>
-              <a:t>TabPFN and TabFM will run on a Kaggle GPU; CatBoost and the statistics on a Mac.</a:t>
-            </a:r>
-          </a:p>
-        </p:txBody>
-      </p:sp>
     </p:spTree>
   </p:cSld>
   <p:clrMapOvr>
@@ -6159,7 +5777,7 @@
                 </a:solidFill>
                 <a:latin typeface="Arial"/>
               </a:rPr>
-              <a:t>Explainability and evaluation</a:t>
+              <a:t>Expected outcomes</a:t>
             </a:r>
           </a:p>
         </p:txBody>
@@ -6272,7 +5890,7 @@
                 </a:solidFill>
                 <a:latin typeface="Arial"/>
               </a:rPr>
-              <a:t>13 / 16</a:t>
+              <a:t>13 / 14</a:t>
             </a:r>
           </a:p>
         </p:txBody>
@@ -6285,8 +5903,8 @@
         </p:nvSpPr>
         <p:spPr>
           <a:xfrm>
-            <a:off x="548640" y="1463040"/>
-            <a:ext cx="5394960" cy="4572000"/>
+            <a:off x="731520" y="1737360"/>
+            <a:ext cx="10698480" cy="4114800"/>
           </a:xfrm>
           <a:prstGeom prst="rect">
             <a:avLst/>
@@ -6301,168 +5919,49 @@
           <a:p>
             <a:pPr algn="l">
               <a:spcAft>
-                <a:spcPts val="1200"/>
+                <a:spcPts val="2600"/>
               </a:spcAft>
             </a:pPr>
             <a:r>
-              <a:rPr sz="2000" b="0">
+              <a:rPr sz="2600" b="0">
                 <a:solidFill>
                   <a:srgbClr val="000000"/>
                 </a:solidFill>
                 <a:latin typeface="Arial"/>
               </a:rPr>
-              <a:t>SHAP for all three models:</a:t>
+              <a:t>•  A fair comparison of the three models on the same data.</a:t>
             </a:r>
           </a:p>
           <a:p>
             <a:pPr algn="l">
               <a:spcAft>
-                <a:spcPts val="1200"/>
+                <a:spcPts val="2600"/>
               </a:spcAft>
             </a:pPr>
             <a:r>
-              <a:rPr sz="2000" b="0">
+              <a:rPr sz="2600" b="0">
                 <a:solidFill>
                   <a:srgbClr val="000000"/>
                 </a:solidFill>
                 <a:latin typeface="Arial"/>
               </a:rPr>
-              <a:t>TreeExplainer for CatBoost</a:t>
+              <a:t>•  TabPFN and TabFM competitive without tuning (to be tested).</a:t>
             </a:r>
           </a:p>
           <a:p>
             <a:pPr algn="l">
               <a:spcAft>
-                <a:spcPts val="1200"/>
+                <a:spcPts val="2600"/>
               </a:spcAft>
             </a:pPr>
             <a:r>
-              <a:rPr sz="2000" b="0">
+              <a:rPr sz="2600" b="0">
                 <a:solidFill>
                   <a:srgbClr val="000000"/>
                 </a:solidFill>
                 <a:latin typeface="Arial"/>
               </a:rPr>
-              <a:t>KernelExplainer for TabPFN and TabFM</a:t>
-            </a:r>
-          </a:p>
-          <a:p>
-            <a:pPr algn="l">
-              <a:spcAft>
-                <a:spcPts val="1200"/>
-              </a:spcAft>
-            </a:pPr>
-            <a:r>
-              <a:rPr sz="2000" b="0">
-                <a:solidFill>
-                  <a:srgbClr val="000000"/>
-                </a:solidFill>
-                <a:latin typeface="Arial"/>
-              </a:rPr>
-              <a:t>Global ranking and per-patient explanations</a:t>
-            </a:r>
-          </a:p>
-        </p:txBody>
-      </p:sp>
-      <p:sp>
-        <p:nvSpPr>
-          <p:cNvPr id="7" name="TextBox 6"/>
-          <p:cNvSpPr txBox="1"/>
-          <p:nvPr/>
-        </p:nvSpPr>
-        <p:spPr>
-          <a:xfrm>
-            <a:off x="6309360" y="1463040"/>
-            <a:ext cx="5394960" cy="4572000"/>
-          </a:xfrm>
-          <a:prstGeom prst="rect">
-            <a:avLst/>
-          </a:prstGeom>
-          <a:noFill/>
-        </p:spPr>
-        <p:txBody>
-          <a:bodyPr wrap="square" anchor="t" lIns="45720" rIns="45720">
-            <a:spAutoFit/>
-          </a:bodyPr>
-          <a:lstStyle/>
-          <a:p>
-            <a:pPr algn="l">
-              <a:spcAft>
-                <a:spcPts val="1200"/>
-              </a:spcAft>
-            </a:pPr>
-            <a:r>
-              <a:rPr sz="2000" b="0">
-                <a:solidFill>
-                  <a:srgbClr val="000000"/>
-                </a:solidFill>
-                <a:latin typeface="Arial"/>
-              </a:rPr>
-              <a:t>Evaluation on the same test set:</a:t>
-            </a:r>
-          </a:p>
-          <a:p>
-            <a:pPr algn="l">
-              <a:spcAft>
-                <a:spcPts val="1200"/>
-              </a:spcAft>
-            </a:pPr>
-            <a:r>
-              <a:rPr sz="2000" b="0">
-                <a:solidFill>
-                  <a:srgbClr val="000000"/>
-                </a:solidFill>
-                <a:latin typeface="Arial"/>
-              </a:rPr>
-              <a:t>Accuracy, macro-precision, macro-recall, macro-F1</a:t>
-            </a:r>
-          </a:p>
-          <a:p>
-            <a:pPr algn="l">
-              <a:spcAft>
-                <a:spcPts val="1200"/>
-              </a:spcAft>
-            </a:pPr>
-            <a:r>
-              <a:rPr sz="2000" b="0">
-                <a:solidFill>
-                  <a:srgbClr val="000000"/>
-                </a:solidFill>
-                <a:latin typeface="Arial"/>
-              </a:rPr>
-              <a:t>ROC-AUC (one-versus-rest)</a:t>
-            </a:r>
-          </a:p>
-          <a:p>
-            <a:pPr algn="l">
-              <a:spcAft>
-                <a:spcPts val="1200"/>
-              </a:spcAft>
-            </a:pPr>
-            <a:r>
-              <a:rPr sz="2000" b="0">
-                <a:solidFill>
-                  <a:srgbClr val="000000"/>
-                </a:solidFill>
-                <a:latin typeface="Arial"/>
-              </a:rPr>
-              <a:t>Confusion matrix</a:t>
-            </a:r>
-          </a:p>
-          <a:p>
-            <a:pPr algn="l">
-              <a:spcAft>
-                <a:spcPts val="1200"/>
-              </a:spcAft>
-            </a:pPr>
-            <a:r>
-              <a:rPr sz="2000" b="0">
-                <a:solidFill>
-                  <a:srgbClr val="000000"/>
-                </a:solidFill>
-                <a:latin typeface="Arial"/>
-              </a:rPr>
-              <a:t>McNemar's test and Wilson 95% intervals</a:t>
+              <a:t>•  Explanations that agree with known causes: iron, stress, family history.</a:t>
             </a:r>
           </a:p>
         </p:txBody>
@@ -6493,6 +5992,192 @@
         </p:nvSpPr>
         <p:spPr>
           <a:xfrm>
+            <a:off x="731520" y="2103120"/>
+            <a:ext cx="10698480" cy="1280160"/>
+          </a:xfrm>
+          <a:prstGeom prst="rect">
+            <a:avLst/>
+          </a:prstGeom>
+          <a:noFill/>
+        </p:spPr>
+        <p:txBody>
+          <a:bodyPr wrap="square" anchor="ctr" lIns="45720" rIns="45720">
+            <a:spAutoFit/>
+          </a:bodyPr>
+          <a:lstStyle/>
+          <a:p>
+            <a:pPr algn="ctr">
+              <a:spcAft>
+                <a:spcPts val="800"/>
+              </a:spcAft>
+            </a:pPr>
+            <a:r>
+              <a:rPr sz="5400" b="1">
+                <a:solidFill>
+                  <a:srgbClr val="000000"/>
+                </a:solidFill>
+                <a:latin typeface="Arial"/>
+              </a:rPr>
+              <a:t>Thank you</a:t>
+            </a:r>
+          </a:p>
+        </p:txBody>
+      </p:sp>
+      <p:cxnSp>
+        <p:nvCxnSpPr>
+          <p:cNvPr id="3" name="Connector 2"/>
+          <p:cNvCxnSpPr/>
+          <p:nvPr/>
+        </p:nvCxnSpPr>
+        <p:spPr>
+          <a:xfrm>
+            <a:off x="3840480" y="3566160"/>
+            <a:ext cx="4572000" cy="0"/>
+          </a:xfrm>
+          <a:prstGeom prst="line">
+            <a:avLst/>
+          </a:prstGeom>
+          <a:ln w="15875">
+            <a:solidFill>
+              <a:srgbClr val="000000"/>
+            </a:solidFill>
+          </a:ln>
+        </p:spPr>
+        <p:style>
+          <a:lnRef idx="2">
+            <a:schemeClr val="accent1"/>
+          </a:lnRef>
+          <a:fillRef idx="0">
+            <a:schemeClr val="accent1"/>
+          </a:fillRef>
+          <a:effectRef idx="1">
+            <a:schemeClr val="accent1"/>
+          </a:effectRef>
+          <a:fontRef idx="minor">
+            <a:schemeClr val="tx1"/>
+          </a:fontRef>
+        </p:style>
+      </p:cxnSp>
+      <p:sp>
+        <p:nvSpPr>
+          <p:cNvPr id="4" name="TextBox 3"/>
+          <p:cNvSpPr txBox="1"/>
+          <p:nvPr/>
+        </p:nvSpPr>
+        <p:spPr>
+          <a:xfrm>
+            <a:off x="731520" y="3749039"/>
+            <a:ext cx="10698480" cy="1097280"/>
+          </a:xfrm>
+          <a:prstGeom prst="rect">
+            <a:avLst/>
+          </a:prstGeom>
+          <a:noFill/>
+        </p:spPr>
+        <p:txBody>
+          <a:bodyPr wrap="square" anchor="t" lIns="45720" rIns="45720">
+            <a:spAutoFit/>
+          </a:bodyPr>
+          <a:lstStyle/>
+          <a:p>
+            <a:pPr algn="ctr">
+              <a:spcAft>
+                <a:spcPts val="800"/>
+              </a:spcAft>
+            </a:pPr>
+            <a:r>
+              <a:rPr sz="2000" b="0">
+                <a:solidFill>
+                  <a:srgbClr val="000000"/>
+                </a:solidFill>
+                <a:latin typeface="Arial"/>
+              </a:rPr>
+              <a:t>Questions are welcome</a:t>
+            </a:r>
+          </a:p>
+          <a:p>
+            <a:pPr algn="ctr">
+              <a:spcAft>
+                <a:spcPts val="800"/>
+              </a:spcAft>
+            </a:pPr>
+            <a:r>
+              <a:rPr sz="2000" b="0">
+                <a:solidFill>
+                  <a:srgbClr val="000000"/>
+                </a:solidFill>
+                <a:latin typeface="Arial"/>
+              </a:rPr>
+              <a:t>Nirajan Shahi  |  Supervisor: Asst. Prof. Jagadish Bhatta</a:t>
+            </a:r>
+          </a:p>
+        </p:txBody>
+      </p:sp>
+      <p:sp>
+        <p:nvSpPr>
+          <p:cNvPr id="5" name="TextBox 4"/>
+          <p:cNvSpPr txBox="1"/>
+          <p:nvPr/>
+        </p:nvSpPr>
+        <p:spPr>
+          <a:xfrm>
+            <a:off x="10698480" y="6400800"/>
+            <a:ext cx="914400" cy="320040"/>
+          </a:xfrm>
+          <a:prstGeom prst="rect">
+            <a:avLst/>
+          </a:prstGeom>
+          <a:noFill/>
+        </p:spPr>
+        <p:txBody>
+          <a:bodyPr wrap="square" anchor="t" lIns="45720" rIns="45720">
+            <a:spAutoFit/>
+          </a:bodyPr>
+          <a:lstStyle/>
+          <a:p>
+            <a:pPr algn="r">
+              <a:spcAft>
+                <a:spcPts val="800"/>
+              </a:spcAft>
+            </a:pPr>
+            <a:r>
+              <a:rPr sz="1100" b="0">
+                <a:solidFill>
+                  <a:srgbClr val="595959"/>
+                </a:solidFill>
+                <a:latin typeface="Arial"/>
+              </a:rPr>
+              <a:t>14 / 14</a:t>
+            </a:r>
+          </a:p>
+        </p:txBody>
+      </p:sp>
+    </p:spTree>
+  </p:cSld>
+  <p:clrMapOvr>
+    <a:masterClrMapping/>
+  </p:clrMapOvr>
+</p:sld>
+</file>
+
+<file path=ppt/slides/slide2.xml><?xml version="1.0" encoding="utf-8"?>
+<p:sld xmlns:a="http://schemas.openxmlformats.org/drawingml/2006/main" xmlns:p="http://schemas.openxmlformats.org/presentationml/2006/main" xmlns:r="http://schemas.openxmlformats.org/officeDocument/2006/relationships">
+  <p:cSld>
+    <p:spTree>
+      <p:nvGrpSpPr>
+        <p:cNvPr id="1" name=""/>
+        <p:cNvGrpSpPr/>
+        <p:nvPr/>
+      </p:nvGrpSpPr>
+      <p:grpSpPr/>
+      <p:sp>
+        <p:nvSpPr>
+          <p:cNvPr id="2" name="TextBox 1"/>
+          <p:cNvSpPr txBox="1"/>
+          <p:nvPr/>
+        </p:nvSpPr>
+        <p:spPr>
+          <a:xfrm>
             <a:off x="548640" y="320040"/>
             <a:ext cx="11064240" cy="822960"/>
           </a:xfrm>
@@ -6519,7 +6204,7 @@
                 </a:solidFill>
                 <a:latin typeface="Arial"/>
               </a:rPr>
-              <a:t>Expected outcomes</a:t>
+              <a:t>Contents</a:t>
             </a:r>
           </a:p>
         </p:txBody>
@@ -6632,114 +6317,695 @@
                 </a:solidFill>
                 <a:latin typeface="Arial"/>
               </a:rPr>
-              <a:t>14 / 16</a:t>
-            </a:r>
-          </a:p>
-        </p:txBody>
-      </p:sp>
-      <p:sp>
-        <p:nvSpPr>
-          <p:cNvPr id="6" name="TextBox 5"/>
-          <p:cNvSpPr txBox="1"/>
+              <a:t>2 / 14</a:t>
+            </a:r>
+          </a:p>
+        </p:txBody>
+      </p:sp>
+      <p:graphicFrame>
+        <p:nvGraphicFramePr>
+          <p:cNvPr id="6" name="Table 5"/>
+          <p:cNvGraphicFramePr>
+            <a:graphicFrameLocks noGrp="1"/>
+          </p:cNvGraphicFramePr>
           <p:nvPr/>
-        </p:nvSpPr>
-        <p:spPr>
-          <a:xfrm>
-            <a:off x="731520" y="1554480"/>
-            <a:ext cx="10698480" cy="4389120"/>
-          </a:xfrm>
-          <a:prstGeom prst="rect">
-            <a:avLst/>
-          </a:prstGeom>
-          <a:noFill/>
-        </p:spPr>
-        <p:txBody>
-          <a:bodyPr wrap="square" anchor="t" lIns="45720" rIns="45720">
-            <a:spAutoFit/>
-          </a:bodyPr>
-          <a:lstStyle/>
-          <a:p>
-            <a:pPr algn="l">
-              <a:spcAft>
-                <a:spcPts val="1600"/>
-              </a:spcAft>
-            </a:pPr>
-            <a:r>
-              <a:rPr sz="2200" b="0">
-                <a:solidFill>
-                  <a:srgbClr val="000000"/>
-                </a:solidFill>
-                <a:latin typeface="Arial"/>
-              </a:rPr>
-              <a:t>•  A fair comparison of three model families on the same hair fall data.</a:t>
-            </a:r>
-          </a:p>
-          <a:p>
-            <a:pPr algn="l">
-              <a:spcAft>
-                <a:spcPts val="1600"/>
-              </a:spcAft>
-            </a:pPr>
-            <a:r>
-              <a:rPr sz="2200" b="0">
-                <a:solidFill>
-                  <a:srgbClr val="000000"/>
-                </a:solidFill>
-                <a:latin typeface="Arial"/>
-              </a:rPr>
-              <a:t>•  A properly tuned CatBoost as a strong baseline.</a:t>
-            </a:r>
-          </a:p>
-          <a:p>
-            <a:pPr algn="l">
-              <a:spcAft>
-                <a:spcPts val="1600"/>
-              </a:spcAft>
-            </a:pPr>
-            <a:r>
-              <a:rPr sz="2200" b="0">
-                <a:solidFill>
-                  <a:srgbClr val="000000"/>
-                </a:solidFill>
-                <a:latin typeface="Arial"/>
-              </a:rPr>
-              <a:t>•  TabPFN and TabFM competitive without tuning, especially with small training sets (to be tested).</a:t>
-            </a:r>
-          </a:p>
-          <a:p>
-            <a:pPr algn="l">
-              <a:spcAft>
-                <a:spcPts val="1600"/>
-              </a:spcAft>
-            </a:pPr>
-            <a:r>
-              <a:rPr sz="2200" b="0">
-                <a:solidFill>
-                  <a:srgbClr val="000000"/>
-                </a:solidFill>
-                <a:latin typeface="Arial"/>
-              </a:rPr>
-              <a:t>•  The practical limits of TabFM recorded on a real health dataset.</a:t>
-            </a:r>
-          </a:p>
-          <a:p>
-            <a:pPr algn="l">
-              <a:spcAft>
-                <a:spcPts val="1600"/>
-              </a:spcAft>
-            </a:pPr>
-            <a:r>
-              <a:rPr sz="2200" b="0">
-                <a:solidFill>
-                  <a:srgbClr val="000000"/>
-                </a:solidFill>
-                <a:latin typeface="Arial"/>
-              </a:rPr>
-              <a:t>•  SHAP explanations that agree with known causes: iron, stress, family history.</a:t>
-            </a:r>
-          </a:p>
-        </p:txBody>
-      </p:sp>
+        </p:nvGraphicFramePr>
+        <p:xfrm>
+          <a:off x="2011680" y="1554480"/>
+          <a:ext cx="8138160" cy="4160520"/>
+        </p:xfrm>
+        <a:graphic>
+          <a:graphicData uri="http://schemas.openxmlformats.org/drawingml/2006/table">
+            <a:tbl>
+              <a:tblPr firstRow="0" bandRow="0">
+                <a:tableStyleId>{5940675A-B579-460E-94D1-54222C63F5DA}</a:tableStyleId>
+              </a:tblPr>
+              <a:tblGrid>
+                <a:gridCol w="6400800"/>
+                <a:gridCol w="1737360"/>
+              </a:tblGrid>
+              <a:tr h="594360">
+                <a:tc>
+                  <a:txBody>
+                    <a:bodyPr wrap="square"/>
+                    <a:lstStyle/>
+                    <a:p>
+                      <a:r>
+                        <a:rPr sz="2000" b="1">
+                          <a:solidFill>
+                            <a:srgbClr val="000000"/>
+                          </a:solidFill>
+                          <a:latin typeface="Arial"/>
+                        </a:rPr>
+                        <a:t>Topic</a:t>
+                      </a:r>
+                    </a:p>
+                  </a:txBody>
+                  <a:tcPr marL="73152" marR="73152" marT="36576" marB="36576">
+                    <a:solidFill>
+                      <a:srgbClr val="EEEEEE"/>
+                    </a:solidFill>
+                    <a:lnL w="12700" cap="flat" cmpd="sng" algn="ctr">
+                      <a:solidFill>
+                        <a:srgbClr val="000000"/>
+                      </a:solidFill>
+                      <a:prstDash val="solid"/>
+                    </a:lnL>
+                    <a:lnR w="12700" cap="flat" cmpd="sng" algn="ctr">
+                      <a:solidFill>
+                        <a:srgbClr val="000000"/>
+                      </a:solidFill>
+                      <a:prstDash val="solid"/>
+                    </a:lnR>
+                    <a:lnT w="12700" cap="flat" cmpd="sng" algn="ctr">
+                      <a:solidFill>
+                        <a:srgbClr val="000000"/>
+                      </a:solidFill>
+                      <a:prstDash val="solid"/>
+                    </a:lnT>
+                    <a:lnB w="12700" cap="flat" cmpd="sng" algn="ctr">
+                      <a:solidFill>
+                        <a:srgbClr val="000000"/>
+                      </a:solidFill>
+                      <a:prstDash val="solid"/>
+                    </a:lnB>
+                  </a:tcPr>
+                </a:tc>
+                <a:tc>
+                  <a:txBody>
+                    <a:bodyPr wrap="square"/>
+                    <a:lstStyle/>
+                    <a:p>
+                      <a:r>
+                        <a:rPr sz="2000" b="1">
+                          <a:solidFill>
+                            <a:srgbClr val="000000"/>
+                          </a:solidFill>
+                          <a:latin typeface="Arial"/>
+                        </a:rPr>
+                        <a:t>Slides</a:t>
+                      </a:r>
+                    </a:p>
+                  </a:txBody>
+                  <a:tcPr marL="73152" marR="73152" marT="36576" marB="36576">
+                    <a:solidFill>
+                      <a:srgbClr val="EEEEEE"/>
+                    </a:solidFill>
+                    <a:lnL w="12700" cap="flat" cmpd="sng" algn="ctr">
+                      <a:solidFill>
+                        <a:srgbClr val="000000"/>
+                      </a:solidFill>
+                      <a:prstDash val="solid"/>
+                    </a:lnL>
+                    <a:lnR w="12700" cap="flat" cmpd="sng" algn="ctr">
+                      <a:solidFill>
+                        <a:srgbClr val="000000"/>
+                      </a:solidFill>
+                      <a:prstDash val="solid"/>
+                    </a:lnR>
+                    <a:lnT w="12700" cap="flat" cmpd="sng" algn="ctr">
+                      <a:solidFill>
+                        <a:srgbClr val="000000"/>
+                      </a:solidFill>
+                      <a:prstDash val="solid"/>
+                    </a:lnT>
+                    <a:lnB w="12700" cap="flat" cmpd="sng" algn="ctr">
+                      <a:solidFill>
+                        <a:srgbClr val="000000"/>
+                      </a:solidFill>
+                      <a:prstDash val="solid"/>
+                    </a:lnB>
+                  </a:tcPr>
+                </a:tc>
+              </a:tr>
+              <a:tr h="594360">
+                <a:tc>
+                  <a:txBody>
+                    <a:bodyPr wrap="square"/>
+                    <a:lstStyle/>
+                    <a:p>
+                      <a:r>
+                        <a:rPr sz="2000" b="0">
+                          <a:solidFill>
+                            <a:srgbClr val="000000"/>
+                          </a:solidFill>
+                          <a:latin typeface="Arial"/>
+                        </a:rPr>
+                        <a:t>1.  Project at a glance</a:t>
+                      </a:r>
+                    </a:p>
+                  </a:txBody>
+                  <a:tcPr marL="73152" marR="73152" marT="36576" marB="36576">
+                    <a:solidFill>
+                      <a:srgbClr val="FFFFFF"/>
+                    </a:solidFill>
+                    <a:lnL w="12700" cap="flat" cmpd="sng" algn="ctr">
+                      <a:solidFill>
+                        <a:srgbClr val="000000"/>
+                      </a:solidFill>
+                      <a:prstDash val="solid"/>
+                    </a:lnL>
+                    <a:lnR w="12700" cap="flat" cmpd="sng" algn="ctr">
+                      <a:solidFill>
+                        <a:srgbClr val="000000"/>
+                      </a:solidFill>
+                      <a:prstDash val="solid"/>
+                    </a:lnR>
+                    <a:lnT w="12700" cap="flat" cmpd="sng" algn="ctr">
+                      <a:solidFill>
+                        <a:srgbClr val="000000"/>
+                      </a:solidFill>
+                      <a:prstDash val="solid"/>
+                    </a:lnT>
+                    <a:lnB w="12700" cap="flat" cmpd="sng" algn="ctr">
+                      <a:solidFill>
+                        <a:srgbClr val="000000"/>
+                      </a:solidFill>
+                      <a:prstDash val="solid"/>
+                    </a:lnB>
+                  </a:tcPr>
+                </a:tc>
+                <a:tc>
+                  <a:txBody>
+                    <a:bodyPr wrap="square"/>
+                    <a:lstStyle/>
+                    <a:p>
+                      <a:r>
+                        <a:rPr sz="2000" b="0">
+                          <a:solidFill>
+                            <a:srgbClr val="000000"/>
+                          </a:solidFill>
+                          <a:latin typeface="Arial"/>
+                        </a:rPr>
+                        <a:t>3</a:t>
+                      </a:r>
+                    </a:p>
+                  </a:txBody>
+                  <a:tcPr marL="73152" marR="73152" marT="36576" marB="36576">
+                    <a:solidFill>
+                      <a:srgbClr val="FFFFFF"/>
+                    </a:solidFill>
+                    <a:lnL w="12700" cap="flat" cmpd="sng" algn="ctr">
+                      <a:solidFill>
+                        <a:srgbClr val="000000"/>
+                      </a:solidFill>
+                      <a:prstDash val="solid"/>
+                    </a:lnL>
+                    <a:lnR w="12700" cap="flat" cmpd="sng" algn="ctr">
+                      <a:solidFill>
+                        <a:srgbClr val="000000"/>
+                      </a:solidFill>
+                      <a:prstDash val="solid"/>
+                    </a:lnR>
+                    <a:lnT w="12700" cap="flat" cmpd="sng" algn="ctr">
+                      <a:solidFill>
+                        <a:srgbClr val="000000"/>
+                      </a:solidFill>
+                      <a:prstDash val="solid"/>
+                    </a:lnT>
+                    <a:lnB w="12700" cap="flat" cmpd="sng" algn="ctr">
+                      <a:solidFill>
+                        <a:srgbClr val="000000"/>
+                      </a:solidFill>
+                      <a:prstDash val="solid"/>
+                    </a:lnB>
+                  </a:tcPr>
+                </a:tc>
+              </a:tr>
+              <a:tr h="594360">
+                <a:tc>
+                  <a:txBody>
+                    <a:bodyPr wrap="square"/>
+                    <a:lstStyle/>
+                    <a:p>
+                      <a:r>
+                        <a:rPr sz="2000" b="0">
+                          <a:solidFill>
+                            <a:srgbClr val="000000"/>
+                          </a:solidFill>
+                          <a:latin typeface="Arial"/>
+                        </a:rPr>
+                        <a:t>2.  Problem and objectives</a:t>
+                      </a:r>
+                    </a:p>
+                  </a:txBody>
+                  <a:tcPr marL="73152" marR="73152" marT="36576" marB="36576">
+                    <a:solidFill>
+                      <a:srgbClr val="FFFFFF"/>
+                    </a:solidFill>
+                    <a:lnL w="12700" cap="flat" cmpd="sng" algn="ctr">
+                      <a:solidFill>
+                        <a:srgbClr val="000000"/>
+                      </a:solidFill>
+                      <a:prstDash val="solid"/>
+                    </a:lnL>
+                    <a:lnR w="12700" cap="flat" cmpd="sng" algn="ctr">
+                      <a:solidFill>
+                        <a:srgbClr val="000000"/>
+                      </a:solidFill>
+                      <a:prstDash val="solid"/>
+                    </a:lnR>
+                    <a:lnT w="12700" cap="flat" cmpd="sng" algn="ctr">
+                      <a:solidFill>
+                        <a:srgbClr val="000000"/>
+                      </a:solidFill>
+                      <a:prstDash val="solid"/>
+                    </a:lnT>
+                    <a:lnB w="12700" cap="flat" cmpd="sng" algn="ctr">
+                      <a:solidFill>
+                        <a:srgbClr val="000000"/>
+                      </a:solidFill>
+                      <a:prstDash val="solid"/>
+                    </a:lnB>
+                  </a:tcPr>
+                </a:tc>
+                <a:tc>
+                  <a:txBody>
+                    <a:bodyPr wrap="square"/>
+                    <a:lstStyle/>
+                    <a:p>
+                      <a:r>
+                        <a:rPr sz="2000" b="0">
+                          <a:solidFill>
+                            <a:srgbClr val="000000"/>
+                          </a:solidFill>
+                          <a:latin typeface="Arial"/>
+                        </a:rPr>
+                        <a:t>4 - 5</a:t>
+                      </a:r>
+                    </a:p>
+                  </a:txBody>
+                  <a:tcPr marL="73152" marR="73152" marT="36576" marB="36576">
+                    <a:solidFill>
+                      <a:srgbClr val="FFFFFF"/>
+                    </a:solidFill>
+                    <a:lnL w="12700" cap="flat" cmpd="sng" algn="ctr">
+                      <a:solidFill>
+                        <a:srgbClr val="000000"/>
+                      </a:solidFill>
+                      <a:prstDash val="solid"/>
+                    </a:lnL>
+                    <a:lnR w="12700" cap="flat" cmpd="sng" algn="ctr">
+                      <a:solidFill>
+                        <a:srgbClr val="000000"/>
+                      </a:solidFill>
+                      <a:prstDash val="solid"/>
+                    </a:lnR>
+                    <a:lnT w="12700" cap="flat" cmpd="sng" algn="ctr">
+                      <a:solidFill>
+                        <a:srgbClr val="000000"/>
+                      </a:solidFill>
+                      <a:prstDash val="solid"/>
+                    </a:lnT>
+                    <a:lnB w="12700" cap="flat" cmpd="sng" algn="ctr">
+                      <a:solidFill>
+                        <a:srgbClr val="000000"/>
+                      </a:solidFill>
+                      <a:prstDash val="solid"/>
+                    </a:lnB>
+                  </a:tcPr>
+                </a:tc>
+              </a:tr>
+              <a:tr h="594360">
+                <a:tc>
+                  <a:txBody>
+                    <a:bodyPr wrap="square"/>
+                    <a:lstStyle/>
+                    <a:p>
+                      <a:r>
+                        <a:rPr sz="2000" b="0">
+                          <a:solidFill>
+                            <a:srgbClr val="000000"/>
+                          </a:solidFill>
+                          <a:latin typeface="Arial"/>
+                        </a:rPr>
+                        <a:t>3.  Background and literature</a:t>
+                      </a:r>
+                    </a:p>
+                  </a:txBody>
+                  <a:tcPr marL="73152" marR="73152" marT="36576" marB="36576">
+                    <a:solidFill>
+                      <a:srgbClr val="FFFFFF"/>
+                    </a:solidFill>
+                    <a:lnL w="12700" cap="flat" cmpd="sng" algn="ctr">
+                      <a:solidFill>
+                        <a:srgbClr val="000000"/>
+                      </a:solidFill>
+                      <a:prstDash val="solid"/>
+                    </a:lnL>
+                    <a:lnR w="12700" cap="flat" cmpd="sng" algn="ctr">
+                      <a:solidFill>
+                        <a:srgbClr val="000000"/>
+                      </a:solidFill>
+                      <a:prstDash val="solid"/>
+                    </a:lnR>
+                    <a:lnT w="12700" cap="flat" cmpd="sng" algn="ctr">
+                      <a:solidFill>
+                        <a:srgbClr val="000000"/>
+                      </a:solidFill>
+                      <a:prstDash val="solid"/>
+                    </a:lnT>
+                    <a:lnB w="12700" cap="flat" cmpd="sng" algn="ctr">
+                      <a:solidFill>
+                        <a:srgbClr val="000000"/>
+                      </a:solidFill>
+                      <a:prstDash val="solid"/>
+                    </a:lnB>
+                  </a:tcPr>
+                </a:tc>
+                <a:tc>
+                  <a:txBody>
+                    <a:bodyPr wrap="square"/>
+                    <a:lstStyle/>
+                    <a:p>
+                      <a:r>
+                        <a:rPr sz="2000" b="0">
+                          <a:solidFill>
+                            <a:srgbClr val="000000"/>
+                          </a:solidFill>
+                          <a:latin typeface="Arial"/>
+                        </a:rPr>
+                        <a:t>6 - 8</a:t>
+                      </a:r>
+                    </a:p>
+                  </a:txBody>
+                  <a:tcPr marL="73152" marR="73152" marT="36576" marB="36576">
+                    <a:solidFill>
+                      <a:srgbClr val="FFFFFF"/>
+                    </a:solidFill>
+                    <a:lnL w="12700" cap="flat" cmpd="sng" algn="ctr">
+                      <a:solidFill>
+                        <a:srgbClr val="000000"/>
+                      </a:solidFill>
+                      <a:prstDash val="solid"/>
+                    </a:lnL>
+                    <a:lnR w="12700" cap="flat" cmpd="sng" algn="ctr">
+                      <a:solidFill>
+                        <a:srgbClr val="000000"/>
+                      </a:solidFill>
+                      <a:prstDash val="solid"/>
+                    </a:lnR>
+                    <a:lnT w="12700" cap="flat" cmpd="sng" algn="ctr">
+                      <a:solidFill>
+                        <a:srgbClr val="000000"/>
+                      </a:solidFill>
+                      <a:prstDash val="solid"/>
+                    </a:lnT>
+                    <a:lnB w="12700" cap="flat" cmpd="sng" algn="ctr">
+                      <a:solidFill>
+                        <a:srgbClr val="000000"/>
+                      </a:solidFill>
+                      <a:prstDash val="solid"/>
+                    </a:lnB>
+                  </a:tcPr>
+                </a:tc>
+              </a:tr>
+              <a:tr h="594360">
+                <a:tc>
+                  <a:txBody>
+                    <a:bodyPr wrap="square"/>
+                    <a:lstStyle/>
+                    <a:p>
+                      <a:r>
+                        <a:rPr sz="2000" b="0">
+                          <a:solidFill>
+                            <a:srgbClr val="000000"/>
+                          </a:solidFill>
+                          <a:latin typeface="Arial"/>
+                        </a:rPr>
+                        <a:t>4.  Research gap</a:t>
+                      </a:r>
+                    </a:p>
+                  </a:txBody>
+                  <a:tcPr marL="73152" marR="73152" marT="36576" marB="36576">
+                    <a:solidFill>
+                      <a:srgbClr val="FFFFFF"/>
+                    </a:solidFill>
+                    <a:lnL w="12700" cap="flat" cmpd="sng" algn="ctr">
+                      <a:solidFill>
+                        <a:srgbClr val="000000"/>
+                      </a:solidFill>
+                      <a:prstDash val="solid"/>
+                    </a:lnL>
+                    <a:lnR w="12700" cap="flat" cmpd="sng" algn="ctr">
+                      <a:solidFill>
+                        <a:srgbClr val="000000"/>
+                      </a:solidFill>
+                      <a:prstDash val="solid"/>
+                    </a:lnR>
+                    <a:lnT w="12700" cap="flat" cmpd="sng" algn="ctr">
+                      <a:solidFill>
+                        <a:srgbClr val="000000"/>
+                      </a:solidFill>
+                      <a:prstDash val="solid"/>
+                    </a:lnT>
+                    <a:lnB w="12700" cap="flat" cmpd="sng" algn="ctr">
+                      <a:solidFill>
+                        <a:srgbClr val="000000"/>
+                      </a:solidFill>
+                      <a:prstDash val="solid"/>
+                    </a:lnB>
+                  </a:tcPr>
+                </a:tc>
+                <a:tc>
+                  <a:txBody>
+                    <a:bodyPr wrap="square"/>
+                    <a:lstStyle/>
+                    <a:p>
+                      <a:r>
+                        <a:rPr sz="2000" b="0">
+                          <a:solidFill>
+                            <a:srgbClr val="000000"/>
+                          </a:solidFill>
+                          <a:latin typeface="Arial"/>
+                        </a:rPr>
+                        <a:t>9</a:t>
+                      </a:r>
+                    </a:p>
+                  </a:txBody>
+                  <a:tcPr marL="73152" marR="73152" marT="36576" marB="36576">
+                    <a:solidFill>
+                      <a:srgbClr val="FFFFFF"/>
+                    </a:solidFill>
+                    <a:lnL w="12700" cap="flat" cmpd="sng" algn="ctr">
+                      <a:solidFill>
+                        <a:srgbClr val="000000"/>
+                      </a:solidFill>
+                      <a:prstDash val="solid"/>
+                    </a:lnL>
+                    <a:lnR w="12700" cap="flat" cmpd="sng" algn="ctr">
+                      <a:solidFill>
+                        <a:srgbClr val="000000"/>
+                      </a:solidFill>
+                      <a:prstDash val="solid"/>
+                    </a:lnR>
+                    <a:lnT w="12700" cap="flat" cmpd="sng" algn="ctr">
+                      <a:solidFill>
+                        <a:srgbClr val="000000"/>
+                      </a:solidFill>
+                      <a:prstDash val="solid"/>
+                    </a:lnT>
+                    <a:lnB w="12700" cap="flat" cmpd="sng" algn="ctr">
+                      <a:solidFill>
+                        <a:srgbClr val="000000"/>
+                      </a:solidFill>
+                      <a:prstDash val="solid"/>
+                    </a:lnB>
+                  </a:tcPr>
+                </a:tc>
+              </a:tr>
+              <a:tr h="594360">
+                <a:tc>
+                  <a:txBody>
+                    <a:bodyPr wrap="square"/>
+                    <a:lstStyle/>
+                    <a:p>
+                      <a:r>
+                        <a:rPr sz="2000" b="0">
+                          <a:solidFill>
+                            <a:srgbClr val="000000"/>
+                          </a:solidFill>
+                          <a:latin typeface="Arial"/>
+                        </a:rPr>
+                        <a:t>5.  Data and methods</a:t>
+                      </a:r>
+                    </a:p>
+                  </a:txBody>
+                  <a:tcPr marL="73152" marR="73152" marT="36576" marB="36576">
+                    <a:solidFill>
+                      <a:srgbClr val="FFFFFF"/>
+                    </a:solidFill>
+                    <a:lnL w="12700" cap="flat" cmpd="sng" algn="ctr">
+                      <a:solidFill>
+                        <a:srgbClr val="000000"/>
+                      </a:solidFill>
+                      <a:prstDash val="solid"/>
+                    </a:lnL>
+                    <a:lnR w="12700" cap="flat" cmpd="sng" algn="ctr">
+                      <a:solidFill>
+                        <a:srgbClr val="000000"/>
+                      </a:solidFill>
+                      <a:prstDash val="solid"/>
+                    </a:lnR>
+                    <a:lnT w="12700" cap="flat" cmpd="sng" algn="ctr">
+                      <a:solidFill>
+                        <a:srgbClr val="000000"/>
+                      </a:solidFill>
+                      <a:prstDash val="solid"/>
+                    </a:lnT>
+                    <a:lnB w="12700" cap="flat" cmpd="sng" algn="ctr">
+                      <a:solidFill>
+                        <a:srgbClr val="000000"/>
+                      </a:solidFill>
+                      <a:prstDash val="solid"/>
+                    </a:lnB>
+                  </a:tcPr>
+                </a:tc>
+                <a:tc>
+                  <a:txBody>
+                    <a:bodyPr wrap="square"/>
+                    <a:lstStyle/>
+                    <a:p>
+                      <a:r>
+                        <a:rPr sz="2000" b="0">
+                          <a:solidFill>
+                            <a:srgbClr val="000000"/>
+                          </a:solidFill>
+                          <a:latin typeface="Arial"/>
+                        </a:rPr>
+                        <a:t>10 - 12</a:t>
+                      </a:r>
+                    </a:p>
+                  </a:txBody>
+                  <a:tcPr marL="73152" marR="73152" marT="36576" marB="36576">
+                    <a:solidFill>
+                      <a:srgbClr val="FFFFFF"/>
+                    </a:solidFill>
+                    <a:lnL w="12700" cap="flat" cmpd="sng" algn="ctr">
+                      <a:solidFill>
+                        <a:srgbClr val="000000"/>
+                      </a:solidFill>
+                      <a:prstDash val="solid"/>
+                    </a:lnL>
+                    <a:lnR w="12700" cap="flat" cmpd="sng" algn="ctr">
+                      <a:solidFill>
+                        <a:srgbClr val="000000"/>
+                      </a:solidFill>
+                      <a:prstDash val="solid"/>
+                    </a:lnR>
+                    <a:lnT w="12700" cap="flat" cmpd="sng" algn="ctr">
+                      <a:solidFill>
+                        <a:srgbClr val="000000"/>
+                      </a:solidFill>
+                      <a:prstDash val="solid"/>
+                    </a:lnT>
+                    <a:lnB w="12700" cap="flat" cmpd="sng" algn="ctr">
+                      <a:solidFill>
+                        <a:srgbClr val="000000"/>
+                      </a:solidFill>
+                      <a:prstDash val="solid"/>
+                    </a:lnB>
+                  </a:tcPr>
+                </a:tc>
+              </a:tr>
+              <a:tr h="594360">
+                <a:tc>
+                  <a:txBody>
+                    <a:bodyPr wrap="square"/>
+                    <a:lstStyle/>
+                    <a:p>
+                      <a:r>
+                        <a:rPr sz="2000" b="0">
+                          <a:solidFill>
+                            <a:srgbClr val="000000"/>
+                          </a:solidFill>
+                          <a:latin typeface="Arial"/>
+                        </a:rPr>
+                        <a:t>6.  Expected outcomes</a:t>
+                      </a:r>
+                    </a:p>
+                  </a:txBody>
+                  <a:tcPr marL="73152" marR="73152" marT="36576" marB="36576">
+                    <a:solidFill>
+                      <a:srgbClr val="FFFFFF"/>
+                    </a:solidFill>
+                    <a:lnL w="12700" cap="flat" cmpd="sng" algn="ctr">
+                      <a:solidFill>
+                        <a:srgbClr val="000000"/>
+                      </a:solidFill>
+                      <a:prstDash val="solid"/>
+                    </a:lnL>
+                    <a:lnR w="12700" cap="flat" cmpd="sng" algn="ctr">
+                      <a:solidFill>
+                        <a:srgbClr val="000000"/>
+                      </a:solidFill>
+                      <a:prstDash val="solid"/>
+                    </a:lnR>
+                    <a:lnT w="12700" cap="flat" cmpd="sng" algn="ctr">
+                      <a:solidFill>
+                        <a:srgbClr val="000000"/>
+                      </a:solidFill>
+                      <a:prstDash val="solid"/>
+                    </a:lnT>
+                    <a:lnB w="12700" cap="flat" cmpd="sng" algn="ctr">
+                      <a:solidFill>
+                        <a:srgbClr val="000000"/>
+                      </a:solidFill>
+                      <a:prstDash val="solid"/>
+                    </a:lnB>
+                  </a:tcPr>
+                </a:tc>
+                <a:tc>
+                  <a:txBody>
+                    <a:bodyPr wrap="square"/>
+                    <a:lstStyle/>
+                    <a:p>
+                      <a:r>
+                        <a:rPr sz="2000" b="0">
+                          <a:solidFill>
+                            <a:srgbClr val="000000"/>
+                          </a:solidFill>
+                          <a:latin typeface="Arial"/>
+                        </a:rPr>
+                        <a:t>13</a:t>
+                      </a:r>
+                    </a:p>
+                  </a:txBody>
+                  <a:tcPr marL="73152" marR="73152" marT="36576" marB="36576">
+                    <a:solidFill>
+                      <a:srgbClr val="FFFFFF"/>
+                    </a:solidFill>
+                    <a:lnL w="12700" cap="flat" cmpd="sng" algn="ctr">
+                      <a:solidFill>
+                        <a:srgbClr val="000000"/>
+                      </a:solidFill>
+                      <a:prstDash val="solid"/>
+                    </a:lnL>
+                    <a:lnR w="12700" cap="flat" cmpd="sng" algn="ctr">
+                      <a:solidFill>
+                        <a:srgbClr val="000000"/>
+                      </a:solidFill>
+                      <a:prstDash val="solid"/>
+                    </a:lnR>
+                    <a:lnT w="12700" cap="flat" cmpd="sng" algn="ctr">
+                      <a:solidFill>
+                        <a:srgbClr val="000000"/>
+                      </a:solidFill>
+                      <a:prstDash val="solid"/>
+                    </a:lnT>
+                    <a:lnB w="12700" cap="flat" cmpd="sng" algn="ctr">
+                      <a:solidFill>
+                        <a:srgbClr val="000000"/>
+                      </a:solidFill>
+                      <a:prstDash val="solid"/>
+                    </a:lnB>
+                  </a:tcPr>
+                </a:tc>
+              </a:tr>
+            </a:tbl>
+          </a:graphicData>
+        </a:graphic>
+      </p:graphicFrame>
     </p:spTree>
   </p:cSld>
   <p:clrMapOvr>
@@ -6748,7 +7014,7 @@
 </p:sld>
 </file>
 
-<file path=ppt/slides/slide15.xml><?xml version="1.0" encoding="utf-8"?>
+<file path=ppt/slides/slide3.xml><?xml version="1.0" encoding="utf-8"?>
 <p:sld xmlns:a="http://schemas.openxmlformats.org/drawingml/2006/main" xmlns:p="http://schemas.openxmlformats.org/presentationml/2006/main" xmlns:r="http://schemas.openxmlformats.org/officeDocument/2006/relationships">
   <p:cSld>
     <p:spTree>
@@ -6792,7 +7058,7 @@
                 </a:solidFill>
                 <a:latin typeface="Arial"/>
               </a:rPr>
-              <a:t>Schedule: 4 months</a:t>
+              <a:t>Project at a glance</a:t>
             </a:r>
           </a:p>
         </p:txBody>
@@ -6905,35 +7171,507 @@
                 </a:solidFill>
                 <a:latin typeface="Arial"/>
               </a:rPr>
-              <a:t>15 / 16</a:t>
-            </a:r>
-          </a:p>
-        </p:txBody>
-      </p:sp>
-      <p:pic>
-        <p:nvPicPr>
-          <p:cNvPr id="6" name="Picture 5" descr="fig_4_1_gantt.png"/>
-          <p:cNvPicPr>
-            <a:picLocks noChangeAspect="1"/>
-          </p:cNvPicPr>
+              <a:t>3 / 14</a:t>
+            </a:r>
+          </a:p>
+        </p:txBody>
+      </p:sp>
+      <p:graphicFrame>
+        <p:nvGraphicFramePr>
+          <p:cNvPr id="6" name="Table 5"/>
+          <p:cNvGraphicFramePr>
+            <a:graphicFrameLocks noGrp="1"/>
+          </p:cNvGraphicFramePr>
           <p:nvPr/>
-        </p:nvPicPr>
-        <p:blipFill>
-          <a:blip r:embed="rId3"/>
-          <a:stretch>
-            <a:fillRect/>
-          </a:stretch>
-        </p:blipFill>
-        <p:spPr>
-          <a:xfrm>
-            <a:off x="2377440" y="1280160"/>
-            <a:ext cx="7200213" cy="4937760"/>
-          </a:xfrm>
-          <a:prstGeom prst="rect">
-            <a:avLst/>
-          </a:prstGeom>
-        </p:spPr>
-      </p:pic>
+        </p:nvGraphicFramePr>
+        <p:xfrm>
+          <a:off x="594360" y="1554480"/>
+          <a:ext cx="10972800" cy="3886200"/>
+        </p:xfrm>
+        <a:graphic>
+          <a:graphicData uri="http://schemas.openxmlformats.org/drawingml/2006/table">
+            <a:tbl>
+              <a:tblPr firstRow="0" bandRow="0">
+                <a:tableStyleId>{5940675A-B579-460E-94D1-54222C63F5DA}</a:tableStyleId>
+              </a:tblPr>
+              <a:tblGrid>
+                <a:gridCol w="2377440"/>
+                <a:gridCol w="8595360"/>
+              </a:tblGrid>
+              <a:tr h="777240">
+                <a:tc>
+                  <a:txBody>
+                    <a:bodyPr wrap="square"/>
+                    <a:lstStyle/>
+                    <a:p>
+                      <a:r>
+                        <a:rPr sz="1800" b="1">
+                          <a:solidFill>
+                            <a:srgbClr val="000000"/>
+                          </a:solidFill>
+                          <a:latin typeface="Arial"/>
+                        </a:rPr>
+                        <a:t>Problem</a:t>
+                      </a:r>
+                    </a:p>
+                  </a:txBody>
+                  <a:tcPr marL="73152" marR="73152" marT="36576" marB="36576">
+                    <a:solidFill>
+                      <a:srgbClr val="FFFFFF"/>
+                    </a:solidFill>
+                    <a:lnL w="12700" cap="flat" cmpd="sng" algn="ctr">
+                      <a:solidFill>
+                        <a:srgbClr val="000000"/>
+                      </a:solidFill>
+                      <a:prstDash val="solid"/>
+                    </a:lnL>
+                    <a:lnR w="12700" cap="flat" cmpd="sng" algn="ctr">
+                      <a:solidFill>
+                        <a:srgbClr val="000000"/>
+                      </a:solidFill>
+                      <a:prstDash val="solid"/>
+                    </a:lnR>
+                    <a:lnT w="12700" cap="flat" cmpd="sng" algn="ctr">
+                      <a:solidFill>
+                        <a:srgbClr val="000000"/>
+                      </a:solidFill>
+                      <a:prstDash val="solid"/>
+                    </a:lnT>
+                    <a:lnB w="12700" cap="flat" cmpd="sng" algn="ctr">
+                      <a:solidFill>
+                        <a:srgbClr val="000000"/>
+                      </a:solidFill>
+                      <a:prstDash val="solid"/>
+                    </a:lnB>
+                  </a:tcPr>
+                </a:tc>
+                <a:tc>
+                  <a:txBody>
+                    <a:bodyPr wrap="square"/>
+                    <a:lstStyle/>
+                    <a:p>
+                      <a:r>
+                        <a:rPr sz="1800" b="0">
+                          <a:solidFill>
+                            <a:srgbClr val="000000"/>
+                          </a:solidFill>
+                          <a:latin typeface="Arial"/>
+                        </a:rPr>
+                        <a:t>Hair fall risk is hard to judge, and prediction models are hard to explain.</a:t>
+                      </a:r>
+                    </a:p>
+                  </a:txBody>
+                  <a:tcPr marL="73152" marR="73152" marT="36576" marB="36576">
+                    <a:solidFill>
+                      <a:srgbClr val="FFFFFF"/>
+                    </a:solidFill>
+                    <a:lnL w="12700" cap="flat" cmpd="sng" algn="ctr">
+                      <a:solidFill>
+                        <a:srgbClr val="000000"/>
+                      </a:solidFill>
+                      <a:prstDash val="solid"/>
+                    </a:lnL>
+                    <a:lnR w="12700" cap="flat" cmpd="sng" algn="ctr">
+                      <a:solidFill>
+                        <a:srgbClr val="000000"/>
+                      </a:solidFill>
+                      <a:prstDash val="solid"/>
+                    </a:lnR>
+                    <a:lnT w="12700" cap="flat" cmpd="sng" algn="ctr">
+                      <a:solidFill>
+                        <a:srgbClr val="000000"/>
+                      </a:solidFill>
+                      <a:prstDash val="solid"/>
+                    </a:lnT>
+                    <a:lnB w="12700" cap="flat" cmpd="sng" algn="ctr">
+                      <a:solidFill>
+                        <a:srgbClr val="000000"/>
+                      </a:solidFill>
+                      <a:prstDash val="solid"/>
+                    </a:lnB>
+                  </a:tcPr>
+                </a:tc>
+              </a:tr>
+              <a:tr h="777240">
+                <a:tc>
+                  <a:txBody>
+                    <a:bodyPr wrap="square"/>
+                    <a:lstStyle/>
+                    <a:p>
+                      <a:r>
+                        <a:rPr sz="1800" b="1">
+                          <a:solidFill>
+                            <a:srgbClr val="000000"/>
+                          </a:solidFill>
+                          <a:latin typeface="Arial"/>
+                        </a:rPr>
+                        <a:t>Objectives</a:t>
+                      </a:r>
+                    </a:p>
+                  </a:txBody>
+                  <a:tcPr marL="73152" marR="73152" marT="36576" marB="36576">
+                    <a:solidFill>
+                      <a:srgbClr val="FFFFFF"/>
+                    </a:solidFill>
+                    <a:lnL w="12700" cap="flat" cmpd="sng" algn="ctr">
+                      <a:solidFill>
+                        <a:srgbClr val="000000"/>
+                      </a:solidFill>
+                      <a:prstDash val="solid"/>
+                    </a:lnL>
+                    <a:lnR w="12700" cap="flat" cmpd="sng" algn="ctr">
+                      <a:solidFill>
+                        <a:srgbClr val="000000"/>
+                      </a:solidFill>
+                      <a:prstDash val="solid"/>
+                    </a:lnR>
+                    <a:lnT w="12700" cap="flat" cmpd="sng" algn="ctr">
+                      <a:solidFill>
+                        <a:srgbClr val="000000"/>
+                      </a:solidFill>
+                      <a:prstDash val="solid"/>
+                    </a:lnT>
+                    <a:lnB w="12700" cap="flat" cmpd="sng" algn="ctr">
+                      <a:solidFill>
+                        <a:srgbClr val="000000"/>
+                      </a:solidFill>
+                      <a:prstDash val="solid"/>
+                    </a:lnB>
+                  </a:tcPr>
+                </a:tc>
+                <a:tc>
+                  <a:txBody>
+                    <a:bodyPr wrap="square"/>
+                    <a:lstStyle/>
+                    <a:p>
+                      <a:r>
+                        <a:rPr sz="1800" b="0">
+                          <a:solidFill>
+                            <a:srgbClr val="000000"/>
+                          </a:solidFill>
+                          <a:latin typeface="Arial"/>
+                        </a:rPr>
+                        <a:t>Benchmark CatBoost, TabPFN, and TabFM, and explain every model with SHAP.</a:t>
+                      </a:r>
+                    </a:p>
+                  </a:txBody>
+                  <a:tcPr marL="73152" marR="73152" marT="36576" marB="36576">
+                    <a:solidFill>
+                      <a:srgbClr val="FFFFFF"/>
+                    </a:solidFill>
+                    <a:lnL w="12700" cap="flat" cmpd="sng" algn="ctr">
+                      <a:solidFill>
+                        <a:srgbClr val="000000"/>
+                      </a:solidFill>
+                      <a:prstDash val="solid"/>
+                    </a:lnL>
+                    <a:lnR w="12700" cap="flat" cmpd="sng" algn="ctr">
+                      <a:solidFill>
+                        <a:srgbClr val="000000"/>
+                      </a:solidFill>
+                      <a:prstDash val="solid"/>
+                    </a:lnR>
+                    <a:lnT w="12700" cap="flat" cmpd="sng" algn="ctr">
+                      <a:solidFill>
+                        <a:srgbClr val="000000"/>
+                      </a:solidFill>
+                      <a:prstDash val="solid"/>
+                    </a:lnT>
+                    <a:lnB w="12700" cap="flat" cmpd="sng" algn="ctr">
+                      <a:solidFill>
+                        <a:srgbClr val="000000"/>
+                      </a:solidFill>
+                      <a:prstDash val="solid"/>
+                    </a:lnB>
+                  </a:tcPr>
+                </a:tc>
+              </a:tr>
+              <a:tr h="777240">
+                <a:tc>
+                  <a:txBody>
+                    <a:bodyPr wrap="square"/>
+                    <a:lstStyle/>
+                    <a:p>
+                      <a:r>
+                        <a:rPr sz="1800" b="1">
+                          <a:solidFill>
+                            <a:srgbClr val="000000"/>
+                          </a:solidFill>
+                          <a:latin typeface="Arial"/>
+                        </a:rPr>
+                        <a:t>Research gap</a:t>
+                      </a:r>
+                    </a:p>
+                  </a:txBody>
+                  <a:tcPr marL="73152" marR="73152" marT="36576" marB="36576">
+                    <a:solidFill>
+                      <a:srgbClr val="FFFFFF"/>
+                    </a:solidFill>
+                    <a:lnL w="12700" cap="flat" cmpd="sng" algn="ctr">
+                      <a:solidFill>
+                        <a:srgbClr val="000000"/>
+                      </a:solidFill>
+                      <a:prstDash val="solid"/>
+                    </a:lnL>
+                    <a:lnR w="12700" cap="flat" cmpd="sng" algn="ctr">
+                      <a:solidFill>
+                        <a:srgbClr val="000000"/>
+                      </a:solidFill>
+                      <a:prstDash val="solid"/>
+                    </a:lnR>
+                    <a:lnT w="12700" cap="flat" cmpd="sng" algn="ctr">
+                      <a:solidFill>
+                        <a:srgbClr val="000000"/>
+                      </a:solidFill>
+                      <a:prstDash val="solid"/>
+                    </a:lnT>
+                    <a:lnB w="12700" cap="flat" cmpd="sng" algn="ctr">
+                      <a:solidFill>
+                        <a:srgbClr val="000000"/>
+                      </a:solidFill>
+                      <a:prstDash val="solid"/>
+                    </a:lnB>
+                  </a:tcPr>
+                </a:tc>
+                <a:tc>
+                  <a:txBody>
+                    <a:bodyPr wrap="square"/>
+                    <a:lstStyle/>
+                    <a:p>
+                      <a:r>
+                        <a:rPr sz="1800" b="0">
+                          <a:solidFill>
+                            <a:srgbClr val="000000"/>
+                          </a:solidFill>
+                          <a:latin typeface="Arial"/>
+                        </a:rPr>
+                        <a:t>Foundation models were never tested on hair fall data, and CatBoost was never tuned.</a:t>
+                      </a:r>
+                    </a:p>
+                  </a:txBody>
+                  <a:tcPr marL="73152" marR="73152" marT="36576" marB="36576">
+                    <a:solidFill>
+                      <a:srgbClr val="FFFFFF"/>
+                    </a:solidFill>
+                    <a:lnL w="12700" cap="flat" cmpd="sng" algn="ctr">
+                      <a:solidFill>
+                        <a:srgbClr val="000000"/>
+                      </a:solidFill>
+                      <a:prstDash val="solid"/>
+                    </a:lnL>
+                    <a:lnR w="12700" cap="flat" cmpd="sng" algn="ctr">
+                      <a:solidFill>
+                        <a:srgbClr val="000000"/>
+                      </a:solidFill>
+                      <a:prstDash val="solid"/>
+                    </a:lnR>
+                    <a:lnT w="12700" cap="flat" cmpd="sng" algn="ctr">
+                      <a:solidFill>
+                        <a:srgbClr val="000000"/>
+                      </a:solidFill>
+                      <a:prstDash val="solid"/>
+                    </a:lnT>
+                    <a:lnB w="12700" cap="flat" cmpd="sng" algn="ctr">
+                      <a:solidFill>
+                        <a:srgbClr val="000000"/>
+                      </a:solidFill>
+                      <a:prstDash val="solid"/>
+                    </a:lnB>
+                  </a:tcPr>
+                </a:tc>
+              </a:tr>
+              <a:tr h="777240">
+                <a:tc>
+                  <a:txBody>
+                    <a:bodyPr wrap="square"/>
+                    <a:lstStyle/>
+                    <a:p>
+                      <a:r>
+                        <a:rPr sz="1800" b="1">
+                          <a:solidFill>
+                            <a:srgbClr val="000000"/>
+                          </a:solidFill>
+                          <a:latin typeface="Arial"/>
+                        </a:rPr>
+                        <a:t>Data and method</a:t>
+                      </a:r>
+                    </a:p>
+                  </a:txBody>
+                  <a:tcPr marL="73152" marR="73152" marT="36576" marB="36576">
+                    <a:solidFill>
+                      <a:srgbClr val="FFFFFF"/>
+                    </a:solidFill>
+                    <a:lnL w="12700" cap="flat" cmpd="sng" algn="ctr">
+                      <a:solidFill>
+                        <a:srgbClr val="000000"/>
+                      </a:solidFill>
+                      <a:prstDash val="solid"/>
+                    </a:lnL>
+                    <a:lnR w="12700" cap="flat" cmpd="sng" algn="ctr">
+                      <a:solidFill>
+                        <a:srgbClr val="000000"/>
+                      </a:solidFill>
+                      <a:prstDash val="solid"/>
+                    </a:lnR>
+                    <a:lnT w="12700" cap="flat" cmpd="sng" algn="ctr">
+                      <a:solidFill>
+                        <a:srgbClr val="000000"/>
+                      </a:solidFill>
+                      <a:prstDash val="solid"/>
+                    </a:lnT>
+                    <a:lnB w="12700" cap="flat" cmpd="sng" algn="ctr">
+                      <a:solidFill>
+                        <a:srgbClr val="000000"/>
+                      </a:solidFill>
+                      <a:prstDash val="solid"/>
+                    </a:lnB>
+                  </a:tcPr>
+                </a:tc>
+                <a:tc>
+                  <a:txBody>
+                    <a:bodyPr wrap="square"/>
+                    <a:lstStyle/>
+                    <a:p>
+                      <a:r>
+                        <a:rPr sz="1800" b="0">
+                          <a:solidFill>
+                            <a:srgbClr val="000000"/>
+                          </a:solidFill>
+                          <a:latin typeface="Arial"/>
+                        </a:rPr>
+                        <a:t>21,606 records, 3 risk tiers; same split for all models; accuracy, macro-F1, ROC-AUC.</a:t>
+                      </a:r>
+                    </a:p>
+                  </a:txBody>
+                  <a:tcPr marL="73152" marR="73152" marT="36576" marB="36576">
+                    <a:solidFill>
+                      <a:srgbClr val="FFFFFF"/>
+                    </a:solidFill>
+                    <a:lnL w="12700" cap="flat" cmpd="sng" algn="ctr">
+                      <a:solidFill>
+                        <a:srgbClr val="000000"/>
+                      </a:solidFill>
+                      <a:prstDash val="solid"/>
+                    </a:lnL>
+                    <a:lnR w="12700" cap="flat" cmpd="sng" algn="ctr">
+                      <a:solidFill>
+                        <a:srgbClr val="000000"/>
+                      </a:solidFill>
+                      <a:prstDash val="solid"/>
+                    </a:lnR>
+                    <a:lnT w="12700" cap="flat" cmpd="sng" algn="ctr">
+                      <a:solidFill>
+                        <a:srgbClr val="000000"/>
+                      </a:solidFill>
+                      <a:prstDash val="solid"/>
+                    </a:lnT>
+                    <a:lnB w="12700" cap="flat" cmpd="sng" algn="ctr">
+                      <a:solidFill>
+                        <a:srgbClr val="000000"/>
+                      </a:solidFill>
+                      <a:prstDash val="solid"/>
+                    </a:lnB>
+                  </a:tcPr>
+                </a:tc>
+              </a:tr>
+              <a:tr h="777240">
+                <a:tc>
+                  <a:txBody>
+                    <a:bodyPr wrap="square"/>
+                    <a:lstStyle/>
+                    <a:p>
+                      <a:r>
+                        <a:rPr sz="1800" b="1">
+                          <a:solidFill>
+                            <a:srgbClr val="000000"/>
+                          </a:solidFill>
+                          <a:latin typeface="Arial"/>
+                        </a:rPr>
+                        <a:t>Expected outcome</a:t>
+                      </a:r>
+                    </a:p>
+                  </a:txBody>
+                  <a:tcPr marL="73152" marR="73152" marT="36576" marB="36576">
+                    <a:solidFill>
+                      <a:srgbClr val="FFFFFF"/>
+                    </a:solidFill>
+                    <a:lnL w="12700" cap="flat" cmpd="sng" algn="ctr">
+                      <a:solidFill>
+                        <a:srgbClr val="000000"/>
+                      </a:solidFill>
+                      <a:prstDash val="solid"/>
+                    </a:lnL>
+                    <a:lnR w="12700" cap="flat" cmpd="sng" algn="ctr">
+                      <a:solidFill>
+                        <a:srgbClr val="000000"/>
+                      </a:solidFill>
+                      <a:prstDash val="solid"/>
+                    </a:lnR>
+                    <a:lnT w="12700" cap="flat" cmpd="sng" algn="ctr">
+                      <a:solidFill>
+                        <a:srgbClr val="000000"/>
+                      </a:solidFill>
+                      <a:prstDash val="solid"/>
+                    </a:lnT>
+                    <a:lnB w="12700" cap="flat" cmpd="sng" algn="ctr">
+                      <a:solidFill>
+                        <a:srgbClr val="000000"/>
+                      </a:solidFill>
+                      <a:prstDash val="solid"/>
+                    </a:lnB>
+                  </a:tcPr>
+                </a:tc>
+                <a:tc>
+                  <a:txBody>
+                    <a:bodyPr wrap="square"/>
+                    <a:lstStyle/>
+                    <a:p>
+                      <a:r>
+                        <a:rPr sz="1800" b="0">
+                          <a:solidFill>
+                            <a:srgbClr val="000000"/>
+                          </a:solidFill>
+                          <a:latin typeface="Arial"/>
+                        </a:rPr>
+                        <a:t>A fair comparison and explanations that agree with known causes.</a:t>
+                      </a:r>
+                    </a:p>
+                  </a:txBody>
+                  <a:tcPr marL="73152" marR="73152" marT="36576" marB="36576">
+                    <a:solidFill>
+                      <a:srgbClr val="FFFFFF"/>
+                    </a:solidFill>
+                    <a:lnL w="12700" cap="flat" cmpd="sng" algn="ctr">
+                      <a:solidFill>
+                        <a:srgbClr val="000000"/>
+                      </a:solidFill>
+                      <a:prstDash val="solid"/>
+                    </a:lnL>
+                    <a:lnR w="12700" cap="flat" cmpd="sng" algn="ctr">
+                      <a:solidFill>
+                        <a:srgbClr val="000000"/>
+                      </a:solidFill>
+                      <a:prstDash val="solid"/>
+                    </a:lnR>
+                    <a:lnT w="12700" cap="flat" cmpd="sng" algn="ctr">
+                      <a:solidFill>
+                        <a:srgbClr val="000000"/>
+                      </a:solidFill>
+                      <a:prstDash val="solid"/>
+                    </a:lnT>
+                    <a:lnB w="12700" cap="flat" cmpd="sng" algn="ctr">
+                      <a:solidFill>
+                        <a:srgbClr val="000000"/>
+                      </a:solidFill>
+                      <a:prstDash val="solid"/>
+                    </a:lnB>
+                  </a:tcPr>
+                </a:tc>
+              </a:tr>
+            </a:tbl>
+          </a:graphicData>
+        </a:graphic>
+      </p:graphicFrame>
     </p:spTree>
   </p:cSld>
   <p:clrMapOvr>
@@ -6942,193 +7680,7 @@
 </p:sld>
 </file>
 
-<file path=ppt/slides/slide16.xml><?xml version="1.0" encoding="utf-8"?>
-<p:sld xmlns:a="http://schemas.openxmlformats.org/drawingml/2006/main" xmlns:p="http://schemas.openxmlformats.org/presentationml/2006/main" xmlns:r="http://schemas.openxmlformats.org/officeDocument/2006/relationships">
-  <p:cSld>
-    <p:spTree>
-      <p:nvGrpSpPr>
-        <p:cNvPr id="1" name=""/>
-        <p:cNvGrpSpPr/>
-        <p:nvPr/>
-      </p:nvGrpSpPr>
-      <p:grpSpPr/>
-      <p:sp>
-        <p:nvSpPr>
-          <p:cNvPr id="2" name="TextBox 1"/>
-          <p:cNvSpPr txBox="1"/>
-          <p:nvPr/>
-        </p:nvSpPr>
-        <p:spPr>
-          <a:xfrm>
-            <a:off x="731520" y="2103120"/>
-            <a:ext cx="10698480" cy="1280160"/>
-          </a:xfrm>
-          <a:prstGeom prst="rect">
-            <a:avLst/>
-          </a:prstGeom>
-          <a:noFill/>
-        </p:spPr>
-        <p:txBody>
-          <a:bodyPr wrap="square" anchor="ctr" lIns="45720" rIns="45720">
-            <a:spAutoFit/>
-          </a:bodyPr>
-          <a:lstStyle/>
-          <a:p>
-            <a:pPr algn="ctr">
-              <a:spcAft>
-                <a:spcPts val="800"/>
-              </a:spcAft>
-            </a:pPr>
-            <a:r>
-              <a:rPr sz="5400" b="1">
-                <a:solidFill>
-                  <a:srgbClr val="000000"/>
-                </a:solidFill>
-                <a:latin typeface="Arial"/>
-              </a:rPr>
-              <a:t>Thank you</a:t>
-            </a:r>
-          </a:p>
-        </p:txBody>
-      </p:sp>
-      <p:cxnSp>
-        <p:nvCxnSpPr>
-          <p:cNvPr id="3" name="Connector 2"/>
-          <p:cNvCxnSpPr/>
-          <p:nvPr/>
-        </p:nvCxnSpPr>
-        <p:spPr>
-          <a:xfrm>
-            <a:off x="3840480" y="3566160"/>
-            <a:ext cx="4572000" cy="0"/>
-          </a:xfrm>
-          <a:prstGeom prst="line">
-            <a:avLst/>
-          </a:prstGeom>
-          <a:ln w="15875">
-            <a:solidFill>
-              <a:srgbClr val="000000"/>
-            </a:solidFill>
-          </a:ln>
-        </p:spPr>
-        <p:style>
-          <a:lnRef idx="2">
-            <a:schemeClr val="accent1"/>
-          </a:lnRef>
-          <a:fillRef idx="0">
-            <a:schemeClr val="accent1"/>
-          </a:fillRef>
-          <a:effectRef idx="1">
-            <a:schemeClr val="accent1"/>
-          </a:effectRef>
-          <a:fontRef idx="minor">
-            <a:schemeClr val="tx1"/>
-          </a:fontRef>
-        </p:style>
-      </p:cxnSp>
-      <p:sp>
-        <p:nvSpPr>
-          <p:cNvPr id="4" name="TextBox 3"/>
-          <p:cNvSpPr txBox="1"/>
-          <p:nvPr/>
-        </p:nvSpPr>
-        <p:spPr>
-          <a:xfrm>
-            <a:off x="731520" y="3749039"/>
-            <a:ext cx="10698480" cy="1097280"/>
-          </a:xfrm>
-          <a:prstGeom prst="rect">
-            <a:avLst/>
-          </a:prstGeom>
-          <a:noFill/>
-        </p:spPr>
-        <p:txBody>
-          <a:bodyPr wrap="square" anchor="t" lIns="45720" rIns="45720">
-            <a:spAutoFit/>
-          </a:bodyPr>
-          <a:lstStyle/>
-          <a:p>
-            <a:pPr algn="ctr">
-              <a:spcAft>
-                <a:spcPts val="800"/>
-              </a:spcAft>
-            </a:pPr>
-            <a:r>
-              <a:rPr sz="2000" b="0">
-                <a:solidFill>
-                  <a:srgbClr val="000000"/>
-                </a:solidFill>
-                <a:latin typeface="Arial"/>
-              </a:rPr>
-              <a:t>Questions are welcome</a:t>
-            </a:r>
-          </a:p>
-          <a:p>
-            <a:pPr algn="ctr">
-              <a:spcAft>
-                <a:spcPts val="800"/>
-              </a:spcAft>
-            </a:pPr>
-            <a:r>
-              <a:rPr sz="2000" b="0">
-                <a:solidFill>
-                  <a:srgbClr val="000000"/>
-                </a:solidFill>
-                <a:latin typeface="Arial"/>
-              </a:rPr>
-              <a:t>Nirajan Shahi  |  Supervisor: Asst. Prof. Jagadish Bhatta</a:t>
-            </a:r>
-          </a:p>
-        </p:txBody>
-      </p:sp>
-      <p:sp>
-        <p:nvSpPr>
-          <p:cNvPr id="5" name="TextBox 4"/>
-          <p:cNvSpPr txBox="1"/>
-          <p:nvPr/>
-        </p:nvSpPr>
-        <p:spPr>
-          <a:xfrm>
-            <a:off x="10698480" y="6400800"/>
-            <a:ext cx="914400" cy="320040"/>
-          </a:xfrm>
-          <a:prstGeom prst="rect">
-            <a:avLst/>
-          </a:prstGeom>
-          <a:noFill/>
-        </p:spPr>
-        <p:txBody>
-          <a:bodyPr wrap="square" anchor="t" lIns="45720" rIns="45720">
-            <a:spAutoFit/>
-          </a:bodyPr>
-          <a:lstStyle/>
-          <a:p>
-            <a:pPr algn="r">
-              <a:spcAft>
-                <a:spcPts val="800"/>
-              </a:spcAft>
-            </a:pPr>
-            <a:r>
-              <a:rPr sz="1100" b="0">
-                <a:solidFill>
-                  <a:srgbClr val="595959"/>
-                </a:solidFill>
-                <a:latin typeface="Arial"/>
-              </a:rPr>
-              <a:t>16 / 16</a:t>
-            </a:r>
-          </a:p>
-        </p:txBody>
-      </p:sp>
-    </p:spTree>
-  </p:cSld>
-  <p:clrMapOvr>
-    <a:masterClrMapping/>
-  </p:clrMapOvr>
-</p:sld>
-</file>
-
-<file path=ppt/slides/slide2.xml><?xml version="1.0" encoding="utf-8"?>
+<file path=ppt/slides/slide4.xml><?xml version="1.0" encoding="utf-8"?>
 <p:sld xmlns:a="http://schemas.openxmlformats.org/drawingml/2006/main" xmlns:p="http://schemas.openxmlformats.org/presentationml/2006/main" xmlns:r="http://schemas.openxmlformats.org/officeDocument/2006/relationships">
   <p:cSld>
     <p:spTree>
@@ -7172,7 +7724,7 @@
                 </a:solidFill>
                 <a:latin typeface="Arial"/>
               </a:rPr>
-              <a:t>Contents</a:t>
+              <a:t>Problem statement</a:t>
             </a:r>
           </a:p>
         </p:txBody>
@@ -7285,789 +7837,82 @@
                 </a:solidFill>
                 <a:latin typeface="Arial"/>
               </a:rPr>
-              <a:t>2 / 16</a:t>
-            </a:r>
-          </a:p>
-        </p:txBody>
-      </p:sp>
-      <p:graphicFrame>
-        <p:nvGraphicFramePr>
-          <p:cNvPr id="6" name="Table 5"/>
-          <p:cNvGraphicFramePr>
-            <a:graphicFrameLocks noGrp="1"/>
-          </p:cNvGraphicFramePr>
+              <a:t>4 / 14</a:t>
+            </a:r>
+          </a:p>
+        </p:txBody>
+      </p:sp>
+      <p:sp>
+        <p:nvSpPr>
+          <p:cNvPr id="6" name="TextBox 5"/>
+          <p:cNvSpPr txBox="1"/>
           <p:nvPr/>
-        </p:nvGraphicFramePr>
-        <p:xfrm>
-          <a:off x="2011680" y="1463040"/>
-          <a:ext cx="8138160" cy="4389120"/>
-        </p:xfrm>
-        <a:graphic>
-          <a:graphicData uri="http://schemas.openxmlformats.org/drawingml/2006/table">
-            <a:tbl>
-              <a:tblPr firstRow="0" bandRow="0">
-                <a:tableStyleId>{5940675A-B579-460E-94D1-54222C63F5DA}</a:tableStyleId>
-              </a:tblPr>
-              <a:tblGrid>
-                <a:gridCol w="6400800"/>
-                <a:gridCol w="1737360"/>
-              </a:tblGrid>
-              <a:tr h="548640">
-                <a:tc>
-                  <a:txBody>
-                    <a:bodyPr wrap="square"/>
-                    <a:lstStyle/>
-                    <a:p>
-                      <a:r>
-                        <a:rPr sz="2000" b="1">
-                          <a:solidFill>
-                            <a:srgbClr val="000000"/>
-                          </a:solidFill>
-                          <a:latin typeface="Arial"/>
-                        </a:rPr>
-                        <a:t>Topic</a:t>
-                      </a:r>
-                    </a:p>
-                  </a:txBody>
-                  <a:tcPr marL="73152" marR="73152" marT="36576" marB="36576">
-                    <a:solidFill>
-                      <a:srgbClr val="EEEEEE"/>
-                    </a:solidFill>
-                    <a:lnL w="12700" cap="flat" cmpd="sng" algn="ctr">
-                      <a:solidFill>
-                        <a:srgbClr val="000000"/>
-                      </a:solidFill>
-                      <a:prstDash val="solid"/>
-                    </a:lnL>
-                    <a:lnR w="12700" cap="flat" cmpd="sng" algn="ctr">
-                      <a:solidFill>
-                        <a:srgbClr val="000000"/>
-                      </a:solidFill>
-                      <a:prstDash val="solid"/>
-                    </a:lnR>
-                    <a:lnT w="12700" cap="flat" cmpd="sng" algn="ctr">
-                      <a:solidFill>
-                        <a:srgbClr val="000000"/>
-                      </a:solidFill>
-                      <a:prstDash val="solid"/>
-                    </a:lnT>
-                    <a:lnB w="12700" cap="flat" cmpd="sng" algn="ctr">
-                      <a:solidFill>
-                        <a:srgbClr val="000000"/>
-                      </a:solidFill>
-                      <a:prstDash val="solid"/>
-                    </a:lnB>
-                  </a:tcPr>
-                </a:tc>
-                <a:tc>
-                  <a:txBody>
-                    <a:bodyPr wrap="square"/>
-                    <a:lstStyle/>
-                    <a:p>
-                      <a:r>
-                        <a:rPr sz="2000" b="1">
-                          <a:solidFill>
-                            <a:srgbClr val="000000"/>
-                          </a:solidFill>
-                          <a:latin typeface="Arial"/>
-                        </a:rPr>
-                        <a:t>Slides</a:t>
-                      </a:r>
-                    </a:p>
-                  </a:txBody>
-                  <a:tcPr marL="73152" marR="73152" marT="36576" marB="36576">
-                    <a:solidFill>
-                      <a:srgbClr val="EEEEEE"/>
-                    </a:solidFill>
-                    <a:lnL w="12700" cap="flat" cmpd="sng" algn="ctr">
-                      <a:solidFill>
-                        <a:srgbClr val="000000"/>
-                      </a:solidFill>
-                      <a:prstDash val="solid"/>
-                    </a:lnL>
-                    <a:lnR w="12700" cap="flat" cmpd="sng" algn="ctr">
-                      <a:solidFill>
-                        <a:srgbClr val="000000"/>
-                      </a:solidFill>
-                      <a:prstDash val="solid"/>
-                    </a:lnR>
-                    <a:lnT w="12700" cap="flat" cmpd="sng" algn="ctr">
-                      <a:solidFill>
-                        <a:srgbClr val="000000"/>
-                      </a:solidFill>
-                      <a:prstDash val="solid"/>
-                    </a:lnT>
-                    <a:lnB w="12700" cap="flat" cmpd="sng" algn="ctr">
-                      <a:solidFill>
-                        <a:srgbClr val="000000"/>
-                      </a:solidFill>
-                      <a:prstDash val="solid"/>
-                    </a:lnB>
-                  </a:tcPr>
-                </a:tc>
-              </a:tr>
-              <a:tr h="548640">
-                <a:tc>
-                  <a:txBody>
-                    <a:bodyPr wrap="square"/>
-                    <a:lstStyle/>
-                    <a:p>
-                      <a:r>
-                        <a:rPr sz="2000" b="0">
-                          <a:solidFill>
-                            <a:srgbClr val="000000"/>
-                          </a:solidFill>
-                          <a:latin typeface="Arial"/>
-                        </a:rPr>
-                        <a:t>1.  Project at a glance</a:t>
-                      </a:r>
-                    </a:p>
-                  </a:txBody>
-                  <a:tcPr marL="73152" marR="73152" marT="36576" marB="36576">
-                    <a:solidFill>
-                      <a:srgbClr val="FFFFFF"/>
-                    </a:solidFill>
-                    <a:lnL w="12700" cap="flat" cmpd="sng" algn="ctr">
-                      <a:solidFill>
-                        <a:srgbClr val="000000"/>
-                      </a:solidFill>
-                      <a:prstDash val="solid"/>
-                    </a:lnL>
-                    <a:lnR w="12700" cap="flat" cmpd="sng" algn="ctr">
-                      <a:solidFill>
-                        <a:srgbClr val="000000"/>
-                      </a:solidFill>
-                      <a:prstDash val="solid"/>
-                    </a:lnR>
-                    <a:lnT w="12700" cap="flat" cmpd="sng" algn="ctr">
-                      <a:solidFill>
-                        <a:srgbClr val="000000"/>
-                      </a:solidFill>
-                      <a:prstDash val="solid"/>
-                    </a:lnT>
-                    <a:lnB w="12700" cap="flat" cmpd="sng" algn="ctr">
-                      <a:solidFill>
-                        <a:srgbClr val="000000"/>
-                      </a:solidFill>
-                      <a:prstDash val="solid"/>
-                    </a:lnB>
-                  </a:tcPr>
-                </a:tc>
-                <a:tc>
-                  <a:txBody>
-                    <a:bodyPr wrap="square"/>
-                    <a:lstStyle/>
-                    <a:p>
-                      <a:r>
-                        <a:rPr sz="2000" b="0">
-                          <a:solidFill>
-                            <a:srgbClr val="000000"/>
-                          </a:solidFill>
-                          <a:latin typeface="Arial"/>
-                        </a:rPr>
-                        <a:t>3</a:t>
-                      </a:r>
-                    </a:p>
-                  </a:txBody>
-                  <a:tcPr marL="73152" marR="73152" marT="36576" marB="36576">
-                    <a:solidFill>
-                      <a:srgbClr val="FFFFFF"/>
-                    </a:solidFill>
-                    <a:lnL w="12700" cap="flat" cmpd="sng" algn="ctr">
-                      <a:solidFill>
-                        <a:srgbClr val="000000"/>
-                      </a:solidFill>
-                      <a:prstDash val="solid"/>
-                    </a:lnL>
-                    <a:lnR w="12700" cap="flat" cmpd="sng" algn="ctr">
-                      <a:solidFill>
-                        <a:srgbClr val="000000"/>
-                      </a:solidFill>
-                      <a:prstDash val="solid"/>
-                    </a:lnR>
-                    <a:lnT w="12700" cap="flat" cmpd="sng" algn="ctr">
-                      <a:solidFill>
-                        <a:srgbClr val="000000"/>
-                      </a:solidFill>
-                      <a:prstDash val="solid"/>
-                    </a:lnT>
-                    <a:lnB w="12700" cap="flat" cmpd="sng" algn="ctr">
-                      <a:solidFill>
-                        <a:srgbClr val="000000"/>
-                      </a:solidFill>
-                      <a:prstDash val="solid"/>
-                    </a:lnB>
-                  </a:tcPr>
-                </a:tc>
-              </a:tr>
-              <a:tr h="548640">
-                <a:tc>
-                  <a:txBody>
-                    <a:bodyPr wrap="square"/>
-                    <a:lstStyle/>
-                    <a:p>
-                      <a:r>
-                        <a:rPr sz="2000" b="0">
-                          <a:solidFill>
-                            <a:srgbClr val="000000"/>
-                          </a:solidFill>
-                          <a:latin typeface="Arial"/>
-                        </a:rPr>
-                        <a:t>2.  Problem statement and objectives</a:t>
-                      </a:r>
-                    </a:p>
-                  </a:txBody>
-                  <a:tcPr marL="73152" marR="73152" marT="36576" marB="36576">
-                    <a:solidFill>
-                      <a:srgbClr val="FFFFFF"/>
-                    </a:solidFill>
-                    <a:lnL w="12700" cap="flat" cmpd="sng" algn="ctr">
-                      <a:solidFill>
-                        <a:srgbClr val="000000"/>
-                      </a:solidFill>
-                      <a:prstDash val="solid"/>
-                    </a:lnL>
-                    <a:lnR w="12700" cap="flat" cmpd="sng" algn="ctr">
-                      <a:solidFill>
-                        <a:srgbClr val="000000"/>
-                      </a:solidFill>
-                      <a:prstDash val="solid"/>
-                    </a:lnR>
-                    <a:lnT w="12700" cap="flat" cmpd="sng" algn="ctr">
-                      <a:solidFill>
-                        <a:srgbClr val="000000"/>
-                      </a:solidFill>
-                      <a:prstDash val="solid"/>
-                    </a:lnT>
-                    <a:lnB w="12700" cap="flat" cmpd="sng" algn="ctr">
-                      <a:solidFill>
-                        <a:srgbClr val="000000"/>
-                      </a:solidFill>
-                      <a:prstDash val="solid"/>
-                    </a:lnB>
-                  </a:tcPr>
-                </a:tc>
-                <a:tc>
-                  <a:txBody>
-                    <a:bodyPr wrap="square"/>
-                    <a:lstStyle/>
-                    <a:p>
-                      <a:r>
-                        <a:rPr sz="2000" b="0">
-                          <a:solidFill>
-                            <a:srgbClr val="000000"/>
-                          </a:solidFill>
-                          <a:latin typeface="Arial"/>
-                        </a:rPr>
-                        <a:t>4 - 5</a:t>
-                      </a:r>
-                    </a:p>
-                  </a:txBody>
-                  <a:tcPr marL="73152" marR="73152" marT="36576" marB="36576">
-                    <a:solidFill>
-                      <a:srgbClr val="FFFFFF"/>
-                    </a:solidFill>
-                    <a:lnL w="12700" cap="flat" cmpd="sng" algn="ctr">
-                      <a:solidFill>
-                        <a:srgbClr val="000000"/>
-                      </a:solidFill>
-                      <a:prstDash val="solid"/>
-                    </a:lnL>
-                    <a:lnR w="12700" cap="flat" cmpd="sng" algn="ctr">
-                      <a:solidFill>
-                        <a:srgbClr val="000000"/>
-                      </a:solidFill>
-                      <a:prstDash val="solid"/>
-                    </a:lnR>
-                    <a:lnT w="12700" cap="flat" cmpd="sng" algn="ctr">
-                      <a:solidFill>
-                        <a:srgbClr val="000000"/>
-                      </a:solidFill>
-                      <a:prstDash val="solid"/>
-                    </a:lnT>
-                    <a:lnB w="12700" cap="flat" cmpd="sng" algn="ctr">
-                      <a:solidFill>
-                        <a:srgbClr val="000000"/>
-                      </a:solidFill>
-                      <a:prstDash val="solid"/>
-                    </a:lnB>
-                  </a:tcPr>
-                </a:tc>
-              </a:tr>
-              <a:tr h="548640">
-                <a:tc>
-                  <a:txBody>
-                    <a:bodyPr wrap="square"/>
-                    <a:lstStyle/>
-                    <a:p>
-                      <a:r>
-                        <a:rPr sz="2000" b="0">
-                          <a:solidFill>
-                            <a:srgbClr val="000000"/>
-                          </a:solidFill>
-                          <a:latin typeface="Arial"/>
-                        </a:rPr>
-                        <a:t>3.  Background and literature</a:t>
-                      </a:r>
-                    </a:p>
-                  </a:txBody>
-                  <a:tcPr marL="73152" marR="73152" marT="36576" marB="36576">
-                    <a:solidFill>
-                      <a:srgbClr val="FFFFFF"/>
-                    </a:solidFill>
-                    <a:lnL w="12700" cap="flat" cmpd="sng" algn="ctr">
-                      <a:solidFill>
-                        <a:srgbClr val="000000"/>
-                      </a:solidFill>
-                      <a:prstDash val="solid"/>
-                    </a:lnL>
-                    <a:lnR w="12700" cap="flat" cmpd="sng" algn="ctr">
-                      <a:solidFill>
-                        <a:srgbClr val="000000"/>
-                      </a:solidFill>
-                      <a:prstDash val="solid"/>
-                    </a:lnR>
-                    <a:lnT w="12700" cap="flat" cmpd="sng" algn="ctr">
-                      <a:solidFill>
-                        <a:srgbClr val="000000"/>
-                      </a:solidFill>
-                      <a:prstDash val="solid"/>
-                    </a:lnT>
-                    <a:lnB w="12700" cap="flat" cmpd="sng" algn="ctr">
-                      <a:solidFill>
-                        <a:srgbClr val="000000"/>
-                      </a:solidFill>
-                      <a:prstDash val="solid"/>
-                    </a:lnB>
-                  </a:tcPr>
-                </a:tc>
-                <a:tc>
-                  <a:txBody>
-                    <a:bodyPr wrap="square"/>
-                    <a:lstStyle/>
-                    <a:p>
-                      <a:r>
-                        <a:rPr sz="2000" b="0">
-                          <a:solidFill>
-                            <a:srgbClr val="000000"/>
-                          </a:solidFill>
-                          <a:latin typeface="Arial"/>
-                        </a:rPr>
-                        <a:t>6 - 8</a:t>
-                      </a:r>
-                    </a:p>
-                  </a:txBody>
-                  <a:tcPr marL="73152" marR="73152" marT="36576" marB="36576">
-                    <a:solidFill>
-                      <a:srgbClr val="FFFFFF"/>
-                    </a:solidFill>
-                    <a:lnL w="12700" cap="flat" cmpd="sng" algn="ctr">
-                      <a:solidFill>
-                        <a:srgbClr val="000000"/>
-                      </a:solidFill>
-                      <a:prstDash val="solid"/>
-                    </a:lnL>
-                    <a:lnR w="12700" cap="flat" cmpd="sng" algn="ctr">
-                      <a:solidFill>
-                        <a:srgbClr val="000000"/>
-                      </a:solidFill>
-                      <a:prstDash val="solid"/>
-                    </a:lnR>
-                    <a:lnT w="12700" cap="flat" cmpd="sng" algn="ctr">
-                      <a:solidFill>
-                        <a:srgbClr val="000000"/>
-                      </a:solidFill>
-                      <a:prstDash val="solid"/>
-                    </a:lnT>
-                    <a:lnB w="12700" cap="flat" cmpd="sng" algn="ctr">
-                      <a:solidFill>
-                        <a:srgbClr val="000000"/>
-                      </a:solidFill>
-                      <a:prstDash val="solid"/>
-                    </a:lnB>
-                  </a:tcPr>
-                </a:tc>
-              </a:tr>
-              <a:tr h="548640">
-                <a:tc>
-                  <a:txBody>
-                    <a:bodyPr wrap="square"/>
-                    <a:lstStyle/>
-                    <a:p>
-                      <a:r>
-                        <a:rPr sz="2000" b="0">
-                          <a:solidFill>
-                            <a:srgbClr val="000000"/>
-                          </a:solidFill>
-                          <a:latin typeface="Arial"/>
-                        </a:rPr>
-                        <a:t>4.  Research gap</a:t>
-                      </a:r>
-                    </a:p>
-                  </a:txBody>
-                  <a:tcPr marL="73152" marR="73152" marT="36576" marB="36576">
-                    <a:solidFill>
-                      <a:srgbClr val="FFFFFF"/>
-                    </a:solidFill>
-                    <a:lnL w="12700" cap="flat" cmpd="sng" algn="ctr">
-                      <a:solidFill>
-                        <a:srgbClr val="000000"/>
-                      </a:solidFill>
-                      <a:prstDash val="solid"/>
-                    </a:lnL>
-                    <a:lnR w="12700" cap="flat" cmpd="sng" algn="ctr">
-                      <a:solidFill>
-                        <a:srgbClr val="000000"/>
-                      </a:solidFill>
-                      <a:prstDash val="solid"/>
-                    </a:lnR>
-                    <a:lnT w="12700" cap="flat" cmpd="sng" algn="ctr">
-                      <a:solidFill>
-                        <a:srgbClr val="000000"/>
-                      </a:solidFill>
-                      <a:prstDash val="solid"/>
-                    </a:lnT>
-                    <a:lnB w="12700" cap="flat" cmpd="sng" algn="ctr">
-                      <a:solidFill>
-                        <a:srgbClr val="000000"/>
-                      </a:solidFill>
-                      <a:prstDash val="solid"/>
-                    </a:lnB>
-                  </a:tcPr>
-                </a:tc>
-                <a:tc>
-                  <a:txBody>
-                    <a:bodyPr wrap="square"/>
-                    <a:lstStyle/>
-                    <a:p>
-                      <a:r>
-                        <a:rPr sz="2000" b="0">
-                          <a:solidFill>
-                            <a:srgbClr val="000000"/>
-                          </a:solidFill>
-                          <a:latin typeface="Arial"/>
-                        </a:rPr>
-                        <a:t>9</a:t>
-                      </a:r>
-                    </a:p>
-                  </a:txBody>
-                  <a:tcPr marL="73152" marR="73152" marT="36576" marB="36576">
-                    <a:solidFill>
-                      <a:srgbClr val="FFFFFF"/>
-                    </a:solidFill>
-                    <a:lnL w="12700" cap="flat" cmpd="sng" algn="ctr">
-                      <a:solidFill>
-                        <a:srgbClr val="000000"/>
-                      </a:solidFill>
-                      <a:prstDash val="solid"/>
-                    </a:lnL>
-                    <a:lnR w="12700" cap="flat" cmpd="sng" algn="ctr">
-                      <a:solidFill>
-                        <a:srgbClr val="000000"/>
-                      </a:solidFill>
-                      <a:prstDash val="solid"/>
-                    </a:lnR>
-                    <a:lnT w="12700" cap="flat" cmpd="sng" algn="ctr">
-                      <a:solidFill>
-                        <a:srgbClr val="000000"/>
-                      </a:solidFill>
-                      <a:prstDash val="solid"/>
-                    </a:lnT>
-                    <a:lnB w="12700" cap="flat" cmpd="sng" algn="ctr">
-                      <a:solidFill>
-                        <a:srgbClr val="000000"/>
-                      </a:solidFill>
-                      <a:prstDash val="solid"/>
-                    </a:lnB>
-                  </a:tcPr>
-                </a:tc>
-              </a:tr>
-              <a:tr h="548640">
-                <a:tc>
-                  <a:txBody>
-                    <a:bodyPr wrap="square"/>
-                    <a:lstStyle/>
-                    <a:p>
-                      <a:r>
-                        <a:rPr sz="2000" b="0">
-                          <a:solidFill>
-                            <a:srgbClr val="000000"/>
-                          </a:solidFill>
-                          <a:latin typeface="Arial"/>
-                        </a:rPr>
-                        <a:t>5.  Data, framework, models, and evaluation</a:t>
-                      </a:r>
-                    </a:p>
-                  </a:txBody>
-                  <a:tcPr marL="73152" marR="73152" marT="36576" marB="36576">
-                    <a:solidFill>
-                      <a:srgbClr val="FFFFFF"/>
-                    </a:solidFill>
-                    <a:lnL w="12700" cap="flat" cmpd="sng" algn="ctr">
-                      <a:solidFill>
-                        <a:srgbClr val="000000"/>
-                      </a:solidFill>
-                      <a:prstDash val="solid"/>
-                    </a:lnL>
-                    <a:lnR w="12700" cap="flat" cmpd="sng" algn="ctr">
-                      <a:solidFill>
-                        <a:srgbClr val="000000"/>
-                      </a:solidFill>
-                      <a:prstDash val="solid"/>
-                    </a:lnR>
-                    <a:lnT w="12700" cap="flat" cmpd="sng" algn="ctr">
-                      <a:solidFill>
-                        <a:srgbClr val="000000"/>
-                      </a:solidFill>
-                      <a:prstDash val="solid"/>
-                    </a:lnT>
-                    <a:lnB w="12700" cap="flat" cmpd="sng" algn="ctr">
-                      <a:solidFill>
-                        <a:srgbClr val="000000"/>
-                      </a:solidFill>
-                      <a:prstDash val="solid"/>
-                    </a:lnB>
-                  </a:tcPr>
-                </a:tc>
-                <a:tc>
-                  <a:txBody>
-                    <a:bodyPr wrap="square"/>
-                    <a:lstStyle/>
-                    <a:p>
-                      <a:r>
-                        <a:rPr sz="2000" b="0">
-                          <a:solidFill>
-                            <a:srgbClr val="000000"/>
-                          </a:solidFill>
-                          <a:latin typeface="Arial"/>
-                        </a:rPr>
-                        <a:t>10 - 13</a:t>
-                      </a:r>
-                    </a:p>
-                  </a:txBody>
-                  <a:tcPr marL="73152" marR="73152" marT="36576" marB="36576">
-                    <a:solidFill>
-                      <a:srgbClr val="FFFFFF"/>
-                    </a:solidFill>
-                    <a:lnL w="12700" cap="flat" cmpd="sng" algn="ctr">
-                      <a:solidFill>
-                        <a:srgbClr val="000000"/>
-                      </a:solidFill>
-                      <a:prstDash val="solid"/>
-                    </a:lnL>
-                    <a:lnR w="12700" cap="flat" cmpd="sng" algn="ctr">
-                      <a:solidFill>
-                        <a:srgbClr val="000000"/>
-                      </a:solidFill>
-                      <a:prstDash val="solid"/>
-                    </a:lnR>
-                    <a:lnT w="12700" cap="flat" cmpd="sng" algn="ctr">
-                      <a:solidFill>
-                        <a:srgbClr val="000000"/>
-                      </a:solidFill>
-                      <a:prstDash val="solid"/>
-                    </a:lnT>
-                    <a:lnB w="12700" cap="flat" cmpd="sng" algn="ctr">
-                      <a:solidFill>
-                        <a:srgbClr val="000000"/>
-                      </a:solidFill>
-                      <a:prstDash val="solid"/>
-                    </a:lnB>
-                  </a:tcPr>
-                </a:tc>
-              </a:tr>
-              <a:tr h="548640">
-                <a:tc>
-                  <a:txBody>
-                    <a:bodyPr wrap="square"/>
-                    <a:lstStyle/>
-                    <a:p>
-                      <a:r>
-                        <a:rPr sz="2000" b="0">
-                          <a:solidFill>
-                            <a:srgbClr val="000000"/>
-                          </a:solidFill>
-                          <a:latin typeface="Arial"/>
-                        </a:rPr>
-                        <a:t>6.  Expected outcomes</a:t>
-                      </a:r>
-                    </a:p>
-                  </a:txBody>
-                  <a:tcPr marL="73152" marR="73152" marT="36576" marB="36576">
-                    <a:solidFill>
-                      <a:srgbClr val="FFFFFF"/>
-                    </a:solidFill>
-                    <a:lnL w="12700" cap="flat" cmpd="sng" algn="ctr">
-                      <a:solidFill>
-                        <a:srgbClr val="000000"/>
-                      </a:solidFill>
-                      <a:prstDash val="solid"/>
-                    </a:lnL>
-                    <a:lnR w="12700" cap="flat" cmpd="sng" algn="ctr">
-                      <a:solidFill>
-                        <a:srgbClr val="000000"/>
-                      </a:solidFill>
-                      <a:prstDash val="solid"/>
-                    </a:lnR>
-                    <a:lnT w="12700" cap="flat" cmpd="sng" algn="ctr">
-                      <a:solidFill>
-                        <a:srgbClr val="000000"/>
-                      </a:solidFill>
-                      <a:prstDash val="solid"/>
-                    </a:lnT>
-                    <a:lnB w="12700" cap="flat" cmpd="sng" algn="ctr">
-                      <a:solidFill>
-                        <a:srgbClr val="000000"/>
-                      </a:solidFill>
-                      <a:prstDash val="solid"/>
-                    </a:lnB>
-                  </a:tcPr>
-                </a:tc>
-                <a:tc>
-                  <a:txBody>
-                    <a:bodyPr wrap="square"/>
-                    <a:lstStyle/>
-                    <a:p>
-                      <a:r>
-                        <a:rPr sz="2000" b="0">
-                          <a:solidFill>
-                            <a:srgbClr val="000000"/>
-                          </a:solidFill>
-                          <a:latin typeface="Arial"/>
-                        </a:rPr>
-                        <a:t>14</a:t>
-                      </a:r>
-                    </a:p>
-                  </a:txBody>
-                  <a:tcPr marL="73152" marR="73152" marT="36576" marB="36576">
-                    <a:solidFill>
-                      <a:srgbClr val="FFFFFF"/>
-                    </a:solidFill>
-                    <a:lnL w="12700" cap="flat" cmpd="sng" algn="ctr">
-                      <a:solidFill>
-                        <a:srgbClr val="000000"/>
-                      </a:solidFill>
-                      <a:prstDash val="solid"/>
-                    </a:lnL>
-                    <a:lnR w="12700" cap="flat" cmpd="sng" algn="ctr">
-                      <a:solidFill>
-                        <a:srgbClr val="000000"/>
-                      </a:solidFill>
-                      <a:prstDash val="solid"/>
-                    </a:lnR>
-                    <a:lnT w="12700" cap="flat" cmpd="sng" algn="ctr">
-                      <a:solidFill>
-                        <a:srgbClr val="000000"/>
-                      </a:solidFill>
-                      <a:prstDash val="solid"/>
-                    </a:lnT>
-                    <a:lnB w="12700" cap="flat" cmpd="sng" algn="ctr">
-                      <a:solidFill>
-                        <a:srgbClr val="000000"/>
-                      </a:solidFill>
-                      <a:prstDash val="solid"/>
-                    </a:lnB>
-                  </a:tcPr>
-                </a:tc>
-              </a:tr>
-              <a:tr h="548640">
-                <a:tc>
-                  <a:txBody>
-                    <a:bodyPr wrap="square"/>
-                    <a:lstStyle/>
-                    <a:p>
-                      <a:r>
-                        <a:rPr sz="2000" b="0">
-                          <a:solidFill>
-                            <a:srgbClr val="000000"/>
-                          </a:solidFill>
-                          <a:latin typeface="Arial"/>
-                        </a:rPr>
-                        <a:t>7.  Schedule</a:t>
-                      </a:r>
-                    </a:p>
-                  </a:txBody>
-                  <a:tcPr marL="73152" marR="73152" marT="36576" marB="36576">
-                    <a:solidFill>
-                      <a:srgbClr val="FFFFFF"/>
-                    </a:solidFill>
-                    <a:lnL w="12700" cap="flat" cmpd="sng" algn="ctr">
-                      <a:solidFill>
-                        <a:srgbClr val="000000"/>
-                      </a:solidFill>
-                      <a:prstDash val="solid"/>
-                    </a:lnL>
-                    <a:lnR w="12700" cap="flat" cmpd="sng" algn="ctr">
-                      <a:solidFill>
-                        <a:srgbClr val="000000"/>
-                      </a:solidFill>
-                      <a:prstDash val="solid"/>
-                    </a:lnR>
-                    <a:lnT w="12700" cap="flat" cmpd="sng" algn="ctr">
-                      <a:solidFill>
-                        <a:srgbClr val="000000"/>
-                      </a:solidFill>
-                      <a:prstDash val="solid"/>
-                    </a:lnT>
-                    <a:lnB w="12700" cap="flat" cmpd="sng" algn="ctr">
-                      <a:solidFill>
-                        <a:srgbClr val="000000"/>
-                      </a:solidFill>
-                      <a:prstDash val="solid"/>
-                    </a:lnB>
-                  </a:tcPr>
-                </a:tc>
-                <a:tc>
-                  <a:txBody>
-                    <a:bodyPr wrap="square"/>
-                    <a:lstStyle/>
-                    <a:p>
-                      <a:r>
-                        <a:rPr sz="2000" b="0">
-                          <a:solidFill>
-                            <a:srgbClr val="000000"/>
-                          </a:solidFill>
-                          <a:latin typeface="Arial"/>
-                        </a:rPr>
-                        <a:t>15</a:t>
-                      </a:r>
-                    </a:p>
-                  </a:txBody>
-                  <a:tcPr marL="73152" marR="73152" marT="36576" marB="36576">
-                    <a:solidFill>
-                      <a:srgbClr val="FFFFFF"/>
-                    </a:solidFill>
-                    <a:lnL w="12700" cap="flat" cmpd="sng" algn="ctr">
-                      <a:solidFill>
-                        <a:srgbClr val="000000"/>
-                      </a:solidFill>
-                      <a:prstDash val="solid"/>
-                    </a:lnL>
-                    <a:lnR w="12700" cap="flat" cmpd="sng" algn="ctr">
-                      <a:solidFill>
-                        <a:srgbClr val="000000"/>
-                      </a:solidFill>
-                      <a:prstDash val="solid"/>
-                    </a:lnR>
-                    <a:lnT w="12700" cap="flat" cmpd="sng" algn="ctr">
-                      <a:solidFill>
-                        <a:srgbClr val="000000"/>
-                      </a:solidFill>
-                      <a:prstDash val="solid"/>
-                    </a:lnT>
-                    <a:lnB w="12700" cap="flat" cmpd="sng" algn="ctr">
-                      <a:solidFill>
-                        <a:srgbClr val="000000"/>
-                      </a:solidFill>
-                      <a:prstDash val="solid"/>
-                    </a:lnB>
-                  </a:tcPr>
-                </a:tc>
-              </a:tr>
-            </a:tbl>
-          </a:graphicData>
-        </a:graphic>
-      </p:graphicFrame>
+        </p:nvSpPr>
+        <p:spPr>
+          <a:xfrm>
+            <a:off x="731520" y="1737360"/>
+            <a:ext cx="10698480" cy="4114800"/>
+          </a:xfrm>
+          <a:prstGeom prst="rect">
+            <a:avLst/>
+          </a:prstGeom>
+          <a:noFill/>
+        </p:spPr>
+        <p:txBody>
+          <a:bodyPr wrap="square" anchor="t" lIns="45720" rIns="45720">
+            <a:spAutoFit/>
+          </a:bodyPr>
+          <a:lstStyle/>
+          <a:p>
+            <a:pPr algn="l">
+              <a:spcAft>
+                <a:spcPts val="2600"/>
+              </a:spcAft>
+            </a:pPr>
+            <a:r>
+              <a:rPr sz="2600" b="0">
+                <a:solidFill>
+                  <a:srgbClr val="000000"/>
+                </a:solidFill>
+                <a:latin typeface="Arial"/>
+              </a:rPr>
+              <a:t>•  Hair loss risk is hard to judge: hormones, nutrition, stress, and habits act together.</a:t>
+            </a:r>
+          </a:p>
+          <a:p>
+            <a:pPr algn="l">
+              <a:spcAft>
+                <a:spcPts val="2600"/>
+              </a:spcAft>
+            </a:pPr>
+            <a:r>
+              <a:rPr sz="2600" b="0">
+                <a:solidFill>
+                  <a:srgbClr val="000000"/>
+                </a:solidFill>
+                <a:latin typeface="Arial"/>
+              </a:rPr>
+              <a:t>•  Earlier studies used classical algorithms, with accuracies from about 50% to 100%.</a:t>
+            </a:r>
+          </a:p>
+          <a:p>
+            <a:pPr algn="l">
+              <a:spcAft>
+                <a:spcPts val="2600"/>
+              </a:spcAft>
+            </a:pPr>
+            <a:r>
+              <a:rPr sz="2600" b="0">
+                <a:solidFill>
+                  <a:srgbClr val="000000"/>
+                </a:solidFill>
+                <a:latin typeface="Arial"/>
+              </a:rPr>
+              <a:t>•  Newer foundation models (TabPFN, TabFM) are untested on hair fall data and hard to explain.</a:t>
+            </a:r>
+          </a:p>
+        </p:txBody>
+      </p:sp>
     </p:spTree>
   </p:cSld>
   <p:clrMapOvr>
@@ -8076,7 +7921,7 @@
 </p:sld>
 </file>
 
-<file path=ppt/slides/slide3.xml><?xml version="1.0" encoding="utf-8"?>
+<file path=ppt/slides/slide5.xml><?xml version="1.0" encoding="utf-8"?>
 <p:sld xmlns:a="http://schemas.openxmlformats.org/drawingml/2006/main" xmlns:p="http://schemas.openxmlformats.org/presentationml/2006/main" xmlns:r="http://schemas.openxmlformats.org/officeDocument/2006/relationships">
   <p:cSld>
     <p:spTree>
@@ -8120,7 +7965,7 @@
                 </a:solidFill>
                 <a:latin typeface="Arial"/>
               </a:rPr>
-              <a:t>Project at a glance</a:t>
+              <a:t>Objectives</a:t>
             </a:r>
           </a:p>
         </p:txBody>
@@ -8233,695 +8078,66 @@
                 </a:solidFill>
                 <a:latin typeface="Arial"/>
               </a:rPr>
-              <a:t>3 / 16</a:t>
-            </a:r>
-          </a:p>
-        </p:txBody>
-      </p:sp>
-      <p:graphicFrame>
-        <p:nvGraphicFramePr>
-          <p:cNvPr id="6" name="Table 5"/>
-          <p:cNvGraphicFramePr>
-            <a:graphicFrameLocks noGrp="1"/>
-          </p:cNvGraphicFramePr>
+              <a:t>5 / 14</a:t>
+            </a:r>
+          </a:p>
+        </p:txBody>
+      </p:sp>
+      <p:sp>
+        <p:nvSpPr>
+          <p:cNvPr id="6" name="TextBox 5"/>
+          <p:cNvSpPr txBox="1"/>
           <p:nvPr/>
-        </p:nvGraphicFramePr>
-        <p:xfrm>
-          <a:off x="594360" y="1371600"/>
-          <a:ext cx="10972800" cy="4608576"/>
-        </p:xfrm>
-        <a:graphic>
-          <a:graphicData uri="http://schemas.openxmlformats.org/drawingml/2006/table">
-            <a:tbl>
-              <a:tblPr firstRow="0" bandRow="0">
-                <a:tableStyleId>{5940675A-B579-460E-94D1-54222C63F5DA}</a:tableStyleId>
-              </a:tblPr>
-              <a:tblGrid>
-                <a:gridCol w="2194560"/>
-                <a:gridCol w="8778240"/>
-              </a:tblGrid>
-              <a:tr h="658368">
-                <a:tc>
-                  <a:txBody>
-                    <a:bodyPr wrap="square"/>
-                    <a:lstStyle/>
-                    <a:p>
-                      <a:r>
-                        <a:rPr sz="1600" b="1">
-                          <a:solidFill>
-                            <a:srgbClr val="000000"/>
-                          </a:solidFill>
-                          <a:latin typeface="Arial"/>
-                        </a:rPr>
-                        <a:t>Problem</a:t>
-                      </a:r>
-                    </a:p>
-                  </a:txBody>
-                  <a:tcPr marL="73152" marR="73152" marT="36576" marB="36576">
-                    <a:solidFill>
-                      <a:srgbClr val="FFFFFF"/>
-                    </a:solidFill>
-                    <a:lnL w="12700" cap="flat" cmpd="sng" algn="ctr">
-                      <a:solidFill>
-                        <a:srgbClr val="000000"/>
-                      </a:solidFill>
-                      <a:prstDash val="solid"/>
-                    </a:lnL>
-                    <a:lnR w="12700" cap="flat" cmpd="sng" algn="ctr">
-                      <a:solidFill>
-                        <a:srgbClr val="000000"/>
-                      </a:solidFill>
-                      <a:prstDash val="solid"/>
-                    </a:lnR>
-                    <a:lnT w="12700" cap="flat" cmpd="sng" algn="ctr">
-                      <a:solidFill>
-                        <a:srgbClr val="000000"/>
-                      </a:solidFill>
-                      <a:prstDash val="solid"/>
-                    </a:lnT>
-                    <a:lnB w="12700" cap="flat" cmpd="sng" algn="ctr">
-                      <a:solidFill>
-                        <a:srgbClr val="000000"/>
-                      </a:solidFill>
-                      <a:prstDash val="solid"/>
-                    </a:lnB>
-                  </a:tcPr>
-                </a:tc>
-                <a:tc>
-                  <a:txBody>
-                    <a:bodyPr wrap="square"/>
-                    <a:lstStyle/>
-                    <a:p>
-                      <a:r>
-                        <a:rPr sz="1600" b="0">
-                          <a:solidFill>
-                            <a:srgbClr val="000000"/>
-                          </a:solidFill>
-                          <a:latin typeface="Arial"/>
-                        </a:rPr>
-                        <a:t>Hair fall risk is hard to judge, and most prediction models cannot explain their answers.</a:t>
-                      </a:r>
-                    </a:p>
-                  </a:txBody>
-                  <a:tcPr marL="73152" marR="73152" marT="36576" marB="36576">
-                    <a:solidFill>
-                      <a:srgbClr val="FFFFFF"/>
-                    </a:solidFill>
-                    <a:lnL w="12700" cap="flat" cmpd="sng" algn="ctr">
-                      <a:solidFill>
-                        <a:srgbClr val="000000"/>
-                      </a:solidFill>
-                      <a:prstDash val="solid"/>
-                    </a:lnL>
-                    <a:lnR w="12700" cap="flat" cmpd="sng" algn="ctr">
-                      <a:solidFill>
-                        <a:srgbClr val="000000"/>
-                      </a:solidFill>
-                      <a:prstDash val="solid"/>
-                    </a:lnR>
-                    <a:lnT w="12700" cap="flat" cmpd="sng" algn="ctr">
-                      <a:solidFill>
-                        <a:srgbClr val="000000"/>
-                      </a:solidFill>
-                      <a:prstDash val="solid"/>
-                    </a:lnT>
-                    <a:lnB w="12700" cap="flat" cmpd="sng" algn="ctr">
-                      <a:solidFill>
-                        <a:srgbClr val="000000"/>
-                      </a:solidFill>
-                      <a:prstDash val="solid"/>
-                    </a:lnB>
-                  </a:tcPr>
-                </a:tc>
-              </a:tr>
-              <a:tr h="658368">
-                <a:tc>
-                  <a:txBody>
-                    <a:bodyPr wrap="square"/>
-                    <a:lstStyle/>
-                    <a:p>
-                      <a:r>
-                        <a:rPr sz="1600" b="1">
-                          <a:solidFill>
-                            <a:srgbClr val="000000"/>
-                          </a:solidFill>
-                          <a:latin typeface="Arial"/>
-                        </a:rPr>
-                        <a:t>Objectives</a:t>
-                      </a:r>
-                    </a:p>
-                  </a:txBody>
-                  <a:tcPr marL="73152" marR="73152" marT="36576" marB="36576">
-                    <a:solidFill>
-                      <a:srgbClr val="FFFFFF"/>
-                    </a:solidFill>
-                    <a:lnL w="12700" cap="flat" cmpd="sng" algn="ctr">
-                      <a:solidFill>
-                        <a:srgbClr val="000000"/>
-                      </a:solidFill>
-                      <a:prstDash val="solid"/>
-                    </a:lnL>
-                    <a:lnR w="12700" cap="flat" cmpd="sng" algn="ctr">
-                      <a:solidFill>
-                        <a:srgbClr val="000000"/>
-                      </a:solidFill>
-                      <a:prstDash val="solid"/>
-                    </a:lnR>
-                    <a:lnT w="12700" cap="flat" cmpd="sng" algn="ctr">
-                      <a:solidFill>
-                        <a:srgbClr val="000000"/>
-                      </a:solidFill>
-                      <a:prstDash val="solid"/>
-                    </a:lnT>
-                    <a:lnB w="12700" cap="flat" cmpd="sng" algn="ctr">
-                      <a:solidFill>
-                        <a:srgbClr val="000000"/>
-                      </a:solidFill>
-                      <a:prstDash val="solid"/>
-                    </a:lnB>
-                  </a:tcPr>
-                </a:tc>
-                <a:tc>
-                  <a:txBody>
-                    <a:bodyPr wrap="square"/>
-                    <a:lstStyle/>
-                    <a:p>
-                      <a:r>
-                        <a:rPr sz="1600" b="0">
-                          <a:solidFill>
-                            <a:srgbClr val="000000"/>
-                          </a:solidFill>
-                          <a:latin typeface="Arial"/>
-                        </a:rPr>
-                        <a:t>1. Benchmark CatBoost, TabPFN, and TabFM.   2. Explain every model with SHAP.</a:t>
-                      </a:r>
-                    </a:p>
-                  </a:txBody>
-                  <a:tcPr marL="73152" marR="73152" marT="36576" marB="36576">
-                    <a:solidFill>
-                      <a:srgbClr val="FFFFFF"/>
-                    </a:solidFill>
-                    <a:lnL w="12700" cap="flat" cmpd="sng" algn="ctr">
-                      <a:solidFill>
-                        <a:srgbClr val="000000"/>
-                      </a:solidFill>
-                      <a:prstDash val="solid"/>
-                    </a:lnL>
-                    <a:lnR w="12700" cap="flat" cmpd="sng" algn="ctr">
-                      <a:solidFill>
-                        <a:srgbClr val="000000"/>
-                      </a:solidFill>
-                      <a:prstDash val="solid"/>
-                    </a:lnR>
-                    <a:lnT w="12700" cap="flat" cmpd="sng" algn="ctr">
-                      <a:solidFill>
-                        <a:srgbClr val="000000"/>
-                      </a:solidFill>
-                      <a:prstDash val="solid"/>
-                    </a:lnT>
-                    <a:lnB w="12700" cap="flat" cmpd="sng" algn="ctr">
-                      <a:solidFill>
-                        <a:srgbClr val="000000"/>
-                      </a:solidFill>
-                      <a:prstDash val="solid"/>
-                    </a:lnB>
-                  </a:tcPr>
-                </a:tc>
-              </a:tr>
-              <a:tr h="658368">
-                <a:tc>
-                  <a:txBody>
-                    <a:bodyPr wrap="square"/>
-                    <a:lstStyle/>
-                    <a:p>
-                      <a:r>
-                        <a:rPr sz="1600" b="1">
-                          <a:solidFill>
-                            <a:srgbClr val="000000"/>
-                          </a:solidFill>
-                          <a:latin typeface="Arial"/>
-                        </a:rPr>
-                        <a:t>Research gap</a:t>
-                      </a:r>
-                    </a:p>
-                  </a:txBody>
-                  <a:tcPr marL="73152" marR="73152" marT="36576" marB="36576">
-                    <a:solidFill>
-                      <a:srgbClr val="FFFFFF"/>
-                    </a:solidFill>
-                    <a:lnL w="12700" cap="flat" cmpd="sng" algn="ctr">
-                      <a:solidFill>
-                        <a:srgbClr val="000000"/>
-                      </a:solidFill>
-                      <a:prstDash val="solid"/>
-                    </a:lnL>
-                    <a:lnR w="12700" cap="flat" cmpd="sng" algn="ctr">
-                      <a:solidFill>
-                        <a:srgbClr val="000000"/>
-                      </a:solidFill>
-                      <a:prstDash val="solid"/>
-                    </a:lnR>
-                    <a:lnT w="12700" cap="flat" cmpd="sng" algn="ctr">
-                      <a:solidFill>
-                        <a:srgbClr val="000000"/>
-                      </a:solidFill>
-                      <a:prstDash val="solid"/>
-                    </a:lnT>
-                    <a:lnB w="12700" cap="flat" cmpd="sng" algn="ctr">
-                      <a:solidFill>
-                        <a:srgbClr val="000000"/>
-                      </a:solidFill>
-                      <a:prstDash val="solid"/>
-                    </a:lnB>
-                  </a:tcPr>
-                </a:tc>
-                <a:tc>
-                  <a:txBody>
-                    <a:bodyPr wrap="square"/>
-                    <a:lstStyle/>
-                    <a:p>
-                      <a:r>
-                        <a:rPr sz="1600" b="0">
-                          <a:solidFill>
-                            <a:srgbClr val="000000"/>
-                          </a:solidFill>
-                          <a:latin typeface="Arial"/>
-                        </a:rPr>
-                        <a:t>Foundation models were never tested on hair fall data; CatBoost was never tuned; no side-by-side explanations.</a:t>
-                      </a:r>
-                    </a:p>
-                  </a:txBody>
-                  <a:tcPr marL="73152" marR="73152" marT="36576" marB="36576">
-                    <a:solidFill>
-                      <a:srgbClr val="FFFFFF"/>
-                    </a:solidFill>
-                    <a:lnL w="12700" cap="flat" cmpd="sng" algn="ctr">
-                      <a:solidFill>
-                        <a:srgbClr val="000000"/>
-                      </a:solidFill>
-                      <a:prstDash val="solid"/>
-                    </a:lnL>
-                    <a:lnR w="12700" cap="flat" cmpd="sng" algn="ctr">
-                      <a:solidFill>
-                        <a:srgbClr val="000000"/>
-                      </a:solidFill>
-                      <a:prstDash val="solid"/>
-                    </a:lnR>
-                    <a:lnT w="12700" cap="flat" cmpd="sng" algn="ctr">
-                      <a:solidFill>
-                        <a:srgbClr val="000000"/>
-                      </a:solidFill>
-                      <a:prstDash val="solid"/>
-                    </a:lnT>
-                    <a:lnB w="12700" cap="flat" cmpd="sng" algn="ctr">
-                      <a:solidFill>
-                        <a:srgbClr val="000000"/>
-                      </a:solidFill>
-                      <a:prstDash val="solid"/>
-                    </a:lnB>
-                  </a:tcPr>
-                </a:tc>
-              </a:tr>
-              <a:tr h="658368">
-                <a:tc>
-                  <a:txBody>
-                    <a:bodyPr wrap="square"/>
-                    <a:lstStyle/>
-                    <a:p>
-                      <a:r>
-                        <a:rPr sz="1600" b="1">
-                          <a:solidFill>
-                            <a:srgbClr val="000000"/>
-                          </a:solidFill>
-                          <a:latin typeface="Arial"/>
-                        </a:rPr>
-                        <a:t>Data</a:t>
-                      </a:r>
-                    </a:p>
-                  </a:txBody>
-                  <a:tcPr marL="73152" marR="73152" marT="36576" marB="36576">
-                    <a:solidFill>
-                      <a:srgbClr val="FFFFFF"/>
-                    </a:solidFill>
-                    <a:lnL w="12700" cap="flat" cmpd="sng" algn="ctr">
-                      <a:solidFill>
-                        <a:srgbClr val="000000"/>
-                      </a:solidFill>
-                      <a:prstDash val="solid"/>
-                    </a:lnL>
-                    <a:lnR w="12700" cap="flat" cmpd="sng" algn="ctr">
-                      <a:solidFill>
-                        <a:srgbClr val="000000"/>
-                      </a:solidFill>
-                      <a:prstDash val="solid"/>
-                    </a:lnR>
-                    <a:lnT w="12700" cap="flat" cmpd="sng" algn="ctr">
-                      <a:solidFill>
-                        <a:srgbClr val="000000"/>
-                      </a:solidFill>
-                      <a:prstDash val="solid"/>
-                    </a:lnT>
-                    <a:lnB w="12700" cap="flat" cmpd="sng" algn="ctr">
-                      <a:solidFill>
-                        <a:srgbClr val="000000"/>
-                      </a:solidFill>
-                      <a:prstDash val="solid"/>
-                    </a:lnB>
-                  </a:tcPr>
-                </a:tc>
-                <a:tc>
-                  <a:txBody>
-                    <a:bodyPr wrap="square"/>
-                    <a:lstStyle/>
-                    <a:p>
-                      <a:r>
-                        <a:rPr sz="1600" b="0">
-                          <a:solidFill>
-                            <a:srgbClr val="000000"/>
-                          </a:solidFill>
-                          <a:latin typeface="Arial"/>
-                        </a:rPr>
-                        <a:t>21,606 records, 20 features (blood and body measurements, lifestyle, clinical), 3 risk tiers: Low, Moderate, High.</a:t>
-                      </a:r>
-                    </a:p>
-                  </a:txBody>
-                  <a:tcPr marL="73152" marR="73152" marT="36576" marB="36576">
-                    <a:solidFill>
-                      <a:srgbClr val="FFFFFF"/>
-                    </a:solidFill>
-                    <a:lnL w="12700" cap="flat" cmpd="sng" algn="ctr">
-                      <a:solidFill>
-                        <a:srgbClr val="000000"/>
-                      </a:solidFill>
-                      <a:prstDash val="solid"/>
-                    </a:lnL>
-                    <a:lnR w="12700" cap="flat" cmpd="sng" algn="ctr">
-                      <a:solidFill>
-                        <a:srgbClr val="000000"/>
-                      </a:solidFill>
-                      <a:prstDash val="solid"/>
-                    </a:lnR>
-                    <a:lnT w="12700" cap="flat" cmpd="sng" algn="ctr">
-                      <a:solidFill>
-                        <a:srgbClr val="000000"/>
-                      </a:solidFill>
-                      <a:prstDash val="solid"/>
-                    </a:lnT>
-                    <a:lnB w="12700" cap="flat" cmpd="sng" algn="ctr">
-                      <a:solidFill>
-                        <a:srgbClr val="000000"/>
-                      </a:solidFill>
-                      <a:prstDash val="solid"/>
-                    </a:lnB>
-                  </a:tcPr>
-                </a:tc>
-              </a:tr>
-              <a:tr h="658368">
-                <a:tc>
-                  <a:txBody>
-                    <a:bodyPr wrap="square"/>
-                    <a:lstStyle/>
-                    <a:p>
-                      <a:r>
-                        <a:rPr sz="1600" b="1">
-                          <a:solidFill>
-                            <a:srgbClr val="000000"/>
-                          </a:solidFill>
-                          <a:latin typeface="Arial"/>
-                        </a:rPr>
-                        <a:t>Method</a:t>
-                      </a:r>
-                    </a:p>
-                  </a:txBody>
-                  <a:tcPr marL="73152" marR="73152" marT="36576" marB="36576">
-                    <a:solidFill>
-                      <a:srgbClr val="FFFFFF"/>
-                    </a:solidFill>
-                    <a:lnL w="12700" cap="flat" cmpd="sng" algn="ctr">
-                      <a:solidFill>
-                        <a:srgbClr val="000000"/>
-                      </a:solidFill>
-                      <a:prstDash val="solid"/>
-                    </a:lnL>
-                    <a:lnR w="12700" cap="flat" cmpd="sng" algn="ctr">
-                      <a:solidFill>
-                        <a:srgbClr val="000000"/>
-                      </a:solidFill>
-                      <a:prstDash val="solid"/>
-                    </a:lnR>
-                    <a:lnT w="12700" cap="flat" cmpd="sng" algn="ctr">
-                      <a:solidFill>
-                        <a:srgbClr val="000000"/>
-                      </a:solidFill>
-                      <a:prstDash val="solid"/>
-                    </a:lnT>
-                    <a:lnB w="12700" cap="flat" cmpd="sng" algn="ctr">
-                      <a:solidFill>
-                        <a:srgbClr val="000000"/>
-                      </a:solidFill>
-                      <a:prstDash val="solid"/>
-                    </a:lnB>
-                  </a:tcPr>
-                </a:tc>
-                <a:tc>
-                  <a:txBody>
-                    <a:bodyPr wrap="square"/>
-                    <a:lstStyle/>
-                    <a:p>
-                      <a:r>
-                        <a:rPr sz="1600" b="0">
-                          <a:solidFill>
-                            <a:srgbClr val="000000"/>
-                          </a:solidFill>
-                          <a:latin typeface="Arial"/>
-                        </a:rPr>
-                        <a:t>Same split for all models; CatBoost tuned, TabPFN and TabFM without tuning; SHAP; accuracy, macro-F1, ROC-AUC, McNemar's test.</a:t>
-                      </a:r>
-                    </a:p>
-                  </a:txBody>
-                  <a:tcPr marL="73152" marR="73152" marT="36576" marB="36576">
-                    <a:solidFill>
-                      <a:srgbClr val="FFFFFF"/>
-                    </a:solidFill>
-                    <a:lnL w="12700" cap="flat" cmpd="sng" algn="ctr">
-                      <a:solidFill>
-                        <a:srgbClr val="000000"/>
-                      </a:solidFill>
-                      <a:prstDash val="solid"/>
-                    </a:lnL>
-                    <a:lnR w="12700" cap="flat" cmpd="sng" algn="ctr">
-                      <a:solidFill>
-                        <a:srgbClr val="000000"/>
-                      </a:solidFill>
-                      <a:prstDash val="solid"/>
-                    </a:lnR>
-                    <a:lnT w="12700" cap="flat" cmpd="sng" algn="ctr">
-                      <a:solidFill>
-                        <a:srgbClr val="000000"/>
-                      </a:solidFill>
-                      <a:prstDash val="solid"/>
-                    </a:lnT>
-                    <a:lnB w="12700" cap="flat" cmpd="sng" algn="ctr">
-                      <a:solidFill>
-                        <a:srgbClr val="000000"/>
-                      </a:solidFill>
-                      <a:prstDash val="solid"/>
-                    </a:lnB>
-                  </a:tcPr>
-                </a:tc>
-              </a:tr>
-              <a:tr h="658368">
-                <a:tc>
-                  <a:txBody>
-                    <a:bodyPr wrap="square"/>
-                    <a:lstStyle/>
-                    <a:p>
-                      <a:r>
-                        <a:rPr sz="1600" b="1">
-                          <a:solidFill>
-                            <a:srgbClr val="000000"/>
-                          </a:solidFill>
-                          <a:latin typeface="Arial"/>
-                        </a:rPr>
-                        <a:t>Expected outcome</a:t>
-                      </a:r>
-                    </a:p>
-                  </a:txBody>
-                  <a:tcPr marL="73152" marR="73152" marT="36576" marB="36576">
-                    <a:solidFill>
-                      <a:srgbClr val="FFFFFF"/>
-                    </a:solidFill>
-                    <a:lnL w="12700" cap="flat" cmpd="sng" algn="ctr">
-                      <a:solidFill>
-                        <a:srgbClr val="000000"/>
-                      </a:solidFill>
-                      <a:prstDash val="solid"/>
-                    </a:lnL>
-                    <a:lnR w="12700" cap="flat" cmpd="sng" algn="ctr">
-                      <a:solidFill>
-                        <a:srgbClr val="000000"/>
-                      </a:solidFill>
-                      <a:prstDash val="solid"/>
-                    </a:lnR>
-                    <a:lnT w="12700" cap="flat" cmpd="sng" algn="ctr">
-                      <a:solidFill>
-                        <a:srgbClr val="000000"/>
-                      </a:solidFill>
-                      <a:prstDash val="solid"/>
-                    </a:lnT>
-                    <a:lnB w="12700" cap="flat" cmpd="sng" algn="ctr">
-                      <a:solidFill>
-                        <a:srgbClr val="000000"/>
-                      </a:solidFill>
-                      <a:prstDash val="solid"/>
-                    </a:lnB>
-                  </a:tcPr>
-                </a:tc>
-                <a:tc>
-                  <a:txBody>
-                    <a:bodyPr wrap="square"/>
-                    <a:lstStyle/>
-                    <a:p>
-                      <a:r>
-                        <a:rPr sz="1600" b="0">
-                          <a:solidFill>
-                            <a:srgbClr val="000000"/>
-                          </a:solidFill>
-                          <a:latin typeface="Arial"/>
-                        </a:rPr>
-                        <a:t>A fair comparison, a strong tuned baseline, TabFM limits recorded, and explanations checked against known biology.</a:t>
-                      </a:r>
-                    </a:p>
-                  </a:txBody>
-                  <a:tcPr marL="73152" marR="73152" marT="36576" marB="36576">
-                    <a:solidFill>
-                      <a:srgbClr val="FFFFFF"/>
-                    </a:solidFill>
-                    <a:lnL w="12700" cap="flat" cmpd="sng" algn="ctr">
-                      <a:solidFill>
-                        <a:srgbClr val="000000"/>
-                      </a:solidFill>
-                      <a:prstDash val="solid"/>
-                    </a:lnL>
-                    <a:lnR w="12700" cap="flat" cmpd="sng" algn="ctr">
-                      <a:solidFill>
-                        <a:srgbClr val="000000"/>
-                      </a:solidFill>
-                      <a:prstDash val="solid"/>
-                    </a:lnR>
-                    <a:lnT w="12700" cap="flat" cmpd="sng" algn="ctr">
-                      <a:solidFill>
-                        <a:srgbClr val="000000"/>
-                      </a:solidFill>
-                      <a:prstDash val="solid"/>
-                    </a:lnT>
-                    <a:lnB w="12700" cap="flat" cmpd="sng" algn="ctr">
-                      <a:solidFill>
-                        <a:srgbClr val="000000"/>
-                      </a:solidFill>
-                      <a:prstDash val="solid"/>
-                    </a:lnB>
-                  </a:tcPr>
-                </a:tc>
-              </a:tr>
-              <a:tr h="658368">
-                <a:tc>
-                  <a:txBody>
-                    <a:bodyPr wrap="square"/>
-                    <a:lstStyle/>
-                    <a:p>
-                      <a:r>
-                        <a:rPr sz="1600" b="1">
-                          <a:solidFill>
-                            <a:srgbClr val="000000"/>
-                          </a:solidFill>
-                          <a:latin typeface="Arial"/>
-                        </a:rPr>
-                        <a:t>Time</a:t>
-                      </a:r>
-                    </a:p>
-                  </a:txBody>
-                  <a:tcPr marL="73152" marR="73152" marT="36576" marB="36576">
-                    <a:solidFill>
-                      <a:srgbClr val="FFFFFF"/>
-                    </a:solidFill>
-                    <a:lnL w="12700" cap="flat" cmpd="sng" algn="ctr">
-                      <a:solidFill>
-                        <a:srgbClr val="000000"/>
-                      </a:solidFill>
-                      <a:prstDash val="solid"/>
-                    </a:lnL>
-                    <a:lnR w="12700" cap="flat" cmpd="sng" algn="ctr">
-                      <a:solidFill>
-                        <a:srgbClr val="000000"/>
-                      </a:solidFill>
-                      <a:prstDash val="solid"/>
-                    </a:lnR>
-                    <a:lnT w="12700" cap="flat" cmpd="sng" algn="ctr">
-                      <a:solidFill>
-                        <a:srgbClr val="000000"/>
-                      </a:solidFill>
-                      <a:prstDash val="solid"/>
-                    </a:lnT>
-                    <a:lnB w="12700" cap="flat" cmpd="sng" algn="ctr">
-                      <a:solidFill>
-                        <a:srgbClr val="000000"/>
-                      </a:solidFill>
-                      <a:prstDash val="solid"/>
-                    </a:lnB>
-                  </a:tcPr>
-                </a:tc>
-                <a:tc>
-                  <a:txBody>
-                    <a:bodyPr wrap="square"/>
-                    <a:lstStyle/>
-                    <a:p>
-                      <a:r>
-                        <a:rPr sz="1600" b="0">
-                          <a:solidFill>
-                            <a:srgbClr val="000000"/>
-                          </a:solidFill>
-                          <a:latin typeface="Arial"/>
-                        </a:rPr>
-                        <a:t>4 months: proposal work (Months 1 and 2) and final work (Months 3 and 4).</a:t>
-                      </a:r>
-                    </a:p>
-                  </a:txBody>
-                  <a:tcPr marL="73152" marR="73152" marT="36576" marB="36576">
-                    <a:solidFill>
-                      <a:srgbClr val="FFFFFF"/>
-                    </a:solidFill>
-                    <a:lnL w="12700" cap="flat" cmpd="sng" algn="ctr">
-                      <a:solidFill>
-                        <a:srgbClr val="000000"/>
-                      </a:solidFill>
-                      <a:prstDash val="solid"/>
-                    </a:lnL>
-                    <a:lnR w="12700" cap="flat" cmpd="sng" algn="ctr">
-                      <a:solidFill>
-                        <a:srgbClr val="000000"/>
-                      </a:solidFill>
-                      <a:prstDash val="solid"/>
-                    </a:lnR>
-                    <a:lnT w="12700" cap="flat" cmpd="sng" algn="ctr">
-                      <a:solidFill>
-                        <a:srgbClr val="000000"/>
-                      </a:solidFill>
-                      <a:prstDash val="solid"/>
-                    </a:lnT>
-                    <a:lnB w="12700" cap="flat" cmpd="sng" algn="ctr">
-                      <a:solidFill>
-                        <a:srgbClr val="000000"/>
-                      </a:solidFill>
-                      <a:prstDash val="solid"/>
-                    </a:lnB>
-                  </a:tcPr>
-                </a:tc>
-              </a:tr>
-            </a:tbl>
-          </a:graphicData>
-        </a:graphic>
-      </p:graphicFrame>
+        </p:nvSpPr>
+        <p:spPr>
+          <a:xfrm>
+            <a:off x="731520" y="1920240"/>
+            <a:ext cx="10698480" cy="3657600"/>
+          </a:xfrm>
+          <a:prstGeom prst="rect">
+            <a:avLst/>
+          </a:prstGeom>
+          <a:noFill/>
+        </p:spPr>
+        <p:txBody>
+          <a:bodyPr wrap="square" anchor="t" lIns="45720" rIns="45720">
+            <a:spAutoFit/>
+          </a:bodyPr>
+          <a:lstStyle/>
+          <a:p>
+            <a:pPr algn="l">
+              <a:spcAft>
+                <a:spcPts val="3000"/>
+              </a:spcAft>
+            </a:pPr>
+            <a:r>
+              <a:rPr sz="2800" b="0">
+                <a:solidFill>
+                  <a:srgbClr val="000000"/>
+                </a:solidFill>
+                <a:latin typeface="Arial"/>
+              </a:rPr>
+              <a:t>1.  Implement and benchmark CatBoost, TabPFN, and TabFM for multi-tier hair fall risk.</a:t>
+            </a:r>
+          </a:p>
+          <a:p>
+            <a:pPr algn="l">
+              <a:spcAft>
+                <a:spcPts val="3000"/>
+              </a:spcAft>
+            </a:pPr>
+            <a:r>
+              <a:rPr sz="2800" b="0">
+                <a:solidFill>
+                  <a:srgbClr val="000000"/>
+                </a:solidFill>
+                <a:latin typeface="Arial"/>
+              </a:rPr>
+              <a:t>2.  Explain every model with SHAP so each predicted risk tier can be traced to specific indicators.</a:t>
+            </a:r>
+          </a:p>
+        </p:txBody>
+      </p:sp>
     </p:spTree>
   </p:cSld>
   <p:clrMapOvr>
@@ -8930,7 +8146,7 @@
 </p:sld>
 </file>
 
-<file path=ppt/slides/slide4.xml><?xml version="1.0" encoding="utf-8"?>
+<file path=ppt/slides/slide6.xml><?xml version="1.0" encoding="utf-8"?>
 <p:sld xmlns:a="http://schemas.openxmlformats.org/drawingml/2006/main" xmlns:p="http://schemas.openxmlformats.org/presentationml/2006/main" xmlns:r="http://schemas.openxmlformats.org/officeDocument/2006/relationships">
   <p:cSld>
     <p:spTree>
@@ -8974,7 +8190,7 @@
                 </a:solidFill>
                 <a:latin typeface="Arial"/>
               </a:rPr>
-              <a:t>Problem statement</a:t>
+              <a:t>Background: what causes hair loss</a:t>
             </a:r>
           </a:p>
         </p:txBody>
@@ -9087,114 +8303,507 @@
                 </a:solidFill>
                 <a:latin typeface="Arial"/>
               </a:rPr>
-              <a:t>4 / 16</a:t>
-            </a:r>
-          </a:p>
-        </p:txBody>
-      </p:sp>
-      <p:sp>
-        <p:nvSpPr>
-          <p:cNvPr id="6" name="TextBox 5"/>
-          <p:cNvSpPr txBox="1"/>
+              <a:t>6 / 14</a:t>
+            </a:r>
+          </a:p>
+        </p:txBody>
+      </p:sp>
+      <p:graphicFrame>
+        <p:nvGraphicFramePr>
+          <p:cNvPr id="6" name="Table 5"/>
+          <p:cNvGraphicFramePr>
+            <a:graphicFrameLocks noGrp="1"/>
+          </p:cNvGraphicFramePr>
           <p:nvPr/>
-        </p:nvSpPr>
-        <p:spPr>
-          <a:xfrm>
-            <a:off x="731520" y="1554480"/>
-            <a:ext cx="10698480" cy="4389120"/>
-          </a:xfrm>
-          <a:prstGeom prst="rect">
-            <a:avLst/>
-          </a:prstGeom>
-          <a:noFill/>
-        </p:spPr>
-        <p:txBody>
-          <a:bodyPr wrap="square" anchor="t" lIns="45720" rIns="45720">
-            <a:spAutoFit/>
-          </a:bodyPr>
-          <a:lstStyle/>
-          <a:p>
-            <a:pPr algn="l">
-              <a:spcAft>
-                <a:spcPts val="1600"/>
-              </a:spcAft>
-            </a:pPr>
-            <a:r>
-              <a:rPr sz="2200" b="0">
-                <a:solidFill>
-                  <a:srgbClr val="000000"/>
-                </a:solidFill>
-                <a:latin typeface="Arial"/>
-              </a:rPr>
-              <a:t>•  Hair loss risk is hard to judge: hormones, nutrition, stress, illness, and habits act together.</a:t>
-            </a:r>
-          </a:p>
-          <a:p>
-            <a:pPr algn="l">
-              <a:spcAft>
-                <a:spcPts val="1600"/>
-              </a:spcAft>
-            </a:pPr>
-            <a:r>
-              <a:rPr sz="2200" b="0">
-                <a:solidFill>
-                  <a:srgbClr val="000000"/>
-                </a:solidFill>
-                <a:latin typeface="Arial"/>
-              </a:rPr>
-              <a:t>•  Assessment often relies on self-reporting or late clinical checks, which are subjective and hard to reach in rural areas.</a:t>
-            </a:r>
-          </a:p>
-          <a:p>
-            <a:pPr algn="l">
-              <a:spcAft>
-                <a:spcPts val="1600"/>
-              </a:spcAft>
-            </a:pPr>
-            <a:r>
-              <a:rPr sz="2200" b="0">
-                <a:solidFill>
-                  <a:srgbClr val="000000"/>
-                </a:solidFill>
-                <a:latin typeface="Arial"/>
-              </a:rPr>
-              <a:t>•  Earlier prediction studies used classical algorithms and report very different accuracies (about 50% to 100%).</a:t>
-            </a:r>
-          </a:p>
-          <a:p>
-            <a:pPr algn="l">
-              <a:spcAft>
-                <a:spcPts val="1600"/>
-              </a:spcAft>
-            </a:pPr>
-            <a:r>
-              <a:rPr sz="2200" b="0">
-                <a:solidFill>
-                  <a:srgbClr val="000000"/>
-                </a:solidFill>
-                <a:latin typeface="Arial"/>
-              </a:rPr>
-              <a:t>•  Newer tabular foundation models (TabPFN, TabFM) have not been tested on hair fall data.</a:t>
-            </a:r>
-          </a:p>
-          <a:p>
-            <a:pPr algn="l">
-              <a:spcAft>
-                <a:spcPts val="1600"/>
-              </a:spcAft>
-            </a:pPr>
-            <a:r>
-              <a:rPr sz="2200" b="0">
-                <a:solidFill>
-                  <a:srgbClr val="000000"/>
-                </a:solidFill>
-                <a:latin typeface="Arial"/>
-              </a:rPr>
-              <a:t>•  Both gradient boosting and foundation models are hard to explain.</a:t>
-            </a:r>
-          </a:p>
-        </p:txBody>
-      </p:sp>
+        </p:nvGraphicFramePr>
+        <p:xfrm>
+          <a:off x="594360" y="1645920"/>
+          <a:ext cx="10972799" cy="3657600"/>
+        </p:xfrm>
+        <a:graphic>
+          <a:graphicData uri="http://schemas.openxmlformats.org/drawingml/2006/table">
+            <a:tbl>
+              <a:tblPr firstRow="0" bandRow="0">
+                <a:tableStyleId>{5940675A-B579-460E-94D1-54222C63F5DA}</a:tableStyleId>
+              </a:tblPr>
+              <a:tblGrid>
+                <a:gridCol w="3474720"/>
+                <a:gridCol w="7498079"/>
+              </a:tblGrid>
+              <a:tr h="731520">
+                <a:tc>
+                  <a:txBody>
+                    <a:bodyPr wrap="square"/>
+                    <a:lstStyle/>
+                    <a:p>
+                      <a:r>
+                        <a:rPr sz="2000" b="1">
+                          <a:solidFill>
+                            <a:srgbClr val="000000"/>
+                          </a:solidFill>
+                          <a:latin typeface="Arial"/>
+                        </a:rPr>
+                        <a:t>Factor</a:t>
+                      </a:r>
+                    </a:p>
+                  </a:txBody>
+                  <a:tcPr marL="73152" marR="73152" marT="36576" marB="36576">
+                    <a:solidFill>
+                      <a:srgbClr val="EEEEEE"/>
+                    </a:solidFill>
+                    <a:lnL w="12700" cap="flat" cmpd="sng" algn="ctr">
+                      <a:solidFill>
+                        <a:srgbClr val="000000"/>
+                      </a:solidFill>
+                      <a:prstDash val="solid"/>
+                    </a:lnL>
+                    <a:lnR w="12700" cap="flat" cmpd="sng" algn="ctr">
+                      <a:solidFill>
+                        <a:srgbClr val="000000"/>
+                      </a:solidFill>
+                      <a:prstDash val="solid"/>
+                    </a:lnR>
+                    <a:lnT w="12700" cap="flat" cmpd="sng" algn="ctr">
+                      <a:solidFill>
+                        <a:srgbClr val="000000"/>
+                      </a:solidFill>
+                      <a:prstDash val="solid"/>
+                    </a:lnT>
+                    <a:lnB w="12700" cap="flat" cmpd="sng" algn="ctr">
+                      <a:solidFill>
+                        <a:srgbClr val="000000"/>
+                      </a:solidFill>
+                      <a:prstDash val="solid"/>
+                    </a:lnB>
+                  </a:tcPr>
+                </a:tc>
+                <a:tc>
+                  <a:txBody>
+                    <a:bodyPr wrap="square"/>
+                    <a:lstStyle/>
+                    <a:p>
+                      <a:r>
+                        <a:rPr sz="2000" b="1">
+                          <a:solidFill>
+                            <a:srgbClr val="000000"/>
+                          </a:solidFill>
+                          <a:latin typeface="Arial"/>
+                        </a:rPr>
+                        <a:t>What it does</a:t>
+                      </a:r>
+                    </a:p>
+                  </a:txBody>
+                  <a:tcPr marL="73152" marR="73152" marT="36576" marB="36576">
+                    <a:solidFill>
+                      <a:srgbClr val="EEEEEE"/>
+                    </a:solidFill>
+                    <a:lnL w="12700" cap="flat" cmpd="sng" algn="ctr">
+                      <a:solidFill>
+                        <a:srgbClr val="000000"/>
+                      </a:solidFill>
+                      <a:prstDash val="solid"/>
+                    </a:lnL>
+                    <a:lnR w="12700" cap="flat" cmpd="sng" algn="ctr">
+                      <a:solidFill>
+                        <a:srgbClr val="000000"/>
+                      </a:solidFill>
+                      <a:prstDash val="solid"/>
+                    </a:lnR>
+                    <a:lnT w="12700" cap="flat" cmpd="sng" algn="ctr">
+                      <a:solidFill>
+                        <a:srgbClr val="000000"/>
+                      </a:solidFill>
+                      <a:prstDash val="solid"/>
+                    </a:lnT>
+                    <a:lnB w="12700" cap="flat" cmpd="sng" algn="ctr">
+                      <a:solidFill>
+                        <a:srgbClr val="000000"/>
+                      </a:solidFill>
+                      <a:prstDash val="solid"/>
+                    </a:lnB>
+                  </a:tcPr>
+                </a:tc>
+              </a:tr>
+              <a:tr h="731520">
+                <a:tc>
+                  <a:txBody>
+                    <a:bodyPr wrap="square"/>
+                    <a:lstStyle/>
+                    <a:p>
+                      <a:r>
+                        <a:rPr sz="2000" b="0">
+                          <a:solidFill>
+                            <a:srgbClr val="000000"/>
+                          </a:solidFill>
+                          <a:latin typeface="Arial"/>
+                        </a:rPr>
+                        <a:t>Hormones and heredity</a:t>
+                      </a:r>
+                    </a:p>
+                  </a:txBody>
+                  <a:tcPr marL="73152" marR="73152" marT="36576" marB="36576">
+                    <a:solidFill>
+                      <a:srgbClr val="FFFFFF"/>
+                    </a:solidFill>
+                    <a:lnL w="12700" cap="flat" cmpd="sng" algn="ctr">
+                      <a:solidFill>
+                        <a:srgbClr val="000000"/>
+                      </a:solidFill>
+                      <a:prstDash val="solid"/>
+                    </a:lnL>
+                    <a:lnR w="12700" cap="flat" cmpd="sng" algn="ctr">
+                      <a:solidFill>
+                        <a:srgbClr val="000000"/>
+                      </a:solidFill>
+                      <a:prstDash val="solid"/>
+                    </a:lnR>
+                    <a:lnT w="12700" cap="flat" cmpd="sng" algn="ctr">
+                      <a:solidFill>
+                        <a:srgbClr val="000000"/>
+                      </a:solidFill>
+                      <a:prstDash val="solid"/>
+                    </a:lnT>
+                    <a:lnB w="12700" cap="flat" cmpd="sng" algn="ctr">
+                      <a:solidFill>
+                        <a:srgbClr val="000000"/>
+                      </a:solidFill>
+                      <a:prstDash val="solid"/>
+                    </a:lnB>
+                  </a:tcPr>
+                </a:tc>
+                <a:tc>
+                  <a:txBody>
+                    <a:bodyPr wrap="square"/>
+                    <a:lstStyle/>
+                    <a:p>
+                      <a:r>
+                        <a:rPr sz="2000" b="0">
+                          <a:solidFill>
+                            <a:srgbClr val="000000"/>
+                          </a:solidFill>
+                          <a:latin typeface="Arial"/>
+                        </a:rPr>
+                        <a:t>Inherited sensitivity to androgens; family history matters</a:t>
+                      </a:r>
+                    </a:p>
+                  </a:txBody>
+                  <a:tcPr marL="73152" marR="73152" marT="36576" marB="36576">
+                    <a:solidFill>
+                      <a:srgbClr val="FFFFFF"/>
+                    </a:solidFill>
+                    <a:lnL w="12700" cap="flat" cmpd="sng" algn="ctr">
+                      <a:solidFill>
+                        <a:srgbClr val="000000"/>
+                      </a:solidFill>
+                      <a:prstDash val="solid"/>
+                    </a:lnL>
+                    <a:lnR w="12700" cap="flat" cmpd="sng" algn="ctr">
+                      <a:solidFill>
+                        <a:srgbClr val="000000"/>
+                      </a:solidFill>
+                      <a:prstDash val="solid"/>
+                    </a:lnR>
+                    <a:lnT w="12700" cap="flat" cmpd="sng" algn="ctr">
+                      <a:solidFill>
+                        <a:srgbClr val="000000"/>
+                      </a:solidFill>
+                      <a:prstDash val="solid"/>
+                    </a:lnT>
+                    <a:lnB w="12700" cap="flat" cmpd="sng" algn="ctr">
+                      <a:solidFill>
+                        <a:srgbClr val="000000"/>
+                      </a:solidFill>
+                      <a:prstDash val="solid"/>
+                    </a:lnB>
+                  </a:tcPr>
+                </a:tc>
+              </a:tr>
+              <a:tr h="731520">
+                <a:tc>
+                  <a:txBody>
+                    <a:bodyPr wrap="square"/>
+                    <a:lstStyle/>
+                    <a:p>
+                      <a:r>
+                        <a:rPr sz="2000" b="0">
+                          <a:solidFill>
+                            <a:srgbClr val="000000"/>
+                          </a:solidFill>
+                          <a:latin typeface="Arial"/>
+                        </a:rPr>
+                        <a:t>Nutrition and iron</a:t>
+                      </a:r>
+                    </a:p>
+                  </a:txBody>
+                  <a:tcPr marL="73152" marR="73152" marT="36576" marB="36576">
+                    <a:solidFill>
+                      <a:srgbClr val="FFFFFF"/>
+                    </a:solidFill>
+                    <a:lnL w="12700" cap="flat" cmpd="sng" algn="ctr">
+                      <a:solidFill>
+                        <a:srgbClr val="000000"/>
+                      </a:solidFill>
+                      <a:prstDash val="solid"/>
+                    </a:lnL>
+                    <a:lnR w="12700" cap="flat" cmpd="sng" algn="ctr">
+                      <a:solidFill>
+                        <a:srgbClr val="000000"/>
+                      </a:solidFill>
+                      <a:prstDash val="solid"/>
+                    </a:lnR>
+                    <a:lnT w="12700" cap="flat" cmpd="sng" algn="ctr">
+                      <a:solidFill>
+                        <a:srgbClr val="000000"/>
+                      </a:solidFill>
+                      <a:prstDash val="solid"/>
+                    </a:lnT>
+                    <a:lnB w="12700" cap="flat" cmpd="sng" algn="ctr">
+                      <a:solidFill>
+                        <a:srgbClr val="000000"/>
+                      </a:solidFill>
+                      <a:prstDash val="solid"/>
+                    </a:lnB>
+                  </a:tcPr>
+                </a:tc>
+                <a:tc>
+                  <a:txBody>
+                    <a:bodyPr wrap="square"/>
+                    <a:lstStyle/>
+                    <a:p>
+                      <a:r>
+                        <a:rPr sz="2000" b="0">
+                          <a:solidFill>
+                            <a:srgbClr val="000000"/>
+                          </a:solidFill>
+                          <a:latin typeface="Arial"/>
+                        </a:rPr>
+                        <a:t>Shortage of iron, zinc, and vitamins weakens follicles</a:t>
+                      </a:r>
+                    </a:p>
+                  </a:txBody>
+                  <a:tcPr marL="73152" marR="73152" marT="36576" marB="36576">
+                    <a:solidFill>
+                      <a:srgbClr val="FFFFFF"/>
+                    </a:solidFill>
+                    <a:lnL w="12700" cap="flat" cmpd="sng" algn="ctr">
+                      <a:solidFill>
+                        <a:srgbClr val="000000"/>
+                      </a:solidFill>
+                      <a:prstDash val="solid"/>
+                    </a:lnL>
+                    <a:lnR w="12700" cap="flat" cmpd="sng" algn="ctr">
+                      <a:solidFill>
+                        <a:srgbClr val="000000"/>
+                      </a:solidFill>
+                      <a:prstDash val="solid"/>
+                    </a:lnR>
+                    <a:lnT w="12700" cap="flat" cmpd="sng" algn="ctr">
+                      <a:solidFill>
+                        <a:srgbClr val="000000"/>
+                      </a:solidFill>
+                      <a:prstDash val="solid"/>
+                    </a:lnT>
+                    <a:lnB w="12700" cap="flat" cmpd="sng" algn="ctr">
+                      <a:solidFill>
+                        <a:srgbClr val="000000"/>
+                      </a:solidFill>
+                      <a:prstDash val="solid"/>
+                    </a:lnB>
+                  </a:tcPr>
+                </a:tc>
+              </a:tr>
+              <a:tr h="731520">
+                <a:tc>
+                  <a:txBody>
+                    <a:bodyPr wrap="square"/>
+                    <a:lstStyle/>
+                    <a:p>
+                      <a:r>
+                        <a:rPr sz="2000" b="0">
+                          <a:solidFill>
+                            <a:srgbClr val="000000"/>
+                          </a:solidFill>
+                          <a:latin typeface="Arial"/>
+                        </a:rPr>
+                        <a:t>Thyroid function</a:t>
+                      </a:r>
+                    </a:p>
+                  </a:txBody>
+                  <a:tcPr marL="73152" marR="73152" marT="36576" marB="36576">
+                    <a:solidFill>
+                      <a:srgbClr val="FFFFFF"/>
+                    </a:solidFill>
+                    <a:lnL w="12700" cap="flat" cmpd="sng" algn="ctr">
+                      <a:solidFill>
+                        <a:srgbClr val="000000"/>
+                      </a:solidFill>
+                      <a:prstDash val="solid"/>
+                    </a:lnL>
+                    <a:lnR w="12700" cap="flat" cmpd="sng" algn="ctr">
+                      <a:solidFill>
+                        <a:srgbClr val="000000"/>
+                      </a:solidFill>
+                      <a:prstDash val="solid"/>
+                    </a:lnR>
+                    <a:lnT w="12700" cap="flat" cmpd="sng" algn="ctr">
+                      <a:solidFill>
+                        <a:srgbClr val="000000"/>
+                      </a:solidFill>
+                      <a:prstDash val="solid"/>
+                    </a:lnT>
+                    <a:lnB w="12700" cap="flat" cmpd="sng" algn="ctr">
+                      <a:solidFill>
+                        <a:srgbClr val="000000"/>
+                      </a:solidFill>
+                      <a:prstDash val="solid"/>
+                    </a:lnB>
+                  </a:tcPr>
+                </a:tc>
+                <a:tc>
+                  <a:txBody>
+                    <a:bodyPr wrap="square"/>
+                    <a:lstStyle/>
+                    <a:p>
+                      <a:r>
+                        <a:rPr sz="2000" b="0">
+                          <a:solidFill>
+                            <a:srgbClr val="000000"/>
+                          </a:solidFill>
+                          <a:latin typeface="Arial"/>
+                        </a:rPr>
+                        <a:t>Thyroid hormones regulate the hair cycle</a:t>
+                      </a:r>
+                    </a:p>
+                  </a:txBody>
+                  <a:tcPr marL="73152" marR="73152" marT="36576" marB="36576">
+                    <a:solidFill>
+                      <a:srgbClr val="FFFFFF"/>
+                    </a:solidFill>
+                    <a:lnL w="12700" cap="flat" cmpd="sng" algn="ctr">
+                      <a:solidFill>
+                        <a:srgbClr val="000000"/>
+                      </a:solidFill>
+                      <a:prstDash val="solid"/>
+                    </a:lnL>
+                    <a:lnR w="12700" cap="flat" cmpd="sng" algn="ctr">
+                      <a:solidFill>
+                        <a:srgbClr val="000000"/>
+                      </a:solidFill>
+                      <a:prstDash val="solid"/>
+                    </a:lnR>
+                    <a:lnT w="12700" cap="flat" cmpd="sng" algn="ctr">
+                      <a:solidFill>
+                        <a:srgbClr val="000000"/>
+                      </a:solidFill>
+                      <a:prstDash val="solid"/>
+                    </a:lnT>
+                    <a:lnB w="12700" cap="flat" cmpd="sng" algn="ctr">
+                      <a:solidFill>
+                        <a:srgbClr val="000000"/>
+                      </a:solidFill>
+                      <a:prstDash val="solid"/>
+                    </a:lnB>
+                  </a:tcPr>
+                </a:tc>
+              </a:tr>
+              <a:tr h="731520">
+                <a:tc>
+                  <a:txBody>
+                    <a:bodyPr wrap="square"/>
+                    <a:lstStyle/>
+                    <a:p>
+                      <a:r>
+                        <a:rPr sz="2000" b="0">
+                          <a:solidFill>
+                            <a:srgbClr val="000000"/>
+                          </a:solidFill>
+                          <a:latin typeface="Arial"/>
+                        </a:rPr>
+                        <a:t>Psychological stress</a:t>
+                      </a:r>
+                    </a:p>
+                  </a:txBody>
+                  <a:tcPr marL="73152" marR="73152" marT="36576" marB="36576">
+                    <a:solidFill>
+                      <a:srgbClr val="FFFFFF"/>
+                    </a:solidFill>
+                    <a:lnL w="12700" cap="flat" cmpd="sng" algn="ctr">
+                      <a:solidFill>
+                        <a:srgbClr val="000000"/>
+                      </a:solidFill>
+                      <a:prstDash val="solid"/>
+                    </a:lnL>
+                    <a:lnR w="12700" cap="flat" cmpd="sng" algn="ctr">
+                      <a:solidFill>
+                        <a:srgbClr val="000000"/>
+                      </a:solidFill>
+                      <a:prstDash val="solid"/>
+                    </a:lnR>
+                    <a:lnT w="12700" cap="flat" cmpd="sng" algn="ctr">
+                      <a:solidFill>
+                        <a:srgbClr val="000000"/>
+                      </a:solidFill>
+                      <a:prstDash val="solid"/>
+                    </a:lnT>
+                    <a:lnB w="12700" cap="flat" cmpd="sng" algn="ctr">
+                      <a:solidFill>
+                        <a:srgbClr val="000000"/>
+                      </a:solidFill>
+                      <a:prstDash val="solid"/>
+                    </a:lnB>
+                  </a:tcPr>
+                </a:tc>
+                <a:tc>
+                  <a:txBody>
+                    <a:bodyPr wrap="square"/>
+                    <a:lstStyle/>
+                    <a:p>
+                      <a:r>
+                        <a:rPr sz="2000" b="0">
+                          <a:solidFill>
+                            <a:srgbClr val="000000"/>
+                          </a:solidFill>
+                          <a:latin typeface="Arial"/>
+                        </a:rPr>
+                        <a:t>Pushes follicles into the resting phase early</a:t>
+                      </a:r>
+                    </a:p>
+                  </a:txBody>
+                  <a:tcPr marL="73152" marR="73152" marT="36576" marB="36576">
+                    <a:solidFill>
+                      <a:srgbClr val="FFFFFF"/>
+                    </a:solidFill>
+                    <a:lnL w="12700" cap="flat" cmpd="sng" algn="ctr">
+                      <a:solidFill>
+                        <a:srgbClr val="000000"/>
+                      </a:solidFill>
+                      <a:prstDash val="solid"/>
+                    </a:lnL>
+                    <a:lnR w="12700" cap="flat" cmpd="sng" algn="ctr">
+                      <a:solidFill>
+                        <a:srgbClr val="000000"/>
+                      </a:solidFill>
+                      <a:prstDash val="solid"/>
+                    </a:lnR>
+                    <a:lnT w="12700" cap="flat" cmpd="sng" algn="ctr">
+                      <a:solidFill>
+                        <a:srgbClr val="000000"/>
+                      </a:solidFill>
+                      <a:prstDash val="solid"/>
+                    </a:lnT>
+                    <a:lnB w="12700" cap="flat" cmpd="sng" algn="ctr">
+                      <a:solidFill>
+                        <a:srgbClr val="000000"/>
+                      </a:solidFill>
+                      <a:prstDash val="solid"/>
+                    </a:lnB>
+                  </a:tcPr>
+                </a:tc>
+              </a:tr>
+            </a:tbl>
+          </a:graphicData>
+        </a:graphic>
+      </p:graphicFrame>
     </p:spTree>
   </p:cSld>
   <p:clrMapOvr>
@@ -9203,7 +8812,7 @@
 </p:sld>
 </file>
 
-<file path=ppt/slides/slide5.xml><?xml version="1.0" encoding="utf-8"?>
+<file path=ppt/slides/slide7.xml><?xml version="1.0" encoding="utf-8"?>
 <p:sld xmlns:a="http://schemas.openxmlformats.org/drawingml/2006/main" xmlns:p="http://schemas.openxmlformats.org/presentationml/2006/main" xmlns:r="http://schemas.openxmlformats.org/officeDocument/2006/relationships">
   <p:cSld>
     <p:spTree>
@@ -9247,7 +8856,7 @@
                 </a:solidFill>
                 <a:latin typeface="Arial"/>
               </a:rPr>
-              <a:t>Objectives</a:t>
+              <a:t>Literature: what others did</a:t>
             </a:r>
           </a:p>
         </p:txBody>
@@ -9360,21 +8969,608 @@
                 </a:solidFill>
                 <a:latin typeface="Arial"/>
               </a:rPr>
-              <a:t>5 / 16</a:t>
-            </a:r>
-          </a:p>
-        </p:txBody>
-      </p:sp>
-      <p:sp>
-        <p:nvSpPr>
-          <p:cNvPr id="6" name="TextBox 5"/>
+              <a:t>7 / 14</a:t>
+            </a:r>
+          </a:p>
+        </p:txBody>
+      </p:sp>
+      <p:graphicFrame>
+        <p:nvGraphicFramePr>
+          <p:cNvPr id="6" name="Table 5"/>
+          <p:cNvGraphicFramePr>
+            <a:graphicFrameLocks noGrp="1"/>
+          </p:cNvGraphicFramePr>
+          <p:nvPr/>
+        </p:nvGraphicFramePr>
+        <p:xfrm>
+          <a:off x="594360" y="1645920"/>
+          <a:ext cx="10972800" cy="2926080"/>
+        </p:xfrm>
+        <a:graphic>
+          <a:graphicData uri="http://schemas.openxmlformats.org/drawingml/2006/table">
+            <a:tbl>
+              <a:tblPr firstRow="0" bandRow="0">
+                <a:tableStyleId>{5940675A-B579-460E-94D1-54222C63F5DA}</a:tableStyleId>
+              </a:tblPr>
+              <a:tblGrid>
+                <a:gridCol w="3474720"/>
+                <a:gridCol w="4572000"/>
+                <a:gridCol w="2926080"/>
+              </a:tblGrid>
+              <a:tr h="731520">
+                <a:tc>
+                  <a:txBody>
+                    <a:bodyPr wrap="square"/>
+                    <a:lstStyle/>
+                    <a:p>
+                      <a:r>
+                        <a:rPr sz="2000" b="1">
+                          <a:solidFill>
+                            <a:srgbClr val="000000"/>
+                          </a:solidFill>
+                          <a:latin typeface="Arial"/>
+                        </a:rPr>
+                        <a:t>Study</a:t>
+                      </a:r>
+                    </a:p>
+                  </a:txBody>
+                  <a:tcPr marL="73152" marR="73152" marT="36576" marB="36576">
+                    <a:solidFill>
+                      <a:srgbClr val="EEEEEE"/>
+                    </a:solidFill>
+                    <a:lnL w="12700" cap="flat" cmpd="sng" algn="ctr">
+                      <a:solidFill>
+                        <a:srgbClr val="000000"/>
+                      </a:solidFill>
+                      <a:prstDash val="solid"/>
+                    </a:lnL>
+                    <a:lnR w="12700" cap="flat" cmpd="sng" algn="ctr">
+                      <a:solidFill>
+                        <a:srgbClr val="000000"/>
+                      </a:solidFill>
+                      <a:prstDash val="solid"/>
+                    </a:lnR>
+                    <a:lnT w="12700" cap="flat" cmpd="sng" algn="ctr">
+                      <a:solidFill>
+                        <a:srgbClr val="000000"/>
+                      </a:solidFill>
+                      <a:prstDash val="solid"/>
+                    </a:lnT>
+                    <a:lnB w="12700" cap="flat" cmpd="sng" algn="ctr">
+                      <a:solidFill>
+                        <a:srgbClr val="000000"/>
+                      </a:solidFill>
+                      <a:prstDash val="solid"/>
+                    </a:lnB>
+                  </a:tcPr>
+                </a:tc>
+                <a:tc>
+                  <a:txBody>
+                    <a:bodyPr wrap="square"/>
+                    <a:lstStyle/>
+                    <a:p>
+                      <a:r>
+                        <a:rPr sz="2000" b="1">
+                          <a:solidFill>
+                            <a:srgbClr val="000000"/>
+                          </a:solidFill>
+                          <a:latin typeface="Arial"/>
+                        </a:rPr>
+                        <a:t>Models</a:t>
+                      </a:r>
+                    </a:p>
+                  </a:txBody>
+                  <a:tcPr marL="73152" marR="73152" marT="36576" marB="36576">
+                    <a:solidFill>
+                      <a:srgbClr val="EEEEEE"/>
+                    </a:solidFill>
+                    <a:lnL w="12700" cap="flat" cmpd="sng" algn="ctr">
+                      <a:solidFill>
+                        <a:srgbClr val="000000"/>
+                      </a:solidFill>
+                      <a:prstDash val="solid"/>
+                    </a:lnL>
+                    <a:lnR w="12700" cap="flat" cmpd="sng" algn="ctr">
+                      <a:solidFill>
+                        <a:srgbClr val="000000"/>
+                      </a:solidFill>
+                      <a:prstDash val="solid"/>
+                    </a:lnR>
+                    <a:lnT w="12700" cap="flat" cmpd="sng" algn="ctr">
+                      <a:solidFill>
+                        <a:srgbClr val="000000"/>
+                      </a:solidFill>
+                      <a:prstDash val="solid"/>
+                    </a:lnT>
+                    <a:lnB w="12700" cap="flat" cmpd="sng" algn="ctr">
+                      <a:solidFill>
+                        <a:srgbClr val="000000"/>
+                      </a:solidFill>
+                      <a:prstDash val="solid"/>
+                    </a:lnB>
+                  </a:tcPr>
+                </a:tc>
+                <a:tc>
+                  <a:txBody>
+                    <a:bodyPr wrap="square"/>
+                    <a:lstStyle/>
+                    <a:p>
+                      <a:r>
+                        <a:rPr sz="2000" b="1">
+                          <a:solidFill>
+                            <a:srgbClr val="000000"/>
+                          </a:solidFill>
+                          <a:latin typeface="Arial"/>
+                        </a:rPr>
+                        <a:t>Main result</a:t>
+                      </a:r>
+                    </a:p>
+                  </a:txBody>
+                  <a:tcPr marL="73152" marR="73152" marT="36576" marB="36576">
+                    <a:solidFill>
+                      <a:srgbClr val="EEEEEE"/>
+                    </a:solidFill>
+                    <a:lnL w="12700" cap="flat" cmpd="sng" algn="ctr">
+                      <a:solidFill>
+                        <a:srgbClr val="000000"/>
+                      </a:solidFill>
+                      <a:prstDash val="solid"/>
+                    </a:lnL>
+                    <a:lnR w="12700" cap="flat" cmpd="sng" algn="ctr">
+                      <a:solidFill>
+                        <a:srgbClr val="000000"/>
+                      </a:solidFill>
+                      <a:prstDash val="solid"/>
+                    </a:lnR>
+                    <a:lnT w="12700" cap="flat" cmpd="sng" algn="ctr">
+                      <a:solidFill>
+                        <a:srgbClr val="000000"/>
+                      </a:solidFill>
+                      <a:prstDash val="solid"/>
+                    </a:lnT>
+                    <a:lnB w="12700" cap="flat" cmpd="sng" algn="ctr">
+                      <a:solidFill>
+                        <a:srgbClr val="000000"/>
+                      </a:solidFill>
+                      <a:prstDash val="solid"/>
+                    </a:lnB>
+                  </a:tcPr>
+                </a:tc>
+              </a:tr>
+              <a:tr h="731520">
+                <a:tc>
+                  <a:txBody>
+                    <a:bodyPr wrap="square"/>
+                    <a:lstStyle/>
+                    <a:p>
+                      <a:r>
+                        <a:rPr sz="2000" b="0">
+                          <a:solidFill>
+                            <a:srgbClr val="000000"/>
+                          </a:solidFill>
+                          <a:latin typeface="Arial"/>
+                        </a:rPr>
+                        <a:t>Khatun et al. (2022)</a:t>
+                      </a:r>
+                    </a:p>
+                  </a:txBody>
+                  <a:tcPr marL="73152" marR="73152" marT="36576" marB="36576">
+                    <a:solidFill>
+                      <a:srgbClr val="FFFFFF"/>
+                    </a:solidFill>
+                    <a:lnL w="12700" cap="flat" cmpd="sng" algn="ctr">
+                      <a:solidFill>
+                        <a:srgbClr val="000000"/>
+                      </a:solidFill>
+                      <a:prstDash val="solid"/>
+                    </a:lnL>
+                    <a:lnR w="12700" cap="flat" cmpd="sng" algn="ctr">
+                      <a:solidFill>
+                        <a:srgbClr val="000000"/>
+                      </a:solidFill>
+                      <a:prstDash val="solid"/>
+                    </a:lnR>
+                    <a:lnT w="12700" cap="flat" cmpd="sng" algn="ctr">
+                      <a:solidFill>
+                        <a:srgbClr val="000000"/>
+                      </a:solidFill>
+                      <a:prstDash val="solid"/>
+                    </a:lnT>
+                    <a:lnB w="12700" cap="flat" cmpd="sng" algn="ctr">
+                      <a:solidFill>
+                        <a:srgbClr val="000000"/>
+                      </a:solidFill>
+                      <a:prstDash val="solid"/>
+                    </a:lnB>
+                  </a:tcPr>
+                </a:tc>
+                <a:tc>
+                  <a:txBody>
+                    <a:bodyPr wrap="square"/>
+                    <a:lstStyle/>
+                    <a:p>
+                      <a:r>
+                        <a:rPr sz="2000" b="0">
+                          <a:solidFill>
+                            <a:srgbClr val="000000"/>
+                          </a:solidFill>
+                          <a:latin typeface="Arial"/>
+                        </a:rPr>
+                        <a:t>SVM, KNN, LR, RF, XGBoost</a:t>
+                      </a:r>
+                    </a:p>
+                  </a:txBody>
+                  <a:tcPr marL="73152" marR="73152" marT="36576" marB="36576">
+                    <a:solidFill>
+                      <a:srgbClr val="FFFFFF"/>
+                    </a:solidFill>
+                    <a:lnL w="12700" cap="flat" cmpd="sng" algn="ctr">
+                      <a:solidFill>
+                        <a:srgbClr val="000000"/>
+                      </a:solidFill>
+                      <a:prstDash val="solid"/>
+                    </a:lnL>
+                    <a:lnR w="12700" cap="flat" cmpd="sng" algn="ctr">
+                      <a:solidFill>
+                        <a:srgbClr val="000000"/>
+                      </a:solidFill>
+                      <a:prstDash val="solid"/>
+                    </a:lnR>
+                    <a:lnT w="12700" cap="flat" cmpd="sng" algn="ctr">
+                      <a:solidFill>
+                        <a:srgbClr val="000000"/>
+                      </a:solidFill>
+                      <a:prstDash val="solid"/>
+                    </a:lnT>
+                    <a:lnB w="12700" cap="flat" cmpd="sng" algn="ctr">
+                      <a:solidFill>
+                        <a:srgbClr val="000000"/>
+                      </a:solidFill>
+                      <a:prstDash val="solid"/>
+                    </a:lnB>
+                  </a:tcPr>
+                </a:tc>
+                <a:tc>
+                  <a:txBody>
+                    <a:bodyPr wrap="square"/>
+                    <a:lstStyle/>
+                    <a:p>
+                      <a:r>
+                        <a:rPr sz="2000" b="0">
+                          <a:solidFill>
+                            <a:srgbClr val="000000"/>
+                          </a:solidFill>
+                          <a:latin typeface="Arial"/>
+                        </a:rPr>
+                        <a:t>XGBoost 92.62%</a:t>
+                      </a:r>
+                    </a:p>
+                  </a:txBody>
+                  <a:tcPr marL="73152" marR="73152" marT="36576" marB="36576">
+                    <a:solidFill>
+                      <a:srgbClr val="FFFFFF"/>
+                    </a:solidFill>
+                    <a:lnL w="12700" cap="flat" cmpd="sng" algn="ctr">
+                      <a:solidFill>
+                        <a:srgbClr val="000000"/>
+                      </a:solidFill>
+                      <a:prstDash val="solid"/>
+                    </a:lnL>
+                    <a:lnR w="12700" cap="flat" cmpd="sng" algn="ctr">
+                      <a:solidFill>
+                        <a:srgbClr val="000000"/>
+                      </a:solidFill>
+                      <a:prstDash val="solid"/>
+                    </a:lnR>
+                    <a:lnT w="12700" cap="flat" cmpd="sng" algn="ctr">
+                      <a:solidFill>
+                        <a:srgbClr val="000000"/>
+                      </a:solidFill>
+                      <a:prstDash val="solid"/>
+                    </a:lnT>
+                    <a:lnB w="12700" cap="flat" cmpd="sng" algn="ctr">
+                      <a:solidFill>
+                        <a:srgbClr val="000000"/>
+                      </a:solidFill>
+                      <a:prstDash val="solid"/>
+                    </a:lnB>
+                  </a:tcPr>
+                </a:tc>
+              </a:tr>
+              <a:tr h="731520">
+                <a:tc>
+                  <a:txBody>
+                    <a:bodyPr wrap="square"/>
+                    <a:lstStyle/>
+                    <a:p>
+                      <a:r>
+                        <a:rPr sz="2000" b="0">
+                          <a:solidFill>
+                            <a:srgbClr val="000000"/>
+                          </a:solidFill>
+                          <a:latin typeface="Arial"/>
+                        </a:rPr>
+                        <a:t>Kumar et al. (2025)</a:t>
+                      </a:r>
+                    </a:p>
+                  </a:txBody>
+                  <a:tcPr marL="73152" marR="73152" marT="36576" marB="36576">
+                    <a:solidFill>
+                      <a:srgbClr val="FFFFFF"/>
+                    </a:solidFill>
+                    <a:lnL w="12700" cap="flat" cmpd="sng" algn="ctr">
+                      <a:solidFill>
+                        <a:srgbClr val="000000"/>
+                      </a:solidFill>
+                      <a:prstDash val="solid"/>
+                    </a:lnL>
+                    <a:lnR w="12700" cap="flat" cmpd="sng" algn="ctr">
+                      <a:solidFill>
+                        <a:srgbClr val="000000"/>
+                      </a:solidFill>
+                      <a:prstDash val="solid"/>
+                    </a:lnR>
+                    <a:lnT w="12700" cap="flat" cmpd="sng" algn="ctr">
+                      <a:solidFill>
+                        <a:srgbClr val="000000"/>
+                      </a:solidFill>
+                      <a:prstDash val="solid"/>
+                    </a:lnT>
+                    <a:lnB w="12700" cap="flat" cmpd="sng" algn="ctr">
+                      <a:solidFill>
+                        <a:srgbClr val="000000"/>
+                      </a:solidFill>
+                      <a:prstDash val="solid"/>
+                    </a:lnB>
+                  </a:tcPr>
+                </a:tc>
+                <a:tc>
+                  <a:txBody>
+                    <a:bodyPr wrap="square"/>
+                    <a:lstStyle/>
+                    <a:p>
+                      <a:r>
+                        <a:rPr sz="2000" b="0">
+                          <a:solidFill>
+                            <a:srgbClr val="000000"/>
+                          </a:solidFill>
+                          <a:latin typeface="Arial"/>
+                        </a:rPr>
+                        <a:t>RF, XGBoost, CatBoost, LightGBM</a:t>
+                      </a:r>
+                    </a:p>
+                  </a:txBody>
+                  <a:tcPr marL="73152" marR="73152" marT="36576" marB="36576">
+                    <a:solidFill>
+                      <a:srgbClr val="FFFFFF"/>
+                    </a:solidFill>
+                    <a:lnL w="12700" cap="flat" cmpd="sng" algn="ctr">
+                      <a:solidFill>
+                        <a:srgbClr val="000000"/>
+                      </a:solidFill>
+                      <a:prstDash val="solid"/>
+                    </a:lnL>
+                    <a:lnR w="12700" cap="flat" cmpd="sng" algn="ctr">
+                      <a:solidFill>
+                        <a:srgbClr val="000000"/>
+                      </a:solidFill>
+                      <a:prstDash val="solid"/>
+                    </a:lnR>
+                    <a:lnT w="12700" cap="flat" cmpd="sng" algn="ctr">
+                      <a:solidFill>
+                        <a:srgbClr val="000000"/>
+                      </a:solidFill>
+                      <a:prstDash val="solid"/>
+                    </a:lnT>
+                    <a:lnB w="12700" cap="flat" cmpd="sng" algn="ctr">
+                      <a:solidFill>
+                        <a:srgbClr val="000000"/>
+                      </a:solidFill>
+                      <a:prstDash val="solid"/>
+                    </a:lnB>
+                  </a:tcPr>
+                </a:tc>
+                <a:tc>
+                  <a:txBody>
+                    <a:bodyPr wrap="square"/>
+                    <a:lstStyle/>
+                    <a:p>
+                      <a:r>
+                        <a:rPr sz="2000" b="0">
+                          <a:solidFill>
+                            <a:srgbClr val="000000"/>
+                          </a:solidFill>
+                          <a:latin typeface="Arial"/>
+                        </a:rPr>
+                        <a:t>RF 100%, CatBoost 49.5%</a:t>
+                      </a:r>
+                    </a:p>
+                  </a:txBody>
+                  <a:tcPr marL="73152" marR="73152" marT="36576" marB="36576">
+                    <a:solidFill>
+                      <a:srgbClr val="FFFFFF"/>
+                    </a:solidFill>
+                    <a:lnL w="12700" cap="flat" cmpd="sng" algn="ctr">
+                      <a:solidFill>
+                        <a:srgbClr val="000000"/>
+                      </a:solidFill>
+                      <a:prstDash val="solid"/>
+                    </a:lnL>
+                    <a:lnR w="12700" cap="flat" cmpd="sng" algn="ctr">
+                      <a:solidFill>
+                        <a:srgbClr val="000000"/>
+                      </a:solidFill>
+                      <a:prstDash val="solid"/>
+                    </a:lnR>
+                    <a:lnT w="12700" cap="flat" cmpd="sng" algn="ctr">
+                      <a:solidFill>
+                        <a:srgbClr val="000000"/>
+                      </a:solidFill>
+                      <a:prstDash val="solid"/>
+                    </a:lnT>
+                    <a:lnB w="12700" cap="flat" cmpd="sng" algn="ctr">
+                      <a:solidFill>
+                        <a:srgbClr val="000000"/>
+                      </a:solidFill>
+                      <a:prstDash val="solid"/>
+                    </a:lnB>
+                  </a:tcPr>
+                </a:tc>
+              </a:tr>
+              <a:tr h="731520">
+                <a:tc>
+                  <a:txBody>
+                    <a:bodyPr wrap="square"/>
+                    <a:lstStyle/>
+                    <a:p>
+                      <a:r>
+                        <a:rPr sz="2000" b="0">
+                          <a:solidFill>
+                            <a:srgbClr val="000000"/>
+                          </a:solidFill>
+                          <a:latin typeface="Arial"/>
+                        </a:rPr>
+                        <a:t>Siami &amp; Azis (2025)</a:t>
+                      </a:r>
+                    </a:p>
+                  </a:txBody>
+                  <a:tcPr marL="73152" marR="73152" marT="36576" marB="36576">
+                    <a:solidFill>
+                      <a:srgbClr val="FFFFFF"/>
+                    </a:solidFill>
+                    <a:lnL w="12700" cap="flat" cmpd="sng" algn="ctr">
+                      <a:solidFill>
+                        <a:srgbClr val="000000"/>
+                      </a:solidFill>
+                      <a:prstDash val="solid"/>
+                    </a:lnL>
+                    <a:lnR w="12700" cap="flat" cmpd="sng" algn="ctr">
+                      <a:solidFill>
+                        <a:srgbClr val="000000"/>
+                      </a:solidFill>
+                      <a:prstDash val="solid"/>
+                    </a:lnR>
+                    <a:lnT w="12700" cap="flat" cmpd="sng" algn="ctr">
+                      <a:solidFill>
+                        <a:srgbClr val="000000"/>
+                      </a:solidFill>
+                      <a:prstDash val="solid"/>
+                    </a:lnT>
+                    <a:lnB w="12700" cap="flat" cmpd="sng" algn="ctr">
+                      <a:solidFill>
+                        <a:srgbClr val="000000"/>
+                      </a:solidFill>
+                      <a:prstDash val="solid"/>
+                    </a:lnB>
+                  </a:tcPr>
+                </a:tc>
+                <a:tc>
+                  <a:txBody>
+                    <a:bodyPr wrap="square"/>
+                    <a:lstStyle/>
+                    <a:p>
+                      <a:r>
+                        <a:rPr sz="2000" b="0">
+                          <a:solidFill>
+                            <a:srgbClr val="000000"/>
+                          </a:solidFill>
+                          <a:latin typeface="Arial"/>
+                        </a:rPr>
+                        <a:t>LR, DT, RF, GB, XGBoost</a:t>
+                      </a:r>
+                    </a:p>
+                  </a:txBody>
+                  <a:tcPr marL="73152" marR="73152" marT="36576" marB="36576">
+                    <a:solidFill>
+                      <a:srgbClr val="FFFFFF"/>
+                    </a:solidFill>
+                    <a:lnL w="12700" cap="flat" cmpd="sng" algn="ctr">
+                      <a:solidFill>
+                        <a:srgbClr val="000000"/>
+                      </a:solidFill>
+                      <a:prstDash val="solid"/>
+                    </a:lnL>
+                    <a:lnR w="12700" cap="flat" cmpd="sng" algn="ctr">
+                      <a:solidFill>
+                        <a:srgbClr val="000000"/>
+                      </a:solidFill>
+                      <a:prstDash val="solid"/>
+                    </a:lnR>
+                    <a:lnT w="12700" cap="flat" cmpd="sng" algn="ctr">
+                      <a:solidFill>
+                        <a:srgbClr val="000000"/>
+                      </a:solidFill>
+                      <a:prstDash val="solid"/>
+                    </a:lnT>
+                    <a:lnB w="12700" cap="flat" cmpd="sng" algn="ctr">
+                      <a:solidFill>
+                        <a:srgbClr val="000000"/>
+                      </a:solidFill>
+                      <a:prstDash val="solid"/>
+                    </a:lnB>
+                  </a:tcPr>
+                </a:tc>
+                <a:tc>
+                  <a:txBody>
+                    <a:bodyPr wrap="square"/>
+                    <a:lstStyle/>
+                    <a:p>
+                      <a:r>
+                        <a:rPr sz="2000" b="0">
+                          <a:solidFill>
+                            <a:srgbClr val="000000"/>
+                          </a:solidFill>
+                          <a:latin typeface="Arial"/>
+                        </a:rPr>
+                        <a:t>About 50% at best</a:t>
+                      </a:r>
+                    </a:p>
+                  </a:txBody>
+                  <a:tcPr marL="73152" marR="73152" marT="36576" marB="36576">
+                    <a:solidFill>
+                      <a:srgbClr val="FFFFFF"/>
+                    </a:solidFill>
+                    <a:lnL w="12700" cap="flat" cmpd="sng" algn="ctr">
+                      <a:solidFill>
+                        <a:srgbClr val="000000"/>
+                      </a:solidFill>
+                      <a:prstDash val="solid"/>
+                    </a:lnL>
+                    <a:lnR w="12700" cap="flat" cmpd="sng" algn="ctr">
+                      <a:solidFill>
+                        <a:srgbClr val="000000"/>
+                      </a:solidFill>
+                      <a:prstDash val="solid"/>
+                    </a:lnR>
+                    <a:lnT w="12700" cap="flat" cmpd="sng" algn="ctr">
+                      <a:solidFill>
+                        <a:srgbClr val="000000"/>
+                      </a:solidFill>
+                      <a:prstDash val="solid"/>
+                    </a:lnT>
+                    <a:lnB w="12700" cap="flat" cmpd="sng" algn="ctr">
+                      <a:solidFill>
+                        <a:srgbClr val="000000"/>
+                      </a:solidFill>
+                      <a:prstDash val="solid"/>
+                    </a:lnB>
+                  </a:tcPr>
+                </a:tc>
+              </a:tr>
+            </a:tbl>
+          </a:graphicData>
+        </a:graphic>
+      </p:graphicFrame>
+      <p:sp>
+        <p:nvSpPr>
+          <p:cNvPr id="7" name="TextBox 6"/>
           <p:cNvSpPr txBox="1"/>
           <p:nvPr/>
         </p:nvSpPr>
         <p:spPr>
           <a:xfrm>
-            <a:off x="731520" y="1737360"/>
-            <a:ext cx="10698480" cy="4114800"/>
+            <a:off x="594360" y="5029200"/>
+            <a:ext cx="10972800" cy="548640"/>
           </a:xfrm>
           <a:prstGeom prst="rect">
             <a:avLst/>
@@ -9389,33 +9585,17 @@
           <a:p>
             <a:pPr algn="l">
               <a:spcAft>
-                <a:spcPts val="2600"/>
+                <a:spcPts val="800"/>
               </a:spcAft>
             </a:pPr>
             <a:r>
-              <a:rPr sz="2400" b="0">
+              <a:rPr sz="1200" b="0">
                 <a:solidFill>
-                  <a:srgbClr val="000000"/>
+                  <a:srgbClr val="595959"/>
                 </a:solidFill>
                 <a:latin typeface="Arial"/>
               </a:rPr>
-              <a:t>1.  To implement and benchmark CatBoost, TabPFN, and TabFM for predicting multi-tier hair fall risk from structured clinical and lifestyle data.</a:t>
-            </a:r>
-          </a:p>
-          <a:p>
-            <a:pPr algn="l">
-              <a:spcAft>
-                <a:spcPts val="2600"/>
-              </a:spcAft>
-            </a:pPr>
-            <a:r>
-              <a:rPr sz="2400" b="0">
-                <a:solidFill>
-                  <a:srgbClr val="000000"/>
-                </a:solidFill>
-                <a:latin typeface="Arial"/>
-              </a:rPr>
-              <a:t>2.  To provide transparent, feature-level decision-support insights for every model through SHAP-based explainability, so that each predicted risk tier can be traced to specific indicators.</a:t>
+              <a:t>LR = Logistic Regression, DT = Decision Tree, RF = Random Forest, GB = Gradient Boosting</a:t>
             </a:r>
           </a:p>
         </p:txBody>
@@ -9428,7 +9608,7 @@
 </p:sld>
 </file>
 
-<file path=ppt/slides/slide6.xml><?xml version="1.0" encoding="utf-8"?>
+<file path=ppt/slides/slide8.xml><?xml version="1.0" encoding="utf-8"?>
 <p:sld xmlns:a="http://schemas.openxmlformats.org/drawingml/2006/main" xmlns:p="http://schemas.openxmlformats.org/presentationml/2006/main" xmlns:r="http://schemas.openxmlformats.org/officeDocument/2006/relationships">
   <p:cSld>
     <p:spTree>
@@ -9472,7 +9652,7 @@
                 </a:solidFill>
                 <a:latin typeface="Arial"/>
               </a:rPr>
-              <a:t>Background: what causes hair loss</a:t>
+              <a:t>Literature: the three models</a:t>
             </a:r>
           </a:p>
         </p:txBody>
@@ -9585,888 +9765,21 @@
                 </a:solidFill>
                 <a:latin typeface="Arial"/>
               </a:rPr>
-              <a:t>6 / 16</a:t>
-            </a:r>
-          </a:p>
-        </p:txBody>
-      </p:sp>
-      <p:graphicFrame>
-        <p:nvGraphicFramePr>
-          <p:cNvPr id="6" name="Table 5"/>
-          <p:cNvGraphicFramePr>
-            <a:graphicFrameLocks noGrp="1"/>
-          </p:cNvGraphicFramePr>
-          <p:nvPr/>
-        </p:nvGraphicFramePr>
-        <p:xfrm>
-          <a:off x="594360" y="1371600"/>
-          <a:ext cx="10972800" cy="3291840"/>
-        </p:xfrm>
-        <a:graphic>
-          <a:graphicData uri="http://schemas.openxmlformats.org/drawingml/2006/table">
-            <a:tbl>
-              <a:tblPr firstRow="0" bandRow="0">
-                <a:tableStyleId>{5940675A-B579-460E-94D1-54222C63F5DA}</a:tableStyleId>
-              </a:tblPr>
-              <a:tblGrid>
-                <a:gridCol w="2926080"/>
-                <a:gridCol w="5120640"/>
-                <a:gridCol w="2926080"/>
-              </a:tblGrid>
-              <a:tr h="548640">
-                <a:tc>
-                  <a:txBody>
-                    <a:bodyPr wrap="square"/>
-                    <a:lstStyle/>
-                    <a:p>
-                      <a:r>
-                        <a:rPr sz="1600" b="1">
-                          <a:solidFill>
-                            <a:srgbClr val="000000"/>
-                          </a:solidFill>
-                          <a:latin typeface="Arial"/>
-                        </a:rPr>
-                        <a:t>Factor</a:t>
-                      </a:r>
-                    </a:p>
-                  </a:txBody>
-                  <a:tcPr marL="73152" marR="73152" marT="36576" marB="36576">
-                    <a:solidFill>
-                      <a:srgbClr val="EEEEEE"/>
-                    </a:solidFill>
-                    <a:lnL w="12700" cap="flat" cmpd="sng" algn="ctr">
-                      <a:solidFill>
-                        <a:srgbClr val="000000"/>
-                      </a:solidFill>
-                      <a:prstDash val="solid"/>
-                    </a:lnL>
-                    <a:lnR w="12700" cap="flat" cmpd="sng" algn="ctr">
-                      <a:solidFill>
-                        <a:srgbClr val="000000"/>
-                      </a:solidFill>
-                      <a:prstDash val="solid"/>
-                    </a:lnR>
-                    <a:lnT w="12700" cap="flat" cmpd="sng" algn="ctr">
-                      <a:solidFill>
-                        <a:srgbClr val="000000"/>
-                      </a:solidFill>
-                      <a:prstDash val="solid"/>
-                    </a:lnT>
-                    <a:lnB w="12700" cap="flat" cmpd="sng" algn="ctr">
-                      <a:solidFill>
-                        <a:srgbClr val="000000"/>
-                      </a:solidFill>
-                      <a:prstDash val="solid"/>
-                    </a:lnB>
-                  </a:tcPr>
-                </a:tc>
-                <a:tc>
-                  <a:txBody>
-                    <a:bodyPr wrap="square"/>
-                    <a:lstStyle/>
-                    <a:p>
-                      <a:r>
-                        <a:rPr sz="1600" b="1">
-                          <a:solidFill>
-                            <a:srgbClr val="000000"/>
-                          </a:solidFill>
-                          <a:latin typeface="Arial"/>
-                        </a:rPr>
-                        <a:t>What it does</a:t>
-                      </a:r>
-                    </a:p>
-                  </a:txBody>
-                  <a:tcPr marL="73152" marR="73152" marT="36576" marB="36576">
-                    <a:solidFill>
-                      <a:srgbClr val="EEEEEE"/>
-                    </a:solidFill>
-                    <a:lnL w="12700" cap="flat" cmpd="sng" algn="ctr">
-                      <a:solidFill>
-                        <a:srgbClr val="000000"/>
-                      </a:solidFill>
-                      <a:prstDash val="solid"/>
-                    </a:lnL>
-                    <a:lnR w="12700" cap="flat" cmpd="sng" algn="ctr">
-                      <a:solidFill>
-                        <a:srgbClr val="000000"/>
-                      </a:solidFill>
-                      <a:prstDash val="solid"/>
-                    </a:lnR>
-                    <a:lnT w="12700" cap="flat" cmpd="sng" algn="ctr">
-                      <a:solidFill>
-                        <a:srgbClr val="000000"/>
-                      </a:solidFill>
-                      <a:prstDash val="solid"/>
-                    </a:lnT>
-                    <a:lnB w="12700" cap="flat" cmpd="sng" algn="ctr">
-                      <a:solidFill>
-                        <a:srgbClr val="000000"/>
-                      </a:solidFill>
-                      <a:prstDash val="solid"/>
-                    </a:lnB>
-                  </a:tcPr>
-                </a:tc>
-                <a:tc>
-                  <a:txBody>
-                    <a:bodyPr wrap="square"/>
-                    <a:lstStyle/>
-                    <a:p>
-                      <a:r>
-                        <a:rPr sz="1600" b="1">
-                          <a:solidFill>
-                            <a:srgbClr val="000000"/>
-                          </a:solidFill>
-                          <a:latin typeface="Arial"/>
-                        </a:rPr>
-                        <a:t>Source</a:t>
-                      </a:r>
-                    </a:p>
-                  </a:txBody>
-                  <a:tcPr marL="73152" marR="73152" marT="36576" marB="36576">
-                    <a:solidFill>
-                      <a:srgbClr val="EEEEEE"/>
-                    </a:solidFill>
-                    <a:lnL w="12700" cap="flat" cmpd="sng" algn="ctr">
-                      <a:solidFill>
-                        <a:srgbClr val="000000"/>
-                      </a:solidFill>
-                      <a:prstDash val="solid"/>
-                    </a:lnL>
-                    <a:lnR w="12700" cap="flat" cmpd="sng" algn="ctr">
-                      <a:solidFill>
-                        <a:srgbClr val="000000"/>
-                      </a:solidFill>
-                      <a:prstDash val="solid"/>
-                    </a:lnR>
-                    <a:lnT w="12700" cap="flat" cmpd="sng" algn="ctr">
-                      <a:solidFill>
-                        <a:srgbClr val="000000"/>
-                      </a:solidFill>
-                      <a:prstDash val="solid"/>
-                    </a:lnT>
-                    <a:lnB w="12700" cap="flat" cmpd="sng" algn="ctr">
-                      <a:solidFill>
-                        <a:srgbClr val="000000"/>
-                      </a:solidFill>
-                      <a:prstDash val="solid"/>
-                    </a:lnB>
-                  </a:tcPr>
-                </a:tc>
-              </a:tr>
-              <a:tr h="548640">
-                <a:tc>
-                  <a:txBody>
-                    <a:bodyPr wrap="square"/>
-                    <a:lstStyle/>
-                    <a:p>
-                      <a:r>
-                        <a:rPr sz="1600" b="0">
-                          <a:solidFill>
-                            <a:srgbClr val="000000"/>
-                          </a:solidFill>
-                          <a:latin typeface="Arial"/>
-                        </a:rPr>
-                        <a:t>Hormones and heredity</a:t>
-                      </a:r>
-                    </a:p>
-                  </a:txBody>
-                  <a:tcPr marL="73152" marR="73152" marT="36576" marB="36576">
-                    <a:solidFill>
-                      <a:srgbClr val="FFFFFF"/>
-                    </a:solidFill>
-                    <a:lnL w="12700" cap="flat" cmpd="sng" algn="ctr">
-                      <a:solidFill>
-                        <a:srgbClr val="000000"/>
-                      </a:solidFill>
-                      <a:prstDash val="solid"/>
-                    </a:lnL>
-                    <a:lnR w="12700" cap="flat" cmpd="sng" algn="ctr">
-                      <a:solidFill>
-                        <a:srgbClr val="000000"/>
-                      </a:solidFill>
-                      <a:prstDash val="solid"/>
-                    </a:lnR>
-                    <a:lnT w="12700" cap="flat" cmpd="sng" algn="ctr">
-                      <a:solidFill>
-                        <a:srgbClr val="000000"/>
-                      </a:solidFill>
-                      <a:prstDash val="solid"/>
-                    </a:lnT>
-                    <a:lnB w="12700" cap="flat" cmpd="sng" algn="ctr">
-                      <a:solidFill>
-                        <a:srgbClr val="000000"/>
-                      </a:solidFill>
-                      <a:prstDash val="solid"/>
-                    </a:lnB>
-                  </a:tcPr>
-                </a:tc>
-                <a:tc>
-                  <a:txBody>
-                    <a:bodyPr wrap="square"/>
-                    <a:lstStyle/>
-                    <a:p>
-                      <a:r>
-                        <a:rPr sz="1600" b="0">
-                          <a:solidFill>
-                            <a:srgbClr val="000000"/>
-                          </a:solidFill>
-                          <a:latin typeface="Arial"/>
-                        </a:rPr>
-                        <a:t>Inherited sensitivity to androgens; family history is a key indicator</a:t>
-                      </a:r>
-                    </a:p>
-                  </a:txBody>
-                  <a:tcPr marL="73152" marR="73152" marT="36576" marB="36576">
-                    <a:solidFill>
-                      <a:srgbClr val="FFFFFF"/>
-                    </a:solidFill>
-                    <a:lnL w="12700" cap="flat" cmpd="sng" algn="ctr">
-                      <a:solidFill>
-                        <a:srgbClr val="000000"/>
-                      </a:solidFill>
-                      <a:prstDash val="solid"/>
-                    </a:lnL>
-                    <a:lnR w="12700" cap="flat" cmpd="sng" algn="ctr">
-                      <a:solidFill>
-                        <a:srgbClr val="000000"/>
-                      </a:solidFill>
-                      <a:prstDash val="solid"/>
-                    </a:lnR>
-                    <a:lnT w="12700" cap="flat" cmpd="sng" algn="ctr">
-                      <a:solidFill>
-                        <a:srgbClr val="000000"/>
-                      </a:solidFill>
-                      <a:prstDash val="solid"/>
-                    </a:lnT>
-                    <a:lnB w="12700" cap="flat" cmpd="sng" algn="ctr">
-                      <a:solidFill>
-                        <a:srgbClr val="000000"/>
-                      </a:solidFill>
-                      <a:prstDash val="solid"/>
-                    </a:lnB>
-                  </a:tcPr>
-                </a:tc>
-                <a:tc>
-                  <a:txBody>
-                    <a:bodyPr wrap="square"/>
-                    <a:lstStyle/>
-                    <a:p>
-                      <a:r>
-                        <a:rPr sz="1600" b="0">
-                          <a:solidFill>
-                            <a:srgbClr val="000000"/>
-                          </a:solidFill>
-                          <a:latin typeface="Arial"/>
-                        </a:rPr>
-                        <a:t>Agaoglu et al. (2021)</a:t>
-                      </a:r>
-                    </a:p>
-                  </a:txBody>
-                  <a:tcPr marL="73152" marR="73152" marT="36576" marB="36576">
-                    <a:solidFill>
-                      <a:srgbClr val="FFFFFF"/>
-                    </a:solidFill>
-                    <a:lnL w="12700" cap="flat" cmpd="sng" algn="ctr">
-                      <a:solidFill>
-                        <a:srgbClr val="000000"/>
-                      </a:solidFill>
-                      <a:prstDash val="solid"/>
-                    </a:lnL>
-                    <a:lnR w="12700" cap="flat" cmpd="sng" algn="ctr">
-                      <a:solidFill>
-                        <a:srgbClr val="000000"/>
-                      </a:solidFill>
-                      <a:prstDash val="solid"/>
-                    </a:lnR>
-                    <a:lnT w="12700" cap="flat" cmpd="sng" algn="ctr">
-                      <a:solidFill>
-                        <a:srgbClr val="000000"/>
-                      </a:solidFill>
-                      <a:prstDash val="solid"/>
-                    </a:lnT>
-                    <a:lnB w="12700" cap="flat" cmpd="sng" algn="ctr">
-                      <a:solidFill>
-                        <a:srgbClr val="000000"/>
-                      </a:solidFill>
-                      <a:prstDash val="solid"/>
-                    </a:lnB>
-                  </a:tcPr>
-                </a:tc>
-              </a:tr>
-              <a:tr h="548640">
-                <a:tc>
-                  <a:txBody>
-                    <a:bodyPr wrap="square"/>
-                    <a:lstStyle/>
-                    <a:p>
-                      <a:r>
-                        <a:rPr sz="1600" b="0">
-                          <a:solidFill>
-                            <a:srgbClr val="000000"/>
-                          </a:solidFill>
-                          <a:latin typeface="Arial"/>
-                        </a:rPr>
-                        <a:t>Nutrition and iron</a:t>
-                      </a:r>
-                    </a:p>
-                  </a:txBody>
-                  <a:tcPr marL="73152" marR="73152" marT="36576" marB="36576">
-                    <a:solidFill>
-                      <a:srgbClr val="FFFFFF"/>
-                    </a:solidFill>
-                    <a:lnL w="12700" cap="flat" cmpd="sng" algn="ctr">
-                      <a:solidFill>
-                        <a:srgbClr val="000000"/>
-                      </a:solidFill>
-                      <a:prstDash val="solid"/>
-                    </a:lnL>
-                    <a:lnR w="12700" cap="flat" cmpd="sng" algn="ctr">
-                      <a:solidFill>
-                        <a:srgbClr val="000000"/>
-                      </a:solidFill>
-                      <a:prstDash val="solid"/>
-                    </a:lnR>
-                    <a:lnT w="12700" cap="flat" cmpd="sng" algn="ctr">
-                      <a:solidFill>
-                        <a:srgbClr val="000000"/>
-                      </a:solidFill>
-                      <a:prstDash val="solid"/>
-                    </a:lnT>
-                    <a:lnB w="12700" cap="flat" cmpd="sng" algn="ctr">
-                      <a:solidFill>
-                        <a:srgbClr val="000000"/>
-                      </a:solidFill>
-                      <a:prstDash val="solid"/>
-                    </a:lnB>
-                  </a:tcPr>
-                </a:tc>
-                <a:tc>
-                  <a:txBody>
-                    <a:bodyPr wrap="square"/>
-                    <a:lstStyle/>
-                    <a:p>
-                      <a:r>
-                        <a:rPr sz="1600" b="0">
-                          <a:solidFill>
-                            <a:srgbClr val="000000"/>
-                          </a:solidFill>
-                          <a:latin typeface="Arial"/>
-                        </a:rPr>
-                        <a:t>Shortage of iron, zinc, and vitamins weakens follicles</a:t>
-                      </a:r>
-                    </a:p>
-                  </a:txBody>
-                  <a:tcPr marL="73152" marR="73152" marT="36576" marB="36576">
-                    <a:solidFill>
-                      <a:srgbClr val="FFFFFF"/>
-                    </a:solidFill>
-                    <a:lnL w="12700" cap="flat" cmpd="sng" algn="ctr">
-                      <a:solidFill>
-                        <a:srgbClr val="000000"/>
-                      </a:solidFill>
-                      <a:prstDash val="solid"/>
-                    </a:lnL>
-                    <a:lnR w="12700" cap="flat" cmpd="sng" algn="ctr">
-                      <a:solidFill>
-                        <a:srgbClr val="000000"/>
-                      </a:solidFill>
-                      <a:prstDash val="solid"/>
-                    </a:lnR>
-                    <a:lnT w="12700" cap="flat" cmpd="sng" algn="ctr">
-                      <a:solidFill>
-                        <a:srgbClr val="000000"/>
-                      </a:solidFill>
-                      <a:prstDash val="solid"/>
-                    </a:lnT>
-                    <a:lnB w="12700" cap="flat" cmpd="sng" algn="ctr">
-                      <a:solidFill>
-                        <a:srgbClr val="000000"/>
-                      </a:solidFill>
-                      <a:prstDash val="solid"/>
-                    </a:lnB>
-                  </a:tcPr>
-                </a:tc>
-                <a:tc>
-                  <a:txBody>
-                    <a:bodyPr wrap="square"/>
-                    <a:lstStyle/>
-                    <a:p>
-                      <a:r>
-                        <a:rPr sz="1600" b="0">
-                          <a:solidFill>
-                            <a:srgbClr val="000000"/>
-                          </a:solidFill>
-                          <a:latin typeface="Arial"/>
-                        </a:rPr>
-                        <a:t>Guo &amp; Katta (2017); Lin et al. (2023)</a:t>
-                      </a:r>
-                    </a:p>
-                  </a:txBody>
-                  <a:tcPr marL="73152" marR="73152" marT="36576" marB="36576">
-                    <a:solidFill>
-                      <a:srgbClr val="FFFFFF"/>
-                    </a:solidFill>
-                    <a:lnL w="12700" cap="flat" cmpd="sng" algn="ctr">
-                      <a:solidFill>
-                        <a:srgbClr val="000000"/>
-                      </a:solidFill>
-                      <a:prstDash val="solid"/>
-                    </a:lnL>
-                    <a:lnR w="12700" cap="flat" cmpd="sng" algn="ctr">
-                      <a:solidFill>
-                        <a:srgbClr val="000000"/>
-                      </a:solidFill>
-                      <a:prstDash val="solid"/>
-                    </a:lnR>
-                    <a:lnT w="12700" cap="flat" cmpd="sng" algn="ctr">
-                      <a:solidFill>
-                        <a:srgbClr val="000000"/>
-                      </a:solidFill>
-                      <a:prstDash val="solid"/>
-                    </a:lnT>
-                    <a:lnB w="12700" cap="flat" cmpd="sng" algn="ctr">
-                      <a:solidFill>
-                        <a:srgbClr val="000000"/>
-                      </a:solidFill>
-                      <a:prstDash val="solid"/>
-                    </a:lnB>
-                  </a:tcPr>
-                </a:tc>
-              </a:tr>
-              <a:tr h="548640">
-                <a:tc>
-                  <a:txBody>
-                    <a:bodyPr wrap="square"/>
-                    <a:lstStyle/>
-                    <a:p>
-                      <a:r>
-                        <a:rPr sz="1600" b="0">
-                          <a:solidFill>
-                            <a:srgbClr val="000000"/>
-                          </a:solidFill>
-                          <a:latin typeface="Arial"/>
-                        </a:rPr>
-                        <a:t>Thyroid function</a:t>
-                      </a:r>
-                    </a:p>
-                  </a:txBody>
-                  <a:tcPr marL="73152" marR="73152" marT="36576" marB="36576">
-                    <a:solidFill>
-                      <a:srgbClr val="FFFFFF"/>
-                    </a:solidFill>
-                    <a:lnL w="12700" cap="flat" cmpd="sng" algn="ctr">
-                      <a:solidFill>
-                        <a:srgbClr val="000000"/>
-                      </a:solidFill>
-                      <a:prstDash val="solid"/>
-                    </a:lnL>
-                    <a:lnR w="12700" cap="flat" cmpd="sng" algn="ctr">
-                      <a:solidFill>
-                        <a:srgbClr val="000000"/>
-                      </a:solidFill>
-                      <a:prstDash val="solid"/>
-                    </a:lnR>
-                    <a:lnT w="12700" cap="flat" cmpd="sng" algn="ctr">
-                      <a:solidFill>
-                        <a:srgbClr val="000000"/>
-                      </a:solidFill>
-                      <a:prstDash val="solid"/>
-                    </a:lnT>
-                    <a:lnB w="12700" cap="flat" cmpd="sng" algn="ctr">
-                      <a:solidFill>
-                        <a:srgbClr val="000000"/>
-                      </a:solidFill>
-                      <a:prstDash val="solid"/>
-                    </a:lnB>
-                  </a:tcPr>
-                </a:tc>
-                <a:tc>
-                  <a:txBody>
-                    <a:bodyPr wrap="square"/>
-                    <a:lstStyle/>
-                    <a:p>
-                      <a:r>
-                        <a:rPr sz="1600" b="0">
-                          <a:solidFill>
-                            <a:srgbClr val="000000"/>
-                          </a:solidFill>
-                          <a:latin typeface="Arial"/>
-                        </a:rPr>
-                        <a:t>Thyroid hormones regulate the hair cycle</a:t>
-                      </a:r>
-                    </a:p>
-                  </a:txBody>
-                  <a:tcPr marL="73152" marR="73152" marT="36576" marB="36576">
-                    <a:solidFill>
-                      <a:srgbClr val="FFFFFF"/>
-                    </a:solidFill>
-                    <a:lnL w="12700" cap="flat" cmpd="sng" algn="ctr">
-                      <a:solidFill>
-                        <a:srgbClr val="000000"/>
-                      </a:solidFill>
-                      <a:prstDash val="solid"/>
-                    </a:lnL>
-                    <a:lnR w="12700" cap="flat" cmpd="sng" algn="ctr">
-                      <a:solidFill>
-                        <a:srgbClr val="000000"/>
-                      </a:solidFill>
-                      <a:prstDash val="solid"/>
-                    </a:lnR>
-                    <a:lnT w="12700" cap="flat" cmpd="sng" algn="ctr">
-                      <a:solidFill>
-                        <a:srgbClr val="000000"/>
-                      </a:solidFill>
-                      <a:prstDash val="solid"/>
-                    </a:lnT>
-                    <a:lnB w="12700" cap="flat" cmpd="sng" algn="ctr">
-                      <a:solidFill>
-                        <a:srgbClr val="000000"/>
-                      </a:solidFill>
-                      <a:prstDash val="solid"/>
-                    </a:lnB>
-                  </a:tcPr>
-                </a:tc>
-                <a:tc>
-                  <a:txBody>
-                    <a:bodyPr wrap="square"/>
-                    <a:lstStyle/>
-                    <a:p>
-                      <a:r>
-                        <a:rPr sz="1600" b="0">
-                          <a:solidFill>
-                            <a:srgbClr val="000000"/>
-                          </a:solidFill>
-                          <a:latin typeface="Arial"/>
-                        </a:rPr>
-                        <a:t>Hussein et al. (2023)</a:t>
-                      </a:r>
-                    </a:p>
-                  </a:txBody>
-                  <a:tcPr marL="73152" marR="73152" marT="36576" marB="36576">
-                    <a:solidFill>
-                      <a:srgbClr val="FFFFFF"/>
-                    </a:solidFill>
-                    <a:lnL w="12700" cap="flat" cmpd="sng" algn="ctr">
-                      <a:solidFill>
-                        <a:srgbClr val="000000"/>
-                      </a:solidFill>
-                      <a:prstDash val="solid"/>
-                    </a:lnL>
-                    <a:lnR w="12700" cap="flat" cmpd="sng" algn="ctr">
-                      <a:solidFill>
-                        <a:srgbClr val="000000"/>
-                      </a:solidFill>
-                      <a:prstDash val="solid"/>
-                    </a:lnR>
-                    <a:lnT w="12700" cap="flat" cmpd="sng" algn="ctr">
-                      <a:solidFill>
-                        <a:srgbClr val="000000"/>
-                      </a:solidFill>
-                      <a:prstDash val="solid"/>
-                    </a:lnT>
-                    <a:lnB w="12700" cap="flat" cmpd="sng" algn="ctr">
-                      <a:solidFill>
-                        <a:srgbClr val="000000"/>
-                      </a:solidFill>
-                      <a:prstDash val="solid"/>
-                    </a:lnB>
-                  </a:tcPr>
-                </a:tc>
-              </a:tr>
-              <a:tr h="548640">
-                <a:tc>
-                  <a:txBody>
-                    <a:bodyPr wrap="square"/>
-                    <a:lstStyle/>
-                    <a:p>
-                      <a:r>
-                        <a:rPr sz="1600" b="0">
-                          <a:solidFill>
-                            <a:srgbClr val="000000"/>
-                          </a:solidFill>
-                          <a:latin typeface="Arial"/>
-                        </a:rPr>
-                        <a:t>Psychological stress</a:t>
-                      </a:r>
-                    </a:p>
-                  </a:txBody>
-                  <a:tcPr marL="73152" marR="73152" marT="36576" marB="36576">
-                    <a:solidFill>
-                      <a:srgbClr val="FFFFFF"/>
-                    </a:solidFill>
-                    <a:lnL w="12700" cap="flat" cmpd="sng" algn="ctr">
-                      <a:solidFill>
-                        <a:srgbClr val="000000"/>
-                      </a:solidFill>
-                      <a:prstDash val="solid"/>
-                    </a:lnL>
-                    <a:lnR w="12700" cap="flat" cmpd="sng" algn="ctr">
-                      <a:solidFill>
-                        <a:srgbClr val="000000"/>
-                      </a:solidFill>
-                      <a:prstDash val="solid"/>
-                    </a:lnR>
-                    <a:lnT w="12700" cap="flat" cmpd="sng" algn="ctr">
-                      <a:solidFill>
-                        <a:srgbClr val="000000"/>
-                      </a:solidFill>
-                      <a:prstDash val="solid"/>
-                    </a:lnT>
-                    <a:lnB w="12700" cap="flat" cmpd="sng" algn="ctr">
-                      <a:solidFill>
-                        <a:srgbClr val="000000"/>
-                      </a:solidFill>
-                      <a:prstDash val="solid"/>
-                    </a:lnB>
-                  </a:tcPr>
-                </a:tc>
-                <a:tc>
-                  <a:txBody>
-                    <a:bodyPr wrap="square"/>
-                    <a:lstStyle/>
-                    <a:p>
-                      <a:r>
-                        <a:rPr sz="1600" b="0">
-                          <a:solidFill>
-                            <a:srgbClr val="000000"/>
-                          </a:solidFill>
-                          <a:latin typeface="Arial"/>
-                        </a:rPr>
-                        <a:t>Pushes follicles into the resting phase early</a:t>
-                      </a:r>
-                    </a:p>
-                  </a:txBody>
-                  <a:tcPr marL="73152" marR="73152" marT="36576" marB="36576">
-                    <a:solidFill>
-                      <a:srgbClr val="FFFFFF"/>
-                    </a:solidFill>
-                    <a:lnL w="12700" cap="flat" cmpd="sng" algn="ctr">
-                      <a:solidFill>
-                        <a:srgbClr val="000000"/>
-                      </a:solidFill>
-                      <a:prstDash val="solid"/>
-                    </a:lnL>
-                    <a:lnR w="12700" cap="flat" cmpd="sng" algn="ctr">
-                      <a:solidFill>
-                        <a:srgbClr val="000000"/>
-                      </a:solidFill>
-                      <a:prstDash val="solid"/>
-                    </a:lnR>
-                    <a:lnT w="12700" cap="flat" cmpd="sng" algn="ctr">
-                      <a:solidFill>
-                        <a:srgbClr val="000000"/>
-                      </a:solidFill>
-                      <a:prstDash val="solid"/>
-                    </a:lnT>
-                    <a:lnB w="12700" cap="flat" cmpd="sng" algn="ctr">
-                      <a:solidFill>
-                        <a:srgbClr val="000000"/>
-                      </a:solidFill>
-                      <a:prstDash val="solid"/>
-                    </a:lnB>
-                  </a:tcPr>
-                </a:tc>
-                <a:tc>
-                  <a:txBody>
-                    <a:bodyPr wrap="square"/>
-                    <a:lstStyle/>
-                    <a:p>
-                      <a:r>
-                        <a:rPr sz="1600" b="0">
-                          <a:solidFill>
-                            <a:srgbClr val="000000"/>
-                          </a:solidFill>
-                          <a:latin typeface="Arial"/>
-                        </a:rPr>
-                        <a:t>Bai et al. (2026)</a:t>
-                      </a:r>
-                    </a:p>
-                  </a:txBody>
-                  <a:tcPr marL="73152" marR="73152" marT="36576" marB="36576">
-                    <a:solidFill>
-                      <a:srgbClr val="FFFFFF"/>
-                    </a:solidFill>
-                    <a:lnL w="12700" cap="flat" cmpd="sng" algn="ctr">
-                      <a:solidFill>
-                        <a:srgbClr val="000000"/>
-                      </a:solidFill>
-                      <a:prstDash val="solid"/>
-                    </a:lnL>
-                    <a:lnR w="12700" cap="flat" cmpd="sng" algn="ctr">
-                      <a:solidFill>
-                        <a:srgbClr val="000000"/>
-                      </a:solidFill>
-                      <a:prstDash val="solid"/>
-                    </a:lnR>
-                    <a:lnT w="12700" cap="flat" cmpd="sng" algn="ctr">
-                      <a:solidFill>
-                        <a:srgbClr val="000000"/>
-                      </a:solidFill>
-                      <a:prstDash val="solid"/>
-                    </a:lnT>
-                    <a:lnB w="12700" cap="flat" cmpd="sng" algn="ctr">
-                      <a:solidFill>
-                        <a:srgbClr val="000000"/>
-                      </a:solidFill>
-                      <a:prstDash val="solid"/>
-                    </a:lnB>
-                  </a:tcPr>
-                </a:tc>
-              </a:tr>
-              <a:tr h="548640">
-                <a:tc>
-                  <a:txBody>
-                    <a:bodyPr wrap="square"/>
-                    <a:lstStyle/>
-                    <a:p>
-                      <a:r>
-                        <a:rPr sz="1600" b="0">
-                          <a:solidFill>
-                            <a:srgbClr val="000000"/>
-                          </a:solidFill>
-                          <a:latin typeface="Arial"/>
-                        </a:rPr>
-                        <a:t>Illness and infection</a:t>
-                      </a:r>
-                    </a:p>
-                  </a:txBody>
-                  <a:tcPr marL="73152" marR="73152" marT="36576" marB="36576">
-                    <a:solidFill>
-                      <a:srgbClr val="FFFFFF"/>
-                    </a:solidFill>
-                    <a:lnL w="12700" cap="flat" cmpd="sng" algn="ctr">
-                      <a:solidFill>
-                        <a:srgbClr val="000000"/>
-                      </a:solidFill>
-                      <a:prstDash val="solid"/>
-                    </a:lnL>
-                    <a:lnR w="12700" cap="flat" cmpd="sng" algn="ctr">
-                      <a:solidFill>
-                        <a:srgbClr val="000000"/>
-                      </a:solidFill>
-                      <a:prstDash val="solid"/>
-                    </a:lnR>
-                    <a:lnT w="12700" cap="flat" cmpd="sng" algn="ctr">
-                      <a:solidFill>
-                        <a:srgbClr val="000000"/>
-                      </a:solidFill>
-                      <a:prstDash val="solid"/>
-                    </a:lnT>
-                    <a:lnB w="12700" cap="flat" cmpd="sng" algn="ctr">
-                      <a:solidFill>
-                        <a:srgbClr val="000000"/>
-                      </a:solidFill>
-                      <a:prstDash val="solid"/>
-                    </a:lnB>
-                  </a:tcPr>
-                </a:tc>
-                <a:tc>
-                  <a:txBody>
-                    <a:bodyPr wrap="square"/>
-                    <a:lstStyle/>
-                    <a:p>
-                      <a:r>
-                        <a:rPr sz="1600" b="0">
-                          <a:solidFill>
-                            <a:srgbClr val="000000"/>
-                          </a:solidFill>
-                          <a:latin typeface="Arial"/>
-                        </a:rPr>
-                        <a:t>Can trigger heavy shedding (telogen effluvium)</a:t>
-                      </a:r>
-                    </a:p>
-                  </a:txBody>
-                  <a:tcPr marL="73152" marR="73152" marT="36576" marB="36576">
-                    <a:solidFill>
-                      <a:srgbClr val="FFFFFF"/>
-                    </a:solidFill>
-                    <a:lnL w="12700" cap="flat" cmpd="sng" algn="ctr">
-                      <a:solidFill>
-                        <a:srgbClr val="000000"/>
-                      </a:solidFill>
-                      <a:prstDash val="solid"/>
-                    </a:lnL>
-                    <a:lnR w="12700" cap="flat" cmpd="sng" algn="ctr">
-                      <a:solidFill>
-                        <a:srgbClr val="000000"/>
-                      </a:solidFill>
-                      <a:prstDash val="solid"/>
-                    </a:lnR>
-                    <a:lnT w="12700" cap="flat" cmpd="sng" algn="ctr">
-                      <a:solidFill>
-                        <a:srgbClr val="000000"/>
-                      </a:solidFill>
-                      <a:prstDash val="solid"/>
-                    </a:lnT>
-                    <a:lnB w="12700" cap="flat" cmpd="sng" algn="ctr">
-                      <a:solidFill>
-                        <a:srgbClr val="000000"/>
-                      </a:solidFill>
-                      <a:prstDash val="solid"/>
-                    </a:lnB>
-                  </a:tcPr>
-                </a:tc>
-                <a:tc>
-                  <a:txBody>
-                    <a:bodyPr wrap="square"/>
-                    <a:lstStyle/>
-                    <a:p>
-                      <a:r>
-                        <a:rPr sz="1600" b="0">
-                          <a:solidFill>
-                            <a:srgbClr val="000000"/>
-                          </a:solidFill>
-                          <a:latin typeface="Arial"/>
-                        </a:rPr>
-                        <a:t>Cline et al. (2021)</a:t>
-                      </a:r>
-                    </a:p>
-                  </a:txBody>
-                  <a:tcPr marL="73152" marR="73152" marT="36576" marB="36576">
-                    <a:solidFill>
-                      <a:srgbClr val="FFFFFF"/>
-                    </a:solidFill>
-                    <a:lnL w="12700" cap="flat" cmpd="sng" algn="ctr">
-                      <a:solidFill>
-                        <a:srgbClr val="000000"/>
-                      </a:solidFill>
-                      <a:prstDash val="solid"/>
-                    </a:lnL>
-                    <a:lnR w="12700" cap="flat" cmpd="sng" algn="ctr">
-                      <a:solidFill>
-                        <a:srgbClr val="000000"/>
-                      </a:solidFill>
-                      <a:prstDash val="solid"/>
-                    </a:lnR>
-                    <a:lnT w="12700" cap="flat" cmpd="sng" algn="ctr">
-                      <a:solidFill>
-                        <a:srgbClr val="000000"/>
-                      </a:solidFill>
-                      <a:prstDash val="solid"/>
-                    </a:lnT>
-                    <a:lnB w="12700" cap="flat" cmpd="sng" algn="ctr">
-                      <a:solidFill>
-                        <a:srgbClr val="000000"/>
-                      </a:solidFill>
-                      <a:prstDash val="solid"/>
-                    </a:lnB>
-                  </a:tcPr>
-                </a:tc>
-              </a:tr>
-            </a:tbl>
-          </a:graphicData>
-        </a:graphic>
-      </p:graphicFrame>
-      <p:sp>
-        <p:nvSpPr>
-          <p:cNvPr id="7" name="TextBox 6"/>
+              <a:t>8 / 14</a:t>
+            </a:r>
+          </a:p>
+        </p:txBody>
+      </p:sp>
+      <p:sp>
+        <p:nvSpPr>
+          <p:cNvPr id="6" name="TextBox 5"/>
           <p:cNvSpPr txBox="1"/>
           <p:nvPr/>
         </p:nvSpPr>
         <p:spPr>
           <a:xfrm>
-            <a:off x="594360" y="4846320"/>
-            <a:ext cx="10972800" cy="1097280"/>
+            <a:off x="731520" y="1737360"/>
+            <a:ext cx="10698480" cy="4114800"/>
           </a:xfrm>
           <a:prstGeom prst="rect">
             <a:avLst/>
@@ -10481,17 +9794,49 @@
           <a:p>
             <a:pPr algn="l">
               <a:spcAft>
-                <a:spcPts val="800"/>
+                <a:spcPts val="2600"/>
               </a:spcAft>
             </a:pPr>
             <a:r>
-              <a:rPr sz="1800" b="0">
+              <a:rPr sz="2600" b="0">
                 <a:solidFill>
                   <a:srgbClr val="000000"/>
                 </a:solidFill>
                 <a:latin typeface="Arial"/>
               </a:rPr>
-              <a:t>Trend: hair loss is reported more often and at a younger age, and it affects self-confidence and quality of life.</a:t>
+              <a:t>•  CatBoost (Prokhorenkova et al., 2018): boosted trees for categorical data.</a:t>
+            </a:r>
+          </a:p>
+          <a:p>
+            <a:pPr algn="l">
+              <a:spcAft>
+                <a:spcPts val="2600"/>
+              </a:spcAft>
+            </a:pPr>
+            <a:r>
+              <a:rPr sz="2600" b="0">
+                <a:solidFill>
+                  <a:srgbClr val="000000"/>
+                </a:solidFill>
+                <a:latin typeface="Arial"/>
+              </a:rPr>
+              <a:t>•  TabPFN (Hollmann et al., 2025): pretrained transformer, best on small tables.</a:t>
+            </a:r>
+          </a:p>
+          <a:p>
+            <a:pPr algn="l">
+              <a:spcAft>
+                <a:spcPts val="2600"/>
+              </a:spcAft>
+            </a:pPr>
+            <a:r>
+              <a:rPr sz="2600" b="0">
+                <a:solidFill>
+                  <a:srgbClr val="000000"/>
+                </a:solidFill>
+                <a:latin typeface="Arial"/>
+              </a:rPr>
+              <a:t>•  TabFM (Kong et al., 2026): 400-million-parameter foundation model.</a:t>
             </a:r>
           </a:p>
         </p:txBody>
@@ -10504,7 +9849,7 @@
 </p:sld>
 </file>
 
-<file path=ppt/slides/slide7.xml><?xml version="1.0" encoding="utf-8"?>
+<file path=ppt/slides/slide9.xml><?xml version="1.0" encoding="utf-8"?>
 <p:sld xmlns:a="http://schemas.openxmlformats.org/drawingml/2006/main" xmlns:p="http://schemas.openxmlformats.org/presentationml/2006/main" xmlns:r="http://schemas.openxmlformats.org/officeDocument/2006/relationships">
   <p:cSld>
     <p:spTree>
@@ -10548,7 +9893,7 @@
                 </a:solidFill>
                 <a:latin typeface="Arial"/>
               </a:rPr>
-              <a:t>Literature: what others did</a:t>
+              <a:t>Research gap</a:t>
             </a:r>
           </a:p>
         </p:txBody>
@@ -10661,1351 +10006,21 @@
                 </a:solidFill>
                 <a:latin typeface="Arial"/>
               </a:rPr>
-              <a:t>7 / 16</a:t>
-            </a:r>
-          </a:p>
-        </p:txBody>
-      </p:sp>
-      <p:graphicFrame>
-        <p:nvGraphicFramePr>
-          <p:cNvPr id="6" name="Table 5"/>
-          <p:cNvGraphicFramePr>
-            <a:graphicFrameLocks noGrp="1"/>
-          </p:cNvGraphicFramePr>
-          <p:nvPr/>
-        </p:nvGraphicFramePr>
-        <p:xfrm>
-          <a:off x="457200" y="1325880"/>
-          <a:ext cx="11247120" cy="3968496"/>
-        </p:xfrm>
-        <a:graphic>
-          <a:graphicData uri="http://schemas.openxmlformats.org/drawingml/2006/table">
-            <a:tbl>
-              <a:tblPr firstRow="0" bandRow="0">
-                <a:tableStyleId>{5940675A-B579-460E-94D1-54222C63F5DA}</a:tableStyleId>
-              </a:tblPr>
-              <a:tblGrid>
-                <a:gridCol w="3566160"/>
-                <a:gridCol w="2377440"/>
-                <a:gridCol w="3291840"/>
-                <a:gridCol w="2011680"/>
-              </a:tblGrid>
-              <a:tr h="566928">
-                <a:tc>
-                  <a:txBody>
-                    <a:bodyPr wrap="square"/>
-                    <a:lstStyle/>
-                    <a:p>
-                      <a:r>
-                        <a:rPr sz="1400" b="1">
-                          <a:solidFill>
-                            <a:srgbClr val="000000"/>
-                          </a:solidFill>
-                          <a:latin typeface="Arial"/>
-                        </a:rPr>
-                        <a:t>Study</a:t>
-                      </a:r>
-                    </a:p>
-                  </a:txBody>
-                  <a:tcPr marL="73152" marR="73152" marT="36576" marB="36576">
-                    <a:solidFill>
-                      <a:srgbClr val="EEEEEE"/>
-                    </a:solidFill>
-                    <a:lnL w="12700" cap="flat" cmpd="sng" algn="ctr">
-                      <a:solidFill>
-                        <a:srgbClr val="000000"/>
-                      </a:solidFill>
-                      <a:prstDash val="solid"/>
-                    </a:lnL>
-                    <a:lnR w="12700" cap="flat" cmpd="sng" algn="ctr">
-                      <a:solidFill>
-                        <a:srgbClr val="000000"/>
-                      </a:solidFill>
-                      <a:prstDash val="solid"/>
-                    </a:lnR>
-                    <a:lnT w="12700" cap="flat" cmpd="sng" algn="ctr">
-                      <a:solidFill>
-                        <a:srgbClr val="000000"/>
-                      </a:solidFill>
-                      <a:prstDash val="solid"/>
-                    </a:lnT>
-                    <a:lnB w="12700" cap="flat" cmpd="sng" algn="ctr">
-                      <a:solidFill>
-                        <a:srgbClr val="000000"/>
-                      </a:solidFill>
-                      <a:prstDash val="solid"/>
-                    </a:lnB>
-                  </a:tcPr>
-                </a:tc>
-                <a:tc>
-                  <a:txBody>
-                    <a:bodyPr wrap="square"/>
-                    <a:lstStyle/>
-                    <a:p>
-                      <a:r>
-                        <a:rPr sz="1400" b="1">
-                          <a:solidFill>
-                            <a:srgbClr val="000000"/>
-                          </a:solidFill>
-                          <a:latin typeface="Arial"/>
-                        </a:rPr>
-                        <a:t>Data</a:t>
-                      </a:r>
-                    </a:p>
-                  </a:txBody>
-                  <a:tcPr marL="73152" marR="73152" marT="36576" marB="36576">
-                    <a:solidFill>
-                      <a:srgbClr val="EEEEEE"/>
-                    </a:solidFill>
-                    <a:lnL w="12700" cap="flat" cmpd="sng" algn="ctr">
-                      <a:solidFill>
-                        <a:srgbClr val="000000"/>
-                      </a:solidFill>
-                      <a:prstDash val="solid"/>
-                    </a:lnL>
-                    <a:lnR w="12700" cap="flat" cmpd="sng" algn="ctr">
-                      <a:solidFill>
-                        <a:srgbClr val="000000"/>
-                      </a:solidFill>
-                      <a:prstDash val="solid"/>
-                    </a:lnR>
-                    <a:lnT w="12700" cap="flat" cmpd="sng" algn="ctr">
-                      <a:solidFill>
-                        <a:srgbClr val="000000"/>
-                      </a:solidFill>
-                      <a:prstDash val="solid"/>
-                    </a:lnT>
-                    <a:lnB w="12700" cap="flat" cmpd="sng" algn="ctr">
-                      <a:solidFill>
-                        <a:srgbClr val="000000"/>
-                      </a:solidFill>
-                      <a:prstDash val="solid"/>
-                    </a:lnB>
-                  </a:tcPr>
-                </a:tc>
-                <a:tc>
-                  <a:txBody>
-                    <a:bodyPr wrap="square"/>
-                    <a:lstStyle/>
-                    <a:p>
-                      <a:r>
-                        <a:rPr sz="1400" b="1">
-                          <a:solidFill>
-                            <a:srgbClr val="000000"/>
-                          </a:solidFill>
-                          <a:latin typeface="Arial"/>
-                        </a:rPr>
-                        <a:t>Models</a:t>
-                      </a:r>
-                    </a:p>
-                  </a:txBody>
-                  <a:tcPr marL="73152" marR="73152" marT="36576" marB="36576">
-                    <a:solidFill>
-                      <a:srgbClr val="EEEEEE"/>
-                    </a:solidFill>
-                    <a:lnL w="12700" cap="flat" cmpd="sng" algn="ctr">
-                      <a:solidFill>
-                        <a:srgbClr val="000000"/>
-                      </a:solidFill>
-                      <a:prstDash val="solid"/>
-                    </a:lnL>
-                    <a:lnR w="12700" cap="flat" cmpd="sng" algn="ctr">
-                      <a:solidFill>
-                        <a:srgbClr val="000000"/>
-                      </a:solidFill>
-                      <a:prstDash val="solid"/>
-                    </a:lnR>
-                    <a:lnT w="12700" cap="flat" cmpd="sng" algn="ctr">
-                      <a:solidFill>
-                        <a:srgbClr val="000000"/>
-                      </a:solidFill>
-                      <a:prstDash val="solid"/>
-                    </a:lnT>
-                    <a:lnB w="12700" cap="flat" cmpd="sng" algn="ctr">
-                      <a:solidFill>
-                        <a:srgbClr val="000000"/>
-                      </a:solidFill>
-                      <a:prstDash val="solid"/>
-                    </a:lnB>
-                  </a:tcPr>
-                </a:tc>
-                <a:tc>
-                  <a:txBody>
-                    <a:bodyPr wrap="square"/>
-                    <a:lstStyle/>
-                    <a:p>
-                      <a:r>
-                        <a:rPr sz="1400" b="1">
-                          <a:solidFill>
-                            <a:srgbClr val="000000"/>
-                          </a:solidFill>
-                          <a:latin typeface="Arial"/>
-                        </a:rPr>
-                        <a:t>Main result</a:t>
-                      </a:r>
-                    </a:p>
-                  </a:txBody>
-                  <a:tcPr marL="73152" marR="73152" marT="36576" marB="36576">
-                    <a:solidFill>
-                      <a:srgbClr val="EEEEEE"/>
-                    </a:solidFill>
-                    <a:lnL w="12700" cap="flat" cmpd="sng" algn="ctr">
-                      <a:solidFill>
-                        <a:srgbClr val="000000"/>
-                      </a:solidFill>
-                      <a:prstDash val="solid"/>
-                    </a:lnL>
-                    <a:lnR w="12700" cap="flat" cmpd="sng" algn="ctr">
-                      <a:solidFill>
-                        <a:srgbClr val="000000"/>
-                      </a:solidFill>
-                      <a:prstDash val="solid"/>
-                    </a:lnR>
-                    <a:lnT w="12700" cap="flat" cmpd="sng" algn="ctr">
-                      <a:solidFill>
-                        <a:srgbClr val="000000"/>
-                      </a:solidFill>
-                      <a:prstDash val="solid"/>
-                    </a:lnT>
-                    <a:lnB w="12700" cap="flat" cmpd="sng" algn="ctr">
-                      <a:solidFill>
-                        <a:srgbClr val="000000"/>
-                      </a:solidFill>
-                      <a:prstDash val="solid"/>
-                    </a:lnB>
-                  </a:tcPr>
-                </a:tc>
-              </a:tr>
-              <a:tr h="566928">
-                <a:tc>
-                  <a:txBody>
-                    <a:bodyPr wrap="square"/>
-                    <a:lstStyle/>
-                    <a:p>
-                      <a:r>
-                        <a:rPr sz="1400" b="0">
-                          <a:solidFill>
-                            <a:srgbClr val="000000"/>
-                          </a:solidFill>
-                          <a:latin typeface="Arial"/>
-                        </a:rPr>
-                        <a:t>Khatun et al. (2022)</a:t>
-                      </a:r>
-                    </a:p>
-                  </a:txBody>
-                  <a:tcPr marL="73152" marR="73152" marT="36576" marB="36576">
-                    <a:solidFill>
-                      <a:srgbClr val="FFFFFF"/>
-                    </a:solidFill>
-                    <a:lnL w="12700" cap="flat" cmpd="sng" algn="ctr">
-                      <a:solidFill>
-                        <a:srgbClr val="000000"/>
-                      </a:solidFill>
-                      <a:prstDash val="solid"/>
-                    </a:lnL>
-                    <a:lnR w="12700" cap="flat" cmpd="sng" algn="ctr">
-                      <a:solidFill>
-                        <a:srgbClr val="000000"/>
-                      </a:solidFill>
-                      <a:prstDash val="solid"/>
-                    </a:lnR>
-                    <a:lnT w="12700" cap="flat" cmpd="sng" algn="ctr">
-                      <a:solidFill>
-                        <a:srgbClr val="000000"/>
-                      </a:solidFill>
-                      <a:prstDash val="solid"/>
-                    </a:lnT>
-                    <a:lnB w="12700" cap="flat" cmpd="sng" algn="ctr">
-                      <a:solidFill>
-                        <a:srgbClr val="000000"/>
-                      </a:solidFill>
-                      <a:prstDash val="solid"/>
-                    </a:lnB>
-                  </a:tcPr>
-                </a:tc>
-                <a:tc>
-                  <a:txBody>
-                    <a:bodyPr wrap="square"/>
-                    <a:lstStyle/>
-                    <a:p>
-                      <a:r>
-                        <a:rPr sz="1400" b="0">
-                          <a:solidFill>
-                            <a:srgbClr val="000000"/>
-                          </a:solidFill>
-                          <a:latin typeface="Arial"/>
-                        </a:rPr>
-                        <a:t>Survey, 610 people</a:t>
-                      </a:r>
-                    </a:p>
-                  </a:txBody>
-                  <a:tcPr marL="73152" marR="73152" marT="36576" marB="36576">
-                    <a:solidFill>
-                      <a:srgbClr val="FFFFFF"/>
-                    </a:solidFill>
-                    <a:lnL w="12700" cap="flat" cmpd="sng" algn="ctr">
-                      <a:solidFill>
-                        <a:srgbClr val="000000"/>
-                      </a:solidFill>
-                      <a:prstDash val="solid"/>
-                    </a:lnL>
-                    <a:lnR w="12700" cap="flat" cmpd="sng" algn="ctr">
-                      <a:solidFill>
-                        <a:srgbClr val="000000"/>
-                      </a:solidFill>
-                      <a:prstDash val="solid"/>
-                    </a:lnR>
-                    <a:lnT w="12700" cap="flat" cmpd="sng" algn="ctr">
-                      <a:solidFill>
-                        <a:srgbClr val="000000"/>
-                      </a:solidFill>
-                      <a:prstDash val="solid"/>
-                    </a:lnT>
-                    <a:lnB w="12700" cap="flat" cmpd="sng" algn="ctr">
-                      <a:solidFill>
-                        <a:srgbClr val="000000"/>
-                      </a:solidFill>
-                      <a:prstDash val="solid"/>
-                    </a:lnB>
-                  </a:tcPr>
-                </a:tc>
-                <a:tc>
-                  <a:txBody>
-                    <a:bodyPr wrap="square"/>
-                    <a:lstStyle/>
-                    <a:p>
-                      <a:r>
-                        <a:rPr sz="1400" b="0">
-                          <a:solidFill>
-                            <a:srgbClr val="000000"/>
-                          </a:solidFill>
-                          <a:latin typeface="Arial"/>
-                        </a:rPr>
-                        <a:t>SVM, KNN, LR, RF, XGBoost</a:t>
-                      </a:r>
-                    </a:p>
-                  </a:txBody>
-                  <a:tcPr marL="73152" marR="73152" marT="36576" marB="36576">
-                    <a:solidFill>
-                      <a:srgbClr val="FFFFFF"/>
-                    </a:solidFill>
-                    <a:lnL w="12700" cap="flat" cmpd="sng" algn="ctr">
-                      <a:solidFill>
-                        <a:srgbClr val="000000"/>
-                      </a:solidFill>
-                      <a:prstDash val="solid"/>
-                    </a:lnL>
-                    <a:lnR w="12700" cap="flat" cmpd="sng" algn="ctr">
-                      <a:solidFill>
-                        <a:srgbClr val="000000"/>
-                      </a:solidFill>
-                      <a:prstDash val="solid"/>
-                    </a:lnR>
-                    <a:lnT w="12700" cap="flat" cmpd="sng" algn="ctr">
-                      <a:solidFill>
-                        <a:srgbClr val="000000"/>
-                      </a:solidFill>
-                      <a:prstDash val="solid"/>
-                    </a:lnT>
-                    <a:lnB w="12700" cap="flat" cmpd="sng" algn="ctr">
-                      <a:solidFill>
-                        <a:srgbClr val="000000"/>
-                      </a:solidFill>
-                      <a:prstDash val="solid"/>
-                    </a:lnB>
-                  </a:tcPr>
-                </a:tc>
-                <a:tc>
-                  <a:txBody>
-                    <a:bodyPr wrap="square"/>
-                    <a:lstStyle/>
-                    <a:p>
-                      <a:r>
-                        <a:rPr sz="1400" b="0">
-                          <a:solidFill>
-                            <a:srgbClr val="000000"/>
-                          </a:solidFill>
-                          <a:latin typeface="Arial"/>
-                        </a:rPr>
-                        <a:t>XGBoost 92.62%</a:t>
-                      </a:r>
-                    </a:p>
-                  </a:txBody>
-                  <a:tcPr marL="73152" marR="73152" marT="36576" marB="36576">
-                    <a:solidFill>
-                      <a:srgbClr val="FFFFFF"/>
-                    </a:solidFill>
-                    <a:lnL w="12700" cap="flat" cmpd="sng" algn="ctr">
-                      <a:solidFill>
-                        <a:srgbClr val="000000"/>
-                      </a:solidFill>
-                      <a:prstDash val="solid"/>
-                    </a:lnL>
-                    <a:lnR w="12700" cap="flat" cmpd="sng" algn="ctr">
-                      <a:solidFill>
-                        <a:srgbClr val="000000"/>
-                      </a:solidFill>
-                      <a:prstDash val="solid"/>
-                    </a:lnR>
-                    <a:lnT w="12700" cap="flat" cmpd="sng" algn="ctr">
-                      <a:solidFill>
-                        <a:srgbClr val="000000"/>
-                      </a:solidFill>
-                      <a:prstDash val="solid"/>
-                    </a:lnT>
-                    <a:lnB w="12700" cap="flat" cmpd="sng" algn="ctr">
-                      <a:solidFill>
-                        <a:srgbClr val="000000"/>
-                      </a:solidFill>
-                      <a:prstDash val="solid"/>
-                    </a:lnB>
-                  </a:tcPr>
-                </a:tc>
-              </a:tr>
-              <a:tr h="566928">
-                <a:tc>
-                  <a:txBody>
-                    <a:bodyPr wrap="square"/>
-                    <a:lstStyle/>
-                    <a:p>
-                      <a:r>
-                        <a:rPr sz="1400" b="0">
-                          <a:solidFill>
-                            <a:srgbClr val="000000"/>
-                          </a:solidFill>
-                          <a:latin typeface="Arial"/>
-                        </a:rPr>
-                        <a:t>Sai et al. (2023)</a:t>
-                      </a:r>
-                    </a:p>
-                  </a:txBody>
-                  <a:tcPr marL="73152" marR="73152" marT="36576" marB="36576">
-                    <a:solidFill>
-                      <a:srgbClr val="FFFFFF"/>
-                    </a:solidFill>
-                    <a:lnL w="12700" cap="flat" cmpd="sng" algn="ctr">
-                      <a:solidFill>
-                        <a:srgbClr val="000000"/>
-                      </a:solidFill>
-                      <a:prstDash val="solid"/>
-                    </a:lnL>
-                    <a:lnR w="12700" cap="flat" cmpd="sng" algn="ctr">
-                      <a:solidFill>
-                        <a:srgbClr val="000000"/>
-                      </a:solidFill>
-                      <a:prstDash val="solid"/>
-                    </a:lnR>
-                    <a:lnT w="12700" cap="flat" cmpd="sng" algn="ctr">
-                      <a:solidFill>
-                        <a:srgbClr val="000000"/>
-                      </a:solidFill>
-                      <a:prstDash val="solid"/>
-                    </a:lnT>
-                    <a:lnB w="12700" cap="flat" cmpd="sng" algn="ctr">
-                      <a:solidFill>
-                        <a:srgbClr val="000000"/>
-                      </a:solidFill>
-                      <a:prstDash val="solid"/>
-                    </a:lnB>
-                  </a:tcPr>
-                </a:tc>
-                <a:tc>
-                  <a:txBody>
-                    <a:bodyPr wrap="square"/>
-                    <a:lstStyle/>
-                    <a:p>
-                      <a:r>
-                        <a:rPr sz="1400" b="0">
-                          <a:solidFill>
-                            <a:srgbClr val="000000"/>
-                          </a:solidFill>
-                          <a:latin typeface="Arial"/>
-                        </a:rPr>
-                        <a:t>Hair fall data</a:t>
-                      </a:r>
-                    </a:p>
-                  </a:txBody>
-                  <a:tcPr marL="73152" marR="73152" marT="36576" marB="36576">
-                    <a:solidFill>
-                      <a:srgbClr val="FFFFFF"/>
-                    </a:solidFill>
-                    <a:lnL w="12700" cap="flat" cmpd="sng" algn="ctr">
-                      <a:solidFill>
-                        <a:srgbClr val="000000"/>
-                      </a:solidFill>
-                      <a:prstDash val="solid"/>
-                    </a:lnL>
-                    <a:lnR w="12700" cap="flat" cmpd="sng" algn="ctr">
-                      <a:solidFill>
-                        <a:srgbClr val="000000"/>
-                      </a:solidFill>
-                      <a:prstDash val="solid"/>
-                    </a:lnR>
-                    <a:lnT w="12700" cap="flat" cmpd="sng" algn="ctr">
-                      <a:solidFill>
-                        <a:srgbClr val="000000"/>
-                      </a:solidFill>
-                      <a:prstDash val="solid"/>
-                    </a:lnT>
-                    <a:lnB w="12700" cap="flat" cmpd="sng" algn="ctr">
-                      <a:solidFill>
-                        <a:srgbClr val="000000"/>
-                      </a:solidFill>
-                      <a:prstDash val="solid"/>
-                    </a:lnB>
-                  </a:tcPr>
-                </a:tc>
-                <a:tc>
-                  <a:txBody>
-                    <a:bodyPr wrap="square"/>
-                    <a:lstStyle/>
-                    <a:p>
-                      <a:r>
-                        <a:rPr sz="1400" b="0">
-                          <a:solidFill>
-                            <a:srgbClr val="000000"/>
-                          </a:solidFill>
-                          <a:latin typeface="Arial"/>
-                        </a:rPr>
-                        <a:t>SVM, KNN, DT, RF, LR, ensemble</a:t>
-                      </a:r>
-                    </a:p>
-                  </a:txBody>
-                  <a:tcPr marL="73152" marR="73152" marT="36576" marB="36576">
-                    <a:solidFill>
-                      <a:srgbClr val="FFFFFF"/>
-                    </a:solidFill>
-                    <a:lnL w="12700" cap="flat" cmpd="sng" algn="ctr">
-                      <a:solidFill>
-                        <a:srgbClr val="000000"/>
-                      </a:solidFill>
-                      <a:prstDash val="solid"/>
-                    </a:lnL>
-                    <a:lnR w="12700" cap="flat" cmpd="sng" algn="ctr">
-                      <a:solidFill>
-                        <a:srgbClr val="000000"/>
-                      </a:solidFill>
-                      <a:prstDash val="solid"/>
-                    </a:lnR>
-                    <a:lnT w="12700" cap="flat" cmpd="sng" algn="ctr">
-                      <a:solidFill>
-                        <a:srgbClr val="000000"/>
-                      </a:solidFill>
-                      <a:prstDash val="solid"/>
-                    </a:lnT>
-                    <a:lnB w="12700" cap="flat" cmpd="sng" algn="ctr">
-                      <a:solidFill>
-                        <a:srgbClr val="000000"/>
-                      </a:solidFill>
-                      <a:prstDash val="solid"/>
-                    </a:lnB>
-                  </a:tcPr>
-                </a:tc>
-                <a:tc>
-                  <a:txBody>
-                    <a:bodyPr wrap="square"/>
-                    <a:lstStyle/>
-                    <a:p>
-                      <a:r>
-                        <a:rPr sz="1400" b="0">
-                          <a:solidFill>
-                            <a:srgbClr val="000000"/>
-                          </a:solidFill>
-                          <a:latin typeface="Arial"/>
-                        </a:rPr>
-                        <a:t>Ensemble best</a:t>
-                      </a:r>
-                    </a:p>
-                  </a:txBody>
-                  <a:tcPr marL="73152" marR="73152" marT="36576" marB="36576">
-                    <a:solidFill>
-                      <a:srgbClr val="FFFFFF"/>
-                    </a:solidFill>
-                    <a:lnL w="12700" cap="flat" cmpd="sng" algn="ctr">
-                      <a:solidFill>
-                        <a:srgbClr val="000000"/>
-                      </a:solidFill>
-                      <a:prstDash val="solid"/>
-                    </a:lnL>
-                    <a:lnR w="12700" cap="flat" cmpd="sng" algn="ctr">
-                      <a:solidFill>
-                        <a:srgbClr val="000000"/>
-                      </a:solidFill>
-                      <a:prstDash val="solid"/>
-                    </a:lnR>
-                    <a:lnT w="12700" cap="flat" cmpd="sng" algn="ctr">
-                      <a:solidFill>
-                        <a:srgbClr val="000000"/>
-                      </a:solidFill>
-                      <a:prstDash val="solid"/>
-                    </a:lnT>
-                    <a:lnB w="12700" cap="flat" cmpd="sng" algn="ctr">
-                      <a:solidFill>
-                        <a:srgbClr val="000000"/>
-                      </a:solidFill>
-                      <a:prstDash val="solid"/>
-                    </a:lnB>
-                  </a:tcPr>
-                </a:tc>
-              </a:tr>
-              <a:tr h="566928">
-                <a:tc>
-                  <a:txBody>
-                    <a:bodyPr wrap="square"/>
-                    <a:lstStyle/>
-                    <a:p>
-                      <a:r>
-                        <a:rPr sz="1400" b="0">
-                          <a:solidFill>
-                            <a:srgbClr val="000000"/>
-                          </a:solidFill>
-                          <a:latin typeface="Arial"/>
-                        </a:rPr>
-                        <a:t>Kumar et al. (2025)</a:t>
-                      </a:r>
-                    </a:p>
-                  </a:txBody>
-                  <a:tcPr marL="73152" marR="73152" marT="36576" marB="36576">
-                    <a:solidFill>
-                      <a:srgbClr val="FFFFFF"/>
-                    </a:solidFill>
-                    <a:lnL w="12700" cap="flat" cmpd="sng" algn="ctr">
-                      <a:solidFill>
-                        <a:srgbClr val="000000"/>
-                      </a:solidFill>
-                      <a:prstDash val="solid"/>
-                    </a:lnL>
-                    <a:lnR w="12700" cap="flat" cmpd="sng" algn="ctr">
-                      <a:solidFill>
-                        <a:srgbClr val="000000"/>
-                      </a:solidFill>
-                      <a:prstDash val="solid"/>
-                    </a:lnR>
-                    <a:lnT w="12700" cap="flat" cmpd="sng" algn="ctr">
-                      <a:solidFill>
-                        <a:srgbClr val="000000"/>
-                      </a:solidFill>
-                      <a:prstDash val="solid"/>
-                    </a:lnT>
-                    <a:lnB w="12700" cap="flat" cmpd="sng" algn="ctr">
-                      <a:solidFill>
-                        <a:srgbClr val="000000"/>
-                      </a:solidFill>
-                      <a:prstDash val="solid"/>
-                    </a:lnB>
-                  </a:tcPr>
-                </a:tc>
-                <a:tc>
-                  <a:txBody>
-                    <a:bodyPr wrap="square"/>
-                    <a:lstStyle/>
-                    <a:p>
-                      <a:r>
-                        <a:rPr sz="1400" b="0">
-                          <a:solidFill>
-                            <a:srgbClr val="000000"/>
-                          </a:solidFill>
-                          <a:latin typeface="Arial"/>
-                        </a:rPr>
-                        <a:t>2,000 records</a:t>
-                      </a:r>
-                    </a:p>
-                  </a:txBody>
-                  <a:tcPr marL="73152" marR="73152" marT="36576" marB="36576">
-                    <a:solidFill>
-                      <a:srgbClr val="FFFFFF"/>
-                    </a:solidFill>
-                    <a:lnL w="12700" cap="flat" cmpd="sng" algn="ctr">
-                      <a:solidFill>
-                        <a:srgbClr val="000000"/>
-                      </a:solidFill>
-                      <a:prstDash val="solid"/>
-                    </a:lnL>
-                    <a:lnR w="12700" cap="flat" cmpd="sng" algn="ctr">
-                      <a:solidFill>
-                        <a:srgbClr val="000000"/>
-                      </a:solidFill>
-                      <a:prstDash val="solid"/>
-                    </a:lnR>
-                    <a:lnT w="12700" cap="flat" cmpd="sng" algn="ctr">
-                      <a:solidFill>
-                        <a:srgbClr val="000000"/>
-                      </a:solidFill>
-                      <a:prstDash val="solid"/>
-                    </a:lnT>
-                    <a:lnB w="12700" cap="flat" cmpd="sng" algn="ctr">
-                      <a:solidFill>
-                        <a:srgbClr val="000000"/>
-                      </a:solidFill>
-                      <a:prstDash val="solid"/>
-                    </a:lnB>
-                  </a:tcPr>
-                </a:tc>
-                <a:tc>
-                  <a:txBody>
-                    <a:bodyPr wrap="square"/>
-                    <a:lstStyle/>
-                    <a:p>
-                      <a:r>
-                        <a:rPr sz="1400" b="0">
-                          <a:solidFill>
-                            <a:srgbClr val="000000"/>
-                          </a:solidFill>
-                          <a:latin typeface="Arial"/>
-                        </a:rPr>
-                        <a:t>RF, XGBoost, CatBoost, LightGBM</a:t>
-                      </a:r>
-                    </a:p>
-                  </a:txBody>
-                  <a:tcPr marL="73152" marR="73152" marT="36576" marB="36576">
-                    <a:solidFill>
-                      <a:srgbClr val="FFFFFF"/>
-                    </a:solidFill>
-                    <a:lnL w="12700" cap="flat" cmpd="sng" algn="ctr">
-                      <a:solidFill>
-                        <a:srgbClr val="000000"/>
-                      </a:solidFill>
-                      <a:prstDash val="solid"/>
-                    </a:lnL>
-                    <a:lnR w="12700" cap="flat" cmpd="sng" algn="ctr">
-                      <a:solidFill>
-                        <a:srgbClr val="000000"/>
-                      </a:solidFill>
-                      <a:prstDash val="solid"/>
-                    </a:lnR>
-                    <a:lnT w="12700" cap="flat" cmpd="sng" algn="ctr">
-                      <a:solidFill>
-                        <a:srgbClr val="000000"/>
-                      </a:solidFill>
-                      <a:prstDash val="solid"/>
-                    </a:lnT>
-                    <a:lnB w="12700" cap="flat" cmpd="sng" algn="ctr">
-                      <a:solidFill>
-                        <a:srgbClr val="000000"/>
-                      </a:solidFill>
-                      <a:prstDash val="solid"/>
-                    </a:lnB>
-                  </a:tcPr>
-                </a:tc>
-                <a:tc>
-                  <a:txBody>
-                    <a:bodyPr wrap="square"/>
-                    <a:lstStyle/>
-                    <a:p>
-                      <a:r>
-                        <a:rPr sz="1400" b="0">
-                          <a:solidFill>
-                            <a:srgbClr val="000000"/>
-                          </a:solidFill>
-                          <a:latin typeface="Arial"/>
-                        </a:rPr>
-                        <a:t>RF 100%, CatBoost 49.5%</a:t>
-                      </a:r>
-                    </a:p>
-                  </a:txBody>
-                  <a:tcPr marL="73152" marR="73152" marT="36576" marB="36576">
-                    <a:solidFill>
-                      <a:srgbClr val="FFFFFF"/>
-                    </a:solidFill>
-                    <a:lnL w="12700" cap="flat" cmpd="sng" algn="ctr">
-                      <a:solidFill>
-                        <a:srgbClr val="000000"/>
-                      </a:solidFill>
-                      <a:prstDash val="solid"/>
-                    </a:lnL>
-                    <a:lnR w="12700" cap="flat" cmpd="sng" algn="ctr">
-                      <a:solidFill>
-                        <a:srgbClr val="000000"/>
-                      </a:solidFill>
-                      <a:prstDash val="solid"/>
-                    </a:lnR>
-                    <a:lnT w="12700" cap="flat" cmpd="sng" algn="ctr">
-                      <a:solidFill>
-                        <a:srgbClr val="000000"/>
-                      </a:solidFill>
-                      <a:prstDash val="solid"/>
-                    </a:lnT>
-                    <a:lnB w="12700" cap="flat" cmpd="sng" algn="ctr">
-                      <a:solidFill>
-                        <a:srgbClr val="000000"/>
-                      </a:solidFill>
-                      <a:prstDash val="solid"/>
-                    </a:lnB>
-                  </a:tcPr>
-                </a:tc>
-              </a:tr>
-              <a:tr h="566928">
-                <a:tc>
-                  <a:txBody>
-                    <a:bodyPr wrap="square"/>
-                    <a:lstStyle/>
-                    <a:p>
-                      <a:r>
-                        <a:rPr sz="1400" b="0">
-                          <a:solidFill>
-                            <a:srgbClr val="000000"/>
-                          </a:solidFill>
-                          <a:latin typeface="Arial"/>
-                        </a:rPr>
-                        <a:t>Siami &amp; Azis (2025)</a:t>
-                      </a:r>
-                    </a:p>
-                  </a:txBody>
-                  <a:tcPr marL="73152" marR="73152" marT="36576" marB="36576">
-                    <a:solidFill>
-                      <a:srgbClr val="FFFFFF"/>
-                    </a:solidFill>
-                    <a:lnL w="12700" cap="flat" cmpd="sng" algn="ctr">
-                      <a:solidFill>
-                        <a:srgbClr val="000000"/>
-                      </a:solidFill>
-                      <a:prstDash val="solid"/>
-                    </a:lnL>
-                    <a:lnR w="12700" cap="flat" cmpd="sng" algn="ctr">
-                      <a:solidFill>
-                        <a:srgbClr val="000000"/>
-                      </a:solidFill>
-                      <a:prstDash val="solid"/>
-                    </a:lnR>
-                    <a:lnT w="12700" cap="flat" cmpd="sng" algn="ctr">
-                      <a:solidFill>
-                        <a:srgbClr val="000000"/>
-                      </a:solidFill>
-                      <a:prstDash val="solid"/>
-                    </a:lnT>
-                    <a:lnB w="12700" cap="flat" cmpd="sng" algn="ctr">
-                      <a:solidFill>
-                        <a:srgbClr val="000000"/>
-                      </a:solidFill>
-                      <a:prstDash val="solid"/>
-                    </a:lnB>
-                  </a:tcPr>
-                </a:tc>
-                <a:tc>
-                  <a:txBody>
-                    <a:bodyPr wrap="square"/>
-                    <a:lstStyle/>
-                    <a:p>
-                      <a:r>
-                        <a:rPr sz="1400" b="0">
-                          <a:solidFill>
-                            <a:srgbClr val="000000"/>
-                          </a:solidFill>
-                          <a:latin typeface="Arial"/>
-                        </a:rPr>
-                        <a:t>Multi-factor data</a:t>
-                      </a:r>
-                    </a:p>
-                  </a:txBody>
-                  <a:tcPr marL="73152" marR="73152" marT="36576" marB="36576">
-                    <a:solidFill>
-                      <a:srgbClr val="FFFFFF"/>
-                    </a:solidFill>
-                    <a:lnL w="12700" cap="flat" cmpd="sng" algn="ctr">
-                      <a:solidFill>
-                        <a:srgbClr val="000000"/>
-                      </a:solidFill>
-                      <a:prstDash val="solid"/>
-                    </a:lnL>
-                    <a:lnR w="12700" cap="flat" cmpd="sng" algn="ctr">
-                      <a:solidFill>
-                        <a:srgbClr val="000000"/>
-                      </a:solidFill>
-                      <a:prstDash val="solid"/>
-                    </a:lnR>
-                    <a:lnT w="12700" cap="flat" cmpd="sng" algn="ctr">
-                      <a:solidFill>
-                        <a:srgbClr val="000000"/>
-                      </a:solidFill>
-                      <a:prstDash val="solid"/>
-                    </a:lnT>
-                    <a:lnB w="12700" cap="flat" cmpd="sng" algn="ctr">
-                      <a:solidFill>
-                        <a:srgbClr val="000000"/>
-                      </a:solidFill>
-                      <a:prstDash val="solid"/>
-                    </a:lnB>
-                  </a:tcPr>
-                </a:tc>
-                <a:tc>
-                  <a:txBody>
-                    <a:bodyPr wrap="square"/>
-                    <a:lstStyle/>
-                    <a:p>
-                      <a:r>
-                        <a:rPr sz="1400" b="0">
-                          <a:solidFill>
-                            <a:srgbClr val="000000"/>
-                          </a:solidFill>
-                          <a:latin typeface="Arial"/>
-                        </a:rPr>
-                        <a:t>LR, DT, RF, GB, XGBoost, voting</a:t>
-                      </a:r>
-                    </a:p>
-                  </a:txBody>
-                  <a:tcPr marL="73152" marR="73152" marT="36576" marB="36576">
-                    <a:solidFill>
-                      <a:srgbClr val="FFFFFF"/>
-                    </a:solidFill>
-                    <a:lnL w="12700" cap="flat" cmpd="sng" algn="ctr">
-                      <a:solidFill>
-                        <a:srgbClr val="000000"/>
-                      </a:solidFill>
-                      <a:prstDash val="solid"/>
-                    </a:lnL>
-                    <a:lnR w="12700" cap="flat" cmpd="sng" algn="ctr">
-                      <a:solidFill>
-                        <a:srgbClr val="000000"/>
-                      </a:solidFill>
-                      <a:prstDash val="solid"/>
-                    </a:lnR>
-                    <a:lnT w="12700" cap="flat" cmpd="sng" algn="ctr">
-                      <a:solidFill>
-                        <a:srgbClr val="000000"/>
-                      </a:solidFill>
-                      <a:prstDash val="solid"/>
-                    </a:lnT>
-                    <a:lnB w="12700" cap="flat" cmpd="sng" algn="ctr">
-                      <a:solidFill>
-                        <a:srgbClr val="000000"/>
-                      </a:solidFill>
-                      <a:prstDash val="solid"/>
-                    </a:lnB>
-                  </a:tcPr>
-                </a:tc>
-                <a:tc>
-                  <a:txBody>
-                    <a:bodyPr wrap="square"/>
-                    <a:lstStyle/>
-                    <a:p>
-                      <a:r>
-                        <a:rPr sz="1400" b="0">
-                          <a:solidFill>
-                            <a:srgbClr val="000000"/>
-                          </a:solidFill>
-                          <a:latin typeface="Arial"/>
-                        </a:rPr>
-                        <a:t>About 50% at best</a:t>
-                      </a:r>
-                    </a:p>
-                  </a:txBody>
-                  <a:tcPr marL="73152" marR="73152" marT="36576" marB="36576">
-                    <a:solidFill>
-                      <a:srgbClr val="FFFFFF"/>
-                    </a:solidFill>
-                    <a:lnL w="12700" cap="flat" cmpd="sng" algn="ctr">
-                      <a:solidFill>
-                        <a:srgbClr val="000000"/>
-                      </a:solidFill>
-                      <a:prstDash val="solid"/>
-                    </a:lnL>
-                    <a:lnR w="12700" cap="flat" cmpd="sng" algn="ctr">
-                      <a:solidFill>
-                        <a:srgbClr val="000000"/>
-                      </a:solidFill>
-                      <a:prstDash val="solid"/>
-                    </a:lnR>
-                    <a:lnT w="12700" cap="flat" cmpd="sng" algn="ctr">
-                      <a:solidFill>
-                        <a:srgbClr val="000000"/>
-                      </a:solidFill>
-                      <a:prstDash val="solid"/>
-                    </a:lnT>
-                    <a:lnB w="12700" cap="flat" cmpd="sng" algn="ctr">
-                      <a:solidFill>
-                        <a:srgbClr val="000000"/>
-                      </a:solidFill>
-                      <a:prstDash val="solid"/>
-                    </a:lnB>
-                  </a:tcPr>
-                </a:tc>
-              </a:tr>
-              <a:tr h="566928">
-                <a:tc>
-                  <a:txBody>
-                    <a:bodyPr wrap="square"/>
-                    <a:lstStyle/>
-                    <a:p>
-                      <a:r>
-                        <a:rPr sz="1400" b="0">
-                          <a:solidFill>
-                            <a:srgbClr val="000000"/>
-                          </a:solidFill>
-                          <a:latin typeface="Arial"/>
-                        </a:rPr>
-                        <a:t>Leema et al. (2025)</a:t>
-                      </a:r>
-                    </a:p>
-                  </a:txBody>
-                  <a:tcPr marL="73152" marR="73152" marT="36576" marB="36576">
-                    <a:solidFill>
-                      <a:srgbClr val="FFFFFF"/>
-                    </a:solidFill>
-                    <a:lnL w="12700" cap="flat" cmpd="sng" algn="ctr">
-                      <a:solidFill>
-                        <a:srgbClr val="000000"/>
-                      </a:solidFill>
-                      <a:prstDash val="solid"/>
-                    </a:lnL>
-                    <a:lnR w="12700" cap="flat" cmpd="sng" algn="ctr">
-                      <a:solidFill>
-                        <a:srgbClr val="000000"/>
-                      </a:solidFill>
-                      <a:prstDash val="solid"/>
-                    </a:lnR>
-                    <a:lnT w="12700" cap="flat" cmpd="sng" algn="ctr">
-                      <a:solidFill>
-                        <a:srgbClr val="000000"/>
-                      </a:solidFill>
-                      <a:prstDash val="solid"/>
-                    </a:lnT>
-                    <a:lnB w="12700" cap="flat" cmpd="sng" algn="ctr">
-                      <a:solidFill>
-                        <a:srgbClr val="000000"/>
-                      </a:solidFill>
-                      <a:prstDash val="solid"/>
-                    </a:lnB>
-                  </a:tcPr>
-                </a:tc>
-                <a:tc>
-                  <a:txBody>
-                    <a:bodyPr wrap="square"/>
-                    <a:lstStyle/>
-                    <a:p>
-                      <a:r>
-                        <a:rPr sz="1400" b="0">
-                          <a:solidFill>
-                            <a:srgbClr val="000000"/>
-                          </a:solidFill>
-                          <a:latin typeface="Arial"/>
-                        </a:rPr>
-                        <a:t>Survey, 750 people</a:t>
-                      </a:r>
-                    </a:p>
-                  </a:txBody>
-                  <a:tcPr marL="73152" marR="73152" marT="36576" marB="36576">
-                    <a:solidFill>
-                      <a:srgbClr val="FFFFFF"/>
-                    </a:solidFill>
-                    <a:lnL w="12700" cap="flat" cmpd="sng" algn="ctr">
-                      <a:solidFill>
-                        <a:srgbClr val="000000"/>
-                      </a:solidFill>
-                      <a:prstDash val="solid"/>
-                    </a:lnL>
-                    <a:lnR w="12700" cap="flat" cmpd="sng" algn="ctr">
-                      <a:solidFill>
-                        <a:srgbClr val="000000"/>
-                      </a:solidFill>
-                      <a:prstDash val="solid"/>
-                    </a:lnR>
-                    <a:lnT w="12700" cap="flat" cmpd="sng" algn="ctr">
-                      <a:solidFill>
-                        <a:srgbClr val="000000"/>
-                      </a:solidFill>
-                      <a:prstDash val="solid"/>
-                    </a:lnT>
-                    <a:lnB w="12700" cap="flat" cmpd="sng" algn="ctr">
-                      <a:solidFill>
-                        <a:srgbClr val="000000"/>
-                      </a:solidFill>
-                      <a:prstDash val="solid"/>
-                    </a:lnB>
-                  </a:tcPr>
-                </a:tc>
-                <a:tc>
-                  <a:txBody>
-                    <a:bodyPr wrap="square"/>
-                    <a:lstStyle/>
-                    <a:p>
-                      <a:r>
-                        <a:rPr sz="1400" b="0">
-                          <a:solidFill>
-                            <a:srgbClr val="000000"/>
-                          </a:solidFill>
-                          <a:latin typeface="Arial"/>
-                        </a:rPr>
-                        <a:t>LSTM, RF, TFT, ARIMAX</a:t>
-                      </a:r>
-                    </a:p>
-                  </a:txBody>
-                  <a:tcPr marL="73152" marR="73152" marT="36576" marB="36576">
-                    <a:solidFill>
-                      <a:srgbClr val="FFFFFF"/>
-                    </a:solidFill>
-                    <a:lnL w="12700" cap="flat" cmpd="sng" algn="ctr">
-                      <a:solidFill>
-                        <a:srgbClr val="000000"/>
-                      </a:solidFill>
-                      <a:prstDash val="solid"/>
-                    </a:lnL>
-                    <a:lnR w="12700" cap="flat" cmpd="sng" algn="ctr">
-                      <a:solidFill>
-                        <a:srgbClr val="000000"/>
-                      </a:solidFill>
-                      <a:prstDash val="solid"/>
-                    </a:lnR>
-                    <a:lnT w="12700" cap="flat" cmpd="sng" algn="ctr">
-                      <a:solidFill>
-                        <a:srgbClr val="000000"/>
-                      </a:solidFill>
-                      <a:prstDash val="solid"/>
-                    </a:lnT>
-                    <a:lnB w="12700" cap="flat" cmpd="sng" algn="ctr">
-                      <a:solidFill>
-                        <a:srgbClr val="000000"/>
-                      </a:solidFill>
-                      <a:prstDash val="solid"/>
-                    </a:lnB>
-                  </a:tcPr>
-                </a:tc>
-                <a:tc>
-                  <a:txBody>
-                    <a:bodyPr wrap="square"/>
-                    <a:lstStyle/>
-                    <a:p>
-                      <a:r>
-                        <a:rPr sz="1400" b="0">
-                          <a:solidFill>
-                            <a:srgbClr val="000000"/>
-                          </a:solidFill>
-                          <a:latin typeface="Arial"/>
-                        </a:rPr>
-                        <a:t>TFT 97.5%</a:t>
-                      </a:r>
-                    </a:p>
-                  </a:txBody>
-                  <a:tcPr marL="73152" marR="73152" marT="36576" marB="36576">
-                    <a:solidFill>
-                      <a:srgbClr val="FFFFFF"/>
-                    </a:solidFill>
-                    <a:lnL w="12700" cap="flat" cmpd="sng" algn="ctr">
-                      <a:solidFill>
-                        <a:srgbClr val="000000"/>
-                      </a:solidFill>
-                      <a:prstDash val="solid"/>
-                    </a:lnL>
-                    <a:lnR w="12700" cap="flat" cmpd="sng" algn="ctr">
-                      <a:solidFill>
-                        <a:srgbClr val="000000"/>
-                      </a:solidFill>
-                      <a:prstDash val="solid"/>
-                    </a:lnR>
-                    <a:lnT w="12700" cap="flat" cmpd="sng" algn="ctr">
-                      <a:solidFill>
-                        <a:srgbClr val="000000"/>
-                      </a:solidFill>
-                      <a:prstDash val="solid"/>
-                    </a:lnT>
-                    <a:lnB w="12700" cap="flat" cmpd="sng" algn="ctr">
-                      <a:solidFill>
-                        <a:srgbClr val="000000"/>
-                      </a:solidFill>
-                      <a:prstDash val="solid"/>
-                    </a:lnB>
-                  </a:tcPr>
-                </a:tc>
-              </a:tr>
-              <a:tr h="566928">
-                <a:tc>
-                  <a:txBody>
-                    <a:bodyPr wrap="square"/>
-                    <a:lstStyle/>
-                    <a:p>
-                      <a:r>
-                        <a:rPr sz="1400" b="0">
-                          <a:solidFill>
-                            <a:srgbClr val="000000"/>
-                          </a:solidFill>
-                          <a:latin typeface="Arial"/>
-                        </a:rPr>
-                        <a:t>Shakeel et al. (2021); Sayyad et al. (2022)</a:t>
-                      </a:r>
-                    </a:p>
-                  </a:txBody>
-                  <a:tcPr marL="73152" marR="73152" marT="36576" marB="36576">
-                    <a:solidFill>
-                      <a:srgbClr val="FFFFFF"/>
-                    </a:solidFill>
-                    <a:lnL w="12700" cap="flat" cmpd="sng" algn="ctr">
-                      <a:solidFill>
-                        <a:srgbClr val="000000"/>
-                      </a:solidFill>
-                      <a:prstDash val="solid"/>
-                    </a:lnL>
-                    <a:lnR w="12700" cap="flat" cmpd="sng" algn="ctr">
-                      <a:solidFill>
-                        <a:srgbClr val="000000"/>
-                      </a:solidFill>
-                      <a:prstDash val="solid"/>
-                    </a:lnR>
-                    <a:lnT w="12700" cap="flat" cmpd="sng" algn="ctr">
-                      <a:solidFill>
-                        <a:srgbClr val="000000"/>
-                      </a:solidFill>
-                      <a:prstDash val="solid"/>
-                    </a:lnT>
-                    <a:lnB w="12700" cap="flat" cmpd="sng" algn="ctr">
-                      <a:solidFill>
-                        <a:srgbClr val="000000"/>
-                      </a:solidFill>
-                      <a:prstDash val="solid"/>
-                    </a:lnB>
-                  </a:tcPr>
-                </a:tc>
-                <a:tc>
-                  <a:txBody>
-                    <a:bodyPr wrap="square"/>
-                    <a:lstStyle/>
-                    <a:p>
-                      <a:r>
-                        <a:rPr sz="1400" b="0">
-                          <a:solidFill>
-                            <a:srgbClr val="000000"/>
-                          </a:solidFill>
-                          <a:latin typeface="Arial"/>
-                        </a:rPr>
-                        <a:t>Hair images</a:t>
-                      </a:r>
-                    </a:p>
-                  </a:txBody>
-                  <a:tcPr marL="73152" marR="73152" marT="36576" marB="36576">
-                    <a:solidFill>
-                      <a:srgbClr val="FFFFFF"/>
-                    </a:solidFill>
-                    <a:lnL w="12700" cap="flat" cmpd="sng" algn="ctr">
-                      <a:solidFill>
-                        <a:srgbClr val="000000"/>
-                      </a:solidFill>
-                      <a:prstDash val="solid"/>
-                    </a:lnL>
-                    <a:lnR w="12700" cap="flat" cmpd="sng" algn="ctr">
-                      <a:solidFill>
-                        <a:srgbClr val="000000"/>
-                      </a:solidFill>
-                      <a:prstDash val="solid"/>
-                    </a:lnR>
-                    <a:lnT w="12700" cap="flat" cmpd="sng" algn="ctr">
-                      <a:solidFill>
-                        <a:srgbClr val="000000"/>
-                      </a:solidFill>
-                      <a:prstDash val="solid"/>
-                    </a:lnT>
-                    <a:lnB w="12700" cap="flat" cmpd="sng" algn="ctr">
-                      <a:solidFill>
-                        <a:srgbClr val="000000"/>
-                      </a:solidFill>
-                      <a:prstDash val="solid"/>
-                    </a:lnB>
-                  </a:tcPr>
-                </a:tc>
-                <a:tc>
-                  <a:txBody>
-                    <a:bodyPr wrap="square"/>
-                    <a:lstStyle/>
-                    <a:p>
-                      <a:r>
-                        <a:rPr sz="1400" b="0">
-                          <a:solidFill>
-                            <a:srgbClr val="000000"/>
-                          </a:solidFill>
-                          <a:latin typeface="Arial"/>
-                        </a:rPr>
-                        <a:t>SVM, KNN, VGG with SVM</a:t>
-                      </a:r>
-                    </a:p>
-                  </a:txBody>
-                  <a:tcPr marL="73152" marR="73152" marT="36576" marB="36576">
-                    <a:solidFill>
-                      <a:srgbClr val="FFFFFF"/>
-                    </a:solidFill>
-                    <a:lnL w="12700" cap="flat" cmpd="sng" algn="ctr">
-                      <a:solidFill>
-                        <a:srgbClr val="000000"/>
-                      </a:solidFill>
-                      <a:prstDash val="solid"/>
-                    </a:lnL>
-                    <a:lnR w="12700" cap="flat" cmpd="sng" algn="ctr">
-                      <a:solidFill>
-                        <a:srgbClr val="000000"/>
-                      </a:solidFill>
-                      <a:prstDash val="solid"/>
-                    </a:lnR>
-                    <a:lnT w="12700" cap="flat" cmpd="sng" algn="ctr">
-                      <a:solidFill>
-                        <a:srgbClr val="000000"/>
-                      </a:solidFill>
-                      <a:prstDash val="solid"/>
-                    </a:lnT>
-                    <a:lnB w="12700" cap="flat" cmpd="sng" algn="ctr">
-                      <a:solidFill>
-                        <a:srgbClr val="000000"/>
-                      </a:solidFill>
-                      <a:prstDash val="solid"/>
-                    </a:lnB>
-                  </a:tcPr>
-                </a:tc>
-                <a:tc>
-                  <a:txBody>
-                    <a:bodyPr wrap="square"/>
-                    <a:lstStyle/>
-                    <a:p>
-                      <a:r>
-                        <a:rPr sz="1400" b="0">
-                          <a:solidFill>
-                            <a:srgbClr val="000000"/>
-                          </a:solidFill>
-                          <a:latin typeface="Arial"/>
-                        </a:rPr>
-                        <a:t>91.4% and 98.31%</a:t>
-                      </a:r>
-                    </a:p>
-                  </a:txBody>
-                  <a:tcPr marL="73152" marR="73152" marT="36576" marB="36576">
-                    <a:solidFill>
-                      <a:srgbClr val="FFFFFF"/>
-                    </a:solidFill>
-                    <a:lnL w="12700" cap="flat" cmpd="sng" algn="ctr">
-                      <a:solidFill>
-                        <a:srgbClr val="000000"/>
-                      </a:solidFill>
-                      <a:prstDash val="solid"/>
-                    </a:lnL>
-                    <a:lnR w="12700" cap="flat" cmpd="sng" algn="ctr">
-                      <a:solidFill>
-                        <a:srgbClr val="000000"/>
-                      </a:solidFill>
-                      <a:prstDash val="solid"/>
-                    </a:lnR>
-                    <a:lnT w="12700" cap="flat" cmpd="sng" algn="ctr">
-                      <a:solidFill>
-                        <a:srgbClr val="000000"/>
-                      </a:solidFill>
-                      <a:prstDash val="solid"/>
-                    </a:lnT>
-                    <a:lnB w="12700" cap="flat" cmpd="sng" algn="ctr">
-                      <a:solidFill>
-                        <a:srgbClr val="000000"/>
-                      </a:solidFill>
-                      <a:prstDash val="solid"/>
-                    </a:lnB>
-                  </a:tcPr>
-                </a:tc>
-              </a:tr>
-            </a:tbl>
-          </a:graphicData>
-        </a:graphic>
-      </p:graphicFrame>
-      <p:sp>
-        <p:nvSpPr>
-          <p:cNvPr id="7" name="TextBox 6"/>
+              <a:t>9 / 14</a:t>
+            </a:r>
+          </a:p>
+        </p:txBody>
+      </p:sp>
+      <p:sp>
+        <p:nvSpPr>
+          <p:cNvPr id="6" name="TextBox 5"/>
           <p:cNvSpPr txBox="1"/>
           <p:nvPr/>
         </p:nvSpPr>
         <p:spPr>
           <a:xfrm>
-            <a:off x="457200" y="5486400"/>
-            <a:ext cx="11247120" cy="731520"/>
+            <a:off x="731520" y="1737360"/>
+            <a:ext cx="10698480" cy="4114800"/>
           </a:xfrm>
           <a:prstGeom prst="rect">
             <a:avLst/>
@@ -12020,563 +10035,49 @@
           <a:p>
             <a:pPr algn="l">
               <a:spcAft>
-                <a:spcPts val="800"/>
+                <a:spcPts val="2800"/>
               </a:spcAft>
             </a:pPr>
             <a:r>
-              <a:rPr sz="1200" b="0">
-                <a:solidFill>
-                  <a:srgbClr val="595959"/>
-                </a:solidFill>
-                <a:latin typeface="Arial"/>
-              </a:rPr>
-              <a:t>LR = Logistic Regression, DT = Decision Tree, RF = Random Forest, GB = Gradient Boosting</a:t>
-            </a:r>
-          </a:p>
-        </p:txBody>
-      </p:sp>
-    </p:spTree>
-  </p:cSld>
-  <p:clrMapOvr>
-    <a:masterClrMapping/>
-  </p:clrMapOvr>
-</p:sld>
-</file>
-
-<file path=ppt/slides/slide8.xml><?xml version="1.0" encoding="utf-8"?>
-<p:sld xmlns:a="http://schemas.openxmlformats.org/drawingml/2006/main" xmlns:p="http://schemas.openxmlformats.org/presentationml/2006/main" xmlns:r="http://schemas.openxmlformats.org/officeDocument/2006/relationships">
-  <p:cSld>
-    <p:spTree>
-      <p:nvGrpSpPr>
-        <p:cNvPr id="1" name=""/>
-        <p:cNvGrpSpPr/>
-        <p:nvPr/>
-      </p:nvGrpSpPr>
-      <p:grpSpPr/>
-      <p:sp>
-        <p:nvSpPr>
-          <p:cNvPr id="2" name="TextBox 1"/>
-          <p:cNvSpPr txBox="1"/>
-          <p:nvPr/>
-        </p:nvSpPr>
-        <p:spPr>
-          <a:xfrm>
-            <a:off x="548640" y="320040"/>
-            <a:ext cx="11064240" cy="822960"/>
-          </a:xfrm>
-          <a:prstGeom prst="rect">
-            <a:avLst/>
-          </a:prstGeom>
-          <a:noFill/>
-        </p:spPr>
-        <p:txBody>
-          <a:bodyPr wrap="square" anchor="ctr" lIns="45720" rIns="45720">
-            <a:spAutoFit/>
-          </a:bodyPr>
-          <a:lstStyle/>
-          <a:p>
-            <a:pPr algn="l">
-              <a:spcAft>
-                <a:spcPts val="800"/>
-              </a:spcAft>
-            </a:pPr>
-            <a:r>
-              <a:rPr sz="3200" b="1">
+              <a:rPr sz="2800" b="0">
                 <a:solidFill>
                   <a:srgbClr val="000000"/>
                 </a:solidFill>
                 <a:latin typeface="Arial"/>
               </a:rPr>
-              <a:t>Literature: the three model families</a:t>
-            </a:r>
-          </a:p>
-        </p:txBody>
-      </p:sp>
-      <p:cxnSp>
-        <p:nvCxnSpPr>
-          <p:cNvPr id="3" name="Connector 2"/>
-          <p:cNvCxnSpPr/>
-          <p:nvPr/>
-        </p:nvCxnSpPr>
-        <p:spPr>
-          <a:xfrm>
-            <a:off x="594360" y="1143000"/>
-            <a:ext cx="10972800" cy="0"/>
-          </a:xfrm>
-          <a:prstGeom prst="line">
-            <a:avLst/>
-          </a:prstGeom>
-          <a:ln w="15875">
-            <a:solidFill>
-              <a:srgbClr val="000000"/>
-            </a:solidFill>
-          </a:ln>
-        </p:spPr>
-        <p:style>
-          <a:lnRef idx="2">
-            <a:schemeClr val="accent1"/>
-          </a:lnRef>
-          <a:fillRef idx="0">
-            <a:schemeClr val="accent1"/>
-          </a:fillRef>
-          <a:effectRef idx="1">
-            <a:schemeClr val="accent1"/>
-          </a:effectRef>
-          <a:fontRef idx="minor">
-            <a:schemeClr val="tx1"/>
-          </a:fontRef>
-        </p:style>
-      </p:cxnSp>
-      <p:sp>
-        <p:nvSpPr>
-          <p:cNvPr id="4" name="TextBox 3"/>
-          <p:cNvSpPr txBox="1"/>
-          <p:nvPr/>
-        </p:nvSpPr>
-        <p:spPr>
-          <a:xfrm>
-            <a:off x="548640" y="6400800"/>
-            <a:ext cx="8229600" cy="320040"/>
-          </a:xfrm>
-          <a:prstGeom prst="rect">
-            <a:avLst/>
-          </a:prstGeom>
-          <a:noFill/>
-        </p:spPr>
-        <p:txBody>
-          <a:bodyPr wrap="square" anchor="t" lIns="45720" rIns="45720">
-            <a:spAutoFit/>
-          </a:bodyPr>
-          <a:lstStyle/>
+              <a:t>•  Only classical algorithms were used, and CatBoost was never tuned.</a:t>
+            </a:r>
+          </a:p>
           <a:p>
             <a:pPr algn="l">
               <a:spcAft>
-                <a:spcPts val="800"/>
+                <a:spcPts val="2800"/>
               </a:spcAft>
             </a:pPr>
             <a:r>
-              <a:rPr sz="1100" b="0">
-                <a:solidFill>
-                  <a:srgbClr val="595959"/>
-                </a:solidFill>
-                <a:latin typeface="Arial"/>
-              </a:rPr>
-              <a:t>Comparing CatBoost, TabPFN, and TabFM for Explainable Hair Fall Risk Prediction</a:t>
-            </a:r>
-          </a:p>
-        </p:txBody>
-      </p:sp>
-      <p:sp>
-        <p:nvSpPr>
-          <p:cNvPr id="5" name="TextBox 4"/>
-          <p:cNvSpPr txBox="1"/>
-          <p:nvPr/>
-        </p:nvSpPr>
-        <p:spPr>
-          <a:xfrm>
-            <a:off x="10698480" y="6400800"/>
-            <a:ext cx="914400" cy="320040"/>
-          </a:xfrm>
-          <a:prstGeom prst="rect">
-            <a:avLst/>
-          </a:prstGeom>
-          <a:noFill/>
-        </p:spPr>
-        <p:txBody>
-          <a:bodyPr wrap="square" anchor="t" lIns="45720" rIns="45720">
-            <a:spAutoFit/>
-          </a:bodyPr>
-          <a:lstStyle/>
-          <a:p>
-            <a:pPr algn="r">
-              <a:spcAft>
-                <a:spcPts val="800"/>
-              </a:spcAft>
-            </a:pPr>
-            <a:r>
-              <a:rPr sz="1100" b="0">
-                <a:solidFill>
-                  <a:srgbClr val="595959"/>
-                </a:solidFill>
-                <a:latin typeface="Arial"/>
-              </a:rPr>
-              <a:t>8 / 16</a:t>
-            </a:r>
-          </a:p>
-        </p:txBody>
-      </p:sp>
-      <p:sp>
-        <p:nvSpPr>
-          <p:cNvPr id="6" name="TextBox 5"/>
-          <p:cNvSpPr txBox="1"/>
-          <p:nvPr/>
-        </p:nvSpPr>
-        <p:spPr>
-          <a:xfrm>
-            <a:off x="731520" y="1463040"/>
-            <a:ext cx="10698480" cy="4572000"/>
-          </a:xfrm>
-          <a:prstGeom prst="rect">
-            <a:avLst/>
-          </a:prstGeom>
-          <a:noFill/>
-        </p:spPr>
-        <p:txBody>
-          <a:bodyPr wrap="square" anchor="t" lIns="45720" rIns="45720">
-            <a:spAutoFit/>
-          </a:bodyPr>
-          <a:lstStyle/>
-          <a:p>
-            <a:pPr algn="l">
-              <a:spcAft>
-                <a:spcPts val="1600"/>
-              </a:spcAft>
-            </a:pPr>
-            <a:r>
-              <a:rPr sz="2100" b="0">
+              <a:rPr sz="2800" b="0">
                 <a:solidFill>
                   <a:srgbClr val="000000"/>
                 </a:solidFill>
                 <a:latin typeface="Arial"/>
               </a:rPr>
-              <a:t>•  CatBoost (Prokhorenkova et al., 2018): gradient boosted trees with ordered encoding of categorical answers.</a:t>
+              <a:t>•  TabPFN and TabFM were never tested on hair loss data.</a:t>
             </a:r>
           </a:p>
           <a:p>
             <a:pPr algn="l">
               <a:spcAft>
-                <a:spcPts val="1600"/>
+                <a:spcPts val="2800"/>
               </a:spcAft>
             </a:pPr>
             <a:r>
-              <a:rPr sz="2100" b="0">
+              <a:rPr sz="2800" b="0">
                 <a:solidFill>
                   <a:srgbClr val="000000"/>
                 </a:solidFill>
                 <a:latin typeface="Arial"/>
               </a:rPr>
-              <a:t>•  TabPFN (Hollmann et al., 2025): transformer pretrained on synthetic tables; predicts in one forward pass; best on small tables.</a:t>
-            </a:r>
-          </a:p>
-          <a:p>
-            <a:pPr algn="l">
-              <a:spcAft>
-                <a:spcPts val="1600"/>
-              </a:spcAft>
-            </a:pPr>
-            <a:r>
-              <a:rPr sz="2100" b="0">
-                <a:solidFill>
-                  <a:srgbClr val="000000"/>
-                </a:solidFill>
-                <a:latin typeface="Arial"/>
-              </a:rPr>
-              <a:t>•  TabFM (Kong et al., 2026): 400-million-parameter foundation model; first among default foundation models on 51 TabArena datasets.</a:t>
-            </a:r>
-          </a:p>
-          <a:p>
-            <a:pPr algn="l">
-              <a:spcAft>
-                <a:spcPts val="1600"/>
-              </a:spcAft>
-            </a:pPr>
-            <a:r>
-              <a:rPr sz="2100" b="0">
-                <a:solidFill>
-                  <a:srgbClr val="000000"/>
-                </a:solidFill>
-                <a:latin typeface="Arial"/>
-              </a:rPr>
-              <a:t>•  An independent check of TabFM reported software defects and memory limits on larger tables (Pandey, 2026).</a:t>
-            </a:r>
-          </a:p>
-          <a:p>
-            <a:pPr algn="l">
-              <a:spcAft>
-                <a:spcPts val="1600"/>
-              </a:spcAft>
-            </a:pPr>
-            <a:r>
-              <a:rPr sz="2100" b="0">
-                <a:solidFill>
-                  <a:srgbClr val="000000"/>
-                </a:solidFill>
-                <a:latin typeface="Arial"/>
-              </a:rPr>
-              <a:t>•  SHAP (Lundberg &amp; Lee, 2017): explains any model by the contribution of each feature.</a:t>
-            </a:r>
-          </a:p>
-        </p:txBody>
-      </p:sp>
-    </p:spTree>
-  </p:cSld>
-  <p:clrMapOvr>
-    <a:masterClrMapping/>
-  </p:clrMapOvr>
-</p:sld>
-</file>
-
-<file path=ppt/slides/slide9.xml><?xml version="1.0" encoding="utf-8"?>
-<p:sld xmlns:a="http://schemas.openxmlformats.org/drawingml/2006/main" xmlns:p="http://schemas.openxmlformats.org/presentationml/2006/main" xmlns:r="http://schemas.openxmlformats.org/officeDocument/2006/relationships">
-  <p:cSld>
-    <p:spTree>
-      <p:nvGrpSpPr>
-        <p:cNvPr id="1" name=""/>
-        <p:cNvGrpSpPr/>
-        <p:nvPr/>
-      </p:nvGrpSpPr>
-      <p:grpSpPr/>
-      <p:sp>
-        <p:nvSpPr>
-          <p:cNvPr id="2" name="TextBox 1"/>
-          <p:cNvSpPr txBox="1"/>
-          <p:nvPr/>
-        </p:nvSpPr>
-        <p:spPr>
-          <a:xfrm>
-            <a:off x="548640" y="320040"/>
-            <a:ext cx="11064240" cy="822960"/>
-          </a:xfrm>
-          <a:prstGeom prst="rect">
-            <a:avLst/>
-          </a:prstGeom>
-          <a:noFill/>
-        </p:spPr>
-        <p:txBody>
-          <a:bodyPr wrap="square" anchor="ctr" lIns="45720" rIns="45720">
-            <a:spAutoFit/>
-          </a:bodyPr>
-          <a:lstStyle/>
-          <a:p>
-            <a:pPr algn="l">
-              <a:spcAft>
-                <a:spcPts val="800"/>
-              </a:spcAft>
-            </a:pPr>
-            <a:r>
-              <a:rPr sz="3200" b="1">
-                <a:solidFill>
-                  <a:srgbClr val="000000"/>
-                </a:solidFill>
-                <a:latin typeface="Arial"/>
-              </a:rPr>
-              <a:t>Research gap</a:t>
-            </a:r>
-          </a:p>
-        </p:txBody>
-      </p:sp>
-      <p:cxnSp>
-        <p:nvCxnSpPr>
-          <p:cNvPr id="3" name="Connector 2"/>
-          <p:cNvCxnSpPr/>
-          <p:nvPr/>
-        </p:nvCxnSpPr>
-        <p:spPr>
-          <a:xfrm>
-            <a:off x="594360" y="1143000"/>
-            <a:ext cx="10972800" cy="0"/>
-          </a:xfrm>
-          <a:prstGeom prst="line">
-            <a:avLst/>
-          </a:prstGeom>
-          <a:ln w="15875">
-            <a:solidFill>
-              <a:srgbClr val="000000"/>
-            </a:solidFill>
-          </a:ln>
-        </p:spPr>
-        <p:style>
-          <a:lnRef idx="2">
-            <a:schemeClr val="accent1"/>
-          </a:lnRef>
-          <a:fillRef idx="0">
-            <a:schemeClr val="accent1"/>
-          </a:fillRef>
-          <a:effectRef idx="1">
-            <a:schemeClr val="accent1"/>
-          </a:effectRef>
-          <a:fontRef idx="minor">
-            <a:schemeClr val="tx1"/>
-          </a:fontRef>
-        </p:style>
-      </p:cxnSp>
-      <p:sp>
-        <p:nvSpPr>
-          <p:cNvPr id="4" name="TextBox 3"/>
-          <p:cNvSpPr txBox="1"/>
-          <p:nvPr/>
-        </p:nvSpPr>
-        <p:spPr>
-          <a:xfrm>
-            <a:off x="548640" y="6400800"/>
-            <a:ext cx="8229600" cy="320040"/>
-          </a:xfrm>
-          <a:prstGeom prst="rect">
-            <a:avLst/>
-          </a:prstGeom>
-          <a:noFill/>
-        </p:spPr>
-        <p:txBody>
-          <a:bodyPr wrap="square" anchor="t" lIns="45720" rIns="45720">
-            <a:spAutoFit/>
-          </a:bodyPr>
-          <a:lstStyle/>
-          <a:p>
-            <a:pPr algn="l">
-              <a:spcAft>
-                <a:spcPts val="800"/>
-              </a:spcAft>
-            </a:pPr>
-            <a:r>
-              <a:rPr sz="1100" b="0">
-                <a:solidFill>
-                  <a:srgbClr val="595959"/>
-                </a:solidFill>
-                <a:latin typeface="Arial"/>
-              </a:rPr>
-              <a:t>Comparing CatBoost, TabPFN, and TabFM for Explainable Hair Fall Risk Prediction</a:t>
-            </a:r>
-          </a:p>
-        </p:txBody>
-      </p:sp>
-      <p:sp>
-        <p:nvSpPr>
-          <p:cNvPr id="5" name="TextBox 4"/>
-          <p:cNvSpPr txBox="1"/>
-          <p:nvPr/>
-        </p:nvSpPr>
-        <p:spPr>
-          <a:xfrm>
-            <a:off x="10698480" y="6400800"/>
-            <a:ext cx="914400" cy="320040"/>
-          </a:xfrm>
-          <a:prstGeom prst="rect">
-            <a:avLst/>
-          </a:prstGeom>
-          <a:noFill/>
-        </p:spPr>
-        <p:txBody>
-          <a:bodyPr wrap="square" anchor="t" lIns="45720" rIns="45720">
-            <a:spAutoFit/>
-          </a:bodyPr>
-          <a:lstStyle/>
-          <a:p>
-            <a:pPr algn="r">
-              <a:spcAft>
-                <a:spcPts val="800"/>
-              </a:spcAft>
-            </a:pPr>
-            <a:r>
-              <a:rPr sz="1100" b="0">
-                <a:solidFill>
-                  <a:srgbClr val="595959"/>
-                </a:solidFill>
-                <a:latin typeface="Arial"/>
-              </a:rPr>
-              <a:t>9 / 16</a:t>
-            </a:r>
-          </a:p>
-        </p:txBody>
-      </p:sp>
-      <p:sp>
-        <p:nvSpPr>
-          <p:cNvPr id="6" name="TextBox 5"/>
-          <p:cNvSpPr txBox="1"/>
-          <p:nvPr/>
-        </p:nvSpPr>
-        <p:spPr>
-          <a:xfrm>
-            <a:off x="731520" y="1554480"/>
-            <a:ext cx="10698480" cy="4389120"/>
-          </a:xfrm>
-          <a:prstGeom prst="rect">
-            <a:avLst/>
-          </a:prstGeom>
-          <a:noFill/>
-        </p:spPr>
-        <p:txBody>
-          <a:bodyPr wrap="square" anchor="t" lIns="45720" rIns="45720">
-            <a:spAutoFit/>
-          </a:bodyPr>
-          <a:lstStyle/>
-          <a:p>
-            <a:pPr algn="l">
-              <a:spcAft>
-                <a:spcPts val="2000"/>
-              </a:spcAft>
-            </a:pPr>
-            <a:r>
-              <a:rPr sz="2400" b="0">
-                <a:solidFill>
-                  <a:srgbClr val="000000"/>
-                </a:solidFill>
-                <a:latin typeface="Arial"/>
-              </a:rPr>
-              <a:t>•  Hair loss prediction studies used only classical algorithms, and accuracies differ widely.</a:t>
-            </a:r>
-          </a:p>
-          <a:p>
-            <a:pPr algn="l">
-              <a:spcAft>
-                <a:spcPts val="2000"/>
-              </a:spcAft>
-            </a:pPr>
-            <a:r>
-              <a:rPr sz="2400" b="0">
-                <a:solidFill>
-                  <a:srgbClr val="000000"/>
-                </a:solidFill>
-                <a:latin typeface="Arial"/>
-              </a:rPr>
-              <a:t>•  CatBoost was compared only once, and it was not tuned.</a:t>
-            </a:r>
-          </a:p>
-          <a:p>
-            <a:pPr algn="l">
-              <a:spcAft>
-                <a:spcPts val="2000"/>
-              </a:spcAft>
-            </a:pPr>
-            <a:r>
-              <a:rPr sz="2400" b="0">
-                <a:solidFill>
-                  <a:srgbClr val="000000"/>
-                </a:solidFill>
-                <a:latin typeface="Arial"/>
-              </a:rPr>
-              <a:t>•  TabPFN and TabFM have not been tested on hair loss data.</a:t>
-            </a:r>
-          </a:p>
-          <a:p>
-            <a:pPr algn="l">
-              <a:spcAft>
-                <a:spcPts val="2000"/>
-              </a:spcAft>
-            </a:pPr>
-            <a:r>
-              <a:rPr sz="2400" b="0">
-                <a:solidFill>
-                  <a:srgbClr val="000000"/>
-                </a:solidFill>
-                <a:latin typeface="Arial"/>
-              </a:rPr>
-              <a:t>•  TabFM has only one independent check, which reported defects and memory limits.</a:t>
-            </a:r>
-          </a:p>
-          <a:p>
-            <a:pPr algn="l">
-              <a:spcAft>
-                <a:spcPts val="2000"/>
-              </a:spcAft>
-            </a:pPr>
-            <a:r>
-              <a:rPr sz="2400" b="0">
-                <a:solidFill>
-                  <a:srgbClr val="000000"/>
-                </a:solidFill>
-                <a:latin typeface="Arial"/>
-              </a:rPr>
-              <a:t>•  No study explains a boosted-tree model and foundation models side by side.</a:t>
+              <a:t>•  No study explains boosted trees and foundation models side by side.</a:t>
             </a:r>
           </a:p>
         </p:txBody>
